--- a/docs/public/course-assets/course-pptx/ov-006.pptx
+++ b/docs/public/course-assets/course-pptx/ov-006.pptx
@@ -2,24 +2,24 @@
 <file path=ppt/presentation.xml><?xml version="1.0" encoding="utf-8"?>
 <p:presentation xmlns:p="http://schemas.openxmlformats.org/presentationml/2006/main">
   <p:sldMasterIdLst>
-    <p:sldMasterId xmlns:r="http://schemas.openxmlformats.org/officeDocument/2006/relationships" id="2147483648" r:id="R5a6a8a62eaff42f6"/>
+    <p:sldMasterId xmlns:r="http://schemas.openxmlformats.org/officeDocument/2006/relationships" id="2147483648" r:id="R29079da66c014372"/>
   </p:sldMasterIdLst>
   <p:notesMasterIdLst>
-    <p:notesMasterId xmlns:r="http://schemas.openxmlformats.org/officeDocument/2006/relationships" r:id="Rc23341d2b8ea4817"/>
+    <p:notesMasterId xmlns:r="http://schemas.openxmlformats.org/officeDocument/2006/relationships" r:id="R63b8406b45084e23"/>
   </p:notesMasterIdLst>
   <p:sldIdLst>
-    <p:sldId xmlns:r="http://schemas.openxmlformats.org/officeDocument/2006/relationships" id="256" r:id="R27b763fb9815441c"/>
-    <p:sldId xmlns:r="http://schemas.openxmlformats.org/officeDocument/2006/relationships" id="257" r:id="R8e1a8954b2fd46ad"/>
-    <p:sldId xmlns:r="http://schemas.openxmlformats.org/officeDocument/2006/relationships" id="258" r:id="R9ed048dba06a4cf2"/>
-    <p:sldId xmlns:r="http://schemas.openxmlformats.org/officeDocument/2006/relationships" id="259" r:id="R694fce78517245bb"/>
-    <p:sldId xmlns:r="http://schemas.openxmlformats.org/officeDocument/2006/relationships" id="260" r:id="R4385b9bbec89473d"/>
-    <p:sldId xmlns:r="http://schemas.openxmlformats.org/officeDocument/2006/relationships" id="261" r:id="Rb450d7b03a814fcc"/>
-    <p:sldId xmlns:r="http://schemas.openxmlformats.org/officeDocument/2006/relationships" id="262" r:id="R186f4ec020ea4e45"/>
-    <p:sldId xmlns:r="http://schemas.openxmlformats.org/officeDocument/2006/relationships" id="263" r:id="R4628314ffc1749b9"/>
-    <p:sldId xmlns:r="http://schemas.openxmlformats.org/officeDocument/2006/relationships" id="264" r:id="R8037525c4dc546a2"/>
-    <p:sldId xmlns:r="http://schemas.openxmlformats.org/officeDocument/2006/relationships" id="265" r:id="Redb8a8781f4349c2"/>
-    <p:sldId xmlns:r="http://schemas.openxmlformats.org/officeDocument/2006/relationships" id="266" r:id="R4b7eb05137ab49cc"/>
-    <p:sldId xmlns:r="http://schemas.openxmlformats.org/officeDocument/2006/relationships" id="267" r:id="R4f21e7b1ff3448ed"/>
+    <p:sldId xmlns:r="http://schemas.openxmlformats.org/officeDocument/2006/relationships" id="256" r:id="R51fa8dfab5d8474d"/>
+    <p:sldId xmlns:r="http://schemas.openxmlformats.org/officeDocument/2006/relationships" id="257" r:id="R6a2260d790dd456d"/>
+    <p:sldId xmlns:r="http://schemas.openxmlformats.org/officeDocument/2006/relationships" id="258" r:id="R40944b04f8114c48"/>
+    <p:sldId xmlns:r="http://schemas.openxmlformats.org/officeDocument/2006/relationships" id="259" r:id="Rf2fefe804d364acc"/>
+    <p:sldId xmlns:r="http://schemas.openxmlformats.org/officeDocument/2006/relationships" id="260" r:id="R0dce8dd88f5d4b29"/>
+    <p:sldId xmlns:r="http://schemas.openxmlformats.org/officeDocument/2006/relationships" id="261" r:id="R207490a44e4642aa"/>
+    <p:sldId xmlns:r="http://schemas.openxmlformats.org/officeDocument/2006/relationships" id="262" r:id="R43c28b121ffe44ad"/>
+    <p:sldId xmlns:r="http://schemas.openxmlformats.org/officeDocument/2006/relationships" id="263" r:id="R6006d823c7d84f02"/>
+    <p:sldId xmlns:r="http://schemas.openxmlformats.org/officeDocument/2006/relationships" id="264" r:id="R17edc8c8269a4800"/>
+    <p:sldId xmlns:r="http://schemas.openxmlformats.org/officeDocument/2006/relationships" id="265" r:id="Re6befdb2e8864bf2"/>
+    <p:sldId xmlns:r="http://schemas.openxmlformats.org/officeDocument/2006/relationships" id="266" r:id="Rf98f0366a9ff42e8"/>
+    <p:sldId xmlns:r="http://schemas.openxmlformats.org/officeDocument/2006/relationships" id="267" r:id="R1dc2f0e8a9584757"/>
   </p:sldIdLst>
   <p:sldSz cx="12192000" cy="6858000"/>
   <p:notesSz cx="6858000" cy="9144000"/>
@@ -1338,7 +1338,7 @@
   </p:cSld>
   <p:clrMap bg1="lt1" tx1="dk1" bg2="lt2" tx2="dk2" accent1="accent1" accent2="accent2" accent3="accent3" accent4="accent4" accent5="accent5" accent6="accent6" hlink="hlink" folHlink="folHlink"/>
   <p:sldLayoutIdLst>
-    <p:sldLayoutId xmlns:r="http://schemas.openxmlformats.org/officeDocument/2006/relationships" id="2147483649" r:id="R274693bffd224b94"/>
+    <p:sldLayoutId xmlns:r="http://schemas.openxmlformats.org/officeDocument/2006/relationships" id="2147483649" r:id="R3a80a4e748134825"/>
   </p:sldLayoutIdLst>
   <p:txStyles>
     <p:titleStyle>
@@ -1889,7 +1889,7 @@
           <p:cNvPr id="1" name="cover-rule">
             <a:extLst xmlns:a="http://schemas.openxmlformats.org/drawingml/2006/main">
               <a:ext uri="{FF2B5EF4-FFF2-40B4-BE49-F238E27FC236}">
-                <a16:creationId xmlns:a16="http://schemas.microsoft.com/office/drawing/2014/main" id="{DBABABB2-4EFF-4D1A-B99C-D177645A4A95}"/>
+                <a16:creationId xmlns:a16="http://schemas.microsoft.com/office/drawing/2014/main" id="{6AAB79D9-3D39-4718-830D-A39F06C9F2DE}"/>
               </a:ext>
             </a:extLst>
           </p:cNvPr>
@@ -1922,7 +1922,7 @@
           <p:cNvPr id="2" name="cover-ring-1">
             <a:extLst xmlns:a="http://schemas.openxmlformats.org/drawingml/2006/main">
               <a:ext uri="{FF2B5EF4-FFF2-40B4-BE49-F238E27FC236}">
-                <a16:creationId xmlns:a16="http://schemas.microsoft.com/office/drawing/2014/main" id="{8D28239E-1BD1-48A4-95E5-3F5EABE95A87}"/>
+                <a16:creationId xmlns:a16="http://schemas.microsoft.com/office/drawing/2014/main" id="{7D2AD22B-07F0-4507-99BF-2310837D7A4D}"/>
               </a:ext>
             </a:extLst>
           </p:cNvPr>
@@ -1953,7 +1953,7 @@
           <p:cNvPr id="3" name="cover-ring-2">
             <a:extLst xmlns:a="http://schemas.openxmlformats.org/drawingml/2006/main">
               <a:ext uri="{FF2B5EF4-FFF2-40B4-BE49-F238E27FC236}">
-                <a16:creationId xmlns:a16="http://schemas.microsoft.com/office/drawing/2014/main" id="{070D2620-EE6A-49A7-8977-7477DE4194DA}"/>
+                <a16:creationId xmlns:a16="http://schemas.microsoft.com/office/drawing/2014/main" id="{526981C6-F2E4-4067-B885-F5CCC90780F3}"/>
               </a:ext>
             </a:extLst>
           </p:cNvPr>
@@ -1984,7 +1984,7 @@
           <p:cNvPr id="4" name="cover-core">
             <a:extLst xmlns:a="http://schemas.openxmlformats.org/drawingml/2006/main">
               <a:ext uri="{FF2B5EF4-FFF2-40B4-BE49-F238E27FC236}">
-                <a16:creationId xmlns:a16="http://schemas.microsoft.com/office/drawing/2014/main" id="{034F6A55-6083-4CF8-BE4B-A25A9115AAA0}"/>
+                <a16:creationId xmlns:a16="http://schemas.microsoft.com/office/drawing/2014/main" id="{0A36E3CE-598A-4E09-823F-567B777B41B0}"/>
               </a:ext>
             </a:extLst>
           </p:cNvPr>
@@ -2017,7 +2017,7 @@
           <p:cNvPr id="5" name="cover-line-1">
             <a:extLst xmlns:a="http://schemas.openxmlformats.org/drawingml/2006/main">
               <a:ext uri="{FF2B5EF4-FFF2-40B4-BE49-F238E27FC236}">
-                <a16:creationId xmlns:a16="http://schemas.microsoft.com/office/drawing/2014/main" id="{9294DE49-CDF6-4AC1-A9D8-07D3E684D18B}"/>
+                <a16:creationId xmlns:a16="http://schemas.microsoft.com/office/drawing/2014/main" id="{0EC09CA3-5502-437B-956E-274399AEB68B}"/>
               </a:ext>
             </a:extLst>
           </p:cNvPr>
@@ -2048,7 +2048,7 @@
           <p:cNvPr id="6" name="cover-line-2">
             <a:extLst xmlns:a="http://schemas.openxmlformats.org/drawingml/2006/main">
               <a:ext uri="{FF2B5EF4-FFF2-40B4-BE49-F238E27FC236}">
-                <a16:creationId xmlns:a16="http://schemas.microsoft.com/office/drawing/2014/main" id="{CDB00667-A384-401D-B9F8-541D423424F4}"/>
+                <a16:creationId xmlns:a16="http://schemas.microsoft.com/office/drawing/2014/main" id="{9CF6A607-6A65-4D87-A43B-DA0613EF8A71}"/>
               </a:ext>
             </a:extLst>
           </p:cNvPr>
@@ -2079,7 +2079,7 @@
           <p:cNvPr id="7" name="cover-eyebrow">
             <a:extLst xmlns:a="http://schemas.openxmlformats.org/drawingml/2006/main">
               <a:ext uri="{FF2B5EF4-FFF2-40B4-BE49-F238E27FC236}">
-                <a16:creationId xmlns:a16="http://schemas.microsoft.com/office/drawing/2014/main" id="{6373B05D-0B1D-4F83-B7A3-A1CDD90F81B4}"/>
+                <a16:creationId xmlns:a16="http://schemas.microsoft.com/office/drawing/2014/main" id="{413BBCA6-E2AF-40E2-A4C4-7327C1B7BCE6}"/>
               </a:ext>
             </a:extLst>
           </p:cNvPr>
@@ -2137,7 +2137,7 @@
           <p:cNvPr id="8" name="cover-title">
             <a:extLst xmlns:a="http://schemas.openxmlformats.org/drawingml/2006/main">
               <a:ext uri="{FF2B5EF4-FFF2-40B4-BE49-F238E27FC236}">
-                <a16:creationId xmlns:a16="http://schemas.microsoft.com/office/drawing/2014/main" id="{2E04DB42-C615-4C86-BAAB-6921FC095663}"/>
+                <a16:creationId xmlns:a16="http://schemas.microsoft.com/office/drawing/2014/main" id="{41A2A472-0660-4EFB-BA22-9A9221BE7548}"/>
               </a:ext>
             </a:extLst>
           </p:cNvPr>
@@ -2195,7 +2195,7 @@
           <p:cNvPr id="9" name="cover-subtitle">
             <a:extLst xmlns:a="http://schemas.openxmlformats.org/drawingml/2006/main">
               <a:ext uri="{FF2B5EF4-FFF2-40B4-BE49-F238E27FC236}">
-                <a16:creationId xmlns:a16="http://schemas.microsoft.com/office/drawing/2014/main" id="{4D318134-CF6F-4B19-9329-5FE8015EBE7B}"/>
+                <a16:creationId xmlns:a16="http://schemas.microsoft.com/office/drawing/2014/main" id="{11B82E30-9B9F-4D8D-90CF-28E734E81776}"/>
               </a:ext>
             </a:extLst>
           </p:cNvPr>
@@ -2257,7 +2257,7 @@
           <p:cNvPr id="10" name="cover-lead">
             <a:extLst xmlns:a="http://schemas.openxmlformats.org/drawingml/2006/main">
               <a:ext uri="{FF2B5EF4-FFF2-40B4-BE49-F238E27FC236}">
-                <a16:creationId xmlns:a16="http://schemas.microsoft.com/office/drawing/2014/main" id="{85DBA264-48DF-4E59-8CD0-FED11528128F}"/>
+                <a16:creationId xmlns:a16="http://schemas.microsoft.com/office/drawing/2014/main" id="{6FFFB3F0-2EF3-474B-AA7E-EC291E95918D}"/>
               </a:ext>
             </a:extLst>
           </p:cNvPr>
@@ -2315,7 +2315,7 @@
           <p:cNvPr id="11" name="cover-course">
             <a:extLst xmlns:a="http://schemas.openxmlformats.org/drawingml/2006/main">
               <a:ext uri="{FF2B5EF4-FFF2-40B4-BE49-F238E27FC236}">
-                <a16:creationId xmlns:a16="http://schemas.microsoft.com/office/drawing/2014/main" id="{1467EC21-6157-4702-A678-B5C26E6A5EA9}"/>
+                <a16:creationId xmlns:a16="http://schemas.microsoft.com/office/drawing/2014/main" id="{7ED3BE9F-18F8-4A4E-BF8F-61139F65035D}"/>
               </a:ext>
             </a:extLst>
           </p:cNvPr>
@@ -2373,7 +2373,7 @@
           <p:cNvPr id="12" name="cover-id">
             <a:extLst xmlns:a="http://schemas.openxmlformats.org/drawingml/2006/main">
               <a:ext uri="{FF2B5EF4-FFF2-40B4-BE49-F238E27FC236}">
-                <a16:creationId xmlns:a16="http://schemas.microsoft.com/office/drawing/2014/main" id="{D4F222D4-9ABB-4D8E-8D9D-4FCE460FF356}"/>
+                <a16:creationId xmlns:a16="http://schemas.microsoft.com/office/drawing/2014/main" id="{61DB883A-AEBF-49D4-BA6D-5895177B3538}"/>
               </a:ext>
             </a:extLst>
           </p:cNvPr>
@@ -2429,7 +2429,7 @@
     </p:spTree>
     <p:extLst>
       <p:ext uri="{BB962C8B-B14F-4D97-AF65-F5344CB8AC3E}">
-        <p14:creationId xmlns:p14="http://schemas.microsoft.com/office/powerpoint/2010/main" val="902018890"/>
+        <p14:creationId xmlns:p14="http://schemas.microsoft.com/office/powerpoint/2010/main" val="1141428018"/>
       </p:ext>
     </p:extLst>
   </p:cSld>
@@ -2460,7 +2460,7 @@
           <p:cNvPr id="1" name="s10-rule">
             <a:extLst xmlns:a="http://schemas.openxmlformats.org/drawingml/2006/main">
               <a:ext uri="{FF2B5EF4-FFF2-40B4-BE49-F238E27FC236}">
-                <a16:creationId xmlns:a16="http://schemas.microsoft.com/office/drawing/2014/main" id="{CB3B370F-9E1D-4D08-8929-586F0CF10F03}"/>
+                <a16:creationId xmlns:a16="http://schemas.microsoft.com/office/drawing/2014/main" id="{AEA69C68-B042-4677-B87E-E091338D5DA0}"/>
               </a:ext>
             </a:extLst>
           </p:cNvPr>
@@ -2493,7 +2493,7 @@
           <p:cNvPr id="2" name="s10-eyebrow">
             <a:extLst xmlns:a="http://schemas.openxmlformats.org/drawingml/2006/main">
               <a:ext uri="{FF2B5EF4-FFF2-40B4-BE49-F238E27FC236}">
-                <a16:creationId xmlns:a16="http://schemas.microsoft.com/office/drawing/2014/main" id="{D556803B-2BC6-422B-B6FE-A9693C5A770C}"/>
+                <a16:creationId xmlns:a16="http://schemas.microsoft.com/office/drawing/2014/main" id="{70FC6210-58AB-4580-81D5-E757FD4BEF19}"/>
               </a:ext>
             </a:extLst>
           </p:cNvPr>
@@ -2551,7 +2551,7 @@
           <p:cNvPr id="3" name="s10-title">
             <a:extLst xmlns:a="http://schemas.openxmlformats.org/drawingml/2006/main">
               <a:ext uri="{FF2B5EF4-FFF2-40B4-BE49-F238E27FC236}">
-                <a16:creationId xmlns:a16="http://schemas.microsoft.com/office/drawing/2014/main" id="{01728A38-9E5F-468B-B12E-BA0581193FEF}"/>
+                <a16:creationId xmlns:a16="http://schemas.microsoft.com/office/drawing/2014/main" id="{A5A9854F-3DDF-470C-A095-92DDC9C120C7}"/>
               </a:ext>
             </a:extLst>
           </p:cNvPr>
@@ -2599,7 +2599,7 @@
                 <a:ea typeface="PingFang SC"/>
                 <a:cs typeface="PingFang SC"/>
               </a:rPr>
-              <a:t>把方法落实为可验证的行动</a:t>
+              <a:t>提示词与多模态工作流：一次可验收练习</a:t>
             </a:r>
           </a:p>
         </p:txBody>
@@ -2609,7 +2609,7 @@
           <p:cNvPr id="4" name="s10-footer">
             <a:extLst xmlns:a="http://schemas.openxmlformats.org/drawingml/2006/main">
               <a:ext uri="{FF2B5EF4-FFF2-40B4-BE49-F238E27FC236}">
-                <a16:creationId xmlns:a16="http://schemas.microsoft.com/office/drawing/2014/main" id="{5F9D135D-EBD5-415D-8AF8-2EA09476699A}"/>
+                <a16:creationId xmlns:a16="http://schemas.microsoft.com/office/drawing/2014/main" id="{BDB722E2-9565-4CEC-81A3-84C4DD61D991}"/>
               </a:ext>
             </a:extLst>
           </p:cNvPr>
@@ -2640,7 +2640,7 @@
           <p:cNvPr id="5" name="s10-identity">
             <a:extLst xmlns:a="http://schemas.openxmlformats.org/drawingml/2006/main">
               <a:ext uri="{FF2B5EF4-FFF2-40B4-BE49-F238E27FC236}">
-                <a16:creationId xmlns:a16="http://schemas.microsoft.com/office/drawing/2014/main" id="{214ECA8E-766E-4C19-8076-982D37F53582}"/>
+                <a16:creationId xmlns:a16="http://schemas.microsoft.com/office/drawing/2014/main" id="{5363E6F0-787E-4CB0-B157-97950A762802}"/>
               </a:ext>
             </a:extLst>
           </p:cNvPr>
@@ -2698,7 +2698,7 @@
           <p:cNvPr id="6" name="practice-circle-0">
             <a:extLst xmlns:a="http://schemas.openxmlformats.org/drawingml/2006/main">
               <a:ext uri="{FF2B5EF4-FFF2-40B4-BE49-F238E27FC236}">
-                <a16:creationId xmlns:a16="http://schemas.microsoft.com/office/drawing/2014/main" id="{B0564A8B-9D73-46BF-9F73-698DF3B1A514}"/>
+                <a16:creationId xmlns:a16="http://schemas.microsoft.com/office/drawing/2014/main" id="{F3E3EF4E-A370-43E6-884C-E4AA4BB3655F}"/>
               </a:ext>
             </a:extLst>
           </p:cNvPr>
@@ -2731,7 +2731,7 @@
           <p:cNvPr id="7" name="practice-number-0">
             <a:extLst xmlns:a="http://schemas.openxmlformats.org/drawingml/2006/main">
               <a:ext uri="{FF2B5EF4-FFF2-40B4-BE49-F238E27FC236}">
-                <a16:creationId xmlns:a16="http://schemas.microsoft.com/office/drawing/2014/main" id="{E6E94F93-8F88-4DF6-BADE-0A9C7EEF0E4A}"/>
+                <a16:creationId xmlns:a16="http://schemas.microsoft.com/office/drawing/2014/main" id="{F8C35E9A-B940-46D3-90A2-92EC27E22ABB}"/>
               </a:ext>
             </a:extLst>
           </p:cNvPr>
@@ -2789,7 +2789,7 @@
           <p:cNvPr id="8" name="practice-item-0">
             <a:extLst xmlns:a="http://schemas.openxmlformats.org/drawingml/2006/main">
               <a:ext uri="{FF2B5EF4-FFF2-40B4-BE49-F238E27FC236}">
-                <a16:creationId xmlns:a16="http://schemas.microsoft.com/office/drawing/2014/main" id="{FC013346-9BFD-41ED-B26F-E3408D4C510E}"/>
+                <a16:creationId xmlns:a16="http://schemas.microsoft.com/office/drawing/2014/main" id="{07E111AA-FE07-43A0-9727-BBE0C25F179C}"/>
               </a:ext>
             </a:extLst>
           </p:cNvPr>
@@ -2843,7 +2843,7 @@
                 <a:ea typeface="PingFang SC"/>
                 <a:cs typeface="PingFang SC"/>
               </a:rPr>
-              <a:t>把一个真实模糊请求改写成七部分任务说明，并标出哪些输入仍然缺失。；为同一抽取任务分别写零样本和少样本版本，用 10 个样例比较字段完整率</a:t>
+              <a:t>把一个真实模糊请求改写成七部分任务说明，并标出哪些输入仍然缺失；为同一抽取任务分别写零样本和少样本版本，用 10 个样例比较字段完整率</a:t>
             </a:r>
           </a:p>
         </p:txBody>
@@ -2853,7 +2853,7 @@
           <p:cNvPr id="9" name="practice-connector-0">
             <a:extLst xmlns:a="http://schemas.openxmlformats.org/drawingml/2006/main">
               <a:ext uri="{FF2B5EF4-FFF2-40B4-BE49-F238E27FC236}">
-                <a16:creationId xmlns:a16="http://schemas.microsoft.com/office/drawing/2014/main" id="{454509DC-A973-48DB-9ED7-0606058F24A6}"/>
+                <a16:creationId xmlns:a16="http://schemas.microsoft.com/office/drawing/2014/main" id="{3E845783-D4F9-427A-AEAE-209B1D089DE9}"/>
               </a:ext>
             </a:extLst>
           </p:cNvPr>
@@ -2873,7 +2873,7 @@
           <a:noFill xmlns:a="http://schemas.openxmlformats.org/drawingml/2006/main"/>
           <a:ln xmlns:a="http://schemas.openxmlformats.org/drawingml/2006/main" w="28575">
             <a:solidFill>
-              <a:srgbClr val="D6A33A"/>
+              <a:srgbClr val="8A5A00"/>
             </a:solidFill>
             <a:prstDash val="solid"/>
           </a:ln>
@@ -2884,7 +2884,7 @@
           <p:cNvPr id="10" name="practice-circle-1">
             <a:extLst xmlns:a="http://schemas.openxmlformats.org/drawingml/2006/main">
               <a:ext uri="{FF2B5EF4-FFF2-40B4-BE49-F238E27FC236}">
-                <a16:creationId xmlns:a16="http://schemas.microsoft.com/office/drawing/2014/main" id="{697B89FD-7B21-4369-A27F-8A34EEB5CE4C}"/>
+                <a16:creationId xmlns:a16="http://schemas.microsoft.com/office/drawing/2014/main" id="{481C98B1-AF88-4752-BCEA-AC510EFA27F5}"/>
               </a:ext>
             </a:extLst>
           </p:cNvPr>
@@ -2917,7 +2917,7 @@
           <p:cNvPr id="11" name="practice-number-1">
             <a:extLst xmlns:a="http://schemas.openxmlformats.org/drawingml/2006/main">
               <a:ext uri="{FF2B5EF4-FFF2-40B4-BE49-F238E27FC236}">
-                <a16:creationId xmlns:a16="http://schemas.microsoft.com/office/drawing/2014/main" id="{7B06B8AE-B001-4248-A4F0-22AAB25DBDC5}"/>
+                <a16:creationId xmlns:a16="http://schemas.microsoft.com/office/drawing/2014/main" id="{47186ECD-A4A2-4896-ADAE-144E75893023}"/>
               </a:ext>
             </a:extLst>
           </p:cNvPr>
@@ -2975,7 +2975,7 @@
           <p:cNvPr id="12" name="practice-item-1">
             <a:extLst xmlns:a="http://schemas.openxmlformats.org/drawingml/2006/main">
               <a:ext uri="{FF2B5EF4-FFF2-40B4-BE49-F238E27FC236}">
-                <a16:creationId xmlns:a16="http://schemas.microsoft.com/office/drawing/2014/main" id="{AE179EF3-6D49-4BEB-8F80-8A23D06646D6}"/>
+                <a16:creationId xmlns:a16="http://schemas.microsoft.com/office/drawing/2014/main" id="{266B2788-99DA-4603-BFEB-ABA91BC6FD17}"/>
               </a:ext>
             </a:extLst>
           </p:cNvPr>
@@ -3039,7 +3039,7 @@
           <p:cNvPr id="13" name="practice-connector-1">
             <a:extLst xmlns:a="http://schemas.openxmlformats.org/drawingml/2006/main">
               <a:ext uri="{FF2B5EF4-FFF2-40B4-BE49-F238E27FC236}">
-                <a16:creationId xmlns:a16="http://schemas.microsoft.com/office/drawing/2014/main" id="{9DECD76C-235C-4EB4-8CBA-7EE77D25B16E}"/>
+                <a16:creationId xmlns:a16="http://schemas.microsoft.com/office/drawing/2014/main" id="{A3E92B00-12C6-4CFF-BBAC-1F9AB64A6E60}"/>
               </a:ext>
             </a:extLst>
           </p:cNvPr>
@@ -3059,7 +3059,7 @@
           <a:noFill xmlns:a="http://schemas.openxmlformats.org/drawingml/2006/main"/>
           <a:ln xmlns:a="http://schemas.openxmlformats.org/drawingml/2006/main" w="28575">
             <a:solidFill>
-              <a:srgbClr val="D6A33A"/>
+              <a:srgbClr val="8A5A00"/>
             </a:solidFill>
             <a:prstDash val="solid"/>
           </a:ln>
@@ -3070,7 +3070,7 @@
           <p:cNvPr id="14" name="practice-circle-2">
             <a:extLst xmlns:a="http://schemas.openxmlformats.org/drawingml/2006/main">
               <a:ext uri="{FF2B5EF4-FFF2-40B4-BE49-F238E27FC236}">
-                <a16:creationId xmlns:a16="http://schemas.microsoft.com/office/drawing/2014/main" id="{31AC402C-9336-4F15-A40D-33483F5525F9}"/>
+                <a16:creationId xmlns:a16="http://schemas.microsoft.com/office/drawing/2014/main" id="{C4F092AB-E2BE-417E-A54B-39273DB78FCF}"/>
               </a:ext>
             </a:extLst>
           </p:cNvPr>
@@ -3088,7 +3088,7 @@
             <a:avLst/>
           </a:prstGeom>
           <a:solidFill xmlns:a="http://schemas.openxmlformats.org/drawingml/2006/main">
-            <a:srgbClr val="D6A33A"/>
+            <a:srgbClr val="8A5A00"/>
           </a:solidFill>
           <a:ln xmlns:a="http://schemas.openxmlformats.org/drawingml/2006/main" w="28575">
             <a:solidFill>
@@ -3103,7 +3103,7 @@
           <p:cNvPr id="15" name="practice-number-2">
             <a:extLst xmlns:a="http://schemas.openxmlformats.org/drawingml/2006/main">
               <a:ext uri="{FF2B5EF4-FFF2-40B4-BE49-F238E27FC236}">
-                <a16:creationId xmlns:a16="http://schemas.microsoft.com/office/drawing/2014/main" id="{21731FF1-FFBB-4C4E-ACC5-72C331835CEA}"/>
+                <a16:creationId xmlns:a16="http://schemas.microsoft.com/office/drawing/2014/main" id="{3B933F87-B2F1-47DD-AC20-1F765358CBC8}"/>
               </a:ext>
             </a:extLst>
           </p:cNvPr>
@@ -3161,7 +3161,7 @@
           <p:cNvPr id="16" name="practice-item-2">
             <a:extLst xmlns:a="http://schemas.openxmlformats.org/drawingml/2006/main">
               <a:ext uri="{FF2B5EF4-FFF2-40B4-BE49-F238E27FC236}">
-                <a16:creationId xmlns:a16="http://schemas.microsoft.com/office/drawing/2014/main" id="{D133CD8D-D63D-4BC3-A64F-A92D85D3DA7E}"/>
+                <a16:creationId xmlns:a16="http://schemas.microsoft.com/office/drawing/2014/main" id="{C77F0916-9675-49CA-9E90-B5B7567B1292}"/>
               </a:ext>
             </a:extLst>
           </p:cNvPr>
@@ -3185,7 +3185,7 @@
           </a:solidFill>
           <a:ln xmlns:a="http://schemas.openxmlformats.org/drawingml/2006/main" w="19050">
             <a:solidFill>
-              <a:srgbClr val="D6A33A"/>
+              <a:srgbClr val="8A5A00"/>
             </a:solidFill>
             <a:prstDash val="solid"/>
           </a:ln>
@@ -3223,7 +3223,7 @@
     </p:spTree>
     <p:extLst>
       <p:ext uri="{BB962C8B-B14F-4D97-AF65-F5344CB8AC3E}">
-        <p14:creationId xmlns:p14="http://schemas.microsoft.com/office/powerpoint/2010/main" val="1187567211"/>
+        <p14:creationId xmlns:p14="http://schemas.microsoft.com/office/powerpoint/2010/main" val="1040185182"/>
       </p:ext>
     </p:extLst>
   </p:cSld>
@@ -3254,7 +3254,7 @@
           <p:cNvPr id="1" name="s11-rule">
             <a:extLst xmlns:a="http://schemas.openxmlformats.org/drawingml/2006/main">
               <a:ext uri="{FF2B5EF4-FFF2-40B4-BE49-F238E27FC236}">
-                <a16:creationId xmlns:a16="http://schemas.microsoft.com/office/drawing/2014/main" id="{C30ECE56-0D3D-4206-8689-9C4729571904}"/>
+                <a16:creationId xmlns:a16="http://schemas.microsoft.com/office/drawing/2014/main" id="{BD7ECF2E-D33A-4CC9-86E9-55FE99F95664}"/>
               </a:ext>
             </a:extLst>
           </p:cNvPr>
@@ -3287,7 +3287,7 @@
           <p:cNvPr id="2" name="s11-eyebrow">
             <a:extLst xmlns:a="http://schemas.openxmlformats.org/drawingml/2006/main">
               <a:ext uri="{FF2B5EF4-FFF2-40B4-BE49-F238E27FC236}">
-                <a16:creationId xmlns:a16="http://schemas.microsoft.com/office/drawing/2014/main" id="{17221352-5E0F-4B31-9032-C790DBB0C74C}"/>
+                <a16:creationId xmlns:a16="http://schemas.microsoft.com/office/drawing/2014/main" id="{D9FE60AB-DB53-47DC-B068-41C353A3019C}"/>
               </a:ext>
             </a:extLst>
           </p:cNvPr>
@@ -3345,7 +3345,7 @@
           <p:cNvPr id="3" name="s11-title">
             <a:extLst xmlns:a="http://schemas.openxmlformats.org/drawingml/2006/main">
               <a:ext uri="{FF2B5EF4-FFF2-40B4-BE49-F238E27FC236}">
-                <a16:creationId xmlns:a16="http://schemas.microsoft.com/office/drawing/2014/main" id="{E43A8767-6ED6-43DF-AAB0-6F14B64ADB5F}"/>
+                <a16:creationId xmlns:a16="http://schemas.microsoft.com/office/drawing/2014/main" id="{D69CCD69-8474-4750-9144-E209ADAFF3AB}"/>
               </a:ext>
             </a:extLst>
           </p:cNvPr>
@@ -3393,7 +3393,7 @@
                 <a:ea typeface="PingFang SC"/>
                 <a:cs typeface="PingFang SC"/>
               </a:rPr>
-              <a:t>带走三条可复用的判断原则</a:t>
+              <a:t>提示词与多模态工作流：判断时先抓住三点</a:t>
             </a:r>
           </a:p>
         </p:txBody>
@@ -3403,7 +3403,7 @@
           <p:cNvPr id="4" name="s11-footer">
             <a:extLst xmlns:a="http://schemas.openxmlformats.org/drawingml/2006/main">
               <a:ext uri="{FF2B5EF4-FFF2-40B4-BE49-F238E27FC236}">
-                <a16:creationId xmlns:a16="http://schemas.microsoft.com/office/drawing/2014/main" id="{F712CF01-A8E1-44FF-B061-9C3F621E9B38}"/>
+                <a16:creationId xmlns:a16="http://schemas.microsoft.com/office/drawing/2014/main" id="{570E0221-523A-4B83-9106-646A16460023}"/>
               </a:ext>
             </a:extLst>
           </p:cNvPr>
@@ -3434,7 +3434,7 @@
           <p:cNvPr id="5" name="s11-identity">
             <a:extLst xmlns:a="http://schemas.openxmlformats.org/drawingml/2006/main">
               <a:ext uri="{FF2B5EF4-FFF2-40B4-BE49-F238E27FC236}">
-                <a16:creationId xmlns:a16="http://schemas.microsoft.com/office/drawing/2014/main" id="{83EAC41B-A016-4ED4-A4F0-CB15929D2CC5}"/>
+                <a16:creationId xmlns:a16="http://schemas.microsoft.com/office/drawing/2014/main" id="{910CD5DD-ABC5-4BF5-A013-C6E1883B572F}"/>
               </a:ext>
             </a:extLst>
           </p:cNvPr>
@@ -3492,7 +3492,7 @@
           <p:cNvPr id="6" name="recap-circle-0">
             <a:extLst xmlns:a="http://schemas.openxmlformats.org/drawingml/2006/main">
               <a:ext uri="{FF2B5EF4-FFF2-40B4-BE49-F238E27FC236}">
-                <a16:creationId xmlns:a16="http://schemas.microsoft.com/office/drawing/2014/main" id="{0C64CB2A-4150-42E2-A86B-B78E257E2890}"/>
+                <a16:creationId xmlns:a16="http://schemas.microsoft.com/office/drawing/2014/main" id="{5E995E83-88B5-4316-9EB8-2206271E9869}"/>
               </a:ext>
             </a:extLst>
           </p:cNvPr>
@@ -3525,7 +3525,7 @@
           <p:cNvPr id="7" name="recap-number-0">
             <a:extLst xmlns:a="http://schemas.openxmlformats.org/drawingml/2006/main">
               <a:ext uri="{FF2B5EF4-FFF2-40B4-BE49-F238E27FC236}">
-                <a16:creationId xmlns:a16="http://schemas.microsoft.com/office/drawing/2014/main" id="{60921368-CA43-4230-B5C0-FEEB009D9255}"/>
+                <a16:creationId xmlns:a16="http://schemas.microsoft.com/office/drawing/2014/main" id="{8E494E91-2A68-41F6-99C5-B2DA9067A047}"/>
               </a:ext>
             </a:extLst>
           </p:cNvPr>
@@ -3583,7 +3583,7 @@
           <p:cNvPr id="8" name="recap-item-0">
             <a:extLst xmlns:a="http://schemas.openxmlformats.org/drawingml/2006/main">
               <a:ext uri="{FF2B5EF4-FFF2-40B4-BE49-F238E27FC236}">
-                <a16:creationId xmlns:a16="http://schemas.microsoft.com/office/drawing/2014/main" id="{D2F2B455-0CB7-413D-8F7E-18A39B42200B}"/>
+                <a16:creationId xmlns:a16="http://schemas.microsoft.com/office/drawing/2014/main" id="{F44BD5D0-2744-4962-B8CC-9360D8F19B6A}"/>
               </a:ext>
             </a:extLst>
           </p:cNvPr>
@@ -3647,7 +3647,7 @@
           <p:cNvPr id="9" name="recap-connector-0">
             <a:extLst xmlns:a="http://schemas.openxmlformats.org/drawingml/2006/main">
               <a:ext uri="{FF2B5EF4-FFF2-40B4-BE49-F238E27FC236}">
-                <a16:creationId xmlns:a16="http://schemas.microsoft.com/office/drawing/2014/main" id="{24424D84-AA74-4B0F-B741-99B479134233}"/>
+                <a16:creationId xmlns:a16="http://schemas.microsoft.com/office/drawing/2014/main" id="{AEFCECEC-A99A-460B-8179-DF01C67E3DC5}"/>
               </a:ext>
             </a:extLst>
           </p:cNvPr>
@@ -3667,7 +3667,7 @@
           <a:noFill xmlns:a="http://schemas.openxmlformats.org/drawingml/2006/main"/>
           <a:ln xmlns:a="http://schemas.openxmlformats.org/drawingml/2006/main" w="28575">
             <a:solidFill>
-              <a:srgbClr val="D6A33A"/>
+              <a:srgbClr val="8A5A00"/>
             </a:solidFill>
             <a:prstDash val="solid"/>
           </a:ln>
@@ -3678,7 +3678,7 @@
           <p:cNvPr id="10" name="recap-circle-1">
             <a:extLst xmlns:a="http://schemas.openxmlformats.org/drawingml/2006/main">
               <a:ext uri="{FF2B5EF4-FFF2-40B4-BE49-F238E27FC236}">
-                <a16:creationId xmlns:a16="http://schemas.microsoft.com/office/drawing/2014/main" id="{A2005CD1-E178-4CBA-90B1-A7E5597A8905}"/>
+                <a16:creationId xmlns:a16="http://schemas.microsoft.com/office/drawing/2014/main" id="{008F7B2C-3CEC-490F-A8D2-DC93A026EF13}"/>
               </a:ext>
             </a:extLst>
           </p:cNvPr>
@@ -3711,7 +3711,7 @@
           <p:cNvPr id="11" name="recap-number-1">
             <a:extLst xmlns:a="http://schemas.openxmlformats.org/drawingml/2006/main">
               <a:ext uri="{FF2B5EF4-FFF2-40B4-BE49-F238E27FC236}">
-                <a16:creationId xmlns:a16="http://schemas.microsoft.com/office/drawing/2014/main" id="{D2F737CD-2327-4F79-9F47-D8F1B3EFD83B}"/>
+                <a16:creationId xmlns:a16="http://schemas.microsoft.com/office/drawing/2014/main" id="{87AF2467-3356-453D-8227-934861861D16}"/>
               </a:ext>
             </a:extLst>
           </p:cNvPr>
@@ -3769,7 +3769,7 @@
           <p:cNvPr id="12" name="recap-item-1">
             <a:extLst xmlns:a="http://schemas.openxmlformats.org/drawingml/2006/main">
               <a:ext uri="{FF2B5EF4-FFF2-40B4-BE49-F238E27FC236}">
-                <a16:creationId xmlns:a16="http://schemas.microsoft.com/office/drawing/2014/main" id="{C8585278-6506-4A79-8872-CD9C9E6395E4}"/>
+                <a16:creationId xmlns:a16="http://schemas.microsoft.com/office/drawing/2014/main" id="{EBEEEB6D-9244-484E-AE40-3A752A9987F2}"/>
               </a:ext>
             </a:extLst>
           </p:cNvPr>
@@ -3833,7 +3833,7 @@
           <p:cNvPr id="13" name="recap-connector-1">
             <a:extLst xmlns:a="http://schemas.openxmlformats.org/drawingml/2006/main">
               <a:ext uri="{FF2B5EF4-FFF2-40B4-BE49-F238E27FC236}">
-                <a16:creationId xmlns:a16="http://schemas.microsoft.com/office/drawing/2014/main" id="{7EACF1C9-D0E4-440E-A590-28526C10B702}"/>
+                <a16:creationId xmlns:a16="http://schemas.microsoft.com/office/drawing/2014/main" id="{2AA79071-8B2A-4DA9-BF60-FA7BEC0C6F5D}"/>
               </a:ext>
             </a:extLst>
           </p:cNvPr>
@@ -3853,7 +3853,7 @@
           <a:noFill xmlns:a="http://schemas.openxmlformats.org/drawingml/2006/main"/>
           <a:ln xmlns:a="http://schemas.openxmlformats.org/drawingml/2006/main" w="28575">
             <a:solidFill>
-              <a:srgbClr val="D6A33A"/>
+              <a:srgbClr val="8A5A00"/>
             </a:solidFill>
             <a:prstDash val="solid"/>
           </a:ln>
@@ -3864,7 +3864,7 @@
           <p:cNvPr id="14" name="recap-circle-2">
             <a:extLst xmlns:a="http://schemas.openxmlformats.org/drawingml/2006/main">
               <a:ext uri="{FF2B5EF4-FFF2-40B4-BE49-F238E27FC236}">
-                <a16:creationId xmlns:a16="http://schemas.microsoft.com/office/drawing/2014/main" id="{80EA469A-3C55-4C27-A1F6-96DD913E4BFF}"/>
+                <a16:creationId xmlns:a16="http://schemas.microsoft.com/office/drawing/2014/main" id="{16412A38-15D8-4B1C-8D13-9F1AD7F3A22C}"/>
               </a:ext>
             </a:extLst>
           </p:cNvPr>
@@ -3882,7 +3882,7 @@
             <a:avLst/>
           </a:prstGeom>
           <a:solidFill xmlns:a="http://schemas.openxmlformats.org/drawingml/2006/main">
-            <a:srgbClr val="D6A33A"/>
+            <a:srgbClr val="8A5A00"/>
           </a:solidFill>
           <a:ln xmlns:a="http://schemas.openxmlformats.org/drawingml/2006/main" w="28575">
             <a:solidFill>
@@ -3897,7 +3897,7 @@
           <p:cNvPr id="15" name="recap-number-2">
             <a:extLst xmlns:a="http://schemas.openxmlformats.org/drawingml/2006/main">
               <a:ext uri="{FF2B5EF4-FFF2-40B4-BE49-F238E27FC236}">
-                <a16:creationId xmlns:a16="http://schemas.microsoft.com/office/drawing/2014/main" id="{AF49FF37-9F51-4E5B-A6D9-B7E9D44E772F}"/>
+                <a16:creationId xmlns:a16="http://schemas.microsoft.com/office/drawing/2014/main" id="{50B959D8-26BB-4D3B-BC03-F589C8758B59}"/>
               </a:ext>
             </a:extLst>
           </p:cNvPr>
@@ -3955,7 +3955,7 @@
           <p:cNvPr id="16" name="recap-item-2">
             <a:extLst xmlns:a="http://schemas.openxmlformats.org/drawingml/2006/main">
               <a:ext uri="{FF2B5EF4-FFF2-40B4-BE49-F238E27FC236}">
-                <a16:creationId xmlns:a16="http://schemas.microsoft.com/office/drawing/2014/main" id="{16B16A1C-5355-491F-8CB7-9E3AF995967E}"/>
+                <a16:creationId xmlns:a16="http://schemas.microsoft.com/office/drawing/2014/main" id="{95CF9D90-0ACC-4796-993D-4D5F34751DED}"/>
               </a:ext>
             </a:extLst>
           </p:cNvPr>
@@ -3979,7 +3979,7 @@
           </a:solidFill>
           <a:ln xmlns:a="http://schemas.openxmlformats.org/drawingml/2006/main" w="19050">
             <a:solidFill>
-              <a:srgbClr val="D6A33A"/>
+              <a:srgbClr val="8A5A00"/>
             </a:solidFill>
             <a:prstDash val="solid"/>
           </a:ln>
@@ -4009,7 +4009,7 @@
                 <a:ea typeface="PingFang SC"/>
                 <a:cs typeface="PingFang SC"/>
               </a:rPr>
-              <a:t>以电商上新为例，商品名称、尺寸、材质、价格和库存来自业务系统</a:t>
+              <a:t>业务数据先锁定，AIGC 再生成可审核内容</a:t>
             </a:r>
           </a:p>
         </p:txBody>
@@ -4017,7 +4017,7 @@
     </p:spTree>
     <p:extLst>
       <p:ext uri="{BB962C8B-B14F-4D97-AF65-F5344CB8AC3E}">
-        <p14:creationId xmlns:p14="http://schemas.microsoft.com/office/powerpoint/2010/main" val="1309699051"/>
+        <p14:creationId xmlns:p14="http://schemas.microsoft.com/office/powerpoint/2010/main" val="1829884810"/>
       </p:ext>
     </p:extLst>
   </p:cSld>
@@ -4048,7 +4048,7 @@
           <p:cNvPr id="1" name="s12-rule">
             <a:extLst xmlns:a="http://schemas.openxmlformats.org/drawingml/2006/main">
               <a:ext uri="{FF2B5EF4-FFF2-40B4-BE49-F238E27FC236}">
-                <a16:creationId xmlns:a16="http://schemas.microsoft.com/office/drawing/2014/main" id="{7867B4AA-5A6B-4B65-B9D1-141A4115FEB1}"/>
+                <a16:creationId xmlns:a16="http://schemas.microsoft.com/office/drawing/2014/main" id="{C2CAB489-B652-4626-9315-3A7627EBB041}"/>
               </a:ext>
             </a:extLst>
           </p:cNvPr>
@@ -4081,7 +4081,7 @@
           <p:cNvPr id="2" name="s12-eyebrow">
             <a:extLst xmlns:a="http://schemas.openxmlformats.org/drawingml/2006/main">
               <a:ext uri="{FF2B5EF4-FFF2-40B4-BE49-F238E27FC236}">
-                <a16:creationId xmlns:a16="http://schemas.microsoft.com/office/drawing/2014/main" id="{40F12731-E2EC-43DA-A46A-31317F0FAC23}"/>
+                <a16:creationId xmlns:a16="http://schemas.microsoft.com/office/drawing/2014/main" id="{CF84200B-C21F-4A06-B546-94B89E003D3F}"/>
               </a:ext>
             </a:extLst>
           </p:cNvPr>
@@ -4139,7 +4139,7 @@
           <p:cNvPr id="3" name="s12-title">
             <a:extLst xmlns:a="http://schemas.openxmlformats.org/drawingml/2006/main">
               <a:ext uri="{FF2B5EF4-FFF2-40B4-BE49-F238E27FC236}">
-                <a16:creationId xmlns:a16="http://schemas.microsoft.com/office/drawing/2014/main" id="{8A0E41F5-EB12-4420-99EA-C87BF7037531}"/>
+                <a16:creationId xmlns:a16="http://schemas.microsoft.com/office/drawing/2014/main" id="{459B6389-622C-48A1-8463-30A014135DB5}"/>
               </a:ext>
             </a:extLst>
           </p:cNvPr>
@@ -4187,7 +4187,7 @@
                 <a:ea typeface="PingFang SC"/>
                 <a:cs typeface="PingFang SC"/>
               </a:rPr>
-              <a:t>从公开重制课件回到可核对的学习资料</a:t>
+              <a:t>提示词与多模态工作流：依据、边界与延伸</a:t>
             </a:r>
           </a:p>
         </p:txBody>
@@ -4197,7 +4197,7 @@
           <p:cNvPr id="4" name="s12-footer">
             <a:extLst xmlns:a="http://schemas.openxmlformats.org/drawingml/2006/main">
               <a:ext uri="{FF2B5EF4-FFF2-40B4-BE49-F238E27FC236}">
-                <a16:creationId xmlns:a16="http://schemas.microsoft.com/office/drawing/2014/main" id="{8234356B-14CE-4576-862E-0EF0AC540985}"/>
+                <a16:creationId xmlns:a16="http://schemas.microsoft.com/office/drawing/2014/main" id="{C97EF660-A691-49D4-B92B-CA4B6FE6EE55}"/>
               </a:ext>
             </a:extLst>
           </p:cNvPr>
@@ -4228,7 +4228,7 @@
           <p:cNvPr id="5" name="s12-identity">
             <a:extLst xmlns:a="http://schemas.openxmlformats.org/drawingml/2006/main">
               <a:ext uri="{FF2B5EF4-FFF2-40B4-BE49-F238E27FC236}">
-                <a16:creationId xmlns:a16="http://schemas.microsoft.com/office/drawing/2014/main" id="{8A4EA62B-E104-4004-9CAE-95EF007102F3}"/>
+                <a16:creationId xmlns:a16="http://schemas.microsoft.com/office/drawing/2014/main" id="{66005D80-0574-4FB9-AB65-3F2F0BAC01BE}"/>
               </a:ext>
             </a:extLst>
           </p:cNvPr>
@@ -4286,7 +4286,7 @@
           <p:cNvPr id="6" name="source-0">
             <a:extLst xmlns:a="http://schemas.openxmlformats.org/drawingml/2006/main">
               <a:ext uri="{FF2B5EF4-FFF2-40B4-BE49-F238E27FC236}">
-                <a16:creationId xmlns:a16="http://schemas.microsoft.com/office/drawing/2014/main" id="{95C529B0-B47C-4420-A2FE-F61FA2AE3821}"/>
+                <a16:creationId xmlns:a16="http://schemas.microsoft.com/office/drawing/2014/main" id="{48F16C89-2A52-4A77-9506-8538512B11EE}"/>
               </a:ext>
             </a:extLst>
           </p:cNvPr>
@@ -4310,7 +4310,7 @@
           </a:solidFill>
           <a:ln xmlns:a="http://schemas.openxmlformats.org/drawingml/2006/main" w="9525">
             <a:solidFill>
-              <a:srgbClr val="D6A33A"/>
+              <a:srgbClr val="8A5A00"/>
             </a:solidFill>
             <a:prstDash val="solid"/>
           </a:ln>
@@ -4350,7 +4350,7 @@
           <p:cNvPr id="7" name="source-1">
             <a:extLst xmlns:a="http://schemas.openxmlformats.org/drawingml/2006/main">
               <a:ext uri="{FF2B5EF4-FFF2-40B4-BE49-F238E27FC236}">
-                <a16:creationId xmlns:a16="http://schemas.microsoft.com/office/drawing/2014/main" id="{59EFD0DC-25C6-4F2F-AE50-ACF42976B5BB}"/>
+                <a16:creationId xmlns:a16="http://schemas.microsoft.com/office/drawing/2014/main" id="{AF59F8FB-B44A-4466-9849-C0E4CFA3B363}"/>
               </a:ext>
             </a:extLst>
           </p:cNvPr>
@@ -4414,7 +4414,7 @@
           <p:cNvPr id="8" name="s12-takeaway-rule">
             <a:extLst xmlns:a="http://schemas.openxmlformats.org/drawingml/2006/main">
               <a:ext uri="{FF2B5EF4-FFF2-40B4-BE49-F238E27FC236}">
-                <a16:creationId xmlns:a16="http://schemas.microsoft.com/office/drawing/2014/main" id="{BC88E1C5-FCB5-48A1-BD57-D596E126678C}"/>
+                <a16:creationId xmlns:a16="http://schemas.microsoft.com/office/drawing/2014/main" id="{D740DEDC-9491-4596-958C-7961046E79E5}"/>
               </a:ext>
             </a:extLst>
           </p:cNvPr>
@@ -4447,7 +4447,7 @@
           <p:cNvPr id="9" name="s12-takeaway">
             <a:extLst xmlns:a="http://schemas.openxmlformats.org/drawingml/2006/main">
               <a:ext uri="{FF2B5EF4-FFF2-40B4-BE49-F238E27FC236}">
-                <a16:creationId xmlns:a16="http://schemas.microsoft.com/office/drawing/2014/main" id="{EA2A8660-E55C-4122-B6F5-0609C26DF88E}"/>
+                <a16:creationId xmlns:a16="http://schemas.microsoft.com/office/drawing/2014/main" id="{FA9516AC-331D-40EE-AE4E-6237617FE4F2}"/>
               </a:ext>
             </a:extLst>
           </p:cNvPr>
@@ -4503,7 +4503,7 @@
     </p:spTree>
     <p:extLst>
       <p:ext uri="{BB962C8B-B14F-4D97-AF65-F5344CB8AC3E}">
-        <p14:creationId xmlns:p14="http://schemas.microsoft.com/office/powerpoint/2010/main" val="1744035645"/>
+        <p14:creationId xmlns:p14="http://schemas.microsoft.com/office/powerpoint/2010/main" val="1689466507"/>
       </p:ext>
     </p:extLst>
   </p:cSld>
@@ -4534,7 +4534,7 @@
           <p:cNvPr id="1" name="s2-rule">
             <a:extLst xmlns:a="http://schemas.openxmlformats.org/drawingml/2006/main">
               <a:ext uri="{FF2B5EF4-FFF2-40B4-BE49-F238E27FC236}">
-                <a16:creationId xmlns:a16="http://schemas.microsoft.com/office/drawing/2014/main" id="{AAE5DBB1-D7A4-4BFF-8791-43446F03E132}"/>
+                <a16:creationId xmlns:a16="http://schemas.microsoft.com/office/drawing/2014/main" id="{266B336A-EDFE-4916-8290-2130FF5CAAF2}"/>
               </a:ext>
             </a:extLst>
           </p:cNvPr>
@@ -4567,7 +4567,7 @@
           <p:cNvPr id="2" name="s2-eyebrow">
             <a:extLst xmlns:a="http://schemas.openxmlformats.org/drawingml/2006/main">
               <a:ext uri="{FF2B5EF4-FFF2-40B4-BE49-F238E27FC236}">
-                <a16:creationId xmlns:a16="http://schemas.microsoft.com/office/drawing/2014/main" id="{7C21D0E5-08E3-42FB-9234-346CE500336E}"/>
+                <a16:creationId xmlns:a16="http://schemas.microsoft.com/office/drawing/2014/main" id="{4551AF9E-2B8F-4AAE-B018-1C43E9B52C30}"/>
               </a:ext>
             </a:extLst>
           </p:cNvPr>
@@ -4625,7 +4625,7 @@
           <p:cNvPr id="3" name="s2-title">
             <a:extLst xmlns:a="http://schemas.openxmlformats.org/drawingml/2006/main">
               <a:ext uri="{FF2B5EF4-FFF2-40B4-BE49-F238E27FC236}">
-                <a16:creationId xmlns:a16="http://schemas.microsoft.com/office/drawing/2014/main" id="{AB2F2550-C7F6-48F1-BD0D-5FA86F92C9A5}"/>
+                <a16:creationId xmlns:a16="http://schemas.microsoft.com/office/drawing/2014/main" id="{EA75463C-FF7D-4844-AE0A-A6A50FE56239}"/>
               </a:ext>
             </a:extLst>
           </p:cNvPr>
@@ -4673,7 +4673,7 @@
                 <a:ea typeface="PingFang SC"/>
                 <a:cs typeface="PingFang SC"/>
               </a:rPr>
-              <a:t>学完这一节，你能完成这些判断与行动</a:t>
+              <a:t>提示词与多模态工作流：4项学习结果</a:t>
             </a:r>
           </a:p>
         </p:txBody>
@@ -4683,7 +4683,7 @@
           <p:cNvPr id="4" name="s2-footer">
             <a:extLst xmlns:a="http://schemas.openxmlformats.org/drawingml/2006/main">
               <a:ext uri="{FF2B5EF4-FFF2-40B4-BE49-F238E27FC236}">
-                <a16:creationId xmlns:a16="http://schemas.microsoft.com/office/drawing/2014/main" id="{2C3BD314-8AE2-454E-945F-36FE24B629E9}"/>
+                <a16:creationId xmlns:a16="http://schemas.microsoft.com/office/drawing/2014/main" id="{6922DEFA-6457-48C0-8436-7F0C694FC32F}"/>
               </a:ext>
             </a:extLst>
           </p:cNvPr>
@@ -4714,7 +4714,7 @@
           <p:cNvPr id="5" name="s2-identity">
             <a:extLst xmlns:a="http://schemas.openxmlformats.org/drawingml/2006/main">
               <a:ext uri="{FF2B5EF4-FFF2-40B4-BE49-F238E27FC236}">
-                <a16:creationId xmlns:a16="http://schemas.microsoft.com/office/drawing/2014/main" id="{E1661473-6997-4C55-9907-89F4B9C34FDC}"/>
+                <a16:creationId xmlns:a16="http://schemas.microsoft.com/office/drawing/2014/main" id="{E018E128-CF03-4E3D-9D05-150C03E32301}"/>
               </a:ext>
             </a:extLst>
           </p:cNvPr>
@@ -4772,7 +4772,7 @@
           <p:cNvPr id="6" name="objective-1">
             <a:extLst xmlns:a="http://schemas.openxmlformats.org/drawingml/2006/main">
               <a:ext uri="{FF2B5EF4-FFF2-40B4-BE49-F238E27FC236}">
-                <a16:creationId xmlns:a16="http://schemas.microsoft.com/office/drawing/2014/main" id="{7545F93A-F8FE-4EE9-918A-98BEF4B1420C}"/>
+                <a16:creationId xmlns:a16="http://schemas.microsoft.com/office/drawing/2014/main" id="{8E1B084A-AADB-417B-BF2B-69B9045C2C10}"/>
               </a:ext>
             </a:extLst>
           </p:cNvPr>
@@ -4859,7 +4859,7 @@
           <p:cNvPr id="7" name="objective-2">
             <a:extLst xmlns:a="http://schemas.openxmlformats.org/drawingml/2006/main">
               <a:ext uri="{FF2B5EF4-FFF2-40B4-BE49-F238E27FC236}">
-                <a16:creationId xmlns:a16="http://schemas.microsoft.com/office/drawing/2014/main" id="{08467C3A-C28B-4369-88AD-3105613658F8}"/>
+                <a16:creationId xmlns:a16="http://schemas.microsoft.com/office/drawing/2014/main" id="{82FA9941-1A4D-4AA7-AD8A-C110AC6B27B4}"/>
               </a:ext>
             </a:extLst>
           </p:cNvPr>
@@ -4946,7 +4946,7 @@
           <p:cNvPr id="8" name="objective-3">
             <a:extLst xmlns:a="http://schemas.openxmlformats.org/drawingml/2006/main">
               <a:ext uri="{FF2B5EF4-FFF2-40B4-BE49-F238E27FC236}">
-                <a16:creationId xmlns:a16="http://schemas.microsoft.com/office/drawing/2014/main" id="{80431521-358A-4C04-A25B-B366596E3F7C}"/>
+                <a16:creationId xmlns:a16="http://schemas.microsoft.com/office/drawing/2014/main" id="{5F2946D6-0998-4691-92BF-2ADC053C4CAF}"/>
               </a:ext>
             </a:extLst>
           </p:cNvPr>
@@ -5033,7 +5033,7 @@
           <p:cNvPr id="9" name="objective-4">
             <a:extLst xmlns:a="http://schemas.openxmlformats.org/drawingml/2006/main">
               <a:ext uri="{FF2B5EF4-FFF2-40B4-BE49-F238E27FC236}">
-                <a16:creationId xmlns:a16="http://schemas.microsoft.com/office/drawing/2014/main" id="{302DF0FD-B59E-4EF8-BFC1-342EF4E6B6DF}"/>
+                <a16:creationId xmlns:a16="http://schemas.microsoft.com/office/drawing/2014/main" id="{BDC7A676-8933-4D59-BE5B-315D7C56B247}"/>
               </a:ext>
             </a:extLst>
           </p:cNvPr>
@@ -5057,7 +5057,7 @@
           </a:solidFill>
           <a:ln xmlns:a="http://schemas.openxmlformats.org/drawingml/2006/main" w="19050">
             <a:solidFill>
-              <a:srgbClr val="D6A33A"/>
+              <a:srgbClr val="8A5A00"/>
             </a:solidFill>
             <a:prstDash val="solid"/>
           </a:ln>
@@ -5118,7 +5118,7 @@
     </p:spTree>
     <p:extLst>
       <p:ext uri="{BB962C8B-B14F-4D97-AF65-F5344CB8AC3E}">
-        <p14:creationId xmlns:p14="http://schemas.microsoft.com/office/powerpoint/2010/main" val="1813478039"/>
+        <p14:creationId xmlns:p14="http://schemas.microsoft.com/office/powerpoint/2010/main" val="1685985671"/>
       </p:ext>
     </p:extLst>
   </p:cSld>
@@ -5149,7 +5149,7 @@
           <p:cNvPr id="1" name="s3-rule">
             <a:extLst xmlns:a="http://schemas.openxmlformats.org/drawingml/2006/main">
               <a:ext uri="{FF2B5EF4-FFF2-40B4-BE49-F238E27FC236}">
-                <a16:creationId xmlns:a16="http://schemas.microsoft.com/office/drawing/2014/main" id="{C4FDFFA0-2C6D-4EE8-80BD-B06DC031DA75}"/>
+                <a16:creationId xmlns:a16="http://schemas.microsoft.com/office/drawing/2014/main" id="{962DB9AD-D30D-4613-8C28-BD2239B32679}"/>
               </a:ext>
             </a:extLst>
           </p:cNvPr>
@@ -5182,7 +5182,7 @@
           <p:cNvPr id="2" name="s3-eyebrow">
             <a:extLst xmlns:a="http://schemas.openxmlformats.org/drawingml/2006/main">
               <a:ext uri="{FF2B5EF4-FFF2-40B4-BE49-F238E27FC236}">
-                <a16:creationId xmlns:a16="http://schemas.microsoft.com/office/drawing/2014/main" id="{415282AC-1819-4CAD-968D-49BA0F7E68EC}"/>
+                <a16:creationId xmlns:a16="http://schemas.microsoft.com/office/drawing/2014/main" id="{E87D8259-132A-4629-B02D-36D53BC98C2E}"/>
               </a:ext>
             </a:extLst>
           </p:cNvPr>
@@ -5240,7 +5240,7 @@
           <p:cNvPr id="3" name="s3-title">
             <a:extLst xmlns:a="http://schemas.openxmlformats.org/drawingml/2006/main">
               <a:ext uri="{FF2B5EF4-FFF2-40B4-BE49-F238E27FC236}">
-                <a16:creationId xmlns:a16="http://schemas.microsoft.com/office/drawing/2014/main" id="{AFB18087-A682-45EB-902E-5A41179BE77D}"/>
+                <a16:creationId xmlns:a16="http://schemas.microsoft.com/office/drawing/2014/main" id="{E6FD7F82-DC52-45DC-B41B-F65EB5075A1B}"/>
               </a:ext>
             </a:extLst>
           </p:cNvPr>
@@ -5298,7 +5298,7 @@
           <p:cNvPr id="4" name="s3-footer">
             <a:extLst xmlns:a="http://schemas.openxmlformats.org/drawingml/2006/main">
               <a:ext uri="{FF2B5EF4-FFF2-40B4-BE49-F238E27FC236}">
-                <a16:creationId xmlns:a16="http://schemas.microsoft.com/office/drawing/2014/main" id="{E944E3A8-AF3B-4AD8-8B92-8F45D607DE40}"/>
+                <a16:creationId xmlns:a16="http://schemas.microsoft.com/office/drawing/2014/main" id="{51B26FF1-F5AA-45F1-9654-EE667722A5B3}"/>
               </a:ext>
             </a:extLst>
           </p:cNvPr>
@@ -5329,7 +5329,7 @@
           <p:cNvPr id="5" name="s3-identity">
             <a:extLst xmlns:a="http://schemas.openxmlformats.org/drawingml/2006/main">
               <a:ext uri="{FF2B5EF4-FFF2-40B4-BE49-F238E27FC236}">
-                <a16:creationId xmlns:a16="http://schemas.microsoft.com/office/drawing/2014/main" id="{388BCB4F-EC06-41B1-A885-D328955153CF}"/>
+                <a16:creationId xmlns:a16="http://schemas.microsoft.com/office/drawing/2014/main" id="{0275AC34-9F0D-4FA8-99C5-66D2B423CAAC}"/>
               </a:ext>
             </a:extLst>
           </p:cNvPr>
@@ -5387,7 +5387,7 @@
           <p:cNvPr id="6" name="core-no-0">
             <a:extLst xmlns:a="http://schemas.openxmlformats.org/drawingml/2006/main">
               <a:ext uri="{FF2B5EF4-FFF2-40B4-BE49-F238E27FC236}">
-                <a16:creationId xmlns:a16="http://schemas.microsoft.com/office/drawing/2014/main" id="{F0EDAAF9-979F-462F-BE74-E4380C62101E}"/>
+                <a16:creationId xmlns:a16="http://schemas.microsoft.com/office/drawing/2014/main" id="{CA36B940-94A5-45A6-9574-8220FF242CEB}"/>
               </a:ext>
             </a:extLst>
           </p:cNvPr>
@@ -5419,7 +5419,7 @@
             <a:pPr algn="l">
               <a:defRPr sz="2250" b="1">
                 <a:solidFill>
-                  <a:srgbClr val="D6A33A"/>
+                  <a:srgbClr val="8A5A00"/>
                 </a:solidFill>
                 <a:latin typeface="PingFang SC"/>
                 <a:ea typeface="PingFang SC"/>
@@ -5429,7 +5429,7 @@
             <a:r>
               <a:rPr sz="2250" b="1">
                 <a:solidFill>
-                  <a:srgbClr val="D6A33A"/>
+                  <a:srgbClr val="8A5A00"/>
                 </a:solidFill>
                 <a:latin typeface="PingFang SC"/>
                 <a:ea typeface="PingFang SC"/>
@@ -5445,7 +5445,7 @@
           <p:cNvPr id="7" name="core-label-0">
             <a:extLst xmlns:a="http://schemas.openxmlformats.org/drawingml/2006/main">
               <a:ext uri="{FF2B5EF4-FFF2-40B4-BE49-F238E27FC236}">
-                <a16:creationId xmlns:a16="http://schemas.microsoft.com/office/drawing/2014/main" id="{51CD0B13-E3ED-455C-AFBE-DBAA2059E080}"/>
+                <a16:creationId xmlns:a16="http://schemas.microsoft.com/office/drawing/2014/main" id="{D83C1030-33C5-4E77-BD02-540B6FC3506F}"/>
               </a:ext>
             </a:extLst>
           </p:cNvPr>
@@ -5503,7 +5503,7 @@
           <p:cNvPr id="8" name="core-body-0">
             <a:extLst xmlns:a="http://schemas.openxmlformats.org/drawingml/2006/main">
               <a:ext uri="{FF2B5EF4-FFF2-40B4-BE49-F238E27FC236}">
-                <a16:creationId xmlns:a16="http://schemas.microsoft.com/office/drawing/2014/main" id="{51DA30BC-AD6C-4176-A55C-9862A2113980}"/>
+                <a16:creationId xmlns:a16="http://schemas.microsoft.com/office/drawing/2014/main" id="{A7A2776F-C19F-4FA5-BC8F-4199A6E599AF}"/>
               </a:ext>
             </a:extLst>
           </p:cNvPr>
@@ -5527,7 +5527,7 @@
           </a:solidFill>
           <a:ln xmlns:a="http://schemas.openxmlformats.org/drawingml/2006/main" w="19050">
             <a:solidFill>
-              <a:srgbClr val="D6A33A"/>
+              <a:srgbClr val="8A5A00"/>
             </a:solidFill>
             <a:prstDash val="solid"/>
           </a:ln>
@@ -5567,7 +5567,7 @@
           <p:cNvPr id="9" name="core-no-1">
             <a:extLst xmlns:a="http://schemas.openxmlformats.org/drawingml/2006/main">
               <a:ext uri="{FF2B5EF4-FFF2-40B4-BE49-F238E27FC236}">
-                <a16:creationId xmlns:a16="http://schemas.microsoft.com/office/drawing/2014/main" id="{1A92E69C-C7A2-427C-BB82-6005F8433C46}"/>
+                <a16:creationId xmlns:a16="http://schemas.microsoft.com/office/drawing/2014/main" id="{4BD2F869-980E-46CB-BE8A-69E46E804B40}"/>
               </a:ext>
             </a:extLst>
           </p:cNvPr>
@@ -5599,7 +5599,7 @@
             <a:pPr algn="l">
               <a:defRPr sz="2250" b="1">
                 <a:solidFill>
-                  <a:srgbClr val="D6A33A"/>
+                  <a:srgbClr val="8A5A00"/>
                 </a:solidFill>
                 <a:latin typeface="PingFang SC"/>
                 <a:ea typeface="PingFang SC"/>
@@ -5609,7 +5609,7 @@
             <a:r>
               <a:rPr sz="2250" b="1">
                 <a:solidFill>
-                  <a:srgbClr val="D6A33A"/>
+                  <a:srgbClr val="8A5A00"/>
                 </a:solidFill>
                 <a:latin typeface="PingFang SC"/>
                 <a:ea typeface="PingFang SC"/>
@@ -5625,7 +5625,7 @@
           <p:cNvPr id="10" name="core-body-1">
             <a:extLst xmlns:a="http://schemas.openxmlformats.org/drawingml/2006/main">
               <a:ext uri="{FF2B5EF4-FFF2-40B4-BE49-F238E27FC236}">
-                <a16:creationId xmlns:a16="http://schemas.microsoft.com/office/drawing/2014/main" id="{162EACB0-FE7B-44AE-A9E6-18DBB874BC35}"/>
+                <a16:creationId xmlns:a16="http://schemas.microsoft.com/office/drawing/2014/main" id="{DAF6B3A5-1501-4606-8289-F8D1E159F3B6}"/>
               </a:ext>
             </a:extLst>
           </p:cNvPr>
@@ -5689,7 +5689,7 @@
           <p:cNvPr id="11" name="core-no-2">
             <a:extLst xmlns:a="http://schemas.openxmlformats.org/drawingml/2006/main">
               <a:ext uri="{FF2B5EF4-FFF2-40B4-BE49-F238E27FC236}">
-                <a16:creationId xmlns:a16="http://schemas.microsoft.com/office/drawing/2014/main" id="{0B357979-25B5-406A-8FAD-0B6D90792A93}"/>
+                <a16:creationId xmlns:a16="http://schemas.microsoft.com/office/drawing/2014/main" id="{F4A90EEB-0D63-4991-8EEA-A198F2E286E2}"/>
               </a:ext>
             </a:extLst>
           </p:cNvPr>
@@ -5721,7 +5721,7 @@
             <a:pPr algn="l">
               <a:defRPr sz="2250" b="1">
                 <a:solidFill>
-                  <a:srgbClr val="D6A33A"/>
+                  <a:srgbClr val="8A5A00"/>
                 </a:solidFill>
                 <a:latin typeface="PingFang SC"/>
                 <a:ea typeface="PingFang SC"/>
@@ -5731,7 +5731,7 @@
             <a:r>
               <a:rPr sz="2250" b="1">
                 <a:solidFill>
-                  <a:srgbClr val="D6A33A"/>
+                  <a:srgbClr val="8A5A00"/>
                 </a:solidFill>
                 <a:latin typeface="PingFang SC"/>
                 <a:ea typeface="PingFang SC"/>
@@ -5747,7 +5747,7 @@
           <p:cNvPr id="12" name="core-body-2">
             <a:extLst xmlns:a="http://schemas.openxmlformats.org/drawingml/2006/main">
               <a:ext uri="{FF2B5EF4-FFF2-40B4-BE49-F238E27FC236}">
-                <a16:creationId xmlns:a16="http://schemas.microsoft.com/office/drawing/2014/main" id="{A0307966-2303-4DC6-A0D3-0E27F72CF142}"/>
+                <a16:creationId xmlns:a16="http://schemas.microsoft.com/office/drawing/2014/main" id="{4B54419F-8CFF-451B-B6CB-8974545436AA}"/>
               </a:ext>
             </a:extLst>
           </p:cNvPr>
@@ -5811,7 +5811,7 @@
           <p:cNvPr id="13" name="s3-takeaway-rule">
             <a:extLst xmlns:a="http://schemas.openxmlformats.org/drawingml/2006/main">
               <a:ext uri="{FF2B5EF4-FFF2-40B4-BE49-F238E27FC236}">
-                <a16:creationId xmlns:a16="http://schemas.microsoft.com/office/drawing/2014/main" id="{EC2D8B3C-961E-432F-A712-7D9F25D1950D}"/>
+                <a16:creationId xmlns:a16="http://schemas.microsoft.com/office/drawing/2014/main" id="{ED627C77-4661-4C08-8508-DDF158FD35A3}"/>
               </a:ext>
             </a:extLst>
           </p:cNvPr>
@@ -5844,7 +5844,7 @@
           <p:cNvPr id="14" name="s3-takeaway">
             <a:extLst xmlns:a="http://schemas.openxmlformats.org/drawingml/2006/main">
               <a:ext uri="{FF2B5EF4-FFF2-40B4-BE49-F238E27FC236}">
-                <a16:creationId xmlns:a16="http://schemas.microsoft.com/office/drawing/2014/main" id="{3144DE63-F03B-4E06-8C31-6351381DE94C}"/>
+                <a16:creationId xmlns:a16="http://schemas.microsoft.com/office/drawing/2014/main" id="{4E1F5853-5DE0-482C-80AE-6AE1232F6039}"/>
               </a:ext>
             </a:extLst>
           </p:cNvPr>
@@ -5900,7 +5900,7 @@
     </p:spTree>
     <p:extLst>
       <p:ext uri="{BB962C8B-B14F-4D97-AF65-F5344CB8AC3E}">
-        <p14:creationId xmlns:p14="http://schemas.microsoft.com/office/powerpoint/2010/main" val="759203297"/>
+        <p14:creationId xmlns:p14="http://schemas.microsoft.com/office/powerpoint/2010/main" val="1286399318"/>
       </p:ext>
     </p:extLst>
   </p:cSld>
@@ -5931,7 +5931,7 @@
           <p:cNvPr id="1" name="s4-rule">
             <a:extLst xmlns:a="http://schemas.openxmlformats.org/drawingml/2006/main">
               <a:ext uri="{FF2B5EF4-FFF2-40B4-BE49-F238E27FC236}">
-                <a16:creationId xmlns:a16="http://schemas.microsoft.com/office/drawing/2014/main" id="{4B92EE75-DA9E-4D74-9427-59931D216F39}"/>
+                <a16:creationId xmlns:a16="http://schemas.microsoft.com/office/drawing/2014/main" id="{83980716-D0EB-43B3-9D56-34743C6E6116}"/>
               </a:ext>
             </a:extLst>
           </p:cNvPr>
@@ -5964,7 +5964,7 @@
           <p:cNvPr id="2" name="s4-eyebrow">
             <a:extLst xmlns:a="http://schemas.openxmlformats.org/drawingml/2006/main">
               <a:ext uri="{FF2B5EF4-FFF2-40B4-BE49-F238E27FC236}">
-                <a16:creationId xmlns:a16="http://schemas.microsoft.com/office/drawing/2014/main" id="{8DB8CE5E-BF3E-414D-89F9-82D19644686F}"/>
+                <a16:creationId xmlns:a16="http://schemas.microsoft.com/office/drawing/2014/main" id="{40B07953-A7E0-4C55-8C48-60A70FA6FFFC}"/>
               </a:ext>
             </a:extLst>
           </p:cNvPr>
@@ -6022,7 +6022,7 @@
           <p:cNvPr id="3" name="s4-title">
             <a:extLst xmlns:a="http://schemas.openxmlformats.org/drawingml/2006/main">
               <a:ext uri="{FF2B5EF4-FFF2-40B4-BE49-F238E27FC236}">
-                <a16:creationId xmlns:a16="http://schemas.microsoft.com/office/drawing/2014/main" id="{C60D3B71-9FEC-4AA1-96B9-86CAF67C64EB}"/>
+                <a16:creationId xmlns:a16="http://schemas.microsoft.com/office/drawing/2014/main" id="{0383E9CC-1F7B-4DCC-8C7D-4073DCF40605}"/>
               </a:ext>
             </a:extLst>
           </p:cNvPr>
@@ -6080,7 +6080,7 @@
           <p:cNvPr id="4" name="s4-footer">
             <a:extLst xmlns:a="http://schemas.openxmlformats.org/drawingml/2006/main">
               <a:ext uri="{FF2B5EF4-FFF2-40B4-BE49-F238E27FC236}">
-                <a16:creationId xmlns:a16="http://schemas.microsoft.com/office/drawing/2014/main" id="{79F54A79-D542-4F35-9338-1CBFDA4074CF}"/>
+                <a16:creationId xmlns:a16="http://schemas.microsoft.com/office/drawing/2014/main" id="{864AE0DE-AB43-4A55-9C34-A3FE16E20027}"/>
               </a:ext>
             </a:extLst>
           </p:cNvPr>
@@ -6111,7 +6111,7 @@
           <p:cNvPr id="5" name="s4-identity">
             <a:extLst xmlns:a="http://schemas.openxmlformats.org/drawingml/2006/main">
               <a:ext uri="{FF2B5EF4-FFF2-40B4-BE49-F238E27FC236}">
-                <a16:creationId xmlns:a16="http://schemas.microsoft.com/office/drawing/2014/main" id="{C23DF387-81AC-47D3-9EFB-6E15C2529944}"/>
+                <a16:creationId xmlns:a16="http://schemas.microsoft.com/office/drawing/2014/main" id="{02835B57-3769-4D5C-AB28-677160E2A0AA}"/>
               </a:ext>
             </a:extLst>
           </p:cNvPr>
@@ -6169,7 +6169,7 @@
           <p:cNvPr id="6" name="core-no-0">
             <a:extLst xmlns:a="http://schemas.openxmlformats.org/drawingml/2006/main">
               <a:ext uri="{FF2B5EF4-FFF2-40B4-BE49-F238E27FC236}">
-                <a16:creationId xmlns:a16="http://schemas.microsoft.com/office/drawing/2014/main" id="{57AA6DBD-63CA-4E83-9FB6-702A8B1BF582}"/>
+                <a16:creationId xmlns:a16="http://schemas.microsoft.com/office/drawing/2014/main" id="{A7069022-1A47-4761-B339-68FD4CD620EE}"/>
               </a:ext>
             </a:extLst>
           </p:cNvPr>
@@ -6201,7 +6201,7 @@
             <a:pPr algn="l">
               <a:defRPr sz="2250" b="1">
                 <a:solidFill>
-                  <a:srgbClr val="D6A33A"/>
+                  <a:srgbClr val="8A5A00"/>
                 </a:solidFill>
                 <a:latin typeface="PingFang SC"/>
                 <a:ea typeface="PingFang SC"/>
@@ -6211,7 +6211,7 @@
             <a:r>
               <a:rPr sz="2250" b="1">
                 <a:solidFill>
-                  <a:srgbClr val="D6A33A"/>
+                  <a:srgbClr val="8A5A00"/>
                 </a:solidFill>
                 <a:latin typeface="PingFang SC"/>
                 <a:ea typeface="PingFang SC"/>
@@ -6227,7 +6227,7 @@
           <p:cNvPr id="7" name="core-label-0">
             <a:extLst xmlns:a="http://schemas.openxmlformats.org/drawingml/2006/main">
               <a:ext uri="{FF2B5EF4-FFF2-40B4-BE49-F238E27FC236}">
-                <a16:creationId xmlns:a16="http://schemas.microsoft.com/office/drawing/2014/main" id="{3E000835-1B15-4611-B961-FDB4307D81AC}"/>
+                <a16:creationId xmlns:a16="http://schemas.microsoft.com/office/drawing/2014/main" id="{588903A1-E908-4D44-9201-67F5EEBB7ADF}"/>
               </a:ext>
             </a:extLst>
           </p:cNvPr>
@@ -6285,7 +6285,7 @@
           <p:cNvPr id="8" name="core-body-0">
             <a:extLst xmlns:a="http://schemas.openxmlformats.org/drawingml/2006/main">
               <a:ext uri="{FF2B5EF4-FFF2-40B4-BE49-F238E27FC236}">
-                <a16:creationId xmlns:a16="http://schemas.microsoft.com/office/drawing/2014/main" id="{185EB004-A029-4E7B-8954-6972A42FDDD2}"/>
+                <a16:creationId xmlns:a16="http://schemas.microsoft.com/office/drawing/2014/main" id="{D0184CA3-7E8F-4D78-8737-97A34FDA28E3}"/>
               </a:ext>
             </a:extLst>
           </p:cNvPr>
@@ -6309,7 +6309,7 @@
           </a:solidFill>
           <a:ln xmlns:a="http://schemas.openxmlformats.org/drawingml/2006/main" w="19050">
             <a:solidFill>
-              <a:srgbClr val="D6A33A"/>
+              <a:srgbClr val="8A5A00"/>
             </a:solidFill>
             <a:prstDash val="solid"/>
           </a:ln>
@@ -6349,7 +6349,7 @@
           <p:cNvPr id="9" name="core-no-1">
             <a:extLst xmlns:a="http://schemas.openxmlformats.org/drawingml/2006/main">
               <a:ext uri="{FF2B5EF4-FFF2-40B4-BE49-F238E27FC236}">
-                <a16:creationId xmlns:a16="http://schemas.microsoft.com/office/drawing/2014/main" id="{574093B3-B19F-4EFD-842F-13AB7B29F6DF}"/>
+                <a16:creationId xmlns:a16="http://schemas.microsoft.com/office/drawing/2014/main" id="{D8A34334-A33E-4793-B75A-24B2388BCE08}"/>
               </a:ext>
             </a:extLst>
           </p:cNvPr>
@@ -6381,7 +6381,7 @@
             <a:pPr algn="l">
               <a:defRPr sz="2250" b="1">
                 <a:solidFill>
-                  <a:srgbClr val="D6A33A"/>
+                  <a:srgbClr val="8A5A00"/>
                 </a:solidFill>
                 <a:latin typeface="PingFang SC"/>
                 <a:ea typeface="PingFang SC"/>
@@ -6391,7 +6391,7 @@
             <a:r>
               <a:rPr sz="2250" b="1">
                 <a:solidFill>
-                  <a:srgbClr val="D6A33A"/>
+                  <a:srgbClr val="8A5A00"/>
                 </a:solidFill>
                 <a:latin typeface="PingFang SC"/>
                 <a:ea typeface="PingFang SC"/>
@@ -6407,7 +6407,7 @@
           <p:cNvPr id="10" name="core-body-1">
             <a:extLst xmlns:a="http://schemas.openxmlformats.org/drawingml/2006/main">
               <a:ext uri="{FF2B5EF4-FFF2-40B4-BE49-F238E27FC236}">
-                <a16:creationId xmlns:a16="http://schemas.microsoft.com/office/drawing/2014/main" id="{ED3EAAE6-6C4A-4799-900A-09F83D62423C}"/>
+                <a16:creationId xmlns:a16="http://schemas.microsoft.com/office/drawing/2014/main" id="{9D73E931-E39E-45C5-B812-FFD28EEEBE08}"/>
               </a:ext>
             </a:extLst>
           </p:cNvPr>
@@ -6461,7 +6461,7 @@
                 <a:ea typeface="PingFang SC"/>
                 <a:cs typeface="PingFang SC"/>
               </a:rPr>
-              <a:t>不必索取或展示模型的完整隐藏推理。对外可要求的是 依据、关键步骤、假设和检查项 ：这些内容能被人或工具核对。对于有明确答案的任务，还可以生成多个候选，再比较结果是否一致…</a:t>
+              <a:t>不必索取或展示模型的完整隐藏推理；对外可要求的是 依据、关键步骤、假设和检查项；这些内容能被人或工具核对；对于有明确答案的任务；还可以生成多个候选；再比较结果是否一致</a:t>
             </a:r>
           </a:p>
         </p:txBody>
@@ -6471,7 +6471,7 @@
           <p:cNvPr id="11" name="s4-takeaway-rule">
             <a:extLst xmlns:a="http://schemas.openxmlformats.org/drawingml/2006/main">
               <a:ext uri="{FF2B5EF4-FFF2-40B4-BE49-F238E27FC236}">
-                <a16:creationId xmlns:a16="http://schemas.microsoft.com/office/drawing/2014/main" id="{B64D5880-FD45-4A15-ACB4-D3E0D5D7959E}"/>
+                <a16:creationId xmlns:a16="http://schemas.microsoft.com/office/drawing/2014/main" id="{31ADAF86-125E-4A72-B3C1-106840118CD8}"/>
               </a:ext>
             </a:extLst>
           </p:cNvPr>
@@ -6504,7 +6504,7 @@
           <p:cNvPr id="12" name="s4-takeaway">
             <a:extLst xmlns:a="http://schemas.openxmlformats.org/drawingml/2006/main">
               <a:ext uri="{FF2B5EF4-FFF2-40B4-BE49-F238E27FC236}">
-                <a16:creationId xmlns:a16="http://schemas.microsoft.com/office/drawing/2014/main" id="{EF307029-AD13-4D77-BEA2-5FF29BD5B2BD}"/>
+                <a16:creationId xmlns:a16="http://schemas.microsoft.com/office/drawing/2014/main" id="{F4875096-D4B8-4589-AAF0-149AFAE7D5DD}"/>
               </a:ext>
             </a:extLst>
           </p:cNvPr>
@@ -6560,7 +6560,7 @@
     </p:spTree>
     <p:extLst>
       <p:ext uri="{BB962C8B-B14F-4D97-AF65-F5344CB8AC3E}">
-        <p14:creationId xmlns:p14="http://schemas.microsoft.com/office/powerpoint/2010/main" val="1756216140"/>
+        <p14:creationId xmlns:p14="http://schemas.microsoft.com/office/powerpoint/2010/main" val="636660355"/>
       </p:ext>
     </p:extLst>
   </p:cSld>
@@ -6591,7 +6591,7 @@
           <p:cNvPr id="1" name="s5-rule">
             <a:extLst xmlns:a="http://schemas.openxmlformats.org/drawingml/2006/main">
               <a:ext uri="{FF2B5EF4-FFF2-40B4-BE49-F238E27FC236}">
-                <a16:creationId xmlns:a16="http://schemas.microsoft.com/office/drawing/2014/main" id="{E959E509-0161-4F94-9BE9-012095C4CDDF}"/>
+                <a16:creationId xmlns:a16="http://schemas.microsoft.com/office/drawing/2014/main" id="{2D43A910-519A-4A10-84AD-770D8D766B79}"/>
               </a:ext>
             </a:extLst>
           </p:cNvPr>
@@ -6624,7 +6624,7 @@
           <p:cNvPr id="2" name="s5-eyebrow">
             <a:extLst xmlns:a="http://schemas.openxmlformats.org/drawingml/2006/main">
               <a:ext uri="{FF2B5EF4-FFF2-40B4-BE49-F238E27FC236}">
-                <a16:creationId xmlns:a16="http://schemas.microsoft.com/office/drawing/2014/main" id="{D0F43199-DAE5-4040-BC62-71B23C96D3F9}"/>
+                <a16:creationId xmlns:a16="http://schemas.microsoft.com/office/drawing/2014/main" id="{29CE1815-A5CD-4E9E-BA19-495D837C91FD}"/>
               </a:ext>
             </a:extLst>
           </p:cNvPr>
@@ -6682,7 +6682,7 @@
           <p:cNvPr id="3" name="s5-title">
             <a:extLst xmlns:a="http://schemas.openxmlformats.org/drawingml/2006/main">
               <a:ext uri="{FF2B5EF4-FFF2-40B4-BE49-F238E27FC236}">
-                <a16:creationId xmlns:a16="http://schemas.microsoft.com/office/drawing/2014/main" id="{62EBB580-78CC-4DB5-A4D8-6F0C3B12EC7F}"/>
+                <a16:creationId xmlns:a16="http://schemas.microsoft.com/office/drawing/2014/main" id="{D1F14386-DE81-4F1C-A8C1-33481A308BEE}"/>
               </a:ext>
             </a:extLst>
           </p:cNvPr>
@@ -6740,7 +6740,7 @@
           <p:cNvPr id="4" name="s5-footer">
             <a:extLst xmlns:a="http://schemas.openxmlformats.org/drawingml/2006/main">
               <a:ext uri="{FF2B5EF4-FFF2-40B4-BE49-F238E27FC236}">
-                <a16:creationId xmlns:a16="http://schemas.microsoft.com/office/drawing/2014/main" id="{B47C83F5-58D6-41C5-BB7F-F3FC8471D940}"/>
+                <a16:creationId xmlns:a16="http://schemas.microsoft.com/office/drawing/2014/main" id="{4D5DB1F4-6666-4B13-B734-5EAAFA025E34}"/>
               </a:ext>
             </a:extLst>
           </p:cNvPr>
@@ -6771,7 +6771,7 @@
           <p:cNvPr id="5" name="s5-identity">
             <a:extLst xmlns:a="http://schemas.openxmlformats.org/drawingml/2006/main">
               <a:ext uri="{FF2B5EF4-FFF2-40B4-BE49-F238E27FC236}">
-                <a16:creationId xmlns:a16="http://schemas.microsoft.com/office/drawing/2014/main" id="{22BB9931-8A9B-4882-8356-2435856422CF}"/>
+                <a16:creationId xmlns:a16="http://schemas.microsoft.com/office/drawing/2014/main" id="{42F068A2-0068-4C69-B530-041F203D71FF}"/>
               </a:ext>
             </a:extLst>
           </p:cNvPr>
@@ -6829,7 +6829,7 @@
           <p:cNvPr id="6" name="core-no-0">
             <a:extLst xmlns:a="http://schemas.openxmlformats.org/drawingml/2006/main">
               <a:ext uri="{FF2B5EF4-FFF2-40B4-BE49-F238E27FC236}">
-                <a16:creationId xmlns:a16="http://schemas.microsoft.com/office/drawing/2014/main" id="{E5474EC1-67AE-465F-8615-2CE1E17662A5}"/>
+                <a16:creationId xmlns:a16="http://schemas.microsoft.com/office/drawing/2014/main" id="{29AFC5BB-03A3-4E48-B49B-D8D6C73C57BC}"/>
               </a:ext>
             </a:extLst>
           </p:cNvPr>
@@ -6861,7 +6861,7 @@
             <a:pPr algn="l">
               <a:defRPr sz="2250" b="1">
                 <a:solidFill>
-                  <a:srgbClr val="D6A33A"/>
+                  <a:srgbClr val="8A5A00"/>
                 </a:solidFill>
                 <a:latin typeface="PingFang SC"/>
                 <a:ea typeface="PingFang SC"/>
@@ -6871,7 +6871,7 @@
             <a:r>
               <a:rPr sz="2250" b="1">
                 <a:solidFill>
-                  <a:srgbClr val="D6A33A"/>
+                  <a:srgbClr val="8A5A00"/>
                 </a:solidFill>
                 <a:latin typeface="PingFang SC"/>
                 <a:ea typeface="PingFang SC"/>
@@ -6887,7 +6887,7 @@
           <p:cNvPr id="7" name="core-label-0">
             <a:extLst xmlns:a="http://schemas.openxmlformats.org/drawingml/2006/main">
               <a:ext uri="{FF2B5EF4-FFF2-40B4-BE49-F238E27FC236}">
-                <a16:creationId xmlns:a16="http://schemas.microsoft.com/office/drawing/2014/main" id="{9A7CA281-177D-44CF-95BB-F35725E738DF}"/>
+                <a16:creationId xmlns:a16="http://schemas.microsoft.com/office/drawing/2014/main" id="{D1966A1B-FC9C-4E7A-B460-E0EDE0064FE7}"/>
               </a:ext>
             </a:extLst>
           </p:cNvPr>
@@ -6945,7 +6945,7 @@
           <p:cNvPr id="8" name="core-body-0">
             <a:extLst xmlns:a="http://schemas.openxmlformats.org/drawingml/2006/main">
               <a:ext uri="{FF2B5EF4-FFF2-40B4-BE49-F238E27FC236}">
-                <a16:creationId xmlns:a16="http://schemas.microsoft.com/office/drawing/2014/main" id="{2289BFFA-B3E1-4EB7-8FA0-510F3F4C53AF}"/>
+                <a16:creationId xmlns:a16="http://schemas.microsoft.com/office/drawing/2014/main" id="{30A05F2A-C48D-4E30-B172-089D107BB806}"/>
               </a:ext>
             </a:extLst>
           </p:cNvPr>
@@ -6969,7 +6969,7 @@
           </a:solidFill>
           <a:ln xmlns:a="http://schemas.openxmlformats.org/drawingml/2006/main" w="19050">
             <a:solidFill>
-              <a:srgbClr val="D6A33A"/>
+              <a:srgbClr val="8A5A00"/>
             </a:solidFill>
             <a:prstDash val="solid"/>
           </a:ln>
@@ -6999,7 +6999,7 @@
                 <a:ea typeface="PingFang SC"/>
                 <a:cs typeface="PingFang SC"/>
               </a:rPr>
-              <a:t>可复用模板要把变量与固定规则分开。例如活动方案中的受众、日期和预算是变量，禁止编造嘉宾、必须给出风险预案是固定规则。为模板准备一组真实样例，记录通过率、常见遗漏和人工修改量…</a:t>
+              <a:t>可复用模板要把变量与固定规则分开；例如活动方案中的受众、日期和预算是变量；禁止编造嘉宾、必须给出风险预案是固定规则；为模板准备一组真实样例；记录通过率、常见遗漏和人工修改量</a:t>
             </a:r>
           </a:p>
         </p:txBody>
@@ -7009,7 +7009,7 @@
           <p:cNvPr id="9" name="core-no-1">
             <a:extLst xmlns:a="http://schemas.openxmlformats.org/drawingml/2006/main">
               <a:ext uri="{FF2B5EF4-FFF2-40B4-BE49-F238E27FC236}">
-                <a16:creationId xmlns:a16="http://schemas.microsoft.com/office/drawing/2014/main" id="{0AE188EB-EE51-49FE-B77A-AE536EAF9AE3}"/>
+                <a16:creationId xmlns:a16="http://schemas.microsoft.com/office/drawing/2014/main" id="{44E83323-FF06-49F9-A9B8-AE84CD6F856B}"/>
               </a:ext>
             </a:extLst>
           </p:cNvPr>
@@ -7041,7 +7041,7 @@
             <a:pPr algn="l">
               <a:defRPr sz="2250" b="1">
                 <a:solidFill>
-                  <a:srgbClr val="D6A33A"/>
+                  <a:srgbClr val="8A5A00"/>
                 </a:solidFill>
                 <a:latin typeface="PingFang SC"/>
                 <a:ea typeface="PingFang SC"/>
@@ -7051,7 +7051,7 @@
             <a:r>
               <a:rPr sz="2250" b="1">
                 <a:solidFill>
-                  <a:srgbClr val="D6A33A"/>
+                  <a:srgbClr val="8A5A00"/>
                 </a:solidFill>
                 <a:latin typeface="PingFang SC"/>
                 <a:ea typeface="PingFang SC"/>
@@ -7067,7 +7067,7 @@
           <p:cNvPr id="10" name="core-body-1">
             <a:extLst xmlns:a="http://schemas.openxmlformats.org/drawingml/2006/main">
               <a:ext uri="{FF2B5EF4-FFF2-40B4-BE49-F238E27FC236}">
-                <a16:creationId xmlns:a16="http://schemas.microsoft.com/office/drawing/2014/main" id="{846D9CFA-BDA2-43D0-8EDD-A79D0F98356F}"/>
+                <a16:creationId xmlns:a16="http://schemas.microsoft.com/office/drawing/2014/main" id="{E5EDDAF6-3A73-49A1-998E-5FBF3DF0328A}"/>
               </a:ext>
             </a:extLst>
           </p:cNvPr>
@@ -7131,7 +7131,7 @@
           <p:cNvPr id="11" name="s5-takeaway-rule">
             <a:extLst xmlns:a="http://schemas.openxmlformats.org/drawingml/2006/main">
               <a:ext uri="{FF2B5EF4-FFF2-40B4-BE49-F238E27FC236}">
-                <a16:creationId xmlns:a16="http://schemas.microsoft.com/office/drawing/2014/main" id="{A1D5CDEF-423D-4887-9E03-013722DE79CE}"/>
+                <a16:creationId xmlns:a16="http://schemas.microsoft.com/office/drawing/2014/main" id="{D5F8CDD6-34FF-4299-92D8-EB7EA1AC484E}"/>
               </a:ext>
             </a:extLst>
           </p:cNvPr>
@@ -7164,7 +7164,7 @@
           <p:cNvPr id="12" name="s5-takeaway">
             <a:extLst xmlns:a="http://schemas.openxmlformats.org/drawingml/2006/main">
               <a:ext uri="{FF2B5EF4-FFF2-40B4-BE49-F238E27FC236}">
-                <a16:creationId xmlns:a16="http://schemas.microsoft.com/office/drawing/2014/main" id="{4D687003-5F5B-42E5-8B67-F4B4EB591BDF}"/>
+                <a16:creationId xmlns:a16="http://schemas.microsoft.com/office/drawing/2014/main" id="{714214A0-7A6D-4A82-8DAC-BDF4370F6BDE}"/>
               </a:ext>
             </a:extLst>
           </p:cNvPr>
@@ -7220,7 +7220,7 @@
     </p:spTree>
     <p:extLst>
       <p:ext uri="{BB962C8B-B14F-4D97-AF65-F5344CB8AC3E}">
-        <p14:creationId xmlns:p14="http://schemas.microsoft.com/office/powerpoint/2010/main" val="1958509165"/>
+        <p14:creationId xmlns:p14="http://schemas.microsoft.com/office/powerpoint/2010/main" val="1778091613"/>
       </p:ext>
     </p:extLst>
   </p:cSld>
@@ -7251,7 +7251,7 @@
           <p:cNvPr id="1" name="s6-rule">
             <a:extLst xmlns:a="http://schemas.openxmlformats.org/drawingml/2006/main">
               <a:ext uri="{FF2B5EF4-FFF2-40B4-BE49-F238E27FC236}">
-                <a16:creationId xmlns:a16="http://schemas.microsoft.com/office/drawing/2014/main" id="{28D34559-C346-491E-95A1-570EB726E563}"/>
+                <a16:creationId xmlns:a16="http://schemas.microsoft.com/office/drawing/2014/main" id="{C879788A-B172-4AD2-9873-BF9BEDF17870}"/>
               </a:ext>
             </a:extLst>
           </p:cNvPr>
@@ -7284,7 +7284,7 @@
           <p:cNvPr id="2" name="s6-eyebrow">
             <a:extLst xmlns:a="http://schemas.openxmlformats.org/drawingml/2006/main">
               <a:ext uri="{FF2B5EF4-FFF2-40B4-BE49-F238E27FC236}">
-                <a16:creationId xmlns:a16="http://schemas.microsoft.com/office/drawing/2014/main" id="{8F929D35-0270-40B1-8B14-A92C69DB7BA7}"/>
+                <a16:creationId xmlns:a16="http://schemas.microsoft.com/office/drawing/2014/main" id="{C82F2D32-5A25-4D60-A8F8-DDC08FFE864D}"/>
               </a:ext>
             </a:extLst>
           </p:cNvPr>
@@ -7342,7 +7342,7 @@
           <p:cNvPr id="3" name="s6-title">
             <a:extLst xmlns:a="http://schemas.openxmlformats.org/drawingml/2006/main">
               <a:ext uri="{FF2B5EF4-FFF2-40B4-BE49-F238E27FC236}">
-                <a16:creationId xmlns:a16="http://schemas.microsoft.com/office/drawing/2014/main" id="{60165ACF-5798-4E85-95B9-8FF8D96D964F}"/>
+                <a16:creationId xmlns:a16="http://schemas.microsoft.com/office/drawing/2014/main" id="{9CBCE281-ED47-4F68-A0DF-A7A7666DF2ED}"/>
               </a:ext>
             </a:extLst>
           </p:cNvPr>
@@ -7400,7 +7400,7 @@
           <p:cNvPr id="4" name="s6-footer">
             <a:extLst xmlns:a="http://schemas.openxmlformats.org/drawingml/2006/main">
               <a:ext uri="{FF2B5EF4-FFF2-40B4-BE49-F238E27FC236}">
-                <a16:creationId xmlns:a16="http://schemas.microsoft.com/office/drawing/2014/main" id="{DA870CFF-EFF9-4411-BE63-C014655F20A2}"/>
+                <a16:creationId xmlns:a16="http://schemas.microsoft.com/office/drawing/2014/main" id="{25FB7C62-3F29-4A4F-9510-156F8BB83469}"/>
               </a:ext>
             </a:extLst>
           </p:cNvPr>
@@ -7431,7 +7431,7 @@
           <p:cNvPr id="5" name="s6-identity">
             <a:extLst xmlns:a="http://schemas.openxmlformats.org/drawingml/2006/main">
               <a:ext uri="{FF2B5EF4-FFF2-40B4-BE49-F238E27FC236}">
-                <a16:creationId xmlns:a16="http://schemas.microsoft.com/office/drawing/2014/main" id="{70916133-A713-46CC-B84F-B0CA6D9D0079}"/>
+                <a16:creationId xmlns:a16="http://schemas.microsoft.com/office/drawing/2014/main" id="{7E1C75F8-1F85-415C-ADDB-A04620515836}"/>
               </a:ext>
             </a:extLst>
           </p:cNvPr>
@@ -7489,7 +7489,7 @@
           <p:cNvPr id="6" name="core-no-0">
             <a:extLst xmlns:a="http://schemas.openxmlformats.org/drawingml/2006/main">
               <a:ext uri="{FF2B5EF4-FFF2-40B4-BE49-F238E27FC236}">
-                <a16:creationId xmlns:a16="http://schemas.microsoft.com/office/drawing/2014/main" id="{35416678-E468-4D8B-913D-F602375592AB}"/>
+                <a16:creationId xmlns:a16="http://schemas.microsoft.com/office/drawing/2014/main" id="{12C6F6AD-5E1B-47A1-AFFC-645866AEFF3D}"/>
               </a:ext>
             </a:extLst>
           </p:cNvPr>
@@ -7521,7 +7521,7 @@
             <a:pPr algn="l">
               <a:defRPr sz="2250" b="1">
                 <a:solidFill>
-                  <a:srgbClr val="D6A33A"/>
+                  <a:srgbClr val="8A5A00"/>
                 </a:solidFill>
                 <a:latin typeface="PingFang SC"/>
                 <a:ea typeface="PingFang SC"/>
@@ -7531,7 +7531,7 @@
             <a:r>
               <a:rPr sz="2250" b="1">
                 <a:solidFill>
-                  <a:srgbClr val="D6A33A"/>
+                  <a:srgbClr val="8A5A00"/>
                 </a:solidFill>
                 <a:latin typeface="PingFang SC"/>
                 <a:ea typeface="PingFang SC"/>
@@ -7547,7 +7547,7 @@
           <p:cNvPr id="7" name="core-label-0">
             <a:extLst xmlns:a="http://schemas.openxmlformats.org/drawingml/2006/main">
               <a:ext uri="{FF2B5EF4-FFF2-40B4-BE49-F238E27FC236}">
-                <a16:creationId xmlns:a16="http://schemas.microsoft.com/office/drawing/2014/main" id="{A348E77B-BDCD-43F0-8778-571138F7AD2C}"/>
+                <a16:creationId xmlns:a16="http://schemas.microsoft.com/office/drawing/2014/main" id="{3571C4B9-8C66-4FB4-9EEE-D3BC8D3F3161}"/>
               </a:ext>
             </a:extLst>
           </p:cNvPr>
@@ -7605,7 +7605,7 @@
           <p:cNvPr id="8" name="core-body-0">
             <a:extLst xmlns:a="http://schemas.openxmlformats.org/drawingml/2006/main">
               <a:ext uri="{FF2B5EF4-FFF2-40B4-BE49-F238E27FC236}">
-                <a16:creationId xmlns:a16="http://schemas.microsoft.com/office/drawing/2014/main" id="{0162F807-2374-41AA-A061-A438EC8EE165}"/>
+                <a16:creationId xmlns:a16="http://schemas.microsoft.com/office/drawing/2014/main" id="{9A9CF995-CF26-43C8-B65C-2A56BCB345F6}"/>
               </a:ext>
             </a:extLst>
           </p:cNvPr>
@@ -7629,14 +7629,14 @@
           </a:solidFill>
           <a:ln xmlns:a="http://schemas.openxmlformats.org/drawingml/2006/main" w="19050">
             <a:solidFill>
-              <a:srgbClr val="D6A33A"/>
+              <a:srgbClr val="8A5A00"/>
             </a:solidFill>
             <a:prstDash val="solid"/>
           </a:ln>
         </p:spPr>
         <p:txBody>
           <a:bodyPr xmlns:a="http://schemas.openxmlformats.org/drawingml/2006/main" lIns="152400" tIns="133350" rIns="152400" bIns="133350" anchor="ctr">
-            <a:normAutofit fontScale="98233"/>
+            <a:normAutofit fontScale="100000"/>
           </a:bodyPr>
           <a:lstStyle xmlns:a="http://schemas.openxmlformats.org/drawingml/2006/main"/>
           <a:p xmlns:a="http://schemas.openxmlformats.org/drawingml/2006/main">
@@ -7659,7 +7659,7 @@
                 <a:ea typeface="PingFang SC"/>
                 <a:cs typeface="PingFang SC"/>
               </a:rPr>
-              <a:t>文本生成要区分来源事实与模型表述，新闻、产品参数、价格和政策不能由模型自行补齐。图像生成要检查主体细节、文字、商标、人物授权、风格模仿和品牌一致性。视频还增加镜头连续性、人物与物体一致性…</a:t>
+              <a:t>文本生成要区分来源事实与模型表述；新闻、产品参数、价格和政策不能由模型自行补齐；图像生成要检查主体细节、文字、商标、人物授权、风格模仿和品牌一致性</a:t>
             </a:r>
           </a:p>
         </p:txBody>
@@ -7669,7 +7669,7 @@
           <p:cNvPr id="9" name="core-no-1">
             <a:extLst xmlns:a="http://schemas.openxmlformats.org/drawingml/2006/main">
               <a:ext uri="{FF2B5EF4-FFF2-40B4-BE49-F238E27FC236}">
-                <a16:creationId xmlns:a16="http://schemas.microsoft.com/office/drawing/2014/main" id="{236D0C2D-863C-44B6-A297-3D5586D04DAC}"/>
+                <a16:creationId xmlns:a16="http://schemas.microsoft.com/office/drawing/2014/main" id="{B77A3D05-0B39-48A8-AEAA-535BCC9C8161}"/>
               </a:ext>
             </a:extLst>
           </p:cNvPr>
@@ -7701,7 +7701,7 @@
             <a:pPr algn="l">
               <a:defRPr sz="2250" b="1">
                 <a:solidFill>
-                  <a:srgbClr val="D6A33A"/>
+                  <a:srgbClr val="8A5A00"/>
                 </a:solidFill>
                 <a:latin typeface="PingFang SC"/>
                 <a:ea typeface="PingFang SC"/>
@@ -7711,7 +7711,7 @@
             <a:r>
               <a:rPr sz="2250" b="1">
                 <a:solidFill>
-                  <a:srgbClr val="D6A33A"/>
+                  <a:srgbClr val="8A5A00"/>
                 </a:solidFill>
                 <a:latin typeface="PingFang SC"/>
                 <a:ea typeface="PingFang SC"/>
@@ -7727,7 +7727,7 @@
           <p:cNvPr id="10" name="core-body-1">
             <a:extLst xmlns:a="http://schemas.openxmlformats.org/drawingml/2006/main">
               <a:ext uri="{FF2B5EF4-FFF2-40B4-BE49-F238E27FC236}">
-                <a16:creationId xmlns:a16="http://schemas.microsoft.com/office/drawing/2014/main" id="{7E940BEE-BD31-4FBB-8410-C43F3BB6073F}"/>
+                <a16:creationId xmlns:a16="http://schemas.microsoft.com/office/drawing/2014/main" id="{78093F54-961B-443B-838B-8EE0C446AD7D}"/>
               </a:ext>
             </a:extLst>
           </p:cNvPr>
@@ -7791,7 +7791,7 @@
           <p:cNvPr id="11" name="s6-takeaway-rule">
             <a:extLst xmlns:a="http://schemas.openxmlformats.org/drawingml/2006/main">
               <a:ext uri="{FF2B5EF4-FFF2-40B4-BE49-F238E27FC236}">
-                <a16:creationId xmlns:a16="http://schemas.microsoft.com/office/drawing/2014/main" id="{D7CD4DDD-721C-4662-B76B-5A9CE9C72FB7}"/>
+                <a16:creationId xmlns:a16="http://schemas.microsoft.com/office/drawing/2014/main" id="{A7BEFC08-91E3-46BB-9404-C4A48121A299}"/>
               </a:ext>
             </a:extLst>
           </p:cNvPr>
@@ -7824,7 +7824,7 @@
           <p:cNvPr id="12" name="s6-takeaway">
             <a:extLst xmlns:a="http://schemas.openxmlformats.org/drawingml/2006/main">
               <a:ext uri="{FF2B5EF4-FFF2-40B4-BE49-F238E27FC236}">
-                <a16:creationId xmlns:a16="http://schemas.microsoft.com/office/drawing/2014/main" id="{31B0D23C-E32D-4988-BEA9-9AAC34FBC050}"/>
+                <a16:creationId xmlns:a16="http://schemas.microsoft.com/office/drawing/2014/main" id="{29407F38-807A-448E-94C1-1E5ECEDF25D8}"/>
               </a:ext>
             </a:extLst>
           </p:cNvPr>
@@ -7880,7 +7880,7 @@
     </p:spTree>
     <p:extLst>
       <p:ext uri="{BB962C8B-B14F-4D97-AF65-F5344CB8AC3E}">
-        <p14:creationId xmlns:p14="http://schemas.microsoft.com/office/powerpoint/2010/main" val="1482073688"/>
+        <p14:creationId xmlns:p14="http://schemas.microsoft.com/office/powerpoint/2010/main" val="2053875626"/>
       </p:ext>
     </p:extLst>
   </p:cSld>
@@ -7911,7 +7911,7 @@
           <p:cNvPr id="1" name="s7-rule">
             <a:extLst xmlns:a="http://schemas.openxmlformats.org/drawingml/2006/main">
               <a:ext uri="{FF2B5EF4-FFF2-40B4-BE49-F238E27FC236}">
-                <a16:creationId xmlns:a16="http://schemas.microsoft.com/office/drawing/2014/main" id="{DC72AEAA-654F-4924-B630-1FA5E0AACDEE}"/>
+                <a16:creationId xmlns:a16="http://schemas.microsoft.com/office/drawing/2014/main" id="{CCBD2812-AF17-4F01-9992-52336200A52F}"/>
               </a:ext>
             </a:extLst>
           </p:cNvPr>
@@ -7944,7 +7944,7 @@
           <p:cNvPr id="2" name="s7-eyebrow">
             <a:extLst xmlns:a="http://schemas.openxmlformats.org/drawingml/2006/main">
               <a:ext uri="{FF2B5EF4-FFF2-40B4-BE49-F238E27FC236}">
-                <a16:creationId xmlns:a16="http://schemas.microsoft.com/office/drawing/2014/main" id="{CA797830-C090-4B0B-915B-447FAA09FDCC}"/>
+                <a16:creationId xmlns:a16="http://schemas.microsoft.com/office/drawing/2014/main" id="{4935D3F6-A102-428D-965E-7E9AC0563E86}"/>
               </a:ext>
             </a:extLst>
           </p:cNvPr>
@@ -8002,7 +8002,7 @@
           <p:cNvPr id="3" name="s7-title">
             <a:extLst xmlns:a="http://schemas.openxmlformats.org/drawingml/2006/main">
               <a:ext uri="{FF2B5EF4-FFF2-40B4-BE49-F238E27FC236}">
-                <a16:creationId xmlns:a16="http://schemas.microsoft.com/office/drawing/2014/main" id="{C90588CA-B9B5-40B4-B1F6-7261096ECB8D}"/>
+                <a16:creationId xmlns:a16="http://schemas.microsoft.com/office/drawing/2014/main" id="{6E43F689-3976-48D5-8B73-EC1D97874DA2}"/>
               </a:ext>
             </a:extLst>
           </p:cNvPr>
@@ -8027,7 +8027,7 @@
         </p:spPr>
         <p:txBody>
           <a:bodyPr xmlns:a="http://schemas.openxmlformats.org/drawingml/2006/main" lIns="0" tIns="0" rIns="0" bIns="0" anchor="ctr">
-            <a:normAutofit fontScale="84097"/>
+            <a:normAutofit fontScale="100000"/>
           </a:bodyPr>
           <a:lstStyle xmlns:a="http://schemas.openxmlformats.org/drawingml/2006/main"/>
           <a:p xmlns:a="http://schemas.openxmlformats.org/drawingml/2006/main">
@@ -8050,7 +8050,7 @@
                 <a:ea typeface="PingFang SC"/>
                 <a:cs typeface="PingFang SC"/>
               </a:rPr>
-              <a:t>以电商上新为例，商品名称、尺寸、材质、价格和库存来自业务系统</a:t>
+              <a:t>业务数据先锁定，AIGC 再生成可审核内容</a:t>
             </a:r>
           </a:p>
         </p:txBody>
@@ -8060,7 +8060,7 @@
           <p:cNvPr id="4" name="s7-footer">
             <a:extLst xmlns:a="http://schemas.openxmlformats.org/drawingml/2006/main">
               <a:ext uri="{FF2B5EF4-FFF2-40B4-BE49-F238E27FC236}">
-                <a16:creationId xmlns:a16="http://schemas.microsoft.com/office/drawing/2014/main" id="{AE9A7021-14D8-46BC-BB82-FC05F34F2BEB}"/>
+                <a16:creationId xmlns:a16="http://schemas.microsoft.com/office/drawing/2014/main" id="{5AC884BE-2270-44C6-B824-9D1FA92EECC0}"/>
               </a:ext>
             </a:extLst>
           </p:cNvPr>
@@ -8091,7 +8091,7 @@
           <p:cNvPr id="5" name="s7-identity">
             <a:extLst xmlns:a="http://schemas.openxmlformats.org/drawingml/2006/main">
               <a:ext uri="{FF2B5EF4-FFF2-40B4-BE49-F238E27FC236}">
-                <a16:creationId xmlns:a16="http://schemas.microsoft.com/office/drawing/2014/main" id="{1A3F7B4B-E96D-46EA-8DB6-1FADB1B84942}"/>
+                <a16:creationId xmlns:a16="http://schemas.microsoft.com/office/drawing/2014/main" id="{1121CB15-BA3F-4258-AE67-8469BA31EF34}"/>
               </a:ext>
             </a:extLst>
           </p:cNvPr>
@@ -8149,7 +8149,7 @@
           <p:cNvPr id="6" name="core-no-0">
             <a:extLst xmlns:a="http://schemas.openxmlformats.org/drawingml/2006/main">
               <a:ext uri="{FF2B5EF4-FFF2-40B4-BE49-F238E27FC236}">
-                <a16:creationId xmlns:a16="http://schemas.microsoft.com/office/drawing/2014/main" id="{04DC480C-2E7D-4F95-9F85-97B0324535DA}"/>
+                <a16:creationId xmlns:a16="http://schemas.microsoft.com/office/drawing/2014/main" id="{68A75315-98EC-40B2-B45C-4F5BFA6C3700}"/>
               </a:ext>
             </a:extLst>
           </p:cNvPr>
@@ -8181,7 +8181,7 @@
             <a:pPr algn="l">
               <a:defRPr sz="2250" b="1">
                 <a:solidFill>
-                  <a:srgbClr val="D6A33A"/>
+                  <a:srgbClr val="8A5A00"/>
                 </a:solidFill>
                 <a:latin typeface="PingFang SC"/>
                 <a:ea typeface="PingFang SC"/>
@@ -8191,7 +8191,7 @@
             <a:r>
               <a:rPr sz="2250" b="1">
                 <a:solidFill>
-                  <a:srgbClr val="D6A33A"/>
+                  <a:srgbClr val="8A5A00"/>
                 </a:solidFill>
                 <a:latin typeface="PingFang SC"/>
                 <a:ea typeface="PingFang SC"/>
@@ -8207,7 +8207,7 @@
           <p:cNvPr id="7" name="core-label-0">
             <a:extLst xmlns:a="http://schemas.openxmlformats.org/drawingml/2006/main">
               <a:ext uri="{FF2B5EF4-FFF2-40B4-BE49-F238E27FC236}">
-                <a16:creationId xmlns:a16="http://schemas.microsoft.com/office/drawing/2014/main" id="{AF359AC2-40C1-4F58-871E-495C07B95248}"/>
+                <a16:creationId xmlns:a16="http://schemas.microsoft.com/office/drawing/2014/main" id="{24F5B8D3-0CD0-4BAE-9249-D1CDC80FEBF4}"/>
               </a:ext>
             </a:extLst>
           </p:cNvPr>
@@ -8265,7 +8265,7 @@
           <p:cNvPr id="8" name="core-body-0">
             <a:extLst xmlns:a="http://schemas.openxmlformats.org/drawingml/2006/main">
               <a:ext uri="{FF2B5EF4-FFF2-40B4-BE49-F238E27FC236}">
-                <a16:creationId xmlns:a16="http://schemas.microsoft.com/office/drawing/2014/main" id="{F0FB2753-FA70-44FB-A4EB-054C932D083D}"/>
+                <a16:creationId xmlns:a16="http://schemas.microsoft.com/office/drawing/2014/main" id="{9F9EECC9-EFA2-40A7-8E08-5ABB3244CAB1}"/>
               </a:ext>
             </a:extLst>
           </p:cNvPr>
@@ -8289,7 +8289,7 @@
           </a:solidFill>
           <a:ln xmlns:a="http://schemas.openxmlformats.org/drawingml/2006/main" w="19050">
             <a:solidFill>
-              <a:srgbClr val="D6A33A"/>
+              <a:srgbClr val="8A5A00"/>
             </a:solidFill>
             <a:prstDash val="solid"/>
           </a:ln>
@@ -8319,7 +8319,7 @@
                 <a:ea typeface="PingFang SC"/>
                 <a:cs typeface="PingFang SC"/>
               </a:rPr>
-              <a:t>以电商上新为例，商品名称、尺寸、材质、价格和库存来自业务系统；模型可基于这些受控字段生成不同渠道文案、视觉草图和短视频分镜。商品主图要回到真实商品核对，功效和售后承诺走业务审批…</a:t>
+              <a:t>以电商上新为例，商品名称、尺寸、材质、价格和库存来自业务系统；模型可基于这些受控字段生成不同渠道文案、视觉草图和短视频分镜；商品主图要回到真实商品核对；功效和售后承诺走业务审批</a:t>
             </a:r>
           </a:p>
         </p:txBody>
@@ -8329,7 +8329,7 @@
           <p:cNvPr id="9" name="core-no-1">
             <a:extLst xmlns:a="http://schemas.openxmlformats.org/drawingml/2006/main">
               <a:ext uri="{FF2B5EF4-FFF2-40B4-BE49-F238E27FC236}">
-                <a16:creationId xmlns:a16="http://schemas.microsoft.com/office/drawing/2014/main" id="{67C5841E-1754-4F8B-A6E2-640DA0FA298F}"/>
+                <a16:creationId xmlns:a16="http://schemas.microsoft.com/office/drawing/2014/main" id="{4A0AA411-241F-4F69-8777-F756DB1CFE44}"/>
               </a:ext>
             </a:extLst>
           </p:cNvPr>
@@ -8361,7 +8361,7 @@
             <a:pPr algn="l">
               <a:defRPr sz="2250" b="1">
                 <a:solidFill>
-                  <a:srgbClr val="D6A33A"/>
+                  <a:srgbClr val="8A5A00"/>
                 </a:solidFill>
                 <a:latin typeface="PingFang SC"/>
                 <a:ea typeface="PingFang SC"/>
@@ -8371,7 +8371,7 @@
             <a:r>
               <a:rPr sz="2250" b="1">
                 <a:solidFill>
-                  <a:srgbClr val="D6A33A"/>
+                  <a:srgbClr val="8A5A00"/>
                 </a:solidFill>
                 <a:latin typeface="PingFang SC"/>
                 <a:ea typeface="PingFang SC"/>
@@ -8387,7 +8387,7 @@
           <p:cNvPr id="10" name="core-body-1">
             <a:extLst xmlns:a="http://schemas.openxmlformats.org/drawingml/2006/main">
               <a:ext uri="{FF2B5EF4-FFF2-40B4-BE49-F238E27FC236}">
-                <a16:creationId xmlns:a16="http://schemas.microsoft.com/office/drawing/2014/main" id="{A7507DA9-33F0-4250-889A-827D8D2986EA}"/>
+                <a16:creationId xmlns:a16="http://schemas.microsoft.com/office/drawing/2014/main" id="{06154A4A-F82C-4174-B646-27DDEC2D15B2}"/>
               </a:ext>
             </a:extLst>
           </p:cNvPr>
@@ -8451,7 +8451,7 @@
           <p:cNvPr id="11" name="s7-takeaway-rule">
             <a:extLst xmlns:a="http://schemas.openxmlformats.org/drawingml/2006/main">
               <a:ext uri="{FF2B5EF4-FFF2-40B4-BE49-F238E27FC236}">
-                <a16:creationId xmlns:a16="http://schemas.microsoft.com/office/drawing/2014/main" id="{2C6B1875-14AE-4796-B684-2FECA0F52862}"/>
+                <a16:creationId xmlns:a16="http://schemas.microsoft.com/office/drawing/2014/main" id="{F07C4D60-EAD8-4E6D-814B-2998D68990FE}"/>
               </a:ext>
             </a:extLst>
           </p:cNvPr>
@@ -8484,7 +8484,7 @@
           <p:cNvPr id="12" name="s7-takeaway">
             <a:extLst xmlns:a="http://schemas.openxmlformats.org/drawingml/2006/main">
               <a:ext uri="{FF2B5EF4-FFF2-40B4-BE49-F238E27FC236}">
-                <a16:creationId xmlns:a16="http://schemas.microsoft.com/office/drawing/2014/main" id="{7E973A92-D089-4235-8252-E355357EAB0E}"/>
+                <a16:creationId xmlns:a16="http://schemas.microsoft.com/office/drawing/2014/main" id="{0C7A8633-5CC2-49B7-80F7-DE7DCCEDC2D2}"/>
               </a:ext>
             </a:extLst>
           </p:cNvPr>
@@ -8532,7 +8532,7 @@
                 <a:ea typeface="PingFang SC"/>
                 <a:cs typeface="PingFang SC"/>
               </a:rPr>
-              <a:t>以电商上新为例，商品名称、尺寸、材质、价格和库存来自业务系统</a:t>
+              <a:t>业务数据先锁定，AIGC 再生成可审核内容</a:t>
             </a:r>
           </a:p>
         </p:txBody>
@@ -8540,7 +8540,7 @@
     </p:spTree>
     <p:extLst>
       <p:ext uri="{BB962C8B-B14F-4D97-AF65-F5344CB8AC3E}">
-        <p14:creationId xmlns:p14="http://schemas.microsoft.com/office/powerpoint/2010/main" val="80797981"/>
+        <p14:creationId xmlns:p14="http://schemas.microsoft.com/office/powerpoint/2010/main" val="1947138118"/>
       </p:ext>
     </p:extLst>
   </p:cSld>
@@ -8571,7 +8571,7 @@
           <p:cNvPr id="1" name="s8-rule">
             <a:extLst xmlns:a="http://schemas.openxmlformats.org/drawingml/2006/main">
               <a:ext uri="{FF2B5EF4-FFF2-40B4-BE49-F238E27FC236}">
-                <a16:creationId xmlns:a16="http://schemas.microsoft.com/office/drawing/2014/main" id="{CCE71049-21B3-4EC5-AE88-A06EC35D4C98}"/>
+                <a16:creationId xmlns:a16="http://schemas.microsoft.com/office/drawing/2014/main" id="{D1F7A0D8-E368-4A1F-8D83-8513053C4705}"/>
               </a:ext>
             </a:extLst>
           </p:cNvPr>
@@ -8604,7 +8604,7 @@
           <p:cNvPr id="2" name="s8-eyebrow">
             <a:extLst xmlns:a="http://schemas.openxmlformats.org/drawingml/2006/main">
               <a:ext uri="{FF2B5EF4-FFF2-40B4-BE49-F238E27FC236}">
-                <a16:creationId xmlns:a16="http://schemas.microsoft.com/office/drawing/2014/main" id="{B3DD7F91-3754-41EF-A6D5-0C5EB58F6D1B}"/>
+                <a16:creationId xmlns:a16="http://schemas.microsoft.com/office/drawing/2014/main" id="{3B5995ED-F7EB-4D3A-8A2C-7A7B9CEBCACC}"/>
               </a:ext>
             </a:extLst>
           </p:cNvPr>
@@ -8662,7 +8662,7 @@
           <p:cNvPr id="3" name="s8-title">
             <a:extLst xmlns:a="http://schemas.openxmlformats.org/drawingml/2006/main">
               <a:ext uri="{FF2B5EF4-FFF2-40B4-BE49-F238E27FC236}">
-                <a16:creationId xmlns:a16="http://schemas.microsoft.com/office/drawing/2014/main" id="{8B237892-A48E-4EC4-9AD2-AFF863DD8840}"/>
+                <a16:creationId xmlns:a16="http://schemas.microsoft.com/office/drawing/2014/main" id="{19A4CBB6-4184-4F1A-AF7F-8FC74D3E4997}"/>
               </a:ext>
             </a:extLst>
           </p:cNvPr>
@@ -8710,7 +8710,7 @@
                 <a:ea typeface="PingFang SC"/>
                 <a:cs typeface="PingFang SC"/>
               </a:rPr>
-              <a:t>从“帮我写活动方案”到可验收任务必须经过边界验证</a:t>
+              <a:t>可验收任务必须补齐输入、约束与成功标准</a:t>
             </a:r>
           </a:p>
         </p:txBody>
@@ -8720,7 +8720,7 @@
           <p:cNvPr id="4" name="s8-footer">
             <a:extLst xmlns:a="http://schemas.openxmlformats.org/drawingml/2006/main">
               <a:ext uri="{FF2B5EF4-FFF2-40B4-BE49-F238E27FC236}">
-                <a16:creationId xmlns:a16="http://schemas.microsoft.com/office/drawing/2014/main" id="{16773D35-F686-48D3-A144-ABEB04954F66}"/>
+                <a16:creationId xmlns:a16="http://schemas.microsoft.com/office/drawing/2014/main" id="{4FE99EB5-313B-4406-A508-10B261D7CE4A}"/>
               </a:ext>
             </a:extLst>
           </p:cNvPr>
@@ -8751,7 +8751,7 @@
           <p:cNvPr id="5" name="s8-identity">
             <a:extLst xmlns:a="http://schemas.openxmlformats.org/drawingml/2006/main">
               <a:ext uri="{FF2B5EF4-FFF2-40B4-BE49-F238E27FC236}">
-                <a16:creationId xmlns:a16="http://schemas.microsoft.com/office/drawing/2014/main" id="{77B19D0D-2A92-4AEC-9178-6CC31AAE8E3D}"/>
+                <a16:creationId xmlns:a16="http://schemas.microsoft.com/office/drawing/2014/main" id="{4B340ACC-31F1-4C2B-A5B1-7E845D7AE322}"/>
               </a:ext>
             </a:extLst>
           </p:cNvPr>
@@ -8809,7 +8809,7 @@
           <p:cNvPr id="6" name="case-title">
             <a:extLst xmlns:a="http://schemas.openxmlformats.org/drawingml/2006/main">
               <a:ext uri="{FF2B5EF4-FFF2-40B4-BE49-F238E27FC236}">
-                <a16:creationId xmlns:a16="http://schemas.microsoft.com/office/drawing/2014/main" id="{22461F6D-9488-4AA3-AC9A-B41C447C3BC0}"/>
+                <a16:creationId xmlns:a16="http://schemas.microsoft.com/office/drawing/2014/main" id="{3A1EF7DE-F489-419A-9E60-022D4E300837}"/>
               </a:ext>
             </a:extLst>
           </p:cNvPr>
@@ -8873,23 +8873,23 @@
           <p:cNvPr id="7" name="case-row-0">
             <a:extLst xmlns:a="http://schemas.openxmlformats.org/drawingml/2006/main">
               <a:ext uri="{FF2B5EF4-FFF2-40B4-BE49-F238E27FC236}">
-                <a16:creationId xmlns:a16="http://schemas.microsoft.com/office/drawing/2014/main" id="{0C1C9610-BD8D-4F28-9773-6EF60DF537B7}"/>
-              </a:ext>
-            </a:extLst>
-          </p:cNvPr>
-          <p:cNvSpPr>
-            <a:spLocks xmlns:a="http://schemas.openxmlformats.org/drawingml/2006/main" noGrp="1"/>
-          </p:cNvSpPr>
-          <p:nvPr/>
-        </p:nvSpPr>
-        <p:spPr>
-          <a:xfrm xmlns:a="http://schemas.openxmlformats.org/drawingml/2006/main">
-            <a:off x="4286250" y="2228850"/>
-            <a:ext cx="6534150" cy="1238250"/>
+                <a16:creationId xmlns:a16="http://schemas.microsoft.com/office/drawing/2014/main" id="{826D93E1-66CA-4CAC-AF4F-CBF784373A85}"/>
+              </a:ext>
+            </a:extLst>
+          </p:cNvPr>
+          <p:cNvSpPr>
+            <a:spLocks xmlns:a="http://schemas.openxmlformats.org/drawingml/2006/main" noGrp="1"/>
+          </p:cNvSpPr>
+          <p:nvPr/>
+        </p:nvSpPr>
+        <p:spPr>
+          <a:xfrm xmlns:a="http://schemas.openxmlformats.org/drawingml/2006/main">
+            <a:off x="4286250" y="2038350"/>
+            <a:ext cx="6534150" cy="514350"/>
           </a:xfrm>
           <a:prstGeom xmlns:a="http://schemas.openxmlformats.org/drawingml/2006/main" prst="roundRect">
             <a:avLst>
-              <a:gd name="adj" fmla="val 10000"/>
+              <a:gd name="adj" fmla="val 24074"/>
             </a:avLst>
           </a:prstGeom>
           <a:solidFill xmlns:a="http://schemas.openxmlformats.org/drawingml/2006/main">
@@ -8904,7 +8904,7 @@
         </p:spPr>
         <p:txBody>
           <a:bodyPr xmlns:a="http://schemas.openxmlformats.org/drawingml/2006/main" lIns="152400" tIns="133350" rIns="152400" bIns="133350" anchor="ctr">
-            <a:normAutofit fontScale="93636"/>
+            <a:normAutofit fontScale="72956"/>
           </a:bodyPr>
           <a:lstStyle xmlns:a="http://schemas.openxmlformats.org/drawingml/2006/main"/>
           <a:p xmlns:a="http://schemas.openxmlformats.org/drawingml/2006/main">
@@ -8927,7 +8927,7 @@
                 <a:ea typeface="PingFang SC"/>
                 <a:cs typeface="PingFang SC"/>
               </a:rPr>
-              <a:t>场景｜模糊请求只有一个动作，没有输入和成功标准。改写后的任务可以是：面向 30 名新员工，依据提供的培训目标、场地和预算表，生成半天活动议程；输出时间、环节、负责人…</a:t>
+              <a:t>场景｜模糊请求只有一个动作，没有输入和成功标准</a:t>
             </a:r>
           </a:p>
         </p:txBody>
@@ -8937,23 +8937,215 @@
           <p:cNvPr id="8" name="case-row-1">
             <a:extLst xmlns:a="http://schemas.openxmlformats.org/drawingml/2006/main">
               <a:ext uri="{FF2B5EF4-FFF2-40B4-BE49-F238E27FC236}">
-                <a16:creationId xmlns:a16="http://schemas.microsoft.com/office/drawing/2014/main" id="{B2C7EA38-4F6A-4842-ABE3-DA5AE4428B40}"/>
-              </a:ext>
-            </a:extLst>
-          </p:cNvPr>
-          <p:cNvSpPr>
-            <a:spLocks xmlns:a="http://schemas.openxmlformats.org/drawingml/2006/main" noGrp="1"/>
-          </p:cNvSpPr>
-          <p:nvPr/>
-        </p:nvSpPr>
-        <p:spPr>
-          <a:xfrm xmlns:a="http://schemas.openxmlformats.org/drawingml/2006/main">
-            <a:off x="4286250" y="3714750"/>
-            <a:ext cx="6534150" cy="1238250"/>
+                <a16:creationId xmlns:a16="http://schemas.microsoft.com/office/drawing/2014/main" id="{01C9C55B-C83A-4D52-B10B-F073F8AE53DD}"/>
+              </a:ext>
+            </a:extLst>
+          </p:cNvPr>
+          <p:cNvSpPr>
+            <a:spLocks xmlns:a="http://schemas.openxmlformats.org/drawingml/2006/main" noGrp="1"/>
+          </p:cNvSpPr>
+          <p:nvPr/>
+        </p:nvSpPr>
+        <p:spPr>
+          <a:xfrm xmlns:a="http://schemas.openxmlformats.org/drawingml/2006/main">
+            <a:off x="4286250" y="2667000"/>
+            <a:ext cx="6534150" cy="514350"/>
           </a:xfrm>
           <a:prstGeom xmlns:a="http://schemas.openxmlformats.org/drawingml/2006/main" prst="roundRect">
             <a:avLst>
-              <a:gd name="adj" fmla="val 10000"/>
+              <a:gd name="adj" fmla="val 24074"/>
+            </a:avLst>
+          </a:prstGeom>
+          <a:solidFill xmlns:a="http://schemas.openxmlformats.org/drawingml/2006/main">
+            <a:srgbClr val="FFFFFF"/>
+          </a:solidFill>
+          <a:ln xmlns:a="http://schemas.openxmlformats.org/drawingml/2006/main" w="9525">
+            <a:solidFill>
+              <a:srgbClr val="D8E0E8"/>
+            </a:solidFill>
+            <a:prstDash val="solid"/>
+          </a:ln>
+        </p:spPr>
+        <p:txBody>
+          <a:bodyPr xmlns:a="http://schemas.openxmlformats.org/drawingml/2006/main" lIns="152400" tIns="133350" rIns="152400" bIns="133350" anchor="ctr">
+            <a:normAutofit fontScale="65679"/>
+          </a:bodyPr>
+          <a:lstStyle xmlns:a="http://schemas.openxmlformats.org/drawingml/2006/main"/>
+          <a:p xmlns:a="http://schemas.openxmlformats.org/drawingml/2006/main">
+            <a:pPr algn="l">
+              <a:defRPr sz="1575" b="0">
+                <a:solidFill>
+                  <a:srgbClr val="10233F"/>
+                </a:solidFill>
+                <a:latin typeface="PingFang SC"/>
+                <a:ea typeface="PingFang SC"/>
+                <a:cs typeface="PingFang SC"/>
+              </a:defRPr>
+            </a:pPr>
+            <a:r>
+              <a:rPr sz="1575" b="0">
+                <a:solidFill>
+                  <a:srgbClr val="10233F"/>
+                </a:solidFill>
+                <a:latin typeface="PingFang SC"/>
+                <a:ea typeface="PingFang SC"/>
+                <a:cs typeface="PingFang SC"/>
+              </a:rPr>
+              <a:t>机制｜改写后的任务可以是：面向 30 名新员工，依据提供的培训目标、场地和预算表，生成半天活动议程</a:t>
+            </a:r>
+          </a:p>
+        </p:txBody>
+      </p:sp>
+      <p:sp>
+        <p:nvSpPr>
+          <p:cNvPr id="9" name="case-row-2">
+            <a:extLst xmlns:a="http://schemas.openxmlformats.org/drawingml/2006/main">
+              <a:ext uri="{FF2B5EF4-FFF2-40B4-BE49-F238E27FC236}">
+                <a16:creationId xmlns:a16="http://schemas.microsoft.com/office/drawing/2014/main" id="{6A1028FB-1F2C-453E-849E-446217B8A74D}"/>
+              </a:ext>
+            </a:extLst>
+          </p:cNvPr>
+          <p:cNvSpPr>
+            <a:spLocks xmlns:a="http://schemas.openxmlformats.org/drawingml/2006/main" noGrp="1"/>
+          </p:cNvSpPr>
+          <p:nvPr/>
+        </p:nvSpPr>
+        <p:spPr>
+          <a:xfrm xmlns:a="http://schemas.openxmlformats.org/drawingml/2006/main">
+            <a:off x="4286250" y="3295650"/>
+            <a:ext cx="6534150" cy="514350"/>
+          </a:xfrm>
+          <a:prstGeom xmlns:a="http://schemas.openxmlformats.org/drawingml/2006/main" prst="roundRect">
+            <a:avLst>
+              <a:gd name="adj" fmla="val 24074"/>
+            </a:avLst>
+          </a:prstGeom>
+          <a:solidFill xmlns:a="http://schemas.openxmlformats.org/drawingml/2006/main">
+            <a:srgbClr val="FFFFFF"/>
+          </a:solidFill>
+          <a:ln xmlns:a="http://schemas.openxmlformats.org/drawingml/2006/main" w="9525">
+            <a:solidFill>
+              <a:srgbClr val="D8E0E8"/>
+            </a:solidFill>
+            <a:prstDash val="solid"/>
+          </a:ln>
+        </p:spPr>
+        <p:txBody>
+          <a:bodyPr xmlns:a="http://schemas.openxmlformats.org/drawingml/2006/main" lIns="152400" tIns="133350" rIns="152400" bIns="133350" anchor="ctr">
+            <a:normAutofit fontScale="72956"/>
+          </a:bodyPr>
+          <a:lstStyle xmlns:a="http://schemas.openxmlformats.org/drawingml/2006/main"/>
+          <a:p xmlns:a="http://schemas.openxmlformats.org/drawingml/2006/main">
+            <a:pPr algn="l">
+              <a:defRPr sz="1575" b="0">
+                <a:solidFill>
+                  <a:srgbClr val="10233F"/>
+                </a:solidFill>
+                <a:latin typeface="PingFang SC"/>
+                <a:ea typeface="PingFang SC"/>
+                <a:cs typeface="PingFang SC"/>
+              </a:defRPr>
+            </a:pPr>
+            <a:r>
+              <a:rPr sz="1575" b="0">
+                <a:solidFill>
+                  <a:srgbClr val="10233F"/>
+                </a:solidFill>
+                <a:latin typeface="PingFang SC"/>
+                <a:ea typeface="PingFang SC"/>
+                <a:cs typeface="PingFang SC"/>
+              </a:rPr>
+              <a:t>边界｜输出时间、环节、负责人、物料和风险五列</a:t>
+            </a:r>
+          </a:p>
+        </p:txBody>
+      </p:sp>
+      <p:sp>
+        <p:nvSpPr>
+          <p:cNvPr id="10" name="case-row-3">
+            <a:extLst xmlns:a="http://schemas.openxmlformats.org/drawingml/2006/main">
+              <a:ext uri="{FF2B5EF4-FFF2-40B4-BE49-F238E27FC236}">
+                <a16:creationId xmlns:a16="http://schemas.microsoft.com/office/drawing/2014/main" id="{75BDA859-5C8D-4E66-A20D-5818B9147C25}"/>
+              </a:ext>
+            </a:extLst>
+          </p:cNvPr>
+          <p:cNvSpPr>
+            <a:spLocks xmlns:a="http://schemas.openxmlformats.org/drawingml/2006/main" noGrp="1"/>
+          </p:cNvSpPr>
+          <p:nvPr/>
+        </p:nvSpPr>
+        <p:spPr>
+          <a:xfrm xmlns:a="http://schemas.openxmlformats.org/drawingml/2006/main">
+            <a:off x="4286250" y="3924300"/>
+            <a:ext cx="6534150" cy="514350"/>
+          </a:xfrm>
+          <a:prstGeom xmlns:a="http://schemas.openxmlformats.org/drawingml/2006/main" prst="roundRect">
+            <a:avLst>
+              <a:gd name="adj" fmla="val 24074"/>
+            </a:avLst>
+          </a:prstGeom>
+          <a:solidFill xmlns:a="http://schemas.openxmlformats.org/drawingml/2006/main">
+            <a:srgbClr val="FFFFFF"/>
+          </a:solidFill>
+          <a:ln xmlns:a="http://schemas.openxmlformats.org/drawingml/2006/main" w="9525">
+            <a:solidFill>
+              <a:srgbClr val="D8E0E8"/>
+            </a:solidFill>
+            <a:prstDash val="solid"/>
+          </a:ln>
+        </p:spPr>
+        <p:txBody>
+          <a:bodyPr xmlns:a="http://schemas.openxmlformats.org/drawingml/2006/main" lIns="152400" tIns="133350" rIns="152400" bIns="133350" anchor="ctr">
+            <a:normAutofit fontScale="72956"/>
+          </a:bodyPr>
+          <a:lstStyle xmlns:a="http://schemas.openxmlformats.org/drawingml/2006/main"/>
+          <a:p xmlns:a="http://schemas.openxmlformats.org/drawingml/2006/main">
+            <a:pPr algn="l">
+              <a:defRPr sz="1575" b="0">
+                <a:solidFill>
+                  <a:srgbClr val="10233F"/>
+                </a:solidFill>
+                <a:latin typeface="PingFang SC"/>
+                <a:ea typeface="PingFang SC"/>
+                <a:cs typeface="PingFang SC"/>
+              </a:defRPr>
+            </a:pPr>
+            <a:r>
+              <a:rPr sz="1575" b="0">
+                <a:solidFill>
+                  <a:srgbClr val="10233F"/>
+                </a:solidFill>
+                <a:latin typeface="PingFang SC"/>
+                <a:ea typeface="PingFang SC"/>
+                <a:cs typeface="PingFang SC"/>
+              </a:rPr>
+              <a:t>机制｜不得虚构讲师和价格</a:t>
+            </a:r>
+          </a:p>
+        </p:txBody>
+      </p:sp>
+      <p:sp>
+        <p:nvSpPr>
+          <p:cNvPr id="11" name="case-row-4">
+            <a:extLst xmlns:a="http://schemas.openxmlformats.org/drawingml/2006/main">
+              <a:ext uri="{FF2B5EF4-FFF2-40B4-BE49-F238E27FC236}">
+                <a16:creationId xmlns:a16="http://schemas.microsoft.com/office/drawing/2014/main" id="{4A485EDA-74D0-4FB1-9A3E-253628FB992D}"/>
+              </a:ext>
+            </a:extLst>
+          </p:cNvPr>
+          <p:cNvSpPr>
+            <a:spLocks xmlns:a="http://schemas.openxmlformats.org/drawingml/2006/main" noGrp="1"/>
+          </p:cNvSpPr>
+          <p:nvPr/>
+        </p:nvSpPr>
+        <p:spPr>
+          <a:xfrm xmlns:a="http://schemas.openxmlformats.org/drawingml/2006/main">
+            <a:off x="4286250" y="4552950"/>
+            <a:ext cx="6534150" cy="514350"/>
+          </a:xfrm>
+          <a:prstGeom xmlns:a="http://schemas.openxmlformats.org/drawingml/2006/main" prst="roundRect">
+            <a:avLst>
+              <a:gd name="adj" fmla="val 24074"/>
             </a:avLst>
           </a:prstGeom>
           <a:solidFill xmlns:a="http://schemas.openxmlformats.org/drawingml/2006/main">
@@ -8961,14 +9153,14 @@
           </a:solidFill>
           <a:ln xmlns:a="http://schemas.openxmlformats.org/drawingml/2006/main" w="9525">
             <a:solidFill>
-              <a:srgbClr val="D6A33A"/>
+              <a:srgbClr val="8A5A00"/>
             </a:solidFill>
             <a:prstDash val="solid"/>
           </a:ln>
         </p:spPr>
         <p:txBody>
           <a:bodyPr xmlns:a="http://schemas.openxmlformats.org/drawingml/2006/main" lIns="152400" tIns="133350" rIns="152400" bIns="133350" anchor="ctr">
-            <a:normAutofit fontScale="100000"/>
+            <a:normAutofit fontScale="72956"/>
           </a:bodyPr>
           <a:lstStyle xmlns:a="http://schemas.openxmlformats.org/drawingml/2006/main"/>
           <a:p xmlns:a="http://schemas.openxmlformats.org/drawingml/2006/main">
@@ -8991,17 +9183,17 @@
                 <a:ea typeface="PingFang SC"/>
                 <a:cs typeface="PingFang SC"/>
               </a:rPr>
-              <a:t>机制｜模型先根据可信输入生成两个候选，负责人选择方向后再改写。程序检查时间是否冲突、预算字段是否齐全，人再确认安全、可执行性与对外表述。提示词在这里是流程入口，不是交付终点</a:t>
-            </a:r>
-          </a:p>
-        </p:txBody>
-      </p:sp>
-      <p:sp>
-        <p:nvSpPr>
-          <p:cNvPr id="9" name="s8-takeaway-rule">
-            <a:extLst xmlns:a="http://schemas.openxmlformats.org/drawingml/2006/main">
-              <a:ext uri="{FF2B5EF4-FFF2-40B4-BE49-F238E27FC236}">
-                <a16:creationId xmlns:a16="http://schemas.microsoft.com/office/drawing/2014/main" id="{D5DB1F8A-CDAA-4B93-876A-98DF2654F881}"/>
+              <a:t>边界｜最后列出仍需人工补充的字段</a:t>
+            </a:r>
+          </a:p>
+        </p:txBody>
+      </p:sp>
+      <p:sp>
+        <p:nvSpPr>
+          <p:cNvPr id="12" name="s8-takeaway-rule">
+            <a:extLst xmlns:a="http://schemas.openxmlformats.org/drawingml/2006/main">
+              <a:ext uri="{FF2B5EF4-FFF2-40B4-BE49-F238E27FC236}">
+                <a16:creationId xmlns:a16="http://schemas.microsoft.com/office/drawing/2014/main" id="{FE22C3BB-46D4-489B-AA2B-40DE3C9E16AD}"/>
               </a:ext>
             </a:extLst>
           </p:cNvPr>
@@ -9031,10 +9223,10 @@
       </p:sp>
       <p:sp>
         <p:nvSpPr>
-          <p:cNvPr id="10" name="s8-takeaway">
-            <a:extLst xmlns:a="http://schemas.openxmlformats.org/drawingml/2006/main">
-              <a:ext uri="{FF2B5EF4-FFF2-40B4-BE49-F238E27FC236}">
-                <a16:creationId xmlns:a16="http://schemas.microsoft.com/office/drawing/2014/main" id="{267002E4-8345-40EE-8F9B-9101F088B8D4}"/>
+          <p:cNvPr id="13" name="s8-takeaway">
+            <a:extLst xmlns:a="http://schemas.openxmlformats.org/drawingml/2006/main">
+              <a:ext uri="{FF2B5EF4-FFF2-40B4-BE49-F238E27FC236}">
+                <a16:creationId xmlns:a16="http://schemas.microsoft.com/office/drawing/2014/main" id="{85757144-CE00-44F3-8A01-FA9EA56F4F75}"/>
               </a:ext>
             </a:extLst>
           </p:cNvPr>
@@ -9082,7 +9274,7 @@
                 <a:ea typeface="PingFang SC"/>
                 <a:cs typeface="PingFang SC"/>
               </a:rPr>
-              <a:t>从“帮我写活动方案”到可验收任务必须经过边界验证</a:t>
+              <a:t>可验收任务必须补齐输入、约束与成功标准</a:t>
             </a:r>
           </a:p>
         </p:txBody>
@@ -9090,7 +9282,7 @@
     </p:spTree>
     <p:extLst>
       <p:ext uri="{BB962C8B-B14F-4D97-AF65-F5344CB8AC3E}">
-        <p14:creationId xmlns:p14="http://schemas.microsoft.com/office/powerpoint/2010/main" val="234824513"/>
+        <p14:creationId xmlns:p14="http://schemas.microsoft.com/office/powerpoint/2010/main" val="2037981951"/>
       </p:ext>
     </p:extLst>
   </p:cSld>
@@ -9121,7 +9313,7 @@
           <p:cNvPr id="1" name="s9-rule">
             <a:extLst xmlns:a="http://schemas.openxmlformats.org/drawingml/2006/main">
               <a:ext uri="{FF2B5EF4-FFF2-40B4-BE49-F238E27FC236}">
-                <a16:creationId xmlns:a16="http://schemas.microsoft.com/office/drawing/2014/main" id="{591FD20E-5129-4A97-A7D8-1639B40884D1}"/>
+                <a16:creationId xmlns:a16="http://schemas.microsoft.com/office/drawing/2014/main" id="{3DC9E2CE-3BCE-4BB2-A85F-36C64AE98FF5}"/>
               </a:ext>
             </a:extLst>
           </p:cNvPr>
@@ -9154,7 +9346,7 @@
           <p:cNvPr id="2" name="s9-eyebrow">
             <a:extLst xmlns:a="http://schemas.openxmlformats.org/drawingml/2006/main">
               <a:ext uri="{FF2B5EF4-FFF2-40B4-BE49-F238E27FC236}">
-                <a16:creationId xmlns:a16="http://schemas.microsoft.com/office/drawing/2014/main" id="{FAAD68A1-CB7D-46E8-AA4B-723844E71DED}"/>
+                <a16:creationId xmlns:a16="http://schemas.microsoft.com/office/drawing/2014/main" id="{5EDBC3EB-9E26-48BD-B07D-D667E803EEAD}"/>
               </a:ext>
             </a:extLst>
           </p:cNvPr>
@@ -9212,7 +9404,7 @@
           <p:cNvPr id="3" name="s9-title">
             <a:extLst xmlns:a="http://schemas.openxmlformats.org/drawingml/2006/main">
               <a:ext uri="{FF2B5EF4-FFF2-40B4-BE49-F238E27FC236}">
-                <a16:creationId xmlns:a16="http://schemas.microsoft.com/office/drawing/2014/main" id="{1FF52AE2-F5AA-4556-A6AB-3EB058047AC2}"/>
+                <a16:creationId xmlns:a16="http://schemas.microsoft.com/office/drawing/2014/main" id="{802A9B83-6F49-4990-8CCB-EB375B66E963}"/>
               </a:ext>
             </a:extLst>
           </p:cNvPr>
@@ -9260,7 +9452,7 @@
                 <a:ea typeface="PingFang SC"/>
                 <a:cs typeface="PingFang SC"/>
               </a:rPr>
-              <a:t>商品短视频的多模态流水线必须经过边界验证</a:t>
+              <a:t>多模态流水线要逐镜核对商品与连续性</a:t>
             </a:r>
           </a:p>
         </p:txBody>
@@ -9270,7 +9462,7 @@
           <p:cNvPr id="4" name="s9-footer">
             <a:extLst xmlns:a="http://schemas.openxmlformats.org/drawingml/2006/main">
               <a:ext uri="{FF2B5EF4-FFF2-40B4-BE49-F238E27FC236}">
-                <a16:creationId xmlns:a16="http://schemas.microsoft.com/office/drawing/2014/main" id="{12C6A888-25EB-49C3-B833-495721B5900F}"/>
+                <a16:creationId xmlns:a16="http://schemas.microsoft.com/office/drawing/2014/main" id="{0E71DD24-CB77-48B6-B8C2-91FA27F6B3F3}"/>
               </a:ext>
             </a:extLst>
           </p:cNvPr>
@@ -9301,7 +9493,7 @@
           <p:cNvPr id="5" name="s9-identity">
             <a:extLst xmlns:a="http://schemas.openxmlformats.org/drawingml/2006/main">
               <a:ext uri="{FF2B5EF4-FFF2-40B4-BE49-F238E27FC236}">
-                <a16:creationId xmlns:a16="http://schemas.microsoft.com/office/drawing/2014/main" id="{34456E66-D9B1-4138-A26E-4ADEE5607FB7}"/>
+                <a16:creationId xmlns:a16="http://schemas.microsoft.com/office/drawing/2014/main" id="{C3BD1C48-5321-4138-A85A-E2FE52D31801}"/>
               </a:ext>
             </a:extLst>
           </p:cNvPr>
@@ -9359,7 +9551,7 @@
           <p:cNvPr id="6" name="case-title">
             <a:extLst xmlns:a="http://schemas.openxmlformats.org/drawingml/2006/main">
               <a:ext uri="{FF2B5EF4-FFF2-40B4-BE49-F238E27FC236}">
-                <a16:creationId xmlns:a16="http://schemas.microsoft.com/office/drawing/2014/main" id="{52BE5218-2080-4D25-8822-BE65A661BCA2}"/>
+                <a16:creationId xmlns:a16="http://schemas.microsoft.com/office/drawing/2014/main" id="{59FBB0F1-C826-405E-9427-09AA9074BDDF}"/>
               </a:ext>
             </a:extLst>
           </p:cNvPr>
@@ -9423,23 +9615,23 @@
           <p:cNvPr id="7" name="case-row-0">
             <a:extLst xmlns:a="http://schemas.openxmlformats.org/drawingml/2006/main">
               <a:ext uri="{FF2B5EF4-FFF2-40B4-BE49-F238E27FC236}">
-                <a16:creationId xmlns:a16="http://schemas.microsoft.com/office/drawing/2014/main" id="{ED33CD06-8D6E-495B-87A1-D0BC5A102B3A}"/>
-              </a:ext>
-            </a:extLst>
-          </p:cNvPr>
-          <p:cNvSpPr>
-            <a:spLocks xmlns:a="http://schemas.openxmlformats.org/drawingml/2006/main" noGrp="1"/>
-          </p:cNvSpPr>
-          <p:nvPr/>
-        </p:nvSpPr>
-        <p:spPr>
-          <a:xfrm xmlns:a="http://schemas.openxmlformats.org/drawingml/2006/main">
-            <a:off x="4286250" y="2228850"/>
-            <a:ext cx="6534150" cy="1238250"/>
+                <a16:creationId xmlns:a16="http://schemas.microsoft.com/office/drawing/2014/main" id="{54644EF9-381B-4235-9B82-715BCE438CE1}"/>
+              </a:ext>
+            </a:extLst>
+          </p:cNvPr>
+          <p:cNvSpPr>
+            <a:spLocks xmlns:a="http://schemas.openxmlformats.org/drawingml/2006/main" noGrp="1"/>
+          </p:cNvSpPr>
+          <p:nvPr/>
+        </p:nvSpPr>
+        <p:spPr>
+          <a:xfrm xmlns:a="http://schemas.openxmlformats.org/drawingml/2006/main">
+            <a:off x="4286250" y="2038350"/>
+            <a:ext cx="6534150" cy="514350"/>
           </a:xfrm>
           <a:prstGeom xmlns:a="http://schemas.openxmlformats.org/drawingml/2006/main" prst="roundRect">
             <a:avLst>
-              <a:gd name="adj" fmla="val 10000"/>
+              <a:gd name="adj" fmla="val 24074"/>
             </a:avLst>
           </a:prstGeom>
           <a:solidFill xmlns:a="http://schemas.openxmlformats.org/drawingml/2006/main">
@@ -9454,7 +9646,7 @@
         </p:spPr>
         <p:txBody>
           <a:bodyPr xmlns:a="http://schemas.openxmlformats.org/drawingml/2006/main" lIns="152400" tIns="133350" rIns="152400" bIns="133350" anchor="ctr">
-            <a:normAutofit fontScale="100000"/>
+            <a:normAutofit fontScale="72956"/>
           </a:bodyPr>
           <a:lstStyle xmlns:a="http://schemas.openxmlformats.org/drawingml/2006/main"/>
           <a:p xmlns:a="http://schemas.openxmlformats.org/drawingml/2006/main">
@@ -9477,7 +9669,7 @@
                 <a:ea typeface="PingFang SC"/>
                 <a:cs typeface="PingFang SC"/>
               </a:rPr>
-              <a:t>场景｜团队先锁定真实商品图和参数，生成三套分镜草案；选定一套后制作关键帧，再生成短视频候选。编辑者逐镜检查商品外观、文字、手部动作和镜头连续性…</a:t>
+              <a:t>方法｜团队先锁定真实商品图和参数，生成三套分镜草案</a:t>
             </a:r>
           </a:p>
         </p:txBody>
@@ -9487,23 +9679,151 @@
           <p:cNvPr id="8" name="case-row-1">
             <a:extLst xmlns:a="http://schemas.openxmlformats.org/drawingml/2006/main">
               <a:ext uri="{FF2B5EF4-FFF2-40B4-BE49-F238E27FC236}">
-                <a16:creationId xmlns:a16="http://schemas.microsoft.com/office/drawing/2014/main" id="{ACB0B1C9-2E8E-4E8F-B323-B8BC4E4CDFB0}"/>
-              </a:ext>
-            </a:extLst>
-          </p:cNvPr>
-          <p:cNvSpPr>
-            <a:spLocks xmlns:a="http://schemas.openxmlformats.org/drawingml/2006/main" noGrp="1"/>
-          </p:cNvSpPr>
-          <p:nvPr/>
-        </p:nvSpPr>
-        <p:spPr>
-          <a:xfrm xmlns:a="http://schemas.openxmlformats.org/drawingml/2006/main">
-            <a:off x="4286250" y="3714750"/>
-            <a:ext cx="6534150" cy="1238250"/>
+                <a16:creationId xmlns:a16="http://schemas.microsoft.com/office/drawing/2014/main" id="{EE23408D-BA00-4C57-8F54-02AEF17C4878}"/>
+              </a:ext>
+            </a:extLst>
+          </p:cNvPr>
+          <p:cNvSpPr>
+            <a:spLocks xmlns:a="http://schemas.openxmlformats.org/drawingml/2006/main" noGrp="1"/>
+          </p:cNvSpPr>
+          <p:nvPr/>
+        </p:nvSpPr>
+        <p:spPr>
+          <a:xfrm xmlns:a="http://schemas.openxmlformats.org/drawingml/2006/main">
+            <a:off x="4286250" y="2667000"/>
+            <a:ext cx="6534150" cy="514350"/>
           </a:xfrm>
           <a:prstGeom xmlns:a="http://schemas.openxmlformats.org/drawingml/2006/main" prst="roundRect">
             <a:avLst>
-              <a:gd name="adj" fmla="val 10000"/>
+              <a:gd name="adj" fmla="val 24074"/>
+            </a:avLst>
+          </a:prstGeom>
+          <a:solidFill xmlns:a="http://schemas.openxmlformats.org/drawingml/2006/main">
+            <a:srgbClr val="FFFFFF"/>
+          </a:solidFill>
+          <a:ln xmlns:a="http://schemas.openxmlformats.org/drawingml/2006/main" w="9525">
+            <a:solidFill>
+              <a:srgbClr val="D8E0E8"/>
+            </a:solidFill>
+            <a:prstDash val="solid"/>
+          </a:ln>
+        </p:spPr>
+        <p:txBody>
+          <a:bodyPr xmlns:a="http://schemas.openxmlformats.org/drawingml/2006/main" lIns="152400" tIns="133350" rIns="152400" bIns="133350" anchor="ctr">
+            <a:normAutofit fontScale="72956"/>
+          </a:bodyPr>
+          <a:lstStyle xmlns:a="http://schemas.openxmlformats.org/drawingml/2006/main"/>
+          <a:p xmlns:a="http://schemas.openxmlformats.org/drawingml/2006/main">
+            <a:pPr algn="l">
+              <a:defRPr sz="1575" b="0">
+                <a:solidFill>
+                  <a:srgbClr val="10233F"/>
+                </a:solidFill>
+                <a:latin typeface="PingFang SC"/>
+                <a:ea typeface="PingFang SC"/>
+                <a:cs typeface="PingFang SC"/>
+              </a:defRPr>
+            </a:pPr>
+            <a:r>
+              <a:rPr sz="1575" b="0">
+                <a:solidFill>
+                  <a:srgbClr val="10233F"/>
+                </a:solidFill>
+                <a:latin typeface="PingFang SC"/>
+                <a:ea typeface="PingFang SC"/>
+                <a:cs typeface="PingFang SC"/>
+              </a:rPr>
+              <a:t>方法｜选定一套后制作关键帧，再生成短视频候选</a:t>
+            </a:r>
+          </a:p>
+        </p:txBody>
+      </p:sp>
+      <p:sp>
+        <p:nvSpPr>
+          <p:cNvPr id="9" name="case-row-2">
+            <a:extLst xmlns:a="http://schemas.openxmlformats.org/drawingml/2006/main">
+              <a:ext uri="{FF2B5EF4-FFF2-40B4-BE49-F238E27FC236}">
+                <a16:creationId xmlns:a16="http://schemas.microsoft.com/office/drawing/2014/main" id="{55112D03-7EB5-4C43-BDA3-F47269C7E678}"/>
+              </a:ext>
+            </a:extLst>
+          </p:cNvPr>
+          <p:cNvSpPr>
+            <a:spLocks xmlns:a="http://schemas.openxmlformats.org/drawingml/2006/main" noGrp="1"/>
+          </p:cNvSpPr>
+          <p:nvPr/>
+        </p:nvSpPr>
+        <p:spPr>
+          <a:xfrm xmlns:a="http://schemas.openxmlformats.org/drawingml/2006/main">
+            <a:off x="4286250" y="3295650"/>
+            <a:ext cx="6534150" cy="514350"/>
+          </a:xfrm>
+          <a:prstGeom xmlns:a="http://schemas.openxmlformats.org/drawingml/2006/main" prst="roundRect">
+            <a:avLst>
+              <a:gd name="adj" fmla="val 24074"/>
+            </a:avLst>
+          </a:prstGeom>
+          <a:solidFill xmlns:a="http://schemas.openxmlformats.org/drawingml/2006/main">
+            <a:srgbClr val="FFFFFF"/>
+          </a:solidFill>
+          <a:ln xmlns:a="http://schemas.openxmlformats.org/drawingml/2006/main" w="9525">
+            <a:solidFill>
+              <a:srgbClr val="D8E0E8"/>
+            </a:solidFill>
+            <a:prstDash val="solid"/>
+          </a:ln>
+        </p:spPr>
+        <p:txBody>
+          <a:bodyPr xmlns:a="http://schemas.openxmlformats.org/drawingml/2006/main" lIns="152400" tIns="133350" rIns="152400" bIns="133350" anchor="ctr">
+            <a:normAutofit fontScale="68393"/>
+          </a:bodyPr>
+          <a:lstStyle xmlns:a="http://schemas.openxmlformats.org/drawingml/2006/main"/>
+          <a:p xmlns:a="http://schemas.openxmlformats.org/drawingml/2006/main">
+            <a:pPr algn="l">
+              <a:defRPr sz="1575" b="0">
+                <a:solidFill>
+                  <a:srgbClr val="10233F"/>
+                </a:solidFill>
+                <a:latin typeface="PingFang SC"/>
+                <a:ea typeface="PingFang SC"/>
+                <a:cs typeface="PingFang SC"/>
+              </a:defRPr>
+            </a:pPr>
+            <a:r>
+              <a:rPr sz="1575" b="0">
+                <a:solidFill>
+                  <a:srgbClr val="10233F"/>
+                </a:solidFill>
+                <a:latin typeface="PingFang SC"/>
+                <a:ea typeface="PingFang SC"/>
+                <a:cs typeface="PingFang SC"/>
+              </a:rPr>
+              <a:t>机制｜编辑者逐镜检查商品外观、文字、手部动作和镜头连续性，并用已授权音乐与配音替换临时素材</a:t>
+            </a:r>
+          </a:p>
+        </p:txBody>
+      </p:sp>
+      <p:sp>
+        <p:nvSpPr>
+          <p:cNvPr id="10" name="case-row-3">
+            <a:extLst xmlns:a="http://schemas.openxmlformats.org/drawingml/2006/main">
+              <a:ext uri="{FF2B5EF4-FFF2-40B4-BE49-F238E27FC236}">
+                <a16:creationId xmlns:a16="http://schemas.microsoft.com/office/drawing/2014/main" id="{6AFF0F7E-8DAF-43DB-AC8E-EC56EDFB8720}"/>
+              </a:ext>
+            </a:extLst>
+          </p:cNvPr>
+          <p:cNvSpPr>
+            <a:spLocks xmlns:a="http://schemas.openxmlformats.org/drawingml/2006/main" noGrp="1"/>
+          </p:cNvSpPr>
+          <p:nvPr/>
+        </p:nvSpPr>
+        <p:spPr>
+          <a:xfrm xmlns:a="http://schemas.openxmlformats.org/drawingml/2006/main">
+            <a:off x="4286250" y="3924300"/>
+            <a:ext cx="6534150" cy="514350"/>
+          </a:xfrm>
+          <a:prstGeom xmlns:a="http://schemas.openxmlformats.org/drawingml/2006/main" prst="roundRect">
+            <a:avLst>
+              <a:gd name="adj" fmla="val 24074"/>
             </a:avLst>
           </a:prstGeom>
           <a:solidFill xmlns:a="http://schemas.openxmlformats.org/drawingml/2006/main">
@@ -9511,14 +9831,14 @@
           </a:solidFill>
           <a:ln xmlns:a="http://schemas.openxmlformats.org/drawingml/2006/main" w="9525">
             <a:solidFill>
-              <a:srgbClr val="D6A33A"/>
+              <a:srgbClr val="8A5A00"/>
             </a:solidFill>
             <a:prstDash val="solid"/>
           </a:ln>
         </p:spPr>
         <p:txBody>
           <a:bodyPr xmlns:a="http://schemas.openxmlformats.org/drawingml/2006/main" lIns="152400" tIns="133350" rIns="152400" bIns="133350" anchor="ctr">
-            <a:normAutofit fontScale="100000"/>
+            <a:normAutofit fontScale="66940"/>
           </a:bodyPr>
           <a:lstStyle xmlns:a="http://schemas.openxmlformats.org/drawingml/2006/main"/>
           <a:p xmlns:a="http://schemas.openxmlformats.org/drawingml/2006/main">
@@ -9541,17 +9861,17 @@
                 <a:ea typeface="PingFang SC"/>
                 <a:cs typeface="PingFang SC"/>
               </a:rPr>
-              <a:t>验证｜验收“商品短视频的多模态流水线”时，要同时记录适用场景、证据来源、失败条件与人工责任</a:t>
-            </a:r>
-          </a:p>
-        </p:txBody>
-      </p:sp>
-      <p:sp>
-        <p:nvSpPr>
-          <p:cNvPr id="9" name="s9-takeaway-rule">
-            <a:extLst xmlns:a="http://schemas.openxmlformats.org/drawingml/2006/main">
-              <a:ext uri="{FF2B5EF4-FFF2-40B4-BE49-F238E27FC236}">
-                <a16:creationId xmlns:a16="http://schemas.microsoft.com/office/drawing/2014/main" id="{DCE56270-1E11-419C-A112-F3E654BF1A83}"/>
+              <a:t>方法｜发布前由业务负责人核对价格和功效，由品牌负责人核对视觉，由素材管理员保存来源与授权记录</a:t>
+            </a:r>
+          </a:p>
+        </p:txBody>
+      </p:sp>
+      <p:sp>
+        <p:nvSpPr>
+          <p:cNvPr id="11" name="s9-takeaway-rule">
+            <a:extLst xmlns:a="http://schemas.openxmlformats.org/drawingml/2006/main">
+              <a:ext uri="{FF2B5EF4-FFF2-40B4-BE49-F238E27FC236}">
+                <a16:creationId xmlns:a16="http://schemas.microsoft.com/office/drawing/2014/main" id="{767B6504-2FF1-4AE8-87FA-EC384D5FC659}"/>
               </a:ext>
             </a:extLst>
           </p:cNvPr>
@@ -9581,10 +9901,10 @@
       </p:sp>
       <p:sp>
         <p:nvSpPr>
-          <p:cNvPr id="10" name="s9-takeaway">
-            <a:extLst xmlns:a="http://schemas.openxmlformats.org/drawingml/2006/main">
-              <a:ext uri="{FF2B5EF4-FFF2-40B4-BE49-F238E27FC236}">
-                <a16:creationId xmlns:a16="http://schemas.microsoft.com/office/drawing/2014/main" id="{65528DF2-49B9-4B85-898A-829659D75000}"/>
+          <p:cNvPr id="12" name="s9-takeaway">
+            <a:extLst xmlns:a="http://schemas.openxmlformats.org/drawingml/2006/main">
+              <a:ext uri="{FF2B5EF4-FFF2-40B4-BE49-F238E27FC236}">
+                <a16:creationId xmlns:a16="http://schemas.microsoft.com/office/drawing/2014/main" id="{60478409-8444-4680-846C-7E8A1AFC9090}"/>
               </a:ext>
             </a:extLst>
           </p:cNvPr>
@@ -9632,7 +9952,7 @@
                 <a:ea typeface="PingFang SC"/>
                 <a:cs typeface="PingFang SC"/>
               </a:rPr>
-              <a:t>商品短视频的多模态流水线必须经过边界验证</a:t>
+              <a:t>多模态流水线要逐镜核对商品与连续性</a:t>
             </a:r>
           </a:p>
         </p:txBody>
@@ -9640,7 +9960,7 @@
     </p:spTree>
     <p:extLst>
       <p:ext uri="{BB962C8B-B14F-4D97-AF65-F5344CB8AC3E}">
-        <p14:creationId xmlns:p14="http://schemas.microsoft.com/office/powerpoint/2010/main" val="789569003"/>
+        <p14:creationId xmlns:p14="http://schemas.microsoft.com/office/powerpoint/2010/main" val="121657082"/>
       </p:ext>
     </p:extLst>
   </p:cSld>

--- a/docs/public/course-assets/course-pptx/ov-006.pptx
+++ b/docs/public/course-assets/course-pptx/ov-006.pptx
@@ -2,24 +2,24 @@
 <file path=ppt/presentation.xml><?xml version="1.0" encoding="utf-8"?>
 <p:presentation xmlns:p="http://schemas.openxmlformats.org/presentationml/2006/main">
   <p:sldMasterIdLst>
-    <p:sldMasterId xmlns:r="http://schemas.openxmlformats.org/officeDocument/2006/relationships" id="2147483648" r:id="R29079da66c014372"/>
+    <p:sldMasterId xmlns:r="http://schemas.openxmlformats.org/officeDocument/2006/relationships" id="2147483648" r:id="Rfc9902d40b134c4a"/>
   </p:sldMasterIdLst>
   <p:notesMasterIdLst>
-    <p:notesMasterId xmlns:r="http://schemas.openxmlformats.org/officeDocument/2006/relationships" r:id="R63b8406b45084e23"/>
+    <p:notesMasterId xmlns:r="http://schemas.openxmlformats.org/officeDocument/2006/relationships" r:id="R0a86142bafec41c7"/>
   </p:notesMasterIdLst>
   <p:sldIdLst>
-    <p:sldId xmlns:r="http://schemas.openxmlformats.org/officeDocument/2006/relationships" id="256" r:id="R51fa8dfab5d8474d"/>
-    <p:sldId xmlns:r="http://schemas.openxmlformats.org/officeDocument/2006/relationships" id="257" r:id="R6a2260d790dd456d"/>
-    <p:sldId xmlns:r="http://schemas.openxmlformats.org/officeDocument/2006/relationships" id="258" r:id="R40944b04f8114c48"/>
-    <p:sldId xmlns:r="http://schemas.openxmlformats.org/officeDocument/2006/relationships" id="259" r:id="Rf2fefe804d364acc"/>
-    <p:sldId xmlns:r="http://schemas.openxmlformats.org/officeDocument/2006/relationships" id="260" r:id="R0dce8dd88f5d4b29"/>
-    <p:sldId xmlns:r="http://schemas.openxmlformats.org/officeDocument/2006/relationships" id="261" r:id="R207490a44e4642aa"/>
-    <p:sldId xmlns:r="http://schemas.openxmlformats.org/officeDocument/2006/relationships" id="262" r:id="R43c28b121ffe44ad"/>
-    <p:sldId xmlns:r="http://schemas.openxmlformats.org/officeDocument/2006/relationships" id="263" r:id="R6006d823c7d84f02"/>
-    <p:sldId xmlns:r="http://schemas.openxmlformats.org/officeDocument/2006/relationships" id="264" r:id="R17edc8c8269a4800"/>
-    <p:sldId xmlns:r="http://schemas.openxmlformats.org/officeDocument/2006/relationships" id="265" r:id="Re6befdb2e8864bf2"/>
-    <p:sldId xmlns:r="http://schemas.openxmlformats.org/officeDocument/2006/relationships" id="266" r:id="Rf98f0366a9ff42e8"/>
-    <p:sldId xmlns:r="http://schemas.openxmlformats.org/officeDocument/2006/relationships" id="267" r:id="R1dc2f0e8a9584757"/>
+    <p:sldId xmlns:r="http://schemas.openxmlformats.org/officeDocument/2006/relationships" id="256" r:id="Rac6d219b66b74a5c"/>
+    <p:sldId xmlns:r="http://schemas.openxmlformats.org/officeDocument/2006/relationships" id="257" r:id="Rd3219647af4542cb"/>
+    <p:sldId xmlns:r="http://schemas.openxmlformats.org/officeDocument/2006/relationships" id="258" r:id="R146f05c8f9b646bd"/>
+    <p:sldId xmlns:r="http://schemas.openxmlformats.org/officeDocument/2006/relationships" id="259" r:id="Rb4e5ad8faf1041c1"/>
+    <p:sldId xmlns:r="http://schemas.openxmlformats.org/officeDocument/2006/relationships" id="260" r:id="Rd7395c5c165b4091"/>
+    <p:sldId xmlns:r="http://schemas.openxmlformats.org/officeDocument/2006/relationships" id="261" r:id="Re1ae7576dceb4651"/>
+    <p:sldId xmlns:r="http://schemas.openxmlformats.org/officeDocument/2006/relationships" id="262" r:id="R9fffa5a448d74ebb"/>
+    <p:sldId xmlns:r="http://schemas.openxmlformats.org/officeDocument/2006/relationships" id="263" r:id="R160892137e2d4672"/>
+    <p:sldId xmlns:r="http://schemas.openxmlformats.org/officeDocument/2006/relationships" id="264" r:id="Rf61f1cfdafc246cf"/>
+    <p:sldId xmlns:r="http://schemas.openxmlformats.org/officeDocument/2006/relationships" id="265" r:id="R82970a4d4a0940cd"/>
+    <p:sldId xmlns:r="http://schemas.openxmlformats.org/officeDocument/2006/relationships" id="266" r:id="R6fe08070dfa64489"/>
+    <p:sldId xmlns:r="http://schemas.openxmlformats.org/officeDocument/2006/relationships" id="267" r:id="Rd451a1fe782a4ae5"/>
   </p:sldIdLst>
   <p:sldSz cx="12192000" cy="6858000"/>
   <p:notesSz cx="6858000" cy="9144000"/>
@@ -1338,7 +1338,7 @@
   </p:cSld>
   <p:clrMap bg1="lt1" tx1="dk1" bg2="lt2" tx2="dk2" accent1="accent1" accent2="accent2" accent3="accent3" accent4="accent4" accent5="accent5" accent6="accent6" hlink="hlink" folHlink="folHlink"/>
   <p:sldLayoutIdLst>
-    <p:sldLayoutId xmlns:r="http://schemas.openxmlformats.org/officeDocument/2006/relationships" id="2147483649" r:id="R3a80a4e748134825"/>
+    <p:sldLayoutId xmlns:r="http://schemas.openxmlformats.org/officeDocument/2006/relationships" id="2147483649" r:id="R76413ec225c24731"/>
   </p:sldLayoutIdLst>
   <p:txStyles>
     <p:titleStyle>
@@ -1889,7 +1889,7 @@
           <p:cNvPr id="1" name="cover-rule">
             <a:extLst xmlns:a="http://schemas.openxmlformats.org/drawingml/2006/main">
               <a:ext uri="{FF2B5EF4-FFF2-40B4-BE49-F238E27FC236}">
-                <a16:creationId xmlns:a16="http://schemas.microsoft.com/office/drawing/2014/main" id="{6AAB79D9-3D39-4718-830D-A39F06C9F2DE}"/>
+                <a16:creationId xmlns:a16="http://schemas.microsoft.com/office/drawing/2014/main" id="{B0F8EF2F-4C75-41ED-A972-550930AD42D2}"/>
               </a:ext>
             </a:extLst>
           </p:cNvPr>
@@ -1922,7 +1922,7 @@
           <p:cNvPr id="2" name="cover-ring-1">
             <a:extLst xmlns:a="http://schemas.openxmlformats.org/drawingml/2006/main">
               <a:ext uri="{FF2B5EF4-FFF2-40B4-BE49-F238E27FC236}">
-                <a16:creationId xmlns:a16="http://schemas.microsoft.com/office/drawing/2014/main" id="{7D2AD22B-07F0-4507-99BF-2310837D7A4D}"/>
+                <a16:creationId xmlns:a16="http://schemas.microsoft.com/office/drawing/2014/main" id="{5FC620C7-4A95-4641-A94C-B99127DB6ECF}"/>
               </a:ext>
             </a:extLst>
           </p:cNvPr>
@@ -1953,7 +1953,7 @@
           <p:cNvPr id="3" name="cover-ring-2">
             <a:extLst xmlns:a="http://schemas.openxmlformats.org/drawingml/2006/main">
               <a:ext uri="{FF2B5EF4-FFF2-40B4-BE49-F238E27FC236}">
-                <a16:creationId xmlns:a16="http://schemas.microsoft.com/office/drawing/2014/main" id="{526981C6-F2E4-4067-B885-F5CCC90780F3}"/>
+                <a16:creationId xmlns:a16="http://schemas.microsoft.com/office/drawing/2014/main" id="{64ABEA77-970E-4023-89F4-113CEEC66555}"/>
               </a:ext>
             </a:extLst>
           </p:cNvPr>
@@ -1984,7 +1984,7 @@
           <p:cNvPr id="4" name="cover-core">
             <a:extLst xmlns:a="http://schemas.openxmlformats.org/drawingml/2006/main">
               <a:ext uri="{FF2B5EF4-FFF2-40B4-BE49-F238E27FC236}">
-                <a16:creationId xmlns:a16="http://schemas.microsoft.com/office/drawing/2014/main" id="{0A36E3CE-598A-4E09-823F-567B777B41B0}"/>
+                <a16:creationId xmlns:a16="http://schemas.microsoft.com/office/drawing/2014/main" id="{6A82A6BA-0DE7-4758-B49F-C214CBEBB718}"/>
               </a:ext>
             </a:extLst>
           </p:cNvPr>
@@ -2017,7 +2017,7 @@
           <p:cNvPr id="5" name="cover-line-1">
             <a:extLst xmlns:a="http://schemas.openxmlformats.org/drawingml/2006/main">
               <a:ext uri="{FF2B5EF4-FFF2-40B4-BE49-F238E27FC236}">
-                <a16:creationId xmlns:a16="http://schemas.microsoft.com/office/drawing/2014/main" id="{0EC09CA3-5502-437B-956E-274399AEB68B}"/>
+                <a16:creationId xmlns:a16="http://schemas.microsoft.com/office/drawing/2014/main" id="{95F8681C-86A7-4B3E-A0F8-2252D59B0215}"/>
               </a:ext>
             </a:extLst>
           </p:cNvPr>
@@ -2048,7 +2048,7 @@
           <p:cNvPr id="6" name="cover-line-2">
             <a:extLst xmlns:a="http://schemas.openxmlformats.org/drawingml/2006/main">
               <a:ext uri="{FF2B5EF4-FFF2-40B4-BE49-F238E27FC236}">
-                <a16:creationId xmlns:a16="http://schemas.microsoft.com/office/drawing/2014/main" id="{9CF6A607-6A65-4D87-A43B-DA0613EF8A71}"/>
+                <a16:creationId xmlns:a16="http://schemas.microsoft.com/office/drawing/2014/main" id="{18724328-E28D-4103-822A-79B5507BB90E}"/>
               </a:ext>
             </a:extLst>
           </p:cNvPr>
@@ -2079,7 +2079,7 @@
           <p:cNvPr id="7" name="cover-eyebrow">
             <a:extLst xmlns:a="http://schemas.openxmlformats.org/drawingml/2006/main">
               <a:ext uri="{FF2B5EF4-FFF2-40B4-BE49-F238E27FC236}">
-                <a16:creationId xmlns:a16="http://schemas.microsoft.com/office/drawing/2014/main" id="{413BBCA6-E2AF-40E2-A4C4-7327C1B7BCE6}"/>
+                <a16:creationId xmlns:a16="http://schemas.microsoft.com/office/drawing/2014/main" id="{1A892161-5DBC-449E-8C46-DFFD1B0F8539}"/>
               </a:ext>
             </a:extLst>
           </p:cNvPr>
@@ -2137,7 +2137,7 @@
           <p:cNvPr id="8" name="cover-title">
             <a:extLst xmlns:a="http://schemas.openxmlformats.org/drawingml/2006/main">
               <a:ext uri="{FF2B5EF4-FFF2-40B4-BE49-F238E27FC236}">
-                <a16:creationId xmlns:a16="http://schemas.microsoft.com/office/drawing/2014/main" id="{41A2A472-0660-4EFB-BA22-9A9221BE7548}"/>
+                <a16:creationId xmlns:a16="http://schemas.microsoft.com/office/drawing/2014/main" id="{CAEF08F6-B192-44EA-AC13-D43F31FE7B6A}"/>
               </a:ext>
             </a:extLst>
           </p:cNvPr>
@@ -2195,7 +2195,7 @@
           <p:cNvPr id="9" name="cover-subtitle">
             <a:extLst xmlns:a="http://schemas.openxmlformats.org/drawingml/2006/main">
               <a:ext uri="{FF2B5EF4-FFF2-40B4-BE49-F238E27FC236}">
-                <a16:creationId xmlns:a16="http://schemas.microsoft.com/office/drawing/2014/main" id="{11B82E30-9B9F-4D8D-90CF-28E734E81776}"/>
+                <a16:creationId xmlns:a16="http://schemas.microsoft.com/office/drawing/2014/main" id="{31709030-95D1-498C-91DF-1ECBE904A811}"/>
               </a:ext>
             </a:extLst>
           </p:cNvPr>
@@ -2257,7 +2257,7 @@
           <p:cNvPr id="10" name="cover-lead">
             <a:extLst xmlns:a="http://schemas.openxmlformats.org/drawingml/2006/main">
               <a:ext uri="{FF2B5EF4-FFF2-40B4-BE49-F238E27FC236}">
-                <a16:creationId xmlns:a16="http://schemas.microsoft.com/office/drawing/2014/main" id="{6FFFB3F0-2EF3-474B-AA7E-EC291E95918D}"/>
+                <a16:creationId xmlns:a16="http://schemas.microsoft.com/office/drawing/2014/main" id="{268C5508-2E16-494B-B652-936BCE1521C1}"/>
               </a:ext>
             </a:extLst>
           </p:cNvPr>
@@ -2315,7 +2315,7 @@
           <p:cNvPr id="11" name="cover-course">
             <a:extLst xmlns:a="http://schemas.openxmlformats.org/drawingml/2006/main">
               <a:ext uri="{FF2B5EF4-FFF2-40B4-BE49-F238E27FC236}">
-                <a16:creationId xmlns:a16="http://schemas.microsoft.com/office/drawing/2014/main" id="{7ED3BE9F-18F8-4A4E-BF8F-61139F65035D}"/>
+                <a16:creationId xmlns:a16="http://schemas.microsoft.com/office/drawing/2014/main" id="{8C2572C9-7900-4CD4-8532-FBD59775C073}"/>
               </a:ext>
             </a:extLst>
           </p:cNvPr>
@@ -2373,7 +2373,7 @@
           <p:cNvPr id="12" name="cover-id">
             <a:extLst xmlns:a="http://schemas.openxmlformats.org/drawingml/2006/main">
               <a:ext uri="{FF2B5EF4-FFF2-40B4-BE49-F238E27FC236}">
-                <a16:creationId xmlns:a16="http://schemas.microsoft.com/office/drawing/2014/main" id="{61DB883A-AEBF-49D4-BA6D-5895177B3538}"/>
+                <a16:creationId xmlns:a16="http://schemas.microsoft.com/office/drawing/2014/main" id="{F69D4BD8-E2B2-47E1-A7AF-1205B7632195}"/>
               </a:ext>
             </a:extLst>
           </p:cNvPr>
@@ -2429,7 +2429,7 @@
     </p:spTree>
     <p:extLst>
       <p:ext uri="{BB962C8B-B14F-4D97-AF65-F5344CB8AC3E}">
-        <p14:creationId xmlns:p14="http://schemas.microsoft.com/office/powerpoint/2010/main" val="1141428018"/>
+        <p14:creationId xmlns:p14="http://schemas.microsoft.com/office/powerpoint/2010/main" val="1250714799"/>
       </p:ext>
     </p:extLst>
   </p:cSld>
@@ -2460,7 +2460,7 @@
           <p:cNvPr id="1" name="s10-rule">
             <a:extLst xmlns:a="http://schemas.openxmlformats.org/drawingml/2006/main">
               <a:ext uri="{FF2B5EF4-FFF2-40B4-BE49-F238E27FC236}">
-                <a16:creationId xmlns:a16="http://schemas.microsoft.com/office/drawing/2014/main" id="{AEA69C68-B042-4677-B87E-E091338D5DA0}"/>
+                <a16:creationId xmlns:a16="http://schemas.microsoft.com/office/drawing/2014/main" id="{97854CDB-5CCC-44C3-9613-4D103A35AEB1}"/>
               </a:ext>
             </a:extLst>
           </p:cNvPr>
@@ -2493,7 +2493,7 @@
           <p:cNvPr id="2" name="s10-eyebrow">
             <a:extLst xmlns:a="http://schemas.openxmlformats.org/drawingml/2006/main">
               <a:ext uri="{FF2B5EF4-FFF2-40B4-BE49-F238E27FC236}">
-                <a16:creationId xmlns:a16="http://schemas.microsoft.com/office/drawing/2014/main" id="{70FC6210-58AB-4580-81D5-E757FD4BEF19}"/>
+                <a16:creationId xmlns:a16="http://schemas.microsoft.com/office/drawing/2014/main" id="{1DDBD0E0-D236-4927-B780-73ED47C9F0E5}"/>
               </a:ext>
             </a:extLst>
           </p:cNvPr>
@@ -2551,7 +2551,7 @@
           <p:cNvPr id="3" name="s10-title">
             <a:extLst xmlns:a="http://schemas.openxmlformats.org/drawingml/2006/main">
               <a:ext uri="{FF2B5EF4-FFF2-40B4-BE49-F238E27FC236}">
-                <a16:creationId xmlns:a16="http://schemas.microsoft.com/office/drawing/2014/main" id="{A5A9854F-3DDF-470C-A095-92DDC9C120C7}"/>
+                <a16:creationId xmlns:a16="http://schemas.microsoft.com/office/drawing/2014/main" id="{F5BAB4E1-BBD2-4929-8210-3494A4FBE4AA}"/>
               </a:ext>
             </a:extLst>
           </p:cNvPr>
@@ -2609,7 +2609,7 @@
           <p:cNvPr id="4" name="s10-footer">
             <a:extLst xmlns:a="http://schemas.openxmlformats.org/drawingml/2006/main">
               <a:ext uri="{FF2B5EF4-FFF2-40B4-BE49-F238E27FC236}">
-                <a16:creationId xmlns:a16="http://schemas.microsoft.com/office/drawing/2014/main" id="{BDB722E2-9565-4CEC-81A3-84C4DD61D991}"/>
+                <a16:creationId xmlns:a16="http://schemas.microsoft.com/office/drawing/2014/main" id="{A725976E-8142-4692-B78D-962A29B4B813}"/>
               </a:ext>
             </a:extLst>
           </p:cNvPr>
@@ -2640,7 +2640,7 @@
           <p:cNvPr id="5" name="s10-identity">
             <a:extLst xmlns:a="http://schemas.openxmlformats.org/drawingml/2006/main">
               <a:ext uri="{FF2B5EF4-FFF2-40B4-BE49-F238E27FC236}">
-                <a16:creationId xmlns:a16="http://schemas.microsoft.com/office/drawing/2014/main" id="{5363E6F0-787E-4CB0-B157-97950A762802}"/>
+                <a16:creationId xmlns:a16="http://schemas.microsoft.com/office/drawing/2014/main" id="{FF4C7F34-D838-4A73-8186-5892D8EEA942}"/>
               </a:ext>
             </a:extLst>
           </p:cNvPr>
@@ -2698,7 +2698,7 @@
           <p:cNvPr id="6" name="practice-circle-0">
             <a:extLst xmlns:a="http://schemas.openxmlformats.org/drawingml/2006/main">
               <a:ext uri="{FF2B5EF4-FFF2-40B4-BE49-F238E27FC236}">
-                <a16:creationId xmlns:a16="http://schemas.microsoft.com/office/drawing/2014/main" id="{F3E3EF4E-A370-43E6-884C-E4AA4BB3655F}"/>
+                <a16:creationId xmlns:a16="http://schemas.microsoft.com/office/drawing/2014/main" id="{B45BAD99-49D7-4666-8622-DF2450BE0DC3}"/>
               </a:ext>
             </a:extLst>
           </p:cNvPr>
@@ -2731,7 +2731,7 @@
           <p:cNvPr id="7" name="practice-number-0">
             <a:extLst xmlns:a="http://schemas.openxmlformats.org/drawingml/2006/main">
               <a:ext uri="{FF2B5EF4-FFF2-40B4-BE49-F238E27FC236}">
-                <a16:creationId xmlns:a16="http://schemas.microsoft.com/office/drawing/2014/main" id="{F8C35E9A-B940-46D3-90A2-92EC27E22ABB}"/>
+                <a16:creationId xmlns:a16="http://schemas.microsoft.com/office/drawing/2014/main" id="{302F03CC-2647-4F6C-B6D9-4614D05A6F7A}"/>
               </a:ext>
             </a:extLst>
           </p:cNvPr>
@@ -2789,7 +2789,7 @@
           <p:cNvPr id="8" name="practice-item-0">
             <a:extLst xmlns:a="http://schemas.openxmlformats.org/drawingml/2006/main">
               <a:ext uri="{FF2B5EF4-FFF2-40B4-BE49-F238E27FC236}">
-                <a16:creationId xmlns:a16="http://schemas.microsoft.com/office/drawing/2014/main" id="{07E111AA-FE07-43A0-9727-BBE0C25F179C}"/>
+                <a16:creationId xmlns:a16="http://schemas.microsoft.com/office/drawing/2014/main" id="{B81511B9-71FC-43BD-8678-7574C1BA7A04}"/>
               </a:ext>
             </a:extLst>
           </p:cNvPr>
@@ -2853,7 +2853,7 @@
           <p:cNvPr id="9" name="practice-connector-0">
             <a:extLst xmlns:a="http://schemas.openxmlformats.org/drawingml/2006/main">
               <a:ext uri="{FF2B5EF4-FFF2-40B4-BE49-F238E27FC236}">
-                <a16:creationId xmlns:a16="http://schemas.microsoft.com/office/drawing/2014/main" id="{3E845783-D4F9-427A-AEAE-209B1D089DE9}"/>
+                <a16:creationId xmlns:a16="http://schemas.microsoft.com/office/drawing/2014/main" id="{A52D5698-CF87-4709-9148-D021A005930B}"/>
               </a:ext>
             </a:extLst>
           </p:cNvPr>
@@ -2884,7 +2884,7 @@
           <p:cNvPr id="10" name="practice-circle-1">
             <a:extLst xmlns:a="http://schemas.openxmlformats.org/drawingml/2006/main">
               <a:ext uri="{FF2B5EF4-FFF2-40B4-BE49-F238E27FC236}">
-                <a16:creationId xmlns:a16="http://schemas.microsoft.com/office/drawing/2014/main" id="{481C98B1-AF88-4752-BCEA-AC510EFA27F5}"/>
+                <a16:creationId xmlns:a16="http://schemas.microsoft.com/office/drawing/2014/main" id="{4FC52457-7D0B-4819-AF67-154731DF64BB}"/>
               </a:ext>
             </a:extLst>
           </p:cNvPr>
@@ -2917,7 +2917,7 @@
           <p:cNvPr id="11" name="practice-number-1">
             <a:extLst xmlns:a="http://schemas.openxmlformats.org/drawingml/2006/main">
               <a:ext uri="{FF2B5EF4-FFF2-40B4-BE49-F238E27FC236}">
-                <a16:creationId xmlns:a16="http://schemas.microsoft.com/office/drawing/2014/main" id="{47186ECD-A4A2-4896-ADAE-144E75893023}"/>
+                <a16:creationId xmlns:a16="http://schemas.microsoft.com/office/drawing/2014/main" id="{183F44FD-8C04-4DAD-9840-BBC8AE4BBA6E}"/>
               </a:ext>
             </a:extLst>
           </p:cNvPr>
@@ -2975,7 +2975,7 @@
           <p:cNvPr id="12" name="practice-item-1">
             <a:extLst xmlns:a="http://schemas.openxmlformats.org/drawingml/2006/main">
               <a:ext uri="{FF2B5EF4-FFF2-40B4-BE49-F238E27FC236}">
-                <a16:creationId xmlns:a16="http://schemas.microsoft.com/office/drawing/2014/main" id="{266B2788-99DA-4603-BFEB-ABA91BC6FD17}"/>
+                <a16:creationId xmlns:a16="http://schemas.microsoft.com/office/drawing/2014/main" id="{A88ED311-6161-443D-B9C4-CC3DE52003A5}"/>
               </a:ext>
             </a:extLst>
           </p:cNvPr>
@@ -3039,7 +3039,7 @@
           <p:cNvPr id="13" name="practice-connector-1">
             <a:extLst xmlns:a="http://schemas.openxmlformats.org/drawingml/2006/main">
               <a:ext uri="{FF2B5EF4-FFF2-40B4-BE49-F238E27FC236}">
-                <a16:creationId xmlns:a16="http://schemas.microsoft.com/office/drawing/2014/main" id="{A3E92B00-12C6-4CFF-BBAC-1F9AB64A6E60}"/>
+                <a16:creationId xmlns:a16="http://schemas.microsoft.com/office/drawing/2014/main" id="{8FB5FB79-1438-499D-96D7-0B0F80A0DF86}"/>
               </a:ext>
             </a:extLst>
           </p:cNvPr>
@@ -3070,7 +3070,7 @@
           <p:cNvPr id="14" name="practice-circle-2">
             <a:extLst xmlns:a="http://schemas.openxmlformats.org/drawingml/2006/main">
               <a:ext uri="{FF2B5EF4-FFF2-40B4-BE49-F238E27FC236}">
-                <a16:creationId xmlns:a16="http://schemas.microsoft.com/office/drawing/2014/main" id="{C4F092AB-E2BE-417E-A54B-39273DB78FCF}"/>
+                <a16:creationId xmlns:a16="http://schemas.microsoft.com/office/drawing/2014/main" id="{64A7498D-83D4-4D3B-8F93-C5741514D706}"/>
               </a:ext>
             </a:extLst>
           </p:cNvPr>
@@ -3103,7 +3103,7 @@
           <p:cNvPr id="15" name="practice-number-2">
             <a:extLst xmlns:a="http://schemas.openxmlformats.org/drawingml/2006/main">
               <a:ext uri="{FF2B5EF4-FFF2-40B4-BE49-F238E27FC236}">
-                <a16:creationId xmlns:a16="http://schemas.microsoft.com/office/drawing/2014/main" id="{3B933F87-B2F1-47DD-AC20-1F765358CBC8}"/>
+                <a16:creationId xmlns:a16="http://schemas.microsoft.com/office/drawing/2014/main" id="{B818B60F-313C-4FB9-B831-A7CC10591D93}"/>
               </a:ext>
             </a:extLst>
           </p:cNvPr>
@@ -3161,7 +3161,7 @@
           <p:cNvPr id="16" name="practice-item-2">
             <a:extLst xmlns:a="http://schemas.openxmlformats.org/drawingml/2006/main">
               <a:ext uri="{FF2B5EF4-FFF2-40B4-BE49-F238E27FC236}">
-                <a16:creationId xmlns:a16="http://schemas.microsoft.com/office/drawing/2014/main" id="{C77F0916-9675-49CA-9E90-B5B7567B1292}"/>
+                <a16:creationId xmlns:a16="http://schemas.microsoft.com/office/drawing/2014/main" id="{69BE970B-64E4-4C52-BD54-228B9320950B}"/>
               </a:ext>
             </a:extLst>
           </p:cNvPr>
@@ -3223,7 +3223,7 @@
     </p:spTree>
     <p:extLst>
       <p:ext uri="{BB962C8B-B14F-4D97-AF65-F5344CB8AC3E}">
-        <p14:creationId xmlns:p14="http://schemas.microsoft.com/office/powerpoint/2010/main" val="1040185182"/>
+        <p14:creationId xmlns:p14="http://schemas.microsoft.com/office/powerpoint/2010/main" val="1864338397"/>
       </p:ext>
     </p:extLst>
   </p:cSld>
@@ -3254,7 +3254,7 @@
           <p:cNvPr id="1" name="s11-rule">
             <a:extLst xmlns:a="http://schemas.openxmlformats.org/drawingml/2006/main">
               <a:ext uri="{FF2B5EF4-FFF2-40B4-BE49-F238E27FC236}">
-                <a16:creationId xmlns:a16="http://schemas.microsoft.com/office/drawing/2014/main" id="{BD7ECF2E-D33A-4CC9-86E9-55FE99F95664}"/>
+                <a16:creationId xmlns:a16="http://schemas.microsoft.com/office/drawing/2014/main" id="{8B4CA27B-8CC7-4D8B-B725-509F20ACDF90}"/>
               </a:ext>
             </a:extLst>
           </p:cNvPr>
@@ -3287,7 +3287,7 @@
           <p:cNvPr id="2" name="s11-eyebrow">
             <a:extLst xmlns:a="http://schemas.openxmlformats.org/drawingml/2006/main">
               <a:ext uri="{FF2B5EF4-FFF2-40B4-BE49-F238E27FC236}">
-                <a16:creationId xmlns:a16="http://schemas.microsoft.com/office/drawing/2014/main" id="{D9FE60AB-DB53-47DC-B068-41C353A3019C}"/>
+                <a16:creationId xmlns:a16="http://schemas.microsoft.com/office/drawing/2014/main" id="{E39BB136-849E-44E5-B40A-9693407FDFDD}"/>
               </a:ext>
             </a:extLst>
           </p:cNvPr>
@@ -3345,7 +3345,7 @@
           <p:cNvPr id="3" name="s11-title">
             <a:extLst xmlns:a="http://schemas.openxmlformats.org/drawingml/2006/main">
               <a:ext uri="{FF2B5EF4-FFF2-40B4-BE49-F238E27FC236}">
-                <a16:creationId xmlns:a16="http://schemas.microsoft.com/office/drawing/2014/main" id="{D69CCD69-8474-4750-9144-E209ADAFF3AB}"/>
+                <a16:creationId xmlns:a16="http://schemas.microsoft.com/office/drawing/2014/main" id="{82B1E5EC-62F5-47EF-BE3E-400E8AFC87B0}"/>
               </a:ext>
             </a:extLst>
           </p:cNvPr>
@@ -3403,7 +3403,7 @@
           <p:cNvPr id="4" name="s11-footer">
             <a:extLst xmlns:a="http://schemas.openxmlformats.org/drawingml/2006/main">
               <a:ext uri="{FF2B5EF4-FFF2-40B4-BE49-F238E27FC236}">
-                <a16:creationId xmlns:a16="http://schemas.microsoft.com/office/drawing/2014/main" id="{570E0221-523A-4B83-9106-646A16460023}"/>
+                <a16:creationId xmlns:a16="http://schemas.microsoft.com/office/drawing/2014/main" id="{65327173-358A-4DED-8302-280A048C338E}"/>
               </a:ext>
             </a:extLst>
           </p:cNvPr>
@@ -3434,7 +3434,7 @@
           <p:cNvPr id="5" name="s11-identity">
             <a:extLst xmlns:a="http://schemas.openxmlformats.org/drawingml/2006/main">
               <a:ext uri="{FF2B5EF4-FFF2-40B4-BE49-F238E27FC236}">
-                <a16:creationId xmlns:a16="http://schemas.microsoft.com/office/drawing/2014/main" id="{910CD5DD-ABC5-4BF5-A013-C6E1883B572F}"/>
+                <a16:creationId xmlns:a16="http://schemas.microsoft.com/office/drawing/2014/main" id="{325D700F-9D8F-4DB0-9C25-44E9EDBD9AA1}"/>
               </a:ext>
             </a:extLst>
           </p:cNvPr>
@@ -3492,7 +3492,7 @@
           <p:cNvPr id="6" name="recap-circle-0">
             <a:extLst xmlns:a="http://schemas.openxmlformats.org/drawingml/2006/main">
               <a:ext uri="{FF2B5EF4-FFF2-40B4-BE49-F238E27FC236}">
-                <a16:creationId xmlns:a16="http://schemas.microsoft.com/office/drawing/2014/main" id="{5E995E83-88B5-4316-9EB8-2206271E9869}"/>
+                <a16:creationId xmlns:a16="http://schemas.microsoft.com/office/drawing/2014/main" id="{234B97D3-D708-4183-AB11-4A45B6132947}"/>
               </a:ext>
             </a:extLst>
           </p:cNvPr>
@@ -3525,7 +3525,7 @@
           <p:cNvPr id="7" name="recap-number-0">
             <a:extLst xmlns:a="http://schemas.openxmlformats.org/drawingml/2006/main">
               <a:ext uri="{FF2B5EF4-FFF2-40B4-BE49-F238E27FC236}">
-                <a16:creationId xmlns:a16="http://schemas.microsoft.com/office/drawing/2014/main" id="{8E494E91-2A68-41F6-99C5-B2DA9067A047}"/>
+                <a16:creationId xmlns:a16="http://schemas.microsoft.com/office/drawing/2014/main" id="{C08C48B4-2566-40A3-92CF-26BED2F430FB}"/>
               </a:ext>
             </a:extLst>
           </p:cNvPr>
@@ -3583,7 +3583,7 @@
           <p:cNvPr id="8" name="recap-item-0">
             <a:extLst xmlns:a="http://schemas.openxmlformats.org/drawingml/2006/main">
               <a:ext uri="{FF2B5EF4-FFF2-40B4-BE49-F238E27FC236}">
-                <a16:creationId xmlns:a16="http://schemas.microsoft.com/office/drawing/2014/main" id="{F44BD5D0-2744-4962-B8CC-9360D8F19B6A}"/>
+                <a16:creationId xmlns:a16="http://schemas.microsoft.com/office/drawing/2014/main" id="{69EDF937-D23B-482F-9C3C-4A1DD58C89F6}"/>
               </a:ext>
             </a:extLst>
           </p:cNvPr>
@@ -3647,7 +3647,7 @@
           <p:cNvPr id="9" name="recap-connector-0">
             <a:extLst xmlns:a="http://schemas.openxmlformats.org/drawingml/2006/main">
               <a:ext uri="{FF2B5EF4-FFF2-40B4-BE49-F238E27FC236}">
-                <a16:creationId xmlns:a16="http://schemas.microsoft.com/office/drawing/2014/main" id="{AEFCECEC-A99A-460B-8179-DF01C67E3DC5}"/>
+                <a16:creationId xmlns:a16="http://schemas.microsoft.com/office/drawing/2014/main" id="{CB8B8B84-D386-4454-9B05-DC3BE221D794}"/>
               </a:ext>
             </a:extLst>
           </p:cNvPr>
@@ -3678,7 +3678,7 @@
           <p:cNvPr id="10" name="recap-circle-1">
             <a:extLst xmlns:a="http://schemas.openxmlformats.org/drawingml/2006/main">
               <a:ext uri="{FF2B5EF4-FFF2-40B4-BE49-F238E27FC236}">
-                <a16:creationId xmlns:a16="http://schemas.microsoft.com/office/drawing/2014/main" id="{008F7B2C-3CEC-490F-A8D2-DC93A026EF13}"/>
+                <a16:creationId xmlns:a16="http://schemas.microsoft.com/office/drawing/2014/main" id="{FBC6C0BE-FC4F-4629-8941-197DD6F591E9}"/>
               </a:ext>
             </a:extLst>
           </p:cNvPr>
@@ -3711,7 +3711,7 @@
           <p:cNvPr id="11" name="recap-number-1">
             <a:extLst xmlns:a="http://schemas.openxmlformats.org/drawingml/2006/main">
               <a:ext uri="{FF2B5EF4-FFF2-40B4-BE49-F238E27FC236}">
-                <a16:creationId xmlns:a16="http://schemas.microsoft.com/office/drawing/2014/main" id="{87AF2467-3356-453D-8227-934861861D16}"/>
+                <a16:creationId xmlns:a16="http://schemas.microsoft.com/office/drawing/2014/main" id="{03B814FB-A261-45CA-85EC-74CDF2DE14DA}"/>
               </a:ext>
             </a:extLst>
           </p:cNvPr>
@@ -3769,7 +3769,7 @@
           <p:cNvPr id="12" name="recap-item-1">
             <a:extLst xmlns:a="http://schemas.openxmlformats.org/drawingml/2006/main">
               <a:ext uri="{FF2B5EF4-FFF2-40B4-BE49-F238E27FC236}">
-                <a16:creationId xmlns:a16="http://schemas.microsoft.com/office/drawing/2014/main" id="{EBEEEB6D-9244-484E-AE40-3A752A9987F2}"/>
+                <a16:creationId xmlns:a16="http://schemas.microsoft.com/office/drawing/2014/main" id="{3095212B-9384-42BA-AD20-493EF18B4411}"/>
               </a:ext>
             </a:extLst>
           </p:cNvPr>
@@ -3833,7 +3833,7 @@
           <p:cNvPr id="13" name="recap-connector-1">
             <a:extLst xmlns:a="http://schemas.openxmlformats.org/drawingml/2006/main">
               <a:ext uri="{FF2B5EF4-FFF2-40B4-BE49-F238E27FC236}">
-                <a16:creationId xmlns:a16="http://schemas.microsoft.com/office/drawing/2014/main" id="{2AA79071-8B2A-4DA9-BF60-FA7BEC0C6F5D}"/>
+                <a16:creationId xmlns:a16="http://schemas.microsoft.com/office/drawing/2014/main" id="{85C2A59D-1FE6-4484-B675-BBC2076DE142}"/>
               </a:ext>
             </a:extLst>
           </p:cNvPr>
@@ -3864,7 +3864,7 @@
           <p:cNvPr id="14" name="recap-circle-2">
             <a:extLst xmlns:a="http://schemas.openxmlformats.org/drawingml/2006/main">
               <a:ext uri="{FF2B5EF4-FFF2-40B4-BE49-F238E27FC236}">
-                <a16:creationId xmlns:a16="http://schemas.microsoft.com/office/drawing/2014/main" id="{16412A38-15D8-4B1C-8D13-9F1AD7F3A22C}"/>
+                <a16:creationId xmlns:a16="http://schemas.microsoft.com/office/drawing/2014/main" id="{10B6E5EC-778A-4EE7-B5AA-4D455595F880}"/>
               </a:ext>
             </a:extLst>
           </p:cNvPr>
@@ -3897,7 +3897,7 @@
           <p:cNvPr id="15" name="recap-number-2">
             <a:extLst xmlns:a="http://schemas.openxmlformats.org/drawingml/2006/main">
               <a:ext uri="{FF2B5EF4-FFF2-40B4-BE49-F238E27FC236}">
-                <a16:creationId xmlns:a16="http://schemas.microsoft.com/office/drawing/2014/main" id="{50B959D8-26BB-4D3B-BC03-F589C8758B59}"/>
+                <a16:creationId xmlns:a16="http://schemas.microsoft.com/office/drawing/2014/main" id="{DB9B2E0D-2E48-48D2-BF69-7B20F885FEB0}"/>
               </a:ext>
             </a:extLst>
           </p:cNvPr>
@@ -3955,7 +3955,7 @@
           <p:cNvPr id="16" name="recap-item-2">
             <a:extLst xmlns:a="http://schemas.openxmlformats.org/drawingml/2006/main">
               <a:ext uri="{FF2B5EF4-FFF2-40B4-BE49-F238E27FC236}">
-                <a16:creationId xmlns:a16="http://schemas.microsoft.com/office/drawing/2014/main" id="{95CF9D90-0ACC-4796-993D-4D5F34751DED}"/>
+                <a16:creationId xmlns:a16="http://schemas.microsoft.com/office/drawing/2014/main" id="{6E7B0104-45E5-4D26-A86F-4AB9848984FF}"/>
               </a:ext>
             </a:extLst>
           </p:cNvPr>
@@ -4017,7 +4017,7 @@
     </p:spTree>
     <p:extLst>
       <p:ext uri="{BB962C8B-B14F-4D97-AF65-F5344CB8AC3E}">
-        <p14:creationId xmlns:p14="http://schemas.microsoft.com/office/powerpoint/2010/main" val="1829884810"/>
+        <p14:creationId xmlns:p14="http://schemas.microsoft.com/office/powerpoint/2010/main" val="1786245430"/>
       </p:ext>
     </p:extLst>
   </p:cSld>
@@ -4048,7 +4048,7 @@
           <p:cNvPr id="1" name="s12-rule">
             <a:extLst xmlns:a="http://schemas.openxmlformats.org/drawingml/2006/main">
               <a:ext uri="{FF2B5EF4-FFF2-40B4-BE49-F238E27FC236}">
-                <a16:creationId xmlns:a16="http://schemas.microsoft.com/office/drawing/2014/main" id="{C2CAB489-B652-4626-9315-3A7627EBB041}"/>
+                <a16:creationId xmlns:a16="http://schemas.microsoft.com/office/drawing/2014/main" id="{D5869295-05D3-47E1-8621-D99E229E411F}"/>
               </a:ext>
             </a:extLst>
           </p:cNvPr>
@@ -4081,7 +4081,7 @@
           <p:cNvPr id="2" name="s12-eyebrow">
             <a:extLst xmlns:a="http://schemas.openxmlformats.org/drawingml/2006/main">
               <a:ext uri="{FF2B5EF4-FFF2-40B4-BE49-F238E27FC236}">
-                <a16:creationId xmlns:a16="http://schemas.microsoft.com/office/drawing/2014/main" id="{CF84200B-C21F-4A06-B546-94B89E003D3F}"/>
+                <a16:creationId xmlns:a16="http://schemas.microsoft.com/office/drawing/2014/main" id="{92939E1D-D8C4-4389-BA51-B2E37A781A75}"/>
               </a:ext>
             </a:extLst>
           </p:cNvPr>
@@ -4139,7 +4139,7 @@
           <p:cNvPr id="3" name="s12-title">
             <a:extLst xmlns:a="http://schemas.openxmlformats.org/drawingml/2006/main">
               <a:ext uri="{FF2B5EF4-FFF2-40B4-BE49-F238E27FC236}">
-                <a16:creationId xmlns:a16="http://schemas.microsoft.com/office/drawing/2014/main" id="{459B6389-622C-48A1-8463-30A014135DB5}"/>
+                <a16:creationId xmlns:a16="http://schemas.microsoft.com/office/drawing/2014/main" id="{535EC1A6-15D2-4B7F-A4C4-1812BBF4487F}"/>
               </a:ext>
             </a:extLst>
           </p:cNvPr>
@@ -4197,7 +4197,7 @@
           <p:cNvPr id="4" name="s12-footer">
             <a:extLst xmlns:a="http://schemas.openxmlformats.org/drawingml/2006/main">
               <a:ext uri="{FF2B5EF4-FFF2-40B4-BE49-F238E27FC236}">
-                <a16:creationId xmlns:a16="http://schemas.microsoft.com/office/drawing/2014/main" id="{C97EF660-A691-49D4-B92B-CA4B6FE6EE55}"/>
+                <a16:creationId xmlns:a16="http://schemas.microsoft.com/office/drawing/2014/main" id="{5E0B2110-DF7E-4107-A34B-D0AFB6F84AB1}"/>
               </a:ext>
             </a:extLst>
           </p:cNvPr>
@@ -4228,7 +4228,7 @@
           <p:cNvPr id="5" name="s12-identity">
             <a:extLst xmlns:a="http://schemas.openxmlformats.org/drawingml/2006/main">
               <a:ext uri="{FF2B5EF4-FFF2-40B4-BE49-F238E27FC236}">
-                <a16:creationId xmlns:a16="http://schemas.microsoft.com/office/drawing/2014/main" id="{66005D80-0574-4FB9-AB65-3F2F0BAC01BE}"/>
+                <a16:creationId xmlns:a16="http://schemas.microsoft.com/office/drawing/2014/main" id="{38BA7592-E6B4-4C54-84F8-4EF78C900C54}"/>
               </a:ext>
             </a:extLst>
           </p:cNvPr>
@@ -4286,7 +4286,7 @@
           <p:cNvPr id="6" name="source-0">
             <a:extLst xmlns:a="http://schemas.openxmlformats.org/drawingml/2006/main">
               <a:ext uri="{FF2B5EF4-FFF2-40B4-BE49-F238E27FC236}">
-                <a16:creationId xmlns:a16="http://schemas.microsoft.com/office/drawing/2014/main" id="{48F16C89-2A52-4A77-9506-8538512B11EE}"/>
+                <a16:creationId xmlns:a16="http://schemas.microsoft.com/office/drawing/2014/main" id="{9D607FC3-E5A1-4BC1-A438-700B0738DBF2}"/>
               </a:ext>
             </a:extLst>
           </p:cNvPr>
@@ -4350,7 +4350,7 @@
           <p:cNvPr id="7" name="source-1">
             <a:extLst xmlns:a="http://schemas.openxmlformats.org/drawingml/2006/main">
               <a:ext uri="{FF2B5EF4-FFF2-40B4-BE49-F238E27FC236}">
-                <a16:creationId xmlns:a16="http://schemas.microsoft.com/office/drawing/2014/main" id="{AF59F8FB-B44A-4466-9849-C0E4CFA3B363}"/>
+                <a16:creationId xmlns:a16="http://schemas.microsoft.com/office/drawing/2014/main" id="{CE69F3FF-9B17-4C9A-ACB9-594A0C6885C3}"/>
               </a:ext>
             </a:extLst>
           </p:cNvPr>
@@ -4414,7 +4414,7 @@
           <p:cNvPr id="8" name="s12-takeaway-rule">
             <a:extLst xmlns:a="http://schemas.openxmlformats.org/drawingml/2006/main">
               <a:ext uri="{FF2B5EF4-FFF2-40B4-BE49-F238E27FC236}">
-                <a16:creationId xmlns:a16="http://schemas.microsoft.com/office/drawing/2014/main" id="{D740DEDC-9491-4596-958C-7961046E79E5}"/>
+                <a16:creationId xmlns:a16="http://schemas.microsoft.com/office/drawing/2014/main" id="{78DA153B-C21E-46CB-8E10-52C60FAEC175}"/>
               </a:ext>
             </a:extLst>
           </p:cNvPr>
@@ -4447,7 +4447,7 @@
           <p:cNvPr id="9" name="s12-takeaway">
             <a:extLst xmlns:a="http://schemas.openxmlformats.org/drawingml/2006/main">
               <a:ext uri="{FF2B5EF4-FFF2-40B4-BE49-F238E27FC236}">
-                <a16:creationId xmlns:a16="http://schemas.microsoft.com/office/drawing/2014/main" id="{FA9516AC-331D-40EE-AE4E-6237617FE4F2}"/>
+                <a16:creationId xmlns:a16="http://schemas.microsoft.com/office/drawing/2014/main" id="{8FB7EED4-B66E-4B26-9FCE-E3A642277090}"/>
               </a:ext>
             </a:extLst>
           </p:cNvPr>
@@ -4472,7 +4472,7 @@
         </p:spPr>
         <p:txBody>
           <a:bodyPr xmlns:a="http://schemas.openxmlformats.org/drawingml/2006/main" lIns="0" tIns="0" rIns="0" bIns="0" anchor="ctr">
-            <a:normAutofit fontScale="100000"/>
+            <a:normAutofit fontScale="95911"/>
           </a:bodyPr>
           <a:lstStyle xmlns:a="http://schemas.openxmlformats.org/drawingml/2006/main"/>
           <a:p xmlns:a="http://schemas.openxmlformats.org/drawingml/2006/main">
@@ -4495,7 +4495,7 @@
                 <a:ea typeface="PingFang SC"/>
                 <a:cs typeface="PingFang SC"/>
               </a:rPr>
-              <a:t>公开幻灯片只使用课程原创文字与原生图形；完整论证、链接和事实边界请见本节讲义。</a:t>
+              <a:t>课程精编页用于讲授主线；播放器中的“原课件”模式保留团队 PowerPoint 精选页、真实图片和可播放视频。</a:t>
             </a:r>
           </a:p>
         </p:txBody>
@@ -4503,7 +4503,7 @@
     </p:spTree>
     <p:extLst>
       <p:ext uri="{BB962C8B-B14F-4D97-AF65-F5344CB8AC3E}">
-        <p14:creationId xmlns:p14="http://schemas.microsoft.com/office/powerpoint/2010/main" val="1689466507"/>
+        <p14:creationId xmlns:p14="http://schemas.microsoft.com/office/powerpoint/2010/main" val="1254144670"/>
       </p:ext>
     </p:extLst>
   </p:cSld>
@@ -4534,7 +4534,7 @@
           <p:cNvPr id="1" name="s2-rule">
             <a:extLst xmlns:a="http://schemas.openxmlformats.org/drawingml/2006/main">
               <a:ext uri="{FF2B5EF4-FFF2-40B4-BE49-F238E27FC236}">
-                <a16:creationId xmlns:a16="http://schemas.microsoft.com/office/drawing/2014/main" id="{266B336A-EDFE-4916-8290-2130FF5CAAF2}"/>
+                <a16:creationId xmlns:a16="http://schemas.microsoft.com/office/drawing/2014/main" id="{10945804-75B3-4F74-8796-E9D38952ABFC}"/>
               </a:ext>
             </a:extLst>
           </p:cNvPr>
@@ -4567,7 +4567,7 @@
           <p:cNvPr id="2" name="s2-eyebrow">
             <a:extLst xmlns:a="http://schemas.openxmlformats.org/drawingml/2006/main">
               <a:ext uri="{FF2B5EF4-FFF2-40B4-BE49-F238E27FC236}">
-                <a16:creationId xmlns:a16="http://schemas.microsoft.com/office/drawing/2014/main" id="{4551AF9E-2B8F-4AAE-B018-1C43E9B52C30}"/>
+                <a16:creationId xmlns:a16="http://schemas.microsoft.com/office/drawing/2014/main" id="{C5387D38-B7A7-4965-9C8D-9A3885A6790A}"/>
               </a:ext>
             </a:extLst>
           </p:cNvPr>
@@ -4625,7 +4625,7 @@
           <p:cNvPr id="3" name="s2-title">
             <a:extLst xmlns:a="http://schemas.openxmlformats.org/drawingml/2006/main">
               <a:ext uri="{FF2B5EF4-FFF2-40B4-BE49-F238E27FC236}">
-                <a16:creationId xmlns:a16="http://schemas.microsoft.com/office/drawing/2014/main" id="{EA75463C-FF7D-4844-AE0A-A6A50FE56239}"/>
+                <a16:creationId xmlns:a16="http://schemas.microsoft.com/office/drawing/2014/main" id="{4C52D210-6713-4885-BA92-DD32C114E537}"/>
               </a:ext>
             </a:extLst>
           </p:cNvPr>
@@ -4683,7 +4683,7 @@
           <p:cNvPr id="4" name="s2-footer">
             <a:extLst xmlns:a="http://schemas.openxmlformats.org/drawingml/2006/main">
               <a:ext uri="{FF2B5EF4-FFF2-40B4-BE49-F238E27FC236}">
-                <a16:creationId xmlns:a16="http://schemas.microsoft.com/office/drawing/2014/main" id="{6922DEFA-6457-48C0-8436-7F0C694FC32F}"/>
+                <a16:creationId xmlns:a16="http://schemas.microsoft.com/office/drawing/2014/main" id="{4648DB60-770A-4105-B99C-AD24D0D9AA45}"/>
               </a:ext>
             </a:extLst>
           </p:cNvPr>
@@ -4714,7 +4714,7 @@
           <p:cNvPr id="5" name="s2-identity">
             <a:extLst xmlns:a="http://schemas.openxmlformats.org/drawingml/2006/main">
               <a:ext uri="{FF2B5EF4-FFF2-40B4-BE49-F238E27FC236}">
-                <a16:creationId xmlns:a16="http://schemas.microsoft.com/office/drawing/2014/main" id="{E018E128-CF03-4E3D-9D05-150C03E32301}"/>
+                <a16:creationId xmlns:a16="http://schemas.microsoft.com/office/drawing/2014/main" id="{9623BA56-07E8-46AA-81BA-A7F1DCB065D5}"/>
               </a:ext>
             </a:extLst>
           </p:cNvPr>
@@ -4772,7 +4772,7 @@
           <p:cNvPr id="6" name="objective-1">
             <a:extLst xmlns:a="http://schemas.openxmlformats.org/drawingml/2006/main">
               <a:ext uri="{FF2B5EF4-FFF2-40B4-BE49-F238E27FC236}">
-                <a16:creationId xmlns:a16="http://schemas.microsoft.com/office/drawing/2014/main" id="{8E1B084A-AADB-417B-BF2B-69B9045C2C10}"/>
+                <a16:creationId xmlns:a16="http://schemas.microsoft.com/office/drawing/2014/main" id="{5EC4CFAD-3597-4F57-B470-C89F803BD025}"/>
               </a:ext>
             </a:extLst>
           </p:cNvPr>
@@ -4859,7 +4859,7 @@
           <p:cNvPr id="7" name="objective-2">
             <a:extLst xmlns:a="http://schemas.openxmlformats.org/drawingml/2006/main">
               <a:ext uri="{FF2B5EF4-FFF2-40B4-BE49-F238E27FC236}">
-                <a16:creationId xmlns:a16="http://schemas.microsoft.com/office/drawing/2014/main" id="{82FA9941-1A4D-4AA7-AD8A-C110AC6B27B4}"/>
+                <a16:creationId xmlns:a16="http://schemas.microsoft.com/office/drawing/2014/main" id="{D074F745-CF2D-41E0-A1BA-80A9730C8E53}"/>
               </a:ext>
             </a:extLst>
           </p:cNvPr>
@@ -4946,7 +4946,7 @@
           <p:cNvPr id="8" name="objective-3">
             <a:extLst xmlns:a="http://schemas.openxmlformats.org/drawingml/2006/main">
               <a:ext uri="{FF2B5EF4-FFF2-40B4-BE49-F238E27FC236}">
-                <a16:creationId xmlns:a16="http://schemas.microsoft.com/office/drawing/2014/main" id="{5F2946D6-0998-4691-92BF-2ADC053C4CAF}"/>
+                <a16:creationId xmlns:a16="http://schemas.microsoft.com/office/drawing/2014/main" id="{F4B237BE-321C-442D-9358-755FA5D2DD6C}"/>
               </a:ext>
             </a:extLst>
           </p:cNvPr>
@@ -5033,7 +5033,7 @@
           <p:cNvPr id="9" name="objective-4">
             <a:extLst xmlns:a="http://schemas.openxmlformats.org/drawingml/2006/main">
               <a:ext uri="{FF2B5EF4-FFF2-40B4-BE49-F238E27FC236}">
-                <a16:creationId xmlns:a16="http://schemas.microsoft.com/office/drawing/2014/main" id="{BDC7A676-8933-4D59-BE5B-315D7C56B247}"/>
+                <a16:creationId xmlns:a16="http://schemas.microsoft.com/office/drawing/2014/main" id="{A01B2081-3FFB-411B-BDFC-341730A57747}"/>
               </a:ext>
             </a:extLst>
           </p:cNvPr>
@@ -5118,7 +5118,7 @@
     </p:spTree>
     <p:extLst>
       <p:ext uri="{BB962C8B-B14F-4D97-AF65-F5344CB8AC3E}">
-        <p14:creationId xmlns:p14="http://schemas.microsoft.com/office/powerpoint/2010/main" val="1685985671"/>
+        <p14:creationId xmlns:p14="http://schemas.microsoft.com/office/powerpoint/2010/main" val="948190991"/>
       </p:ext>
     </p:extLst>
   </p:cSld>
@@ -5149,7 +5149,7 @@
           <p:cNvPr id="1" name="s3-rule">
             <a:extLst xmlns:a="http://schemas.openxmlformats.org/drawingml/2006/main">
               <a:ext uri="{FF2B5EF4-FFF2-40B4-BE49-F238E27FC236}">
-                <a16:creationId xmlns:a16="http://schemas.microsoft.com/office/drawing/2014/main" id="{962DB9AD-D30D-4613-8C28-BD2239B32679}"/>
+                <a16:creationId xmlns:a16="http://schemas.microsoft.com/office/drawing/2014/main" id="{A6CAA713-5BB5-4F5F-B444-C68BDDF8DC82}"/>
               </a:ext>
             </a:extLst>
           </p:cNvPr>
@@ -5182,7 +5182,7 @@
           <p:cNvPr id="2" name="s3-eyebrow">
             <a:extLst xmlns:a="http://schemas.openxmlformats.org/drawingml/2006/main">
               <a:ext uri="{FF2B5EF4-FFF2-40B4-BE49-F238E27FC236}">
-                <a16:creationId xmlns:a16="http://schemas.microsoft.com/office/drawing/2014/main" id="{E87D8259-132A-4629-B02D-36D53BC98C2E}"/>
+                <a16:creationId xmlns:a16="http://schemas.microsoft.com/office/drawing/2014/main" id="{84222EDB-5D3F-42F3-9227-8764532A3352}"/>
               </a:ext>
             </a:extLst>
           </p:cNvPr>
@@ -5240,7 +5240,7 @@
           <p:cNvPr id="3" name="s3-title">
             <a:extLst xmlns:a="http://schemas.openxmlformats.org/drawingml/2006/main">
               <a:ext uri="{FF2B5EF4-FFF2-40B4-BE49-F238E27FC236}">
-                <a16:creationId xmlns:a16="http://schemas.microsoft.com/office/drawing/2014/main" id="{E6FD7F82-DC52-45DC-B41B-F65EB5075A1B}"/>
+                <a16:creationId xmlns:a16="http://schemas.microsoft.com/office/drawing/2014/main" id="{B22583F0-6E6A-49EB-92A3-2ADAF340869C}"/>
               </a:ext>
             </a:extLst>
           </p:cNvPr>
@@ -5298,7 +5298,7 @@
           <p:cNvPr id="4" name="s3-footer">
             <a:extLst xmlns:a="http://schemas.openxmlformats.org/drawingml/2006/main">
               <a:ext uri="{FF2B5EF4-FFF2-40B4-BE49-F238E27FC236}">
-                <a16:creationId xmlns:a16="http://schemas.microsoft.com/office/drawing/2014/main" id="{51B26FF1-F5AA-45F1-9654-EE667722A5B3}"/>
+                <a16:creationId xmlns:a16="http://schemas.microsoft.com/office/drawing/2014/main" id="{A9173F7E-6AE7-4DF8-9845-1FC651ECB55A}"/>
               </a:ext>
             </a:extLst>
           </p:cNvPr>
@@ -5329,7 +5329,7 @@
           <p:cNvPr id="5" name="s3-identity">
             <a:extLst xmlns:a="http://schemas.openxmlformats.org/drawingml/2006/main">
               <a:ext uri="{FF2B5EF4-FFF2-40B4-BE49-F238E27FC236}">
-                <a16:creationId xmlns:a16="http://schemas.microsoft.com/office/drawing/2014/main" id="{0275AC34-9F0D-4FA8-99C5-66D2B423CAAC}"/>
+                <a16:creationId xmlns:a16="http://schemas.microsoft.com/office/drawing/2014/main" id="{0111FE54-B453-4AFE-8E3A-7FAEF40B381D}"/>
               </a:ext>
             </a:extLst>
           </p:cNvPr>
@@ -5387,7 +5387,7 @@
           <p:cNvPr id="6" name="core-no-0">
             <a:extLst xmlns:a="http://schemas.openxmlformats.org/drawingml/2006/main">
               <a:ext uri="{FF2B5EF4-FFF2-40B4-BE49-F238E27FC236}">
-                <a16:creationId xmlns:a16="http://schemas.microsoft.com/office/drawing/2014/main" id="{CA36B940-94A5-45A6-9574-8220FF242CEB}"/>
+                <a16:creationId xmlns:a16="http://schemas.microsoft.com/office/drawing/2014/main" id="{8B76CB83-E7A1-4A73-9DCB-112BE3A1CE55}"/>
               </a:ext>
             </a:extLst>
           </p:cNvPr>
@@ -5445,7 +5445,7 @@
           <p:cNvPr id="7" name="core-label-0">
             <a:extLst xmlns:a="http://schemas.openxmlformats.org/drawingml/2006/main">
               <a:ext uri="{FF2B5EF4-FFF2-40B4-BE49-F238E27FC236}">
-                <a16:creationId xmlns:a16="http://schemas.microsoft.com/office/drawing/2014/main" id="{D83C1030-33C5-4E77-BD02-540B6FC3506F}"/>
+                <a16:creationId xmlns:a16="http://schemas.microsoft.com/office/drawing/2014/main" id="{889ACE34-4A32-4292-9DEC-84BFE08D5958}"/>
               </a:ext>
             </a:extLst>
           </p:cNvPr>
@@ -5503,7 +5503,7 @@
           <p:cNvPr id="8" name="core-body-0">
             <a:extLst xmlns:a="http://schemas.openxmlformats.org/drawingml/2006/main">
               <a:ext uri="{FF2B5EF4-FFF2-40B4-BE49-F238E27FC236}">
-                <a16:creationId xmlns:a16="http://schemas.microsoft.com/office/drawing/2014/main" id="{A7A2776F-C19F-4FA5-BC8F-4199A6E599AF}"/>
+                <a16:creationId xmlns:a16="http://schemas.microsoft.com/office/drawing/2014/main" id="{7B0E82E8-4A36-411A-AFB4-B7037F8BE651}"/>
               </a:ext>
             </a:extLst>
           </p:cNvPr>
@@ -5567,7 +5567,7 @@
           <p:cNvPr id="9" name="core-no-1">
             <a:extLst xmlns:a="http://schemas.openxmlformats.org/drawingml/2006/main">
               <a:ext uri="{FF2B5EF4-FFF2-40B4-BE49-F238E27FC236}">
-                <a16:creationId xmlns:a16="http://schemas.microsoft.com/office/drawing/2014/main" id="{4BD2F869-980E-46CB-BE8A-69E46E804B40}"/>
+                <a16:creationId xmlns:a16="http://schemas.microsoft.com/office/drawing/2014/main" id="{CD599278-4E1D-47DC-8AC8-AD75722FF160}"/>
               </a:ext>
             </a:extLst>
           </p:cNvPr>
@@ -5625,7 +5625,7 @@
           <p:cNvPr id="10" name="core-body-1">
             <a:extLst xmlns:a="http://schemas.openxmlformats.org/drawingml/2006/main">
               <a:ext uri="{FF2B5EF4-FFF2-40B4-BE49-F238E27FC236}">
-                <a16:creationId xmlns:a16="http://schemas.microsoft.com/office/drawing/2014/main" id="{DAF6B3A5-1501-4606-8289-F8D1E159F3B6}"/>
+                <a16:creationId xmlns:a16="http://schemas.microsoft.com/office/drawing/2014/main" id="{D2F073FA-FEA8-4742-BE44-A9B9C398FB06}"/>
               </a:ext>
             </a:extLst>
           </p:cNvPr>
@@ -5689,7 +5689,7 @@
           <p:cNvPr id="11" name="core-no-2">
             <a:extLst xmlns:a="http://schemas.openxmlformats.org/drawingml/2006/main">
               <a:ext uri="{FF2B5EF4-FFF2-40B4-BE49-F238E27FC236}">
-                <a16:creationId xmlns:a16="http://schemas.microsoft.com/office/drawing/2014/main" id="{F4A90EEB-0D63-4991-8EEA-A198F2E286E2}"/>
+                <a16:creationId xmlns:a16="http://schemas.microsoft.com/office/drawing/2014/main" id="{22092EA3-381B-43EA-A16C-F61F38309D33}"/>
               </a:ext>
             </a:extLst>
           </p:cNvPr>
@@ -5747,7 +5747,7 @@
           <p:cNvPr id="12" name="core-body-2">
             <a:extLst xmlns:a="http://schemas.openxmlformats.org/drawingml/2006/main">
               <a:ext uri="{FF2B5EF4-FFF2-40B4-BE49-F238E27FC236}">
-                <a16:creationId xmlns:a16="http://schemas.microsoft.com/office/drawing/2014/main" id="{4B54419F-8CFF-451B-B6CB-8974545436AA}"/>
+                <a16:creationId xmlns:a16="http://schemas.microsoft.com/office/drawing/2014/main" id="{8D6FA282-46FA-4983-8F2B-0799F0DC6AE0}"/>
               </a:ext>
             </a:extLst>
           </p:cNvPr>
@@ -5811,7 +5811,7 @@
           <p:cNvPr id="13" name="s3-takeaway-rule">
             <a:extLst xmlns:a="http://schemas.openxmlformats.org/drawingml/2006/main">
               <a:ext uri="{FF2B5EF4-FFF2-40B4-BE49-F238E27FC236}">
-                <a16:creationId xmlns:a16="http://schemas.microsoft.com/office/drawing/2014/main" id="{ED627C77-4661-4C08-8508-DDF158FD35A3}"/>
+                <a16:creationId xmlns:a16="http://schemas.microsoft.com/office/drawing/2014/main" id="{9919A745-1BBA-4519-830D-4E19D58619C1}"/>
               </a:ext>
             </a:extLst>
           </p:cNvPr>
@@ -5844,7 +5844,7 @@
           <p:cNvPr id="14" name="s3-takeaway">
             <a:extLst xmlns:a="http://schemas.openxmlformats.org/drawingml/2006/main">
               <a:ext uri="{FF2B5EF4-FFF2-40B4-BE49-F238E27FC236}">
-                <a16:creationId xmlns:a16="http://schemas.microsoft.com/office/drawing/2014/main" id="{4E1F5853-5DE0-482C-80AE-6AE1232F6039}"/>
+                <a16:creationId xmlns:a16="http://schemas.microsoft.com/office/drawing/2014/main" id="{99753C0D-7590-43ED-8E88-B2E689A117D0}"/>
               </a:ext>
             </a:extLst>
           </p:cNvPr>
@@ -5900,7 +5900,7 @@
     </p:spTree>
     <p:extLst>
       <p:ext uri="{BB962C8B-B14F-4D97-AF65-F5344CB8AC3E}">
-        <p14:creationId xmlns:p14="http://schemas.microsoft.com/office/powerpoint/2010/main" val="1286399318"/>
+        <p14:creationId xmlns:p14="http://schemas.microsoft.com/office/powerpoint/2010/main" val="1307799871"/>
       </p:ext>
     </p:extLst>
   </p:cSld>
@@ -5931,7 +5931,7 @@
           <p:cNvPr id="1" name="s4-rule">
             <a:extLst xmlns:a="http://schemas.openxmlformats.org/drawingml/2006/main">
               <a:ext uri="{FF2B5EF4-FFF2-40B4-BE49-F238E27FC236}">
-                <a16:creationId xmlns:a16="http://schemas.microsoft.com/office/drawing/2014/main" id="{83980716-D0EB-43B3-9D56-34743C6E6116}"/>
+                <a16:creationId xmlns:a16="http://schemas.microsoft.com/office/drawing/2014/main" id="{0CDAE4AC-7D7E-4D43-8C91-0950FF8F8578}"/>
               </a:ext>
             </a:extLst>
           </p:cNvPr>
@@ -5964,7 +5964,7 @@
           <p:cNvPr id="2" name="s4-eyebrow">
             <a:extLst xmlns:a="http://schemas.openxmlformats.org/drawingml/2006/main">
               <a:ext uri="{FF2B5EF4-FFF2-40B4-BE49-F238E27FC236}">
-                <a16:creationId xmlns:a16="http://schemas.microsoft.com/office/drawing/2014/main" id="{40B07953-A7E0-4C55-8C48-60A70FA6FFFC}"/>
+                <a16:creationId xmlns:a16="http://schemas.microsoft.com/office/drawing/2014/main" id="{5F09C7A1-D062-4075-85F0-CFF19308C07D}"/>
               </a:ext>
             </a:extLst>
           </p:cNvPr>
@@ -6022,7 +6022,7 @@
           <p:cNvPr id="3" name="s4-title">
             <a:extLst xmlns:a="http://schemas.openxmlformats.org/drawingml/2006/main">
               <a:ext uri="{FF2B5EF4-FFF2-40B4-BE49-F238E27FC236}">
-                <a16:creationId xmlns:a16="http://schemas.microsoft.com/office/drawing/2014/main" id="{0383E9CC-1F7B-4DCC-8C7D-4073DCF40605}"/>
+                <a16:creationId xmlns:a16="http://schemas.microsoft.com/office/drawing/2014/main" id="{AB3DFEFE-B1B6-4AAE-AEC1-D86F968B8534}"/>
               </a:ext>
             </a:extLst>
           </p:cNvPr>
@@ -6080,7 +6080,7 @@
           <p:cNvPr id="4" name="s4-footer">
             <a:extLst xmlns:a="http://schemas.openxmlformats.org/drawingml/2006/main">
               <a:ext uri="{FF2B5EF4-FFF2-40B4-BE49-F238E27FC236}">
-                <a16:creationId xmlns:a16="http://schemas.microsoft.com/office/drawing/2014/main" id="{864AE0DE-AB43-4A55-9C34-A3FE16E20027}"/>
+                <a16:creationId xmlns:a16="http://schemas.microsoft.com/office/drawing/2014/main" id="{977408A8-4206-48E0-820F-AC145A781BC4}"/>
               </a:ext>
             </a:extLst>
           </p:cNvPr>
@@ -6111,7 +6111,7 @@
           <p:cNvPr id="5" name="s4-identity">
             <a:extLst xmlns:a="http://schemas.openxmlformats.org/drawingml/2006/main">
               <a:ext uri="{FF2B5EF4-FFF2-40B4-BE49-F238E27FC236}">
-                <a16:creationId xmlns:a16="http://schemas.microsoft.com/office/drawing/2014/main" id="{02835B57-3769-4D5C-AB28-677160E2A0AA}"/>
+                <a16:creationId xmlns:a16="http://schemas.microsoft.com/office/drawing/2014/main" id="{AD4E48C0-A816-4050-976B-F3757C1B8432}"/>
               </a:ext>
             </a:extLst>
           </p:cNvPr>
@@ -6169,7 +6169,7 @@
           <p:cNvPr id="6" name="core-no-0">
             <a:extLst xmlns:a="http://schemas.openxmlformats.org/drawingml/2006/main">
               <a:ext uri="{FF2B5EF4-FFF2-40B4-BE49-F238E27FC236}">
-                <a16:creationId xmlns:a16="http://schemas.microsoft.com/office/drawing/2014/main" id="{A7069022-1A47-4761-B339-68FD4CD620EE}"/>
+                <a16:creationId xmlns:a16="http://schemas.microsoft.com/office/drawing/2014/main" id="{8DF6F97B-CA70-4ADA-B9D1-AFBECE9D8479}"/>
               </a:ext>
             </a:extLst>
           </p:cNvPr>
@@ -6227,7 +6227,7 @@
           <p:cNvPr id="7" name="core-label-0">
             <a:extLst xmlns:a="http://schemas.openxmlformats.org/drawingml/2006/main">
               <a:ext uri="{FF2B5EF4-FFF2-40B4-BE49-F238E27FC236}">
-                <a16:creationId xmlns:a16="http://schemas.microsoft.com/office/drawing/2014/main" id="{588903A1-E908-4D44-9201-67F5EEBB7ADF}"/>
+                <a16:creationId xmlns:a16="http://schemas.microsoft.com/office/drawing/2014/main" id="{5874F2BE-727C-4FD4-A029-E45E3FA4AF8E}"/>
               </a:ext>
             </a:extLst>
           </p:cNvPr>
@@ -6285,7 +6285,7 @@
           <p:cNvPr id="8" name="core-body-0">
             <a:extLst xmlns:a="http://schemas.openxmlformats.org/drawingml/2006/main">
               <a:ext uri="{FF2B5EF4-FFF2-40B4-BE49-F238E27FC236}">
-                <a16:creationId xmlns:a16="http://schemas.microsoft.com/office/drawing/2014/main" id="{D0184CA3-7E8F-4D78-8737-97A34FDA28E3}"/>
+                <a16:creationId xmlns:a16="http://schemas.microsoft.com/office/drawing/2014/main" id="{1767B7D7-90A8-424B-AE7D-133672380E17}"/>
               </a:ext>
             </a:extLst>
           </p:cNvPr>
@@ -6349,7 +6349,7 @@
           <p:cNvPr id="9" name="core-no-1">
             <a:extLst xmlns:a="http://schemas.openxmlformats.org/drawingml/2006/main">
               <a:ext uri="{FF2B5EF4-FFF2-40B4-BE49-F238E27FC236}">
-                <a16:creationId xmlns:a16="http://schemas.microsoft.com/office/drawing/2014/main" id="{D8A34334-A33E-4793-B75A-24B2388BCE08}"/>
+                <a16:creationId xmlns:a16="http://schemas.microsoft.com/office/drawing/2014/main" id="{D7086158-A257-402E-8DE3-7A7AD1A63FF7}"/>
               </a:ext>
             </a:extLst>
           </p:cNvPr>
@@ -6407,7 +6407,7 @@
           <p:cNvPr id="10" name="core-body-1">
             <a:extLst xmlns:a="http://schemas.openxmlformats.org/drawingml/2006/main">
               <a:ext uri="{FF2B5EF4-FFF2-40B4-BE49-F238E27FC236}">
-                <a16:creationId xmlns:a16="http://schemas.microsoft.com/office/drawing/2014/main" id="{9D73E931-E39E-45C5-B812-FFD28EEEBE08}"/>
+                <a16:creationId xmlns:a16="http://schemas.microsoft.com/office/drawing/2014/main" id="{62445468-3DDC-4DF7-A0C6-A402100D2EE9}"/>
               </a:ext>
             </a:extLst>
           </p:cNvPr>
@@ -6471,7 +6471,7 @@
           <p:cNvPr id="11" name="s4-takeaway-rule">
             <a:extLst xmlns:a="http://schemas.openxmlformats.org/drawingml/2006/main">
               <a:ext uri="{FF2B5EF4-FFF2-40B4-BE49-F238E27FC236}">
-                <a16:creationId xmlns:a16="http://schemas.microsoft.com/office/drawing/2014/main" id="{31ADAF86-125E-4A72-B3C1-106840118CD8}"/>
+                <a16:creationId xmlns:a16="http://schemas.microsoft.com/office/drawing/2014/main" id="{FA92A216-66F3-44EA-A76A-76598DF75CFE}"/>
               </a:ext>
             </a:extLst>
           </p:cNvPr>
@@ -6504,7 +6504,7 @@
           <p:cNvPr id="12" name="s4-takeaway">
             <a:extLst xmlns:a="http://schemas.openxmlformats.org/drawingml/2006/main">
               <a:ext uri="{FF2B5EF4-FFF2-40B4-BE49-F238E27FC236}">
-                <a16:creationId xmlns:a16="http://schemas.microsoft.com/office/drawing/2014/main" id="{F4875096-D4B8-4589-AAF0-149AFAE7D5DD}"/>
+                <a16:creationId xmlns:a16="http://schemas.microsoft.com/office/drawing/2014/main" id="{8BEC9CBA-2E2E-496D-8E95-A442FFA5A212}"/>
               </a:ext>
             </a:extLst>
           </p:cNvPr>
@@ -6560,7 +6560,7 @@
     </p:spTree>
     <p:extLst>
       <p:ext uri="{BB962C8B-B14F-4D97-AF65-F5344CB8AC3E}">
-        <p14:creationId xmlns:p14="http://schemas.microsoft.com/office/powerpoint/2010/main" val="636660355"/>
+        <p14:creationId xmlns:p14="http://schemas.microsoft.com/office/powerpoint/2010/main" val="1596050988"/>
       </p:ext>
     </p:extLst>
   </p:cSld>
@@ -6591,7 +6591,7 @@
           <p:cNvPr id="1" name="s5-rule">
             <a:extLst xmlns:a="http://schemas.openxmlformats.org/drawingml/2006/main">
               <a:ext uri="{FF2B5EF4-FFF2-40B4-BE49-F238E27FC236}">
-                <a16:creationId xmlns:a16="http://schemas.microsoft.com/office/drawing/2014/main" id="{2D43A910-519A-4A10-84AD-770D8D766B79}"/>
+                <a16:creationId xmlns:a16="http://schemas.microsoft.com/office/drawing/2014/main" id="{9DD25006-677A-42FA-8980-1B8C34112218}"/>
               </a:ext>
             </a:extLst>
           </p:cNvPr>
@@ -6624,7 +6624,7 @@
           <p:cNvPr id="2" name="s5-eyebrow">
             <a:extLst xmlns:a="http://schemas.openxmlformats.org/drawingml/2006/main">
               <a:ext uri="{FF2B5EF4-FFF2-40B4-BE49-F238E27FC236}">
-                <a16:creationId xmlns:a16="http://schemas.microsoft.com/office/drawing/2014/main" id="{29CE1815-A5CD-4E9E-BA19-495D837C91FD}"/>
+                <a16:creationId xmlns:a16="http://schemas.microsoft.com/office/drawing/2014/main" id="{EEC70077-E8B2-4A67-9F92-4759016D4C3B}"/>
               </a:ext>
             </a:extLst>
           </p:cNvPr>
@@ -6682,7 +6682,7 @@
           <p:cNvPr id="3" name="s5-title">
             <a:extLst xmlns:a="http://schemas.openxmlformats.org/drawingml/2006/main">
               <a:ext uri="{FF2B5EF4-FFF2-40B4-BE49-F238E27FC236}">
-                <a16:creationId xmlns:a16="http://schemas.microsoft.com/office/drawing/2014/main" id="{D1F14386-DE81-4F1C-A8C1-33481A308BEE}"/>
+                <a16:creationId xmlns:a16="http://schemas.microsoft.com/office/drawing/2014/main" id="{13CEB99E-E476-4A19-A439-1C2855949E57}"/>
               </a:ext>
             </a:extLst>
           </p:cNvPr>
@@ -6740,7 +6740,7 @@
           <p:cNvPr id="4" name="s5-footer">
             <a:extLst xmlns:a="http://schemas.openxmlformats.org/drawingml/2006/main">
               <a:ext uri="{FF2B5EF4-FFF2-40B4-BE49-F238E27FC236}">
-                <a16:creationId xmlns:a16="http://schemas.microsoft.com/office/drawing/2014/main" id="{4D5DB1F4-6666-4B13-B734-5EAAFA025E34}"/>
+                <a16:creationId xmlns:a16="http://schemas.microsoft.com/office/drawing/2014/main" id="{D6EB712C-29C1-47EE-A8D9-D29A7AA992B3}"/>
               </a:ext>
             </a:extLst>
           </p:cNvPr>
@@ -6771,7 +6771,7 @@
           <p:cNvPr id="5" name="s5-identity">
             <a:extLst xmlns:a="http://schemas.openxmlformats.org/drawingml/2006/main">
               <a:ext uri="{FF2B5EF4-FFF2-40B4-BE49-F238E27FC236}">
-                <a16:creationId xmlns:a16="http://schemas.microsoft.com/office/drawing/2014/main" id="{42F068A2-0068-4C69-B530-041F203D71FF}"/>
+                <a16:creationId xmlns:a16="http://schemas.microsoft.com/office/drawing/2014/main" id="{7D084D57-A189-486B-AA33-E1DDC8A1D490}"/>
               </a:ext>
             </a:extLst>
           </p:cNvPr>
@@ -6829,7 +6829,7 @@
           <p:cNvPr id="6" name="core-no-0">
             <a:extLst xmlns:a="http://schemas.openxmlformats.org/drawingml/2006/main">
               <a:ext uri="{FF2B5EF4-FFF2-40B4-BE49-F238E27FC236}">
-                <a16:creationId xmlns:a16="http://schemas.microsoft.com/office/drawing/2014/main" id="{29AFC5BB-03A3-4E48-B49B-D8D6C73C57BC}"/>
+                <a16:creationId xmlns:a16="http://schemas.microsoft.com/office/drawing/2014/main" id="{103BD534-5F08-40C6-9786-23C4102873C7}"/>
               </a:ext>
             </a:extLst>
           </p:cNvPr>
@@ -6887,7 +6887,7 @@
           <p:cNvPr id="7" name="core-label-0">
             <a:extLst xmlns:a="http://schemas.openxmlformats.org/drawingml/2006/main">
               <a:ext uri="{FF2B5EF4-FFF2-40B4-BE49-F238E27FC236}">
-                <a16:creationId xmlns:a16="http://schemas.microsoft.com/office/drawing/2014/main" id="{D1966A1B-FC9C-4E7A-B460-E0EDE0064FE7}"/>
+                <a16:creationId xmlns:a16="http://schemas.microsoft.com/office/drawing/2014/main" id="{95B36DC6-63BC-46AE-BFFC-115867DAF893}"/>
               </a:ext>
             </a:extLst>
           </p:cNvPr>
@@ -6945,7 +6945,7 @@
           <p:cNvPr id="8" name="core-body-0">
             <a:extLst xmlns:a="http://schemas.openxmlformats.org/drawingml/2006/main">
               <a:ext uri="{FF2B5EF4-FFF2-40B4-BE49-F238E27FC236}">
-                <a16:creationId xmlns:a16="http://schemas.microsoft.com/office/drawing/2014/main" id="{30A05F2A-C48D-4E30-B172-089D107BB806}"/>
+                <a16:creationId xmlns:a16="http://schemas.microsoft.com/office/drawing/2014/main" id="{98BF2762-A89D-4A0E-B58D-42AAADDD4288}"/>
               </a:ext>
             </a:extLst>
           </p:cNvPr>
@@ -7009,7 +7009,7 @@
           <p:cNvPr id="9" name="core-no-1">
             <a:extLst xmlns:a="http://schemas.openxmlformats.org/drawingml/2006/main">
               <a:ext uri="{FF2B5EF4-FFF2-40B4-BE49-F238E27FC236}">
-                <a16:creationId xmlns:a16="http://schemas.microsoft.com/office/drawing/2014/main" id="{44E83323-FF06-49F9-A9B8-AE84CD6F856B}"/>
+                <a16:creationId xmlns:a16="http://schemas.microsoft.com/office/drawing/2014/main" id="{7E67A8D3-3657-4C01-A303-59F0209BD7E2}"/>
               </a:ext>
             </a:extLst>
           </p:cNvPr>
@@ -7067,7 +7067,7 @@
           <p:cNvPr id="10" name="core-body-1">
             <a:extLst xmlns:a="http://schemas.openxmlformats.org/drawingml/2006/main">
               <a:ext uri="{FF2B5EF4-FFF2-40B4-BE49-F238E27FC236}">
-                <a16:creationId xmlns:a16="http://schemas.microsoft.com/office/drawing/2014/main" id="{E5EDDAF6-3A73-49A1-998E-5FBF3DF0328A}"/>
+                <a16:creationId xmlns:a16="http://schemas.microsoft.com/office/drawing/2014/main" id="{50F74658-85D0-4539-9E7E-67CB1043C8DC}"/>
               </a:ext>
             </a:extLst>
           </p:cNvPr>
@@ -7131,7 +7131,7 @@
           <p:cNvPr id="11" name="s5-takeaway-rule">
             <a:extLst xmlns:a="http://schemas.openxmlformats.org/drawingml/2006/main">
               <a:ext uri="{FF2B5EF4-FFF2-40B4-BE49-F238E27FC236}">
-                <a16:creationId xmlns:a16="http://schemas.microsoft.com/office/drawing/2014/main" id="{D5F8CDD6-34FF-4299-92D8-EB7EA1AC484E}"/>
+                <a16:creationId xmlns:a16="http://schemas.microsoft.com/office/drawing/2014/main" id="{DB33FC24-99D4-4EE4-9A80-377F93EA0D47}"/>
               </a:ext>
             </a:extLst>
           </p:cNvPr>
@@ -7164,7 +7164,7 @@
           <p:cNvPr id="12" name="s5-takeaway">
             <a:extLst xmlns:a="http://schemas.openxmlformats.org/drawingml/2006/main">
               <a:ext uri="{FF2B5EF4-FFF2-40B4-BE49-F238E27FC236}">
-                <a16:creationId xmlns:a16="http://schemas.microsoft.com/office/drawing/2014/main" id="{714214A0-7A6D-4A82-8DAC-BDF4370F6BDE}"/>
+                <a16:creationId xmlns:a16="http://schemas.microsoft.com/office/drawing/2014/main" id="{A325C19D-21E7-4C5B-92A0-C22046D3485B}"/>
               </a:ext>
             </a:extLst>
           </p:cNvPr>
@@ -7220,7 +7220,7 @@
     </p:spTree>
     <p:extLst>
       <p:ext uri="{BB962C8B-B14F-4D97-AF65-F5344CB8AC3E}">
-        <p14:creationId xmlns:p14="http://schemas.microsoft.com/office/powerpoint/2010/main" val="1778091613"/>
+        <p14:creationId xmlns:p14="http://schemas.microsoft.com/office/powerpoint/2010/main" val="191501842"/>
       </p:ext>
     </p:extLst>
   </p:cSld>
@@ -7251,7 +7251,7 @@
           <p:cNvPr id="1" name="s6-rule">
             <a:extLst xmlns:a="http://schemas.openxmlformats.org/drawingml/2006/main">
               <a:ext uri="{FF2B5EF4-FFF2-40B4-BE49-F238E27FC236}">
-                <a16:creationId xmlns:a16="http://schemas.microsoft.com/office/drawing/2014/main" id="{C879788A-B172-4AD2-9873-BF9BEDF17870}"/>
+                <a16:creationId xmlns:a16="http://schemas.microsoft.com/office/drawing/2014/main" id="{A3B2B743-E336-48E9-8F7B-9DF1B25A49BF}"/>
               </a:ext>
             </a:extLst>
           </p:cNvPr>
@@ -7284,7 +7284,7 @@
           <p:cNvPr id="2" name="s6-eyebrow">
             <a:extLst xmlns:a="http://schemas.openxmlformats.org/drawingml/2006/main">
               <a:ext uri="{FF2B5EF4-FFF2-40B4-BE49-F238E27FC236}">
-                <a16:creationId xmlns:a16="http://schemas.microsoft.com/office/drawing/2014/main" id="{C82F2D32-5A25-4D60-A8F8-DDC08FFE864D}"/>
+                <a16:creationId xmlns:a16="http://schemas.microsoft.com/office/drawing/2014/main" id="{CEC6EBD7-6850-4E14-907C-6562BA68D377}"/>
               </a:ext>
             </a:extLst>
           </p:cNvPr>
@@ -7342,7 +7342,7 @@
           <p:cNvPr id="3" name="s6-title">
             <a:extLst xmlns:a="http://schemas.openxmlformats.org/drawingml/2006/main">
               <a:ext uri="{FF2B5EF4-FFF2-40B4-BE49-F238E27FC236}">
-                <a16:creationId xmlns:a16="http://schemas.microsoft.com/office/drawing/2014/main" id="{9CBCE281-ED47-4F68-A0DF-A7A7666DF2ED}"/>
+                <a16:creationId xmlns:a16="http://schemas.microsoft.com/office/drawing/2014/main" id="{73CFE2E4-E04A-4BE2-A63D-7449F0F24A43}"/>
               </a:ext>
             </a:extLst>
           </p:cNvPr>
@@ -7400,7 +7400,7 @@
           <p:cNvPr id="4" name="s6-footer">
             <a:extLst xmlns:a="http://schemas.openxmlformats.org/drawingml/2006/main">
               <a:ext uri="{FF2B5EF4-FFF2-40B4-BE49-F238E27FC236}">
-                <a16:creationId xmlns:a16="http://schemas.microsoft.com/office/drawing/2014/main" id="{25FB7C62-3F29-4A4F-9510-156F8BB83469}"/>
+                <a16:creationId xmlns:a16="http://schemas.microsoft.com/office/drawing/2014/main" id="{BF42DAA5-3F17-4585-821B-E0510DB673E6}"/>
               </a:ext>
             </a:extLst>
           </p:cNvPr>
@@ -7431,7 +7431,7 @@
           <p:cNvPr id="5" name="s6-identity">
             <a:extLst xmlns:a="http://schemas.openxmlformats.org/drawingml/2006/main">
               <a:ext uri="{FF2B5EF4-FFF2-40B4-BE49-F238E27FC236}">
-                <a16:creationId xmlns:a16="http://schemas.microsoft.com/office/drawing/2014/main" id="{7E1C75F8-1F85-415C-ADDB-A04620515836}"/>
+                <a16:creationId xmlns:a16="http://schemas.microsoft.com/office/drawing/2014/main" id="{F767F407-031B-4775-ABC1-25ABC03655B1}"/>
               </a:ext>
             </a:extLst>
           </p:cNvPr>
@@ -7489,7 +7489,7 @@
           <p:cNvPr id="6" name="core-no-0">
             <a:extLst xmlns:a="http://schemas.openxmlformats.org/drawingml/2006/main">
               <a:ext uri="{FF2B5EF4-FFF2-40B4-BE49-F238E27FC236}">
-                <a16:creationId xmlns:a16="http://schemas.microsoft.com/office/drawing/2014/main" id="{12C6F6AD-5E1B-47A1-AFFC-645866AEFF3D}"/>
+                <a16:creationId xmlns:a16="http://schemas.microsoft.com/office/drawing/2014/main" id="{76837667-888E-45C0-9D72-1829E8D33FDE}"/>
               </a:ext>
             </a:extLst>
           </p:cNvPr>
@@ -7547,7 +7547,7 @@
           <p:cNvPr id="7" name="core-label-0">
             <a:extLst xmlns:a="http://schemas.openxmlformats.org/drawingml/2006/main">
               <a:ext uri="{FF2B5EF4-FFF2-40B4-BE49-F238E27FC236}">
-                <a16:creationId xmlns:a16="http://schemas.microsoft.com/office/drawing/2014/main" id="{3571C4B9-8C66-4FB4-9EEE-D3BC8D3F3161}"/>
+                <a16:creationId xmlns:a16="http://schemas.microsoft.com/office/drawing/2014/main" id="{60C421EC-D888-429C-A72D-0C8A5BB0D953}"/>
               </a:ext>
             </a:extLst>
           </p:cNvPr>
@@ -7605,7 +7605,7 @@
           <p:cNvPr id="8" name="core-body-0">
             <a:extLst xmlns:a="http://schemas.openxmlformats.org/drawingml/2006/main">
               <a:ext uri="{FF2B5EF4-FFF2-40B4-BE49-F238E27FC236}">
-                <a16:creationId xmlns:a16="http://schemas.microsoft.com/office/drawing/2014/main" id="{9A9CF995-CF26-43C8-B65C-2A56BCB345F6}"/>
+                <a16:creationId xmlns:a16="http://schemas.microsoft.com/office/drawing/2014/main" id="{CA9A88BA-EFEE-419D-A652-9EC86C7F7042}"/>
               </a:ext>
             </a:extLst>
           </p:cNvPr>
@@ -7669,7 +7669,7 @@
           <p:cNvPr id="9" name="core-no-1">
             <a:extLst xmlns:a="http://schemas.openxmlformats.org/drawingml/2006/main">
               <a:ext uri="{FF2B5EF4-FFF2-40B4-BE49-F238E27FC236}">
-                <a16:creationId xmlns:a16="http://schemas.microsoft.com/office/drawing/2014/main" id="{B77A3D05-0B39-48A8-AEAA-535BCC9C8161}"/>
+                <a16:creationId xmlns:a16="http://schemas.microsoft.com/office/drawing/2014/main" id="{812FDB67-BADE-4383-A833-79F0843CD283}"/>
               </a:ext>
             </a:extLst>
           </p:cNvPr>
@@ -7727,7 +7727,7 @@
           <p:cNvPr id="10" name="core-body-1">
             <a:extLst xmlns:a="http://schemas.openxmlformats.org/drawingml/2006/main">
               <a:ext uri="{FF2B5EF4-FFF2-40B4-BE49-F238E27FC236}">
-                <a16:creationId xmlns:a16="http://schemas.microsoft.com/office/drawing/2014/main" id="{78093F54-961B-443B-838B-8EE0C446AD7D}"/>
+                <a16:creationId xmlns:a16="http://schemas.microsoft.com/office/drawing/2014/main" id="{85BA5374-77FF-4D9E-9E30-E02ABA93D0B8}"/>
               </a:ext>
             </a:extLst>
           </p:cNvPr>
@@ -7791,7 +7791,7 @@
           <p:cNvPr id="11" name="s6-takeaway-rule">
             <a:extLst xmlns:a="http://schemas.openxmlformats.org/drawingml/2006/main">
               <a:ext uri="{FF2B5EF4-FFF2-40B4-BE49-F238E27FC236}">
-                <a16:creationId xmlns:a16="http://schemas.microsoft.com/office/drawing/2014/main" id="{A7BEFC08-91E3-46BB-9404-C4A48121A299}"/>
+                <a16:creationId xmlns:a16="http://schemas.microsoft.com/office/drawing/2014/main" id="{37DB3D5B-83BC-4B43-8E81-4DE850D8ACAE}"/>
               </a:ext>
             </a:extLst>
           </p:cNvPr>
@@ -7824,7 +7824,7 @@
           <p:cNvPr id="12" name="s6-takeaway">
             <a:extLst xmlns:a="http://schemas.openxmlformats.org/drawingml/2006/main">
               <a:ext uri="{FF2B5EF4-FFF2-40B4-BE49-F238E27FC236}">
-                <a16:creationId xmlns:a16="http://schemas.microsoft.com/office/drawing/2014/main" id="{29407F38-807A-448E-94C1-1E5ECEDF25D8}"/>
+                <a16:creationId xmlns:a16="http://schemas.microsoft.com/office/drawing/2014/main" id="{6F118D86-9D1B-4ACA-879C-A4DCC7AC5EBE}"/>
               </a:ext>
             </a:extLst>
           </p:cNvPr>
@@ -7880,7 +7880,7 @@
     </p:spTree>
     <p:extLst>
       <p:ext uri="{BB962C8B-B14F-4D97-AF65-F5344CB8AC3E}">
-        <p14:creationId xmlns:p14="http://schemas.microsoft.com/office/powerpoint/2010/main" val="2053875626"/>
+        <p14:creationId xmlns:p14="http://schemas.microsoft.com/office/powerpoint/2010/main" val="1461605460"/>
       </p:ext>
     </p:extLst>
   </p:cSld>
@@ -7911,7 +7911,7 @@
           <p:cNvPr id="1" name="s7-rule">
             <a:extLst xmlns:a="http://schemas.openxmlformats.org/drawingml/2006/main">
               <a:ext uri="{FF2B5EF4-FFF2-40B4-BE49-F238E27FC236}">
-                <a16:creationId xmlns:a16="http://schemas.microsoft.com/office/drawing/2014/main" id="{CCBD2812-AF17-4F01-9992-52336200A52F}"/>
+                <a16:creationId xmlns:a16="http://schemas.microsoft.com/office/drawing/2014/main" id="{681720F5-266E-4BC2-BEE8-624D51C445D0}"/>
               </a:ext>
             </a:extLst>
           </p:cNvPr>
@@ -7944,7 +7944,7 @@
           <p:cNvPr id="2" name="s7-eyebrow">
             <a:extLst xmlns:a="http://schemas.openxmlformats.org/drawingml/2006/main">
               <a:ext uri="{FF2B5EF4-FFF2-40B4-BE49-F238E27FC236}">
-                <a16:creationId xmlns:a16="http://schemas.microsoft.com/office/drawing/2014/main" id="{4935D3F6-A102-428D-965E-7E9AC0563E86}"/>
+                <a16:creationId xmlns:a16="http://schemas.microsoft.com/office/drawing/2014/main" id="{96E85FA9-5E9B-4335-91D0-3489E97ABC29}"/>
               </a:ext>
             </a:extLst>
           </p:cNvPr>
@@ -8002,7 +8002,7 @@
           <p:cNvPr id="3" name="s7-title">
             <a:extLst xmlns:a="http://schemas.openxmlformats.org/drawingml/2006/main">
               <a:ext uri="{FF2B5EF4-FFF2-40B4-BE49-F238E27FC236}">
-                <a16:creationId xmlns:a16="http://schemas.microsoft.com/office/drawing/2014/main" id="{6E43F689-3976-48D5-8B73-EC1D97874DA2}"/>
+                <a16:creationId xmlns:a16="http://schemas.microsoft.com/office/drawing/2014/main" id="{1B6F2908-AFF0-41CB-A6C8-8B4A30FD1131}"/>
               </a:ext>
             </a:extLst>
           </p:cNvPr>
@@ -8060,7 +8060,7 @@
           <p:cNvPr id="4" name="s7-footer">
             <a:extLst xmlns:a="http://schemas.openxmlformats.org/drawingml/2006/main">
               <a:ext uri="{FF2B5EF4-FFF2-40B4-BE49-F238E27FC236}">
-                <a16:creationId xmlns:a16="http://schemas.microsoft.com/office/drawing/2014/main" id="{5AC884BE-2270-44C6-B824-9D1FA92EECC0}"/>
+                <a16:creationId xmlns:a16="http://schemas.microsoft.com/office/drawing/2014/main" id="{DC79FB4A-1BEF-4332-AA70-B8E43DE83F7C}"/>
               </a:ext>
             </a:extLst>
           </p:cNvPr>
@@ -8091,7 +8091,7 @@
           <p:cNvPr id="5" name="s7-identity">
             <a:extLst xmlns:a="http://schemas.openxmlformats.org/drawingml/2006/main">
               <a:ext uri="{FF2B5EF4-FFF2-40B4-BE49-F238E27FC236}">
-                <a16:creationId xmlns:a16="http://schemas.microsoft.com/office/drawing/2014/main" id="{1121CB15-BA3F-4258-AE67-8469BA31EF34}"/>
+                <a16:creationId xmlns:a16="http://schemas.microsoft.com/office/drawing/2014/main" id="{E4C6AF6C-096D-4747-BBEE-77488E6369E5}"/>
               </a:ext>
             </a:extLst>
           </p:cNvPr>
@@ -8149,7 +8149,7 @@
           <p:cNvPr id="6" name="core-no-0">
             <a:extLst xmlns:a="http://schemas.openxmlformats.org/drawingml/2006/main">
               <a:ext uri="{FF2B5EF4-FFF2-40B4-BE49-F238E27FC236}">
-                <a16:creationId xmlns:a16="http://schemas.microsoft.com/office/drawing/2014/main" id="{68A75315-98EC-40B2-B45C-4F5BFA6C3700}"/>
+                <a16:creationId xmlns:a16="http://schemas.microsoft.com/office/drawing/2014/main" id="{5578C2C6-05CE-4D90-85FA-E54567337664}"/>
               </a:ext>
             </a:extLst>
           </p:cNvPr>
@@ -8207,7 +8207,7 @@
           <p:cNvPr id="7" name="core-label-0">
             <a:extLst xmlns:a="http://schemas.openxmlformats.org/drawingml/2006/main">
               <a:ext uri="{FF2B5EF4-FFF2-40B4-BE49-F238E27FC236}">
-                <a16:creationId xmlns:a16="http://schemas.microsoft.com/office/drawing/2014/main" id="{24F5B8D3-0CD0-4BAE-9249-D1CDC80FEBF4}"/>
+                <a16:creationId xmlns:a16="http://schemas.microsoft.com/office/drawing/2014/main" id="{B082F67B-A55A-4E66-9FAE-E7A83C8FD9BA}"/>
               </a:ext>
             </a:extLst>
           </p:cNvPr>
@@ -8265,7 +8265,7 @@
           <p:cNvPr id="8" name="core-body-0">
             <a:extLst xmlns:a="http://schemas.openxmlformats.org/drawingml/2006/main">
               <a:ext uri="{FF2B5EF4-FFF2-40B4-BE49-F238E27FC236}">
-                <a16:creationId xmlns:a16="http://schemas.microsoft.com/office/drawing/2014/main" id="{9F9EECC9-EFA2-40A7-8E08-5ABB3244CAB1}"/>
+                <a16:creationId xmlns:a16="http://schemas.microsoft.com/office/drawing/2014/main" id="{964E3EA7-7287-4EF4-8452-8296FECA19A4}"/>
               </a:ext>
             </a:extLst>
           </p:cNvPr>
@@ -8329,7 +8329,7 @@
           <p:cNvPr id="9" name="core-no-1">
             <a:extLst xmlns:a="http://schemas.openxmlformats.org/drawingml/2006/main">
               <a:ext uri="{FF2B5EF4-FFF2-40B4-BE49-F238E27FC236}">
-                <a16:creationId xmlns:a16="http://schemas.microsoft.com/office/drawing/2014/main" id="{4A0AA411-241F-4F69-8777-F756DB1CFE44}"/>
+                <a16:creationId xmlns:a16="http://schemas.microsoft.com/office/drawing/2014/main" id="{25637C01-16EF-465D-9FDF-D8967EDBEAC7}"/>
               </a:ext>
             </a:extLst>
           </p:cNvPr>
@@ -8387,7 +8387,7 @@
           <p:cNvPr id="10" name="core-body-1">
             <a:extLst xmlns:a="http://schemas.openxmlformats.org/drawingml/2006/main">
               <a:ext uri="{FF2B5EF4-FFF2-40B4-BE49-F238E27FC236}">
-                <a16:creationId xmlns:a16="http://schemas.microsoft.com/office/drawing/2014/main" id="{06154A4A-F82C-4174-B646-27DDEC2D15B2}"/>
+                <a16:creationId xmlns:a16="http://schemas.microsoft.com/office/drawing/2014/main" id="{CB8080AB-D859-4960-B5C7-EDD87F25850F}"/>
               </a:ext>
             </a:extLst>
           </p:cNvPr>
@@ -8451,7 +8451,7 @@
           <p:cNvPr id="11" name="s7-takeaway-rule">
             <a:extLst xmlns:a="http://schemas.openxmlformats.org/drawingml/2006/main">
               <a:ext uri="{FF2B5EF4-FFF2-40B4-BE49-F238E27FC236}">
-                <a16:creationId xmlns:a16="http://schemas.microsoft.com/office/drawing/2014/main" id="{F07C4D60-EAD8-4E6D-814B-2998D68990FE}"/>
+                <a16:creationId xmlns:a16="http://schemas.microsoft.com/office/drawing/2014/main" id="{C126896E-9CE1-4C9C-B3F6-347313675C19}"/>
               </a:ext>
             </a:extLst>
           </p:cNvPr>
@@ -8484,7 +8484,7 @@
           <p:cNvPr id="12" name="s7-takeaway">
             <a:extLst xmlns:a="http://schemas.openxmlformats.org/drawingml/2006/main">
               <a:ext uri="{FF2B5EF4-FFF2-40B4-BE49-F238E27FC236}">
-                <a16:creationId xmlns:a16="http://schemas.microsoft.com/office/drawing/2014/main" id="{0C7A8633-5CC2-49B7-80F7-DE7DCCEDC2D2}"/>
+                <a16:creationId xmlns:a16="http://schemas.microsoft.com/office/drawing/2014/main" id="{B612C709-F96C-411D-B3CF-C06AEED2EB72}"/>
               </a:ext>
             </a:extLst>
           </p:cNvPr>
@@ -8540,7 +8540,7 @@
     </p:spTree>
     <p:extLst>
       <p:ext uri="{BB962C8B-B14F-4D97-AF65-F5344CB8AC3E}">
-        <p14:creationId xmlns:p14="http://schemas.microsoft.com/office/powerpoint/2010/main" val="1947138118"/>
+        <p14:creationId xmlns:p14="http://schemas.microsoft.com/office/powerpoint/2010/main" val="1866480966"/>
       </p:ext>
     </p:extLst>
   </p:cSld>
@@ -8571,7 +8571,7 @@
           <p:cNvPr id="1" name="s8-rule">
             <a:extLst xmlns:a="http://schemas.openxmlformats.org/drawingml/2006/main">
               <a:ext uri="{FF2B5EF4-FFF2-40B4-BE49-F238E27FC236}">
-                <a16:creationId xmlns:a16="http://schemas.microsoft.com/office/drawing/2014/main" id="{D1F7A0D8-E368-4A1F-8D83-8513053C4705}"/>
+                <a16:creationId xmlns:a16="http://schemas.microsoft.com/office/drawing/2014/main" id="{B37183B2-AA31-4133-B999-DA9604B11EF9}"/>
               </a:ext>
             </a:extLst>
           </p:cNvPr>
@@ -8604,7 +8604,7 @@
           <p:cNvPr id="2" name="s8-eyebrow">
             <a:extLst xmlns:a="http://schemas.openxmlformats.org/drawingml/2006/main">
               <a:ext uri="{FF2B5EF4-FFF2-40B4-BE49-F238E27FC236}">
-                <a16:creationId xmlns:a16="http://schemas.microsoft.com/office/drawing/2014/main" id="{3B5995ED-F7EB-4D3A-8A2C-7A7B9CEBCACC}"/>
+                <a16:creationId xmlns:a16="http://schemas.microsoft.com/office/drawing/2014/main" id="{69EBBC56-0BC3-445B-A2C4-0009009F8A24}"/>
               </a:ext>
             </a:extLst>
           </p:cNvPr>
@@ -8662,7 +8662,7 @@
           <p:cNvPr id="3" name="s8-title">
             <a:extLst xmlns:a="http://schemas.openxmlformats.org/drawingml/2006/main">
               <a:ext uri="{FF2B5EF4-FFF2-40B4-BE49-F238E27FC236}">
-                <a16:creationId xmlns:a16="http://schemas.microsoft.com/office/drawing/2014/main" id="{19A4CBB6-4184-4F1A-AF7F-8FC74D3E4997}"/>
+                <a16:creationId xmlns:a16="http://schemas.microsoft.com/office/drawing/2014/main" id="{1EFFE339-0321-4125-BC2E-70A132B5CAE8}"/>
               </a:ext>
             </a:extLst>
           </p:cNvPr>
@@ -8720,7 +8720,7 @@
           <p:cNvPr id="4" name="s8-footer">
             <a:extLst xmlns:a="http://schemas.openxmlformats.org/drawingml/2006/main">
               <a:ext uri="{FF2B5EF4-FFF2-40B4-BE49-F238E27FC236}">
-                <a16:creationId xmlns:a16="http://schemas.microsoft.com/office/drawing/2014/main" id="{4FE99EB5-313B-4406-A508-10B261D7CE4A}"/>
+                <a16:creationId xmlns:a16="http://schemas.microsoft.com/office/drawing/2014/main" id="{E479F57F-8CA2-44BA-8371-7DD1988970EC}"/>
               </a:ext>
             </a:extLst>
           </p:cNvPr>
@@ -8751,7 +8751,7 @@
           <p:cNvPr id="5" name="s8-identity">
             <a:extLst xmlns:a="http://schemas.openxmlformats.org/drawingml/2006/main">
               <a:ext uri="{FF2B5EF4-FFF2-40B4-BE49-F238E27FC236}">
-                <a16:creationId xmlns:a16="http://schemas.microsoft.com/office/drawing/2014/main" id="{4B340ACC-31F1-4C2B-A5B1-7E845D7AE322}"/>
+                <a16:creationId xmlns:a16="http://schemas.microsoft.com/office/drawing/2014/main" id="{4C12C999-9B35-4430-A394-9D1900585FE7}"/>
               </a:ext>
             </a:extLst>
           </p:cNvPr>
@@ -8809,7 +8809,7 @@
           <p:cNvPr id="6" name="case-title">
             <a:extLst xmlns:a="http://schemas.openxmlformats.org/drawingml/2006/main">
               <a:ext uri="{FF2B5EF4-FFF2-40B4-BE49-F238E27FC236}">
-                <a16:creationId xmlns:a16="http://schemas.microsoft.com/office/drawing/2014/main" id="{3A1EF7DE-F489-419A-9E60-022D4E300837}"/>
+                <a16:creationId xmlns:a16="http://schemas.microsoft.com/office/drawing/2014/main" id="{FBA8267C-F75F-40B6-B5C4-EFB05CA5E97E}"/>
               </a:ext>
             </a:extLst>
           </p:cNvPr>
@@ -8873,7 +8873,7 @@
           <p:cNvPr id="7" name="case-row-0">
             <a:extLst xmlns:a="http://schemas.openxmlformats.org/drawingml/2006/main">
               <a:ext uri="{FF2B5EF4-FFF2-40B4-BE49-F238E27FC236}">
-                <a16:creationId xmlns:a16="http://schemas.microsoft.com/office/drawing/2014/main" id="{826D93E1-66CA-4CAC-AF4F-CBF784373A85}"/>
+                <a16:creationId xmlns:a16="http://schemas.microsoft.com/office/drawing/2014/main" id="{B07726E6-38DB-42FA-9A3C-B4DA432770CE}"/>
               </a:ext>
             </a:extLst>
           </p:cNvPr>
@@ -8937,7 +8937,7 @@
           <p:cNvPr id="8" name="case-row-1">
             <a:extLst xmlns:a="http://schemas.openxmlformats.org/drawingml/2006/main">
               <a:ext uri="{FF2B5EF4-FFF2-40B4-BE49-F238E27FC236}">
-                <a16:creationId xmlns:a16="http://schemas.microsoft.com/office/drawing/2014/main" id="{01C9C55B-C83A-4D52-B10B-F073F8AE53DD}"/>
+                <a16:creationId xmlns:a16="http://schemas.microsoft.com/office/drawing/2014/main" id="{FA64A646-E385-4D34-9537-C87E97B00CA1}"/>
               </a:ext>
             </a:extLst>
           </p:cNvPr>
@@ -9001,7 +9001,7 @@
           <p:cNvPr id="9" name="case-row-2">
             <a:extLst xmlns:a="http://schemas.openxmlformats.org/drawingml/2006/main">
               <a:ext uri="{FF2B5EF4-FFF2-40B4-BE49-F238E27FC236}">
-                <a16:creationId xmlns:a16="http://schemas.microsoft.com/office/drawing/2014/main" id="{6A1028FB-1F2C-453E-849E-446217B8A74D}"/>
+                <a16:creationId xmlns:a16="http://schemas.microsoft.com/office/drawing/2014/main" id="{082CC239-F876-45E1-825C-4D992499E38E}"/>
               </a:ext>
             </a:extLst>
           </p:cNvPr>
@@ -9065,7 +9065,7 @@
           <p:cNvPr id="10" name="case-row-3">
             <a:extLst xmlns:a="http://schemas.openxmlformats.org/drawingml/2006/main">
               <a:ext uri="{FF2B5EF4-FFF2-40B4-BE49-F238E27FC236}">
-                <a16:creationId xmlns:a16="http://schemas.microsoft.com/office/drawing/2014/main" id="{75BDA859-5C8D-4E66-A20D-5818B9147C25}"/>
+                <a16:creationId xmlns:a16="http://schemas.microsoft.com/office/drawing/2014/main" id="{AEF525C2-E815-4A77-AFD9-940CEC0C8A8F}"/>
               </a:ext>
             </a:extLst>
           </p:cNvPr>
@@ -9129,7 +9129,7 @@
           <p:cNvPr id="11" name="case-row-4">
             <a:extLst xmlns:a="http://schemas.openxmlformats.org/drawingml/2006/main">
               <a:ext uri="{FF2B5EF4-FFF2-40B4-BE49-F238E27FC236}">
-                <a16:creationId xmlns:a16="http://schemas.microsoft.com/office/drawing/2014/main" id="{4A485EDA-74D0-4FB1-9A3E-253628FB992D}"/>
+                <a16:creationId xmlns:a16="http://schemas.microsoft.com/office/drawing/2014/main" id="{1D8B9241-4709-4B38-9F3B-D5A1AA5732DF}"/>
               </a:ext>
             </a:extLst>
           </p:cNvPr>
@@ -9193,7 +9193,7 @@
           <p:cNvPr id="12" name="s8-takeaway-rule">
             <a:extLst xmlns:a="http://schemas.openxmlformats.org/drawingml/2006/main">
               <a:ext uri="{FF2B5EF4-FFF2-40B4-BE49-F238E27FC236}">
-                <a16:creationId xmlns:a16="http://schemas.microsoft.com/office/drawing/2014/main" id="{FE22C3BB-46D4-489B-AA2B-40DE3C9E16AD}"/>
+                <a16:creationId xmlns:a16="http://schemas.microsoft.com/office/drawing/2014/main" id="{56FC44A9-0A7C-4383-98AA-5B644628E8F8}"/>
               </a:ext>
             </a:extLst>
           </p:cNvPr>
@@ -9226,7 +9226,7 @@
           <p:cNvPr id="13" name="s8-takeaway">
             <a:extLst xmlns:a="http://schemas.openxmlformats.org/drawingml/2006/main">
               <a:ext uri="{FF2B5EF4-FFF2-40B4-BE49-F238E27FC236}">
-                <a16:creationId xmlns:a16="http://schemas.microsoft.com/office/drawing/2014/main" id="{85757144-CE00-44F3-8A01-FA9EA56F4F75}"/>
+                <a16:creationId xmlns:a16="http://schemas.microsoft.com/office/drawing/2014/main" id="{ADAF3DED-3FDA-4091-91FD-6FAF9B6A26ED}"/>
               </a:ext>
             </a:extLst>
           </p:cNvPr>
@@ -9282,7 +9282,7 @@
     </p:spTree>
     <p:extLst>
       <p:ext uri="{BB962C8B-B14F-4D97-AF65-F5344CB8AC3E}">
-        <p14:creationId xmlns:p14="http://schemas.microsoft.com/office/powerpoint/2010/main" val="2037981951"/>
+        <p14:creationId xmlns:p14="http://schemas.microsoft.com/office/powerpoint/2010/main" val="1422757240"/>
       </p:ext>
     </p:extLst>
   </p:cSld>
@@ -9313,7 +9313,7 @@
           <p:cNvPr id="1" name="s9-rule">
             <a:extLst xmlns:a="http://schemas.openxmlformats.org/drawingml/2006/main">
               <a:ext uri="{FF2B5EF4-FFF2-40B4-BE49-F238E27FC236}">
-                <a16:creationId xmlns:a16="http://schemas.microsoft.com/office/drawing/2014/main" id="{3DC9E2CE-3BCE-4BB2-A85F-36C64AE98FF5}"/>
+                <a16:creationId xmlns:a16="http://schemas.microsoft.com/office/drawing/2014/main" id="{420AA6A0-D581-41CC-AC95-F836B02A09B6}"/>
               </a:ext>
             </a:extLst>
           </p:cNvPr>
@@ -9346,7 +9346,7 @@
           <p:cNvPr id="2" name="s9-eyebrow">
             <a:extLst xmlns:a="http://schemas.openxmlformats.org/drawingml/2006/main">
               <a:ext uri="{FF2B5EF4-FFF2-40B4-BE49-F238E27FC236}">
-                <a16:creationId xmlns:a16="http://schemas.microsoft.com/office/drawing/2014/main" id="{5EDBC3EB-9E26-48BD-B07D-D667E803EEAD}"/>
+                <a16:creationId xmlns:a16="http://schemas.microsoft.com/office/drawing/2014/main" id="{48ED1838-BE71-4D99-A2A4-E744B479A3FC}"/>
               </a:ext>
             </a:extLst>
           </p:cNvPr>
@@ -9404,7 +9404,7 @@
           <p:cNvPr id="3" name="s9-title">
             <a:extLst xmlns:a="http://schemas.openxmlformats.org/drawingml/2006/main">
               <a:ext uri="{FF2B5EF4-FFF2-40B4-BE49-F238E27FC236}">
-                <a16:creationId xmlns:a16="http://schemas.microsoft.com/office/drawing/2014/main" id="{802A9B83-6F49-4990-8CCB-EB375B66E963}"/>
+                <a16:creationId xmlns:a16="http://schemas.microsoft.com/office/drawing/2014/main" id="{4D679931-9255-4492-A05C-76B67CC13BE5}"/>
               </a:ext>
             </a:extLst>
           </p:cNvPr>
@@ -9462,7 +9462,7 @@
           <p:cNvPr id="4" name="s9-footer">
             <a:extLst xmlns:a="http://schemas.openxmlformats.org/drawingml/2006/main">
               <a:ext uri="{FF2B5EF4-FFF2-40B4-BE49-F238E27FC236}">
-                <a16:creationId xmlns:a16="http://schemas.microsoft.com/office/drawing/2014/main" id="{0E71DD24-CB77-48B6-B8C2-91FA27F6B3F3}"/>
+                <a16:creationId xmlns:a16="http://schemas.microsoft.com/office/drawing/2014/main" id="{8E4810BF-33C3-4E83-8496-3F6506695EDA}"/>
               </a:ext>
             </a:extLst>
           </p:cNvPr>
@@ -9493,7 +9493,7 @@
           <p:cNvPr id="5" name="s9-identity">
             <a:extLst xmlns:a="http://schemas.openxmlformats.org/drawingml/2006/main">
               <a:ext uri="{FF2B5EF4-FFF2-40B4-BE49-F238E27FC236}">
-                <a16:creationId xmlns:a16="http://schemas.microsoft.com/office/drawing/2014/main" id="{C3BD1C48-5321-4138-A85A-E2FE52D31801}"/>
+                <a16:creationId xmlns:a16="http://schemas.microsoft.com/office/drawing/2014/main" id="{F66866E3-092E-4A61-AFCF-A63EB826C7FA}"/>
               </a:ext>
             </a:extLst>
           </p:cNvPr>
@@ -9551,7 +9551,7 @@
           <p:cNvPr id="6" name="case-title">
             <a:extLst xmlns:a="http://schemas.openxmlformats.org/drawingml/2006/main">
               <a:ext uri="{FF2B5EF4-FFF2-40B4-BE49-F238E27FC236}">
-                <a16:creationId xmlns:a16="http://schemas.microsoft.com/office/drawing/2014/main" id="{59FBB0F1-C826-405E-9427-09AA9074BDDF}"/>
+                <a16:creationId xmlns:a16="http://schemas.microsoft.com/office/drawing/2014/main" id="{7CF79945-F5ED-4A4B-842E-6D1F269FEE98}"/>
               </a:ext>
             </a:extLst>
           </p:cNvPr>
@@ -9615,7 +9615,7 @@
           <p:cNvPr id="7" name="case-row-0">
             <a:extLst xmlns:a="http://schemas.openxmlformats.org/drawingml/2006/main">
               <a:ext uri="{FF2B5EF4-FFF2-40B4-BE49-F238E27FC236}">
-                <a16:creationId xmlns:a16="http://schemas.microsoft.com/office/drawing/2014/main" id="{54644EF9-381B-4235-9B82-715BCE438CE1}"/>
+                <a16:creationId xmlns:a16="http://schemas.microsoft.com/office/drawing/2014/main" id="{4DC7C9E4-3C85-41AB-8C1F-690C8D96CDFC}"/>
               </a:ext>
             </a:extLst>
           </p:cNvPr>
@@ -9679,7 +9679,7 @@
           <p:cNvPr id="8" name="case-row-1">
             <a:extLst xmlns:a="http://schemas.openxmlformats.org/drawingml/2006/main">
               <a:ext uri="{FF2B5EF4-FFF2-40B4-BE49-F238E27FC236}">
-                <a16:creationId xmlns:a16="http://schemas.microsoft.com/office/drawing/2014/main" id="{EE23408D-BA00-4C57-8F54-02AEF17C4878}"/>
+                <a16:creationId xmlns:a16="http://schemas.microsoft.com/office/drawing/2014/main" id="{A626F12A-CF4A-4151-BBFB-6DBB3AF9791A}"/>
               </a:ext>
             </a:extLst>
           </p:cNvPr>
@@ -9743,7 +9743,7 @@
           <p:cNvPr id="9" name="case-row-2">
             <a:extLst xmlns:a="http://schemas.openxmlformats.org/drawingml/2006/main">
               <a:ext uri="{FF2B5EF4-FFF2-40B4-BE49-F238E27FC236}">
-                <a16:creationId xmlns:a16="http://schemas.microsoft.com/office/drawing/2014/main" id="{55112D03-7EB5-4C43-BDA3-F47269C7E678}"/>
+                <a16:creationId xmlns:a16="http://schemas.microsoft.com/office/drawing/2014/main" id="{C8ABA322-A900-4F24-A297-C01E7C1C21C9}"/>
               </a:ext>
             </a:extLst>
           </p:cNvPr>
@@ -9807,7 +9807,7 @@
           <p:cNvPr id="10" name="case-row-3">
             <a:extLst xmlns:a="http://schemas.openxmlformats.org/drawingml/2006/main">
               <a:ext uri="{FF2B5EF4-FFF2-40B4-BE49-F238E27FC236}">
-                <a16:creationId xmlns:a16="http://schemas.microsoft.com/office/drawing/2014/main" id="{6AFF0F7E-8DAF-43DB-AC8E-EC56EDFB8720}"/>
+                <a16:creationId xmlns:a16="http://schemas.microsoft.com/office/drawing/2014/main" id="{D35718FB-56ED-42A8-B19A-6D4976024577}"/>
               </a:ext>
             </a:extLst>
           </p:cNvPr>
@@ -9871,7 +9871,7 @@
           <p:cNvPr id="11" name="s9-takeaway-rule">
             <a:extLst xmlns:a="http://schemas.openxmlformats.org/drawingml/2006/main">
               <a:ext uri="{FF2B5EF4-FFF2-40B4-BE49-F238E27FC236}">
-                <a16:creationId xmlns:a16="http://schemas.microsoft.com/office/drawing/2014/main" id="{767B6504-2FF1-4AE8-87FA-EC384D5FC659}"/>
+                <a16:creationId xmlns:a16="http://schemas.microsoft.com/office/drawing/2014/main" id="{1B7536E8-3922-4AE8-B8F3-10A0EEC3AB68}"/>
               </a:ext>
             </a:extLst>
           </p:cNvPr>
@@ -9904,7 +9904,7 @@
           <p:cNvPr id="12" name="s9-takeaway">
             <a:extLst xmlns:a="http://schemas.openxmlformats.org/drawingml/2006/main">
               <a:ext uri="{FF2B5EF4-FFF2-40B4-BE49-F238E27FC236}">
-                <a16:creationId xmlns:a16="http://schemas.microsoft.com/office/drawing/2014/main" id="{60478409-8444-4680-846C-7E8A1AFC9090}"/>
+                <a16:creationId xmlns:a16="http://schemas.microsoft.com/office/drawing/2014/main" id="{5A06D04D-DEC8-432C-B79B-97EBEDF73389}"/>
               </a:ext>
             </a:extLst>
           </p:cNvPr>
@@ -9960,7 +9960,7 @@
     </p:spTree>
     <p:extLst>
       <p:ext uri="{BB962C8B-B14F-4D97-AF65-F5344CB8AC3E}">
-        <p14:creationId xmlns:p14="http://schemas.microsoft.com/office/powerpoint/2010/main" val="121657082"/>
+        <p14:creationId xmlns:p14="http://schemas.microsoft.com/office/powerpoint/2010/main" val="275199405"/>
       </p:ext>
     </p:extLst>
   </p:cSld>

--- a/docs/public/course-assets/course-pptx/ov-006.pptx
+++ b/docs/public/course-assets/course-pptx/ov-006.pptx
@@ -2,24 +2,24 @@
 <file path=ppt/presentation.xml><?xml version="1.0" encoding="utf-8"?>
 <p:presentation xmlns:p="http://schemas.openxmlformats.org/presentationml/2006/main">
   <p:sldMasterIdLst>
-    <p:sldMasterId xmlns:r="http://schemas.openxmlformats.org/officeDocument/2006/relationships" id="2147483648" r:id="Rfc9902d40b134c4a"/>
+    <p:sldMasterId xmlns:r="http://schemas.openxmlformats.org/officeDocument/2006/relationships" id="2147483648" r:id="R0a6d6061ddf14fe7"/>
   </p:sldMasterIdLst>
   <p:notesMasterIdLst>
-    <p:notesMasterId xmlns:r="http://schemas.openxmlformats.org/officeDocument/2006/relationships" r:id="R0a86142bafec41c7"/>
+    <p:notesMasterId xmlns:r="http://schemas.openxmlformats.org/officeDocument/2006/relationships" r:id="Rf802d9c1b3e8403a"/>
   </p:notesMasterIdLst>
   <p:sldIdLst>
-    <p:sldId xmlns:r="http://schemas.openxmlformats.org/officeDocument/2006/relationships" id="256" r:id="Rac6d219b66b74a5c"/>
-    <p:sldId xmlns:r="http://schemas.openxmlformats.org/officeDocument/2006/relationships" id="257" r:id="Rd3219647af4542cb"/>
-    <p:sldId xmlns:r="http://schemas.openxmlformats.org/officeDocument/2006/relationships" id="258" r:id="R146f05c8f9b646bd"/>
-    <p:sldId xmlns:r="http://schemas.openxmlformats.org/officeDocument/2006/relationships" id="259" r:id="Rb4e5ad8faf1041c1"/>
-    <p:sldId xmlns:r="http://schemas.openxmlformats.org/officeDocument/2006/relationships" id="260" r:id="Rd7395c5c165b4091"/>
-    <p:sldId xmlns:r="http://schemas.openxmlformats.org/officeDocument/2006/relationships" id="261" r:id="Re1ae7576dceb4651"/>
-    <p:sldId xmlns:r="http://schemas.openxmlformats.org/officeDocument/2006/relationships" id="262" r:id="R9fffa5a448d74ebb"/>
-    <p:sldId xmlns:r="http://schemas.openxmlformats.org/officeDocument/2006/relationships" id="263" r:id="R160892137e2d4672"/>
-    <p:sldId xmlns:r="http://schemas.openxmlformats.org/officeDocument/2006/relationships" id="264" r:id="Rf61f1cfdafc246cf"/>
-    <p:sldId xmlns:r="http://schemas.openxmlformats.org/officeDocument/2006/relationships" id="265" r:id="R82970a4d4a0940cd"/>
-    <p:sldId xmlns:r="http://schemas.openxmlformats.org/officeDocument/2006/relationships" id="266" r:id="R6fe08070dfa64489"/>
-    <p:sldId xmlns:r="http://schemas.openxmlformats.org/officeDocument/2006/relationships" id="267" r:id="Rd451a1fe782a4ae5"/>
+    <p:sldId xmlns:r="http://schemas.openxmlformats.org/officeDocument/2006/relationships" id="256" r:id="Rec92dc8a83f54b54"/>
+    <p:sldId xmlns:r="http://schemas.openxmlformats.org/officeDocument/2006/relationships" id="257" r:id="Red42b39d0bb642d5"/>
+    <p:sldId xmlns:r="http://schemas.openxmlformats.org/officeDocument/2006/relationships" id="258" r:id="Rbacb5c458fa747ff"/>
+    <p:sldId xmlns:r="http://schemas.openxmlformats.org/officeDocument/2006/relationships" id="259" r:id="R35d9722979c14b5d"/>
+    <p:sldId xmlns:r="http://schemas.openxmlformats.org/officeDocument/2006/relationships" id="260" r:id="Ra19f96b17753445e"/>
+    <p:sldId xmlns:r="http://schemas.openxmlformats.org/officeDocument/2006/relationships" id="261" r:id="Rb9f86236d3984863"/>
+    <p:sldId xmlns:r="http://schemas.openxmlformats.org/officeDocument/2006/relationships" id="262" r:id="Rd9aab592ecc54fe7"/>
+    <p:sldId xmlns:r="http://schemas.openxmlformats.org/officeDocument/2006/relationships" id="263" r:id="Reaa8c63310774695"/>
+    <p:sldId xmlns:r="http://schemas.openxmlformats.org/officeDocument/2006/relationships" id="264" r:id="Rd439175132ba4e9b"/>
+    <p:sldId xmlns:r="http://schemas.openxmlformats.org/officeDocument/2006/relationships" id="265" r:id="R3c60da7e63ea4789"/>
+    <p:sldId xmlns:r="http://schemas.openxmlformats.org/officeDocument/2006/relationships" id="266" r:id="R940add7bf6f04f5f"/>
+    <p:sldId xmlns:r="http://schemas.openxmlformats.org/officeDocument/2006/relationships" id="267" r:id="R393ade1b38be4b5c"/>
   </p:sldIdLst>
   <p:sldSz cx="12192000" cy="6858000"/>
   <p:notesSz cx="6858000" cy="9144000"/>
@@ -1338,7 +1338,7 @@
   </p:cSld>
   <p:clrMap bg1="lt1" tx1="dk1" bg2="lt2" tx2="dk2" accent1="accent1" accent2="accent2" accent3="accent3" accent4="accent4" accent5="accent5" accent6="accent6" hlink="hlink" folHlink="folHlink"/>
   <p:sldLayoutIdLst>
-    <p:sldLayoutId xmlns:r="http://schemas.openxmlformats.org/officeDocument/2006/relationships" id="2147483649" r:id="R76413ec225c24731"/>
+    <p:sldLayoutId xmlns:r="http://schemas.openxmlformats.org/officeDocument/2006/relationships" id="2147483649" r:id="Recee62411ed34cac"/>
   </p:sldLayoutIdLst>
   <p:txStyles>
     <p:titleStyle>
@@ -1889,7 +1889,7 @@
           <p:cNvPr id="1" name="cover-rule">
             <a:extLst xmlns:a="http://schemas.openxmlformats.org/drawingml/2006/main">
               <a:ext uri="{FF2B5EF4-FFF2-40B4-BE49-F238E27FC236}">
-                <a16:creationId xmlns:a16="http://schemas.microsoft.com/office/drawing/2014/main" id="{B0F8EF2F-4C75-41ED-A972-550930AD42D2}"/>
+                <a16:creationId xmlns:a16="http://schemas.microsoft.com/office/drawing/2014/main" id="{A4DF58D5-D198-4841-998A-E92E6344D59B}"/>
               </a:ext>
             </a:extLst>
           </p:cNvPr>
@@ -1922,7 +1922,7 @@
           <p:cNvPr id="2" name="cover-ring-1">
             <a:extLst xmlns:a="http://schemas.openxmlformats.org/drawingml/2006/main">
               <a:ext uri="{FF2B5EF4-FFF2-40B4-BE49-F238E27FC236}">
-                <a16:creationId xmlns:a16="http://schemas.microsoft.com/office/drawing/2014/main" id="{5FC620C7-4A95-4641-A94C-B99127DB6ECF}"/>
+                <a16:creationId xmlns:a16="http://schemas.microsoft.com/office/drawing/2014/main" id="{81425E4D-C323-4632-B4CE-834A77DCC787}"/>
               </a:ext>
             </a:extLst>
           </p:cNvPr>
@@ -1953,7 +1953,7 @@
           <p:cNvPr id="3" name="cover-ring-2">
             <a:extLst xmlns:a="http://schemas.openxmlformats.org/drawingml/2006/main">
               <a:ext uri="{FF2B5EF4-FFF2-40B4-BE49-F238E27FC236}">
-                <a16:creationId xmlns:a16="http://schemas.microsoft.com/office/drawing/2014/main" id="{64ABEA77-970E-4023-89F4-113CEEC66555}"/>
+                <a16:creationId xmlns:a16="http://schemas.microsoft.com/office/drawing/2014/main" id="{C273565F-4466-408A-BDDC-7A53E0DCB7ED}"/>
               </a:ext>
             </a:extLst>
           </p:cNvPr>
@@ -1984,7 +1984,7 @@
           <p:cNvPr id="4" name="cover-core">
             <a:extLst xmlns:a="http://schemas.openxmlformats.org/drawingml/2006/main">
               <a:ext uri="{FF2B5EF4-FFF2-40B4-BE49-F238E27FC236}">
-                <a16:creationId xmlns:a16="http://schemas.microsoft.com/office/drawing/2014/main" id="{6A82A6BA-0DE7-4758-B49F-C214CBEBB718}"/>
+                <a16:creationId xmlns:a16="http://schemas.microsoft.com/office/drawing/2014/main" id="{FC38D424-C47D-4C9F-AE1B-1AE2AF3DEFEA}"/>
               </a:ext>
             </a:extLst>
           </p:cNvPr>
@@ -2017,7 +2017,7 @@
           <p:cNvPr id="5" name="cover-line-1">
             <a:extLst xmlns:a="http://schemas.openxmlformats.org/drawingml/2006/main">
               <a:ext uri="{FF2B5EF4-FFF2-40B4-BE49-F238E27FC236}">
-                <a16:creationId xmlns:a16="http://schemas.microsoft.com/office/drawing/2014/main" id="{95F8681C-86A7-4B3E-A0F8-2252D59B0215}"/>
+                <a16:creationId xmlns:a16="http://schemas.microsoft.com/office/drawing/2014/main" id="{6E8B72D9-30D5-4606-BD54-DF431CA51060}"/>
               </a:ext>
             </a:extLst>
           </p:cNvPr>
@@ -2048,7 +2048,7 @@
           <p:cNvPr id="6" name="cover-line-2">
             <a:extLst xmlns:a="http://schemas.openxmlformats.org/drawingml/2006/main">
               <a:ext uri="{FF2B5EF4-FFF2-40B4-BE49-F238E27FC236}">
-                <a16:creationId xmlns:a16="http://schemas.microsoft.com/office/drawing/2014/main" id="{18724328-E28D-4103-822A-79B5507BB90E}"/>
+                <a16:creationId xmlns:a16="http://schemas.microsoft.com/office/drawing/2014/main" id="{17ECAAF4-CA40-4E4B-93D5-032154C30857}"/>
               </a:ext>
             </a:extLst>
           </p:cNvPr>
@@ -2079,7 +2079,7 @@
           <p:cNvPr id="7" name="cover-eyebrow">
             <a:extLst xmlns:a="http://schemas.openxmlformats.org/drawingml/2006/main">
               <a:ext uri="{FF2B5EF4-FFF2-40B4-BE49-F238E27FC236}">
-                <a16:creationId xmlns:a16="http://schemas.microsoft.com/office/drawing/2014/main" id="{1A892161-5DBC-449E-8C46-DFFD1B0F8539}"/>
+                <a16:creationId xmlns:a16="http://schemas.microsoft.com/office/drawing/2014/main" id="{DD6AB0F8-2321-45B0-AAAD-4ADDDB7D9028}"/>
               </a:ext>
             </a:extLst>
           </p:cNvPr>
@@ -2137,7 +2137,7 @@
           <p:cNvPr id="8" name="cover-title">
             <a:extLst xmlns:a="http://schemas.openxmlformats.org/drawingml/2006/main">
               <a:ext uri="{FF2B5EF4-FFF2-40B4-BE49-F238E27FC236}">
-                <a16:creationId xmlns:a16="http://schemas.microsoft.com/office/drawing/2014/main" id="{CAEF08F6-B192-44EA-AC13-D43F31FE7B6A}"/>
+                <a16:creationId xmlns:a16="http://schemas.microsoft.com/office/drawing/2014/main" id="{7789F0A7-B28C-4E54-9A25-A047838065B2}"/>
               </a:ext>
             </a:extLst>
           </p:cNvPr>
@@ -2195,7 +2195,7 @@
           <p:cNvPr id="9" name="cover-subtitle">
             <a:extLst xmlns:a="http://schemas.openxmlformats.org/drawingml/2006/main">
               <a:ext uri="{FF2B5EF4-FFF2-40B4-BE49-F238E27FC236}">
-                <a16:creationId xmlns:a16="http://schemas.microsoft.com/office/drawing/2014/main" id="{31709030-95D1-498C-91DF-1ECBE904A811}"/>
+                <a16:creationId xmlns:a16="http://schemas.microsoft.com/office/drawing/2014/main" id="{BCAA29DB-B390-4349-B173-DE5B77C03B94}"/>
               </a:ext>
             </a:extLst>
           </p:cNvPr>
@@ -2257,7 +2257,7 @@
           <p:cNvPr id="10" name="cover-lead">
             <a:extLst xmlns:a="http://schemas.openxmlformats.org/drawingml/2006/main">
               <a:ext uri="{FF2B5EF4-FFF2-40B4-BE49-F238E27FC236}">
-                <a16:creationId xmlns:a16="http://schemas.microsoft.com/office/drawing/2014/main" id="{268C5508-2E16-494B-B652-936BCE1521C1}"/>
+                <a16:creationId xmlns:a16="http://schemas.microsoft.com/office/drawing/2014/main" id="{5A3BCD29-34BE-48CF-9379-E0152F8091ED}"/>
               </a:ext>
             </a:extLst>
           </p:cNvPr>
@@ -2315,7 +2315,7 @@
           <p:cNvPr id="11" name="cover-course">
             <a:extLst xmlns:a="http://schemas.openxmlformats.org/drawingml/2006/main">
               <a:ext uri="{FF2B5EF4-FFF2-40B4-BE49-F238E27FC236}">
-                <a16:creationId xmlns:a16="http://schemas.microsoft.com/office/drawing/2014/main" id="{8C2572C9-7900-4CD4-8532-FBD59775C073}"/>
+                <a16:creationId xmlns:a16="http://schemas.microsoft.com/office/drawing/2014/main" id="{FA7C7254-5A91-47F1-A203-93A3610E35EE}"/>
               </a:ext>
             </a:extLst>
           </p:cNvPr>
@@ -2373,7 +2373,7 @@
           <p:cNvPr id="12" name="cover-id">
             <a:extLst xmlns:a="http://schemas.openxmlformats.org/drawingml/2006/main">
               <a:ext uri="{FF2B5EF4-FFF2-40B4-BE49-F238E27FC236}">
-                <a16:creationId xmlns:a16="http://schemas.microsoft.com/office/drawing/2014/main" id="{F69D4BD8-E2B2-47E1-A7AF-1205B7632195}"/>
+                <a16:creationId xmlns:a16="http://schemas.microsoft.com/office/drawing/2014/main" id="{C7F94D44-98CA-42A4-9119-E4339947CA73}"/>
               </a:ext>
             </a:extLst>
           </p:cNvPr>
@@ -2429,7 +2429,7 @@
     </p:spTree>
     <p:extLst>
       <p:ext uri="{BB962C8B-B14F-4D97-AF65-F5344CB8AC3E}">
-        <p14:creationId xmlns:p14="http://schemas.microsoft.com/office/powerpoint/2010/main" val="1250714799"/>
+        <p14:creationId xmlns:p14="http://schemas.microsoft.com/office/powerpoint/2010/main" val="1474844048"/>
       </p:ext>
     </p:extLst>
   </p:cSld>
@@ -2460,7 +2460,7 @@
           <p:cNvPr id="1" name="s10-rule">
             <a:extLst xmlns:a="http://schemas.openxmlformats.org/drawingml/2006/main">
               <a:ext uri="{FF2B5EF4-FFF2-40B4-BE49-F238E27FC236}">
-                <a16:creationId xmlns:a16="http://schemas.microsoft.com/office/drawing/2014/main" id="{97854CDB-5CCC-44C3-9613-4D103A35AEB1}"/>
+                <a16:creationId xmlns:a16="http://schemas.microsoft.com/office/drawing/2014/main" id="{602A8A45-535B-4973-8426-A863A981FA87}"/>
               </a:ext>
             </a:extLst>
           </p:cNvPr>
@@ -2493,7 +2493,7 @@
           <p:cNvPr id="2" name="s10-eyebrow">
             <a:extLst xmlns:a="http://schemas.openxmlformats.org/drawingml/2006/main">
               <a:ext uri="{FF2B5EF4-FFF2-40B4-BE49-F238E27FC236}">
-                <a16:creationId xmlns:a16="http://schemas.microsoft.com/office/drawing/2014/main" id="{1DDBD0E0-D236-4927-B780-73ED47C9F0E5}"/>
+                <a16:creationId xmlns:a16="http://schemas.microsoft.com/office/drawing/2014/main" id="{4FBA7344-4799-4F8D-8794-FA809BC7617B}"/>
               </a:ext>
             </a:extLst>
           </p:cNvPr>
@@ -2551,7 +2551,7 @@
           <p:cNvPr id="3" name="s10-title">
             <a:extLst xmlns:a="http://schemas.openxmlformats.org/drawingml/2006/main">
               <a:ext uri="{FF2B5EF4-FFF2-40B4-BE49-F238E27FC236}">
-                <a16:creationId xmlns:a16="http://schemas.microsoft.com/office/drawing/2014/main" id="{F5BAB4E1-BBD2-4929-8210-3494A4FBE4AA}"/>
+                <a16:creationId xmlns:a16="http://schemas.microsoft.com/office/drawing/2014/main" id="{D1C4001E-A8DE-48FD-BCD2-A5EA3B0C5637}"/>
               </a:ext>
             </a:extLst>
           </p:cNvPr>
@@ -2609,7 +2609,7 @@
           <p:cNvPr id="4" name="s10-footer">
             <a:extLst xmlns:a="http://schemas.openxmlformats.org/drawingml/2006/main">
               <a:ext uri="{FF2B5EF4-FFF2-40B4-BE49-F238E27FC236}">
-                <a16:creationId xmlns:a16="http://schemas.microsoft.com/office/drawing/2014/main" id="{A725976E-8142-4692-B78D-962A29B4B813}"/>
+                <a16:creationId xmlns:a16="http://schemas.microsoft.com/office/drawing/2014/main" id="{C1B7320C-B7C4-4019-8EF9-B0BF811F5ABA}"/>
               </a:ext>
             </a:extLst>
           </p:cNvPr>
@@ -2640,7 +2640,7 @@
           <p:cNvPr id="5" name="s10-identity">
             <a:extLst xmlns:a="http://schemas.openxmlformats.org/drawingml/2006/main">
               <a:ext uri="{FF2B5EF4-FFF2-40B4-BE49-F238E27FC236}">
-                <a16:creationId xmlns:a16="http://schemas.microsoft.com/office/drawing/2014/main" id="{FF4C7F34-D838-4A73-8186-5892D8EEA942}"/>
+                <a16:creationId xmlns:a16="http://schemas.microsoft.com/office/drawing/2014/main" id="{E1F0A685-5495-4B63-8F17-E5C9037C6420}"/>
               </a:ext>
             </a:extLst>
           </p:cNvPr>
@@ -2698,7 +2698,7 @@
           <p:cNvPr id="6" name="practice-circle-0">
             <a:extLst xmlns:a="http://schemas.openxmlformats.org/drawingml/2006/main">
               <a:ext uri="{FF2B5EF4-FFF2-40B4-BE49-F238E27FC236}">
-                <a16:creationId xmlns:a16="http://schemas.microsoft.com/office/drawing/2014/main" id="{B45BAD99-49D7-4666-8622-DF2450BE0DC3}"/>
+                <a16:creationId xmlns:a16="http://schemas.microsoft.com/office/drawing/2014/main" id="{EE2ACF7D-1F67-430C-A166-0FDBFDF8C8BB}"/>
               </a:ext>
             </a:extLst>
           </p:cNvPr>
@@ -2731,7 +2731,7 @@
           <p:cNvPr id="7" name="practice-number-0">
             <a:extLst xmlns:a="http://schemas.openxmlformats.org/drawingml/2006/main">
               <a:ext uri="{FF2B5EF4-FFF2-40B4-BE49-F238E27FC236}">
-                <a16:creationId xmlns:a16="http://schemas.microsoft.com/office/drawing/2014/main" id="{302F03CC-2647-4F6C-B6D9-4614D05A6F7A}"/>
+                <a16:creationId xmlns:a16="http://schemas.microsoft.com/office/drawing/2014/main" id="{215FC40B-3CDB-4B35-A345-8D68B9537A71}"/>
               </a:ext>
             </a:extLst>
           </p:cNvPr>
@@ -2789,7 +2789,7 @@
           <p:cNvPr id="8" name="practice-item-0">
             <a:extLst xmlns:a="http://schemas.openxmlformats.org/drawingml/2006/main">
               <a:ext uri="{FF2B5EF4-FFF2-40B4-BE49-F238E27FC236}">
-                <a16:creationId xmlns:a16="http://schemas.microsoft.com/office/drawing/2014/main" id="{B81511B9-71FC-43BD-8678-7574C1BA7A04}"/>
+                <a16:creationId xmlns:a16="http://schemas.microsoft.com/office/drawing/2014/main" id="{F78B61AA-ADCE-4457-B431-F84204B8F26F}"/>
               </a:ext>
             </a:extLst>
           </p:cNvPr>
@@ -2853,7 +2853,7 @@
           <p:cNvPr id="9" name="practice-connector-0">
             <a:extLst xmlns:a="http://schemas.openxmlformats.org/drawingml/2006/main">
               <a:ext uri="{FF2B5EF4-FFF2-40B4-BE49-F238E27FC236}">
-                <a16:creationId xmlns:a16="http://schemas.microsoft.com/office/drawing/2014/main" id="{A52D5698-CF87-4709-9148-D021A005930B}"/>
+                <a16:creationId xmlns:a16="http://schemas.microsoft.com/office/drawing/2014/main" id="{6216980D-0076-4F74-8555-DB53BA48A392}"/>
               </a:ext>
             </a:extLst>
           </p:cNvPr>
@@ -2884,7 +2884,7 @@
           <p:cNvPr id="10" name="practice-circle-1">
             <a:extLst xmlns:a="http://schemas.openxmlformats.org/drawingml/2006/main">
               <a:ext uri="{FF2B5EF4-FFF2-40B4-BE49-F238E27FC236}">
-                <a16:creationId xmlns:a16="http://schemas.microsoft.com/office/drawing/2014/main" id="{4FC52457-7D0B-4819-AF67-154731DF64BB}"/>
+                <a16:creationId xmlns:a16="http://schemas.microsoft.com/office/drawing/2014/main" id="{C965D6B9-E82B-43D3-BB7F-79264E5E54A5}"/>
               </a:ext>
             </a:extLst>
           </p:cNvPr>
@@ -2917,7 +2917,7 @@
           <p:cNvPr id="11" name="practice-number-1">
             <a:extLst xmlns:a="http://schemas.openxmlformats.org/drawingml/2006/main">
               <a:ext uri="{FF2B5EF4-FFF2-40B4-BE49-F238E27FC236}">
-                <a16:creationId xmlns:a16="http://schemas.microsoft.com/office/drawing/2014/main" id="{183F44FD-8C04-4DAD-9840-BBC8AE4BBA6E}"/>
+                <a16:creationId xmlns:a16="http://schemas.microsoft.com/office/drawing/2014/main" id="{0D235372-DA40-4EA6-8837-A0B6F96DE43B}"/>
               </a:ext>
             </a:extLst>
           </p:cNvPr>
@@ -2975,7 +2975,7 @@
           <p:cNvPr id="12" name="practice-item-1">
             <a:extLst xmlns:a="http://schemas.openxmlformats.org/drawingml/2006/main">
               <a:ext uri="{FF2B5EF4-FFF2-40B4-BE49-F238E27FC236}">
-                <a16:creationId xmlns:a16="http://schemas.microsoft.com/office/drawing/2014/main" id="{A88ED311-6161-443D-B9C4-CC3DE52003A5}"/>
+                <a16:creationId xmlns:a16="http://schemas.microsoft.com/office/drawing/2014/main" id="{2A493DFA-CBC6-4DAF-8B9C-BD88AD35F781}"/>
               </a:ext>
             </a:extLst>
           </p:cNvPr>
@@ -3039,7 +3039,7 @@
           <p:cNvPr id="13" name="practice-connector-1">
             <a:extLst xmlns:a="http://schemas.openxmlformats.org/drawingml/2006/main">
               <a:ext uri="{FF2B5EF4-FFF2-40B4-BE49-F238E27FC236}">
-                <a16:creationId xmlns:a16="http://schemas.microsoft.com/office/drawing/2014/main" id="{8FB5FB79-1438-499D-96D7-0B0F80A0DF86}"/>
+                <a16:creationId xmlns:a16="http://schemas.microsoft.com/office/drawing/2014/main" id="{82905C5B-E377-40D4-8D62-3C630DB4B6BE}"/>
               </a:ext>
             </a:extLst>
           </p:cNvPr>
@@ -3070,7 +3070,7 @@
           <p:cNvPr id="14" name="practice-circle-2">
             <a:extLst xmlns:a="http://schemas.openxmlformats.org/drawingml/2006/main">
               <a:ext uri="{FF2B5EF4-FFF2-40B4-BE49-F238E27FC236}">
-                <a16:creationId xmlns:a16="http://schemas.microsoft.com/office/drawing/2014/main" id="{64A7498D-83D4-4D3B-8F93-C5741514D706}"/>
+                <a16:creationId xmlns:a16="http://schemas.microsoft.com/office/drawing/2014/main" id="{FCAD5FB8-BCD4-4473-AE37-156C04212723}"/>
               </a:ext>
             </a:extLst>
           </p:cNvPr>
@@ -3103,7 +3103,7 @@
           <p:cNvPr id="15" name="practice-number-2">
             <a:extLst xmlns:a="http://schemas.openxmlformats.org/drawingml/2006/main">
               <a:ext uri="{FF2B5EF4-FFF2-40B4-BE49-F238E27FC236}">
-                <a16:creationId xmlns:a16="http://schemas.microsoft.com/office/drawing/2014/main" id="{B818B60F-313C-4FB9-B831-A7CC10591D93}"/>
+                <a16:creationId xmlns:a16="http://schemas.microsoft.com/office/drawing/2014/main" id="{A1E3B26B-3EBB-47B5-ADAC-F16D63B9317B}"/>
               </a:ext>
             </a:extLst>
           </p:cNvPr>
@@ -3161,7 +3161,7 @@
           <p:cNvPr id="16" name="practice-item-2">
             <a:extLst xmlns:a="http://schemas.openxmlformats.org/drawingml/2006/main">
               <a:ext uri="{FF2B5EF4-FFF2-40B4-BE49-F238E27FC236}">
-                <a16:creationId xmlns:a16="http://schemas.microsoft.com/office/drawing/2014/main" id="{69BE970B-64E4-4C52-BD54-228B9320950B}"/>
+                <a16:creationId xmlns:a16="http://schemas.microsoft.com/office/drawing/2014/main" id="{E4619FBD-A63D-4501-B8AD-30033C8DF2D5}"/>
               </a:ext>
             </a:extLst>
           </p:cNvPr>
@@ -3223,7 +3223,7 @@
     </p:spTree>
     <p:extLst>
       <p:ext uri="{BB962C8B-B14F-4D97-AF65-F5344CB8AC3E}">
-        <p14:creationId xmlns:p14="http://schemas.microsoft.com/office/powerpoint/2010/main" val="1864338397"/>
+        <p14:creationId xmlns:p14="http://schemas.microsoft.com/office/powerpoint/2010/main" val="566863108"/>
       </p:ext>
     </p:extLst>
   </p:cSld>
@@ -3254,7 +3254,7 @@
           <p:cNvPr id="1" name="s11-rule">
             <a:extLst xmlns:a="http://schemas.openxmlformats.org/drawingml/2006/main">
               <a:ext uri="{FF2B5EF4-FFF2-40B4-BE49-F238E27FC236}">
-                <a16:creationId xmlns:a16="http://schemas.microsoft.com/office/drawing/2014/main" id="{8B4CA27B-8CC7-4D8B-B725-509F20ACDF90}"/>
+                <a16:creationId xmlns:a16="http://schemas.microsoft.com/office/drawing/2014/main" id="{5E49E801-4D6C-4B4E-BE1F-CC865CB037B3}"/>
               </a:ext>
             </a:extLst>
           </p:cNvPr>
@@ -3287,7 +3287,7 @@
           <p:cNvPr id="2" name="s11-eyebrow">
             <a:extLst xmlns:a="http://schemas.openxmlformats.org/drawingml/2006/main">
               <a:ext uri="{FF2B5EF4-FFF2-40B4-BE49-F238E27FC236}">
-                <a16:creationId xmlns:a16="http://schemas.microsoft.com/office/drawing/2014/main" id="{E39BB136-849E-44E5-B40A-9693407FDFDD}"/>
+                <a16:creationId xmlns:a16="http://schemas.microsoft.com/office/drawing/2014/main" id="{5BDF7EEF-65D9-4C7B-BD75-12719C2C2970}"/>
               </a:ext>
             </a:extLst>
           </p:cNvPr>
@@ -3345,7 +3345,7 @@
           <p:cNvPr id="3" name="s11-title">
             <a:extLst xmlns:a="http://schemas.openxmlformats.org/drawingml/2006/main">
               <a:ext uri="{FF2B5EF4-FFF2-40B4-BE49-F238E27FC236}">
-                <a16:creationId xmlns:a16="http://schemas.microsoft.com/office/drawing/2014/main" id="{82B1E5EC-62F5-47EF-BE3E-400E8AFC87B0}"/>
+                <a16:creationId xmlns:a16="http://schemas.microsoft.com/office/drawing/2014/main" id="{ABBC5776-02D1-4B2F-B948-D2ECE7AC84C2}"/>
               </a:ext>
             </a:extLst>
           </p:cNvPr>
@@ -3403,7 +3403,7 @@
           <p:cNvPr id="4" name="s11-footer">
             <a:extLst xmlns:a="http://schemas.openxmlformats.org/drawingml/2006/main">
               <a:ext uri="{FF2B5EF4-FFF2-40B4-BE49-F238E27FC236}">
-                <a16:creationId xmlns:a16="http://schemas.microsoft.com/office/drawing/2014/main" id="{65327173-358A-4DED-8302-280A048C338E}"/>
+                <a16:creationId xmlns:a16="http://schemas.microsoft.com/office/drawing/2014/main" id="{F946E7B9-0DE8-4601-85F6-B0819657F8FC}"/>
               </a:ext>
             </a:extLst>
           </p:cNvPr>
@@ -3434,7 +3434,7 @@
           <p:cNvPr id="5" name="s11-identity">
             <a:extLst xmlns:a="http://schemas.openxmlformats.org/drawingml/2006/main">
               <a:ext uri="{FF2B5EF4-FFF2-40B4-BE49-F238E27FC236}">
-                <a16:creationId xmlns:a16="http://schemas.microsoft.com/office/drawing/2014/main" id="{325D700F-9D8F-4DB0-9C25-44E9EDBD9AA1}"/>
+                <a16:creationId xmlns:a16="http://schemas.microsoft.com/office/drawing/2014/main" id="{39254CBF-2A17-43AF-B1AE-67ACDFEA34DF}"/>
               </a:ext>
             </a:extLst>
           </p:cNvPr>
@@ -3492,7 +3492,7 @@
           <p:cNvPr id="6" name="recap-circle-0">
             <a:extLst xmlns:a="http://schemas.openxmlformats.org/drawingml/2006/main">
               <a:ext uri="{FF2B5EF4-FFF2-40B4-BE49-F238E27FC236}">
-                <a16:creationId xmlns:a16="http://schemas.microsoft.com/office/drawing/2014/main" id="{234B97D3-D708-4183-AB11-4A45B6132947}"/>
+                <a16:creationId xmlns:a16="http://schemas.microsoft.com/office/drawing/2014/main" id="{4A5C1C80-3E18-4B00-96CA-D7F9007B1F73}"/>
               </a:ext>
             </a:extLst>
           </p:cNvPr>
@@ -3525,7 +3525,7 @@
           <p:cNvPr id="7" name="recap-number-0">
             <a:extLst xmlns:a="http://schemas.openxmlformats.org/drawingml/2006/main">
               <a:ext uri="{FF2B5EF4-FFF2-40B4-BE49-F238E27FC236}">
-                <a16:creationId xmlns:a16="http://schemas.microsoft.com/office/drawing/2014/main" id="{C08C48B4-2566-40A3-92CF-26BED2F430FB}"/>
+                <a16:creationId xmlns:a16="http://schemas.microsoft.com/office/drawing/2014/main" id="{46F45309-F1F6-4D4F-B47C-4C98693AFFAC}"/>
               </a:ext>
             </a:extLst>
           </p:cNvPr>
@@ -3583,7 +3583,7 @@
           <p:cNvPr id="8" name="recap-item-0">
             <a:extLst xmlns:a="http://schemas.openxmlformats.org/drawingml/2006/main">
               <a:ext uri="{FF2B5EF4-FFF2-40B4-BE49-F238E27FC236}">
-                <a16:creationId xmlns:a16="http://schemas.microsoft.com/office/drawing/2014/main" id="{69EDF937-D23B-482F-9C3C-4A1DD58C89F6}"/>
+                <a16:creationId xmlns:a16="http://schemas.microsoft.com/office/drawing/2014/main" id="{6AF4A2F1-C4A9-4773-83C5-A18DA4A6BA81}"/>
               </a:ext>
             </a:extLst>
           </p:cNvPr>
@@ -3647,7 +3647,7 @@
           <p:cNvPr id="9" name="recap-connector-0">
             <a:extLst xmlns:a="http://schemas.openxmlformats.org/drawingml/2006/main">
               <a:ext uri="{FF2B5EF4-FFF2-40B4-BE49-F238E27FC236}">
-                <a16:creationId xmlns:a16="http://schemas.microsoft.com/office/drawing/2014/main" id="{CB8B8B84-D386-4454-9B05-DC3BE221D794}"/>
+                <a16:creationId xmlns:a16="http://schemas.microsoft.com/office/drawing/2014/main" id="{04AC191D-FB00-4A5E-9FA3-32968972FAB0}"/>
               </a:ext>
             </a:extLst>
           </p:cNvPr>
@@ -3678,7 +3678,7 @@
           <p:cNvPr id="10" name="recap-circle-1">
             <a:extLst xmlns:a="http://schemas.openxmlformats.org/drawingml/2006/main">
               <a:ext uri="{FF2B5EF4-FFF2-40B4-BE49-F238E27FC236}">
-                <a16:creationId xmlns:a16="http://schemas.microsoft.com/office/drawing/2014/main" id="{FBC6C0BE-FC4F-4629-8941-197DD6F591E9}"/>
+                <a16:creationId xmlns:a16="http://schemas.microsoft.com/office/drawing/2014/main" id="{9804BFEE-4708-4D74-9B08-C37D32714E29}"/>
               </a:ext>
             </a:extLst>
           </p:cNvPr>
@@ -3711,7 +3711,7 @@
           <p:cNvPr id="11" name="recap-number-1">
             <a:extLst xmlns:a="http://schemas.openxmlformats.org/drawingml/2006/main">
               <a:ext uri="{FF2B5EF4-FFF2-40B4-BE49-F238E27FC236}">
-                <a16:creationId xmlns:a16="http://schemas.microsoft.com/office/drawing/2014/main" id="{03B814FB-A261-45CA-85EC-74CDF2DE14DA}"/>
+                <a16:creationId xmlns:a16="http://schemas.microsoft.com/office/drawing/2014/main" id="{3722CC78-5975-4516-A485-7B3B7C2D7E2B}"/>
               </a:ext>
             </a:extLst>
           </p:cNvPr>
@@ -3769,7 +3769,7 @@
           <p:cNvPr id="12" name="recap-item-1">
             <a:extLst xmlns:a="http://schemas.openxmlformats.org/drawingml/2006/main">
               <a:ext uri="{FF2B5EF4-FFF2-40B4-BE49-F238E27FC236}">
-                <a16:creationId xmlns:a16="http://schemas.microsoft.com/office/drawing/2014/main" id="{3095212B-9384-42BA-AD20-493EF18B4411}"/>
+                <a16:creationId xmlns:a16="http://schemas.microsoft.com/office/drawing/2014/main" id="{D8BEC996-C8C3-4E2F-B2D5-5B0EB69E67E3}"/>
               </a:ext>
             </a:extLst>
           </p:cNvPr>
@@ -3833,7 +3833,7 @@
           <p:cNvPr id="13" name="recap-connector-1">
             <a:extLst xmlns:a="http://schemas.openxmlformats.org/drawingml/2006/main">
               <a:ext uri="{FF2B5EF4-FFF2-40B4-BE49-F238E27FC236}">
-                <a16:creationId xmlns:a16="http://schemas.microsoft.com/office/drawing/2014/main" id="{85C2A59D-1FE6-4484-B675-BBC2076DE142}"/>
+                <a16:creationId xmlns:a16="http://schemas.microsoft.com/office/drawing/2014/main" id="{C904B897-08D5-489E-A48D-85EB6609A7C7}"/>
               </a:ext>
             </a:extLst>
           </p:cNvPr>
@@ -3864,7 +3864,7 @@
           <p:cNvPr id="14" name="recap-circle-2">
             <a:extLst xmlns:a="http://schemas.openxmlformats.org/drawingml/2006/main">
               <a:ext uri="{FF2B5EF4-FFF2-40B4-BE49-F238E27FC236}">
-                <a16:creationId xmlns:a16="http://schemas.microsoft.com/office/drawing/2014/main" id="{10B6E5EC-778A-4EE7-B5AA-4D455595F880}"/>
+                <a16:creationId xmlns:a16="http://schemas.microsoft.com/office/drawing/2014/main" id="{8B9DC980-5FC1-4B42-AC14-B9DBAC15AD03}"/>
               </a:ext>
             </a:extLst>
           </p:cNvPr>
@@ -3897,7 +3897,7 @@
           <p:cNvPr id="15" name="recap-number-2">
             <a:extLst xmlns:a="http://schemas.openxmlformats.org/drawingml/2006/main">
               <a:ext uri="{FF2B5EF4-FFF2-40B4-BE49-F238E27FC236}">
-                <a16:creationId xmlns:a16="http://schemas.microsoft.com/office/drawing/2014/main" id="{DB9B2E0D-2E48-48D2-BF69-7B20F885FEB0}"/>
+                <a16:creationId xmlns:a16="http://schemas.microsoft.com/office/drawing/2014/main" id="{EAC3EE2A-2B9D-4E01-ABD4-64755C648B91}"/>
               </a:ext>
             </a:extLst>
           </p:cNvPr>
@@ -3955,7 +3955,7 @@
           <p:cNvPr id="16" name="recap-item-2">
             <a:extLst xmlns:a="http://schemas.openxmlformats.org/drawingml/2006/main">
               <a:ext uri="{FF2B5EF4-FFF2-40B4-BE49-F238E27FC236}">
-                <a16:creationId xmlns:a16="http://schemas.microsoft.com/office/drawing/2014/main" id="{6E7B0104-45E5-4D26-A86F-4AB9848984FF}"/>
+                <a16:creationId xmlns:a16="http://schemas.microsoft.com/office/drawing/2014/main" id="{FD3BB079-F31A-4796-8065-FCF872159646}"/>
               </a:ext>
             </a:extLst>
           </p:cNvPr>
@@ -4017,7 +4017,7 @@
     </p:spTree>
     <p:extLst>
       <p:ext uri="{BB962C8B-B14F-4D97-AF65-F5344CB8AC3E}">
-        <p14:creationId xmlns:p14="http://schemas.microsoft.com/office/powerpoint/2010/main" val="1786245430"/>
+        <p14:creationId xmlns:p14="http://schemas.microsoft.com/office/powerpoint/2010/main" val="1232632916"/>
       </p:ext>
     </p:extLst>
   </p:cSld>
@@ -4048,7 +4048,7 @@
           <p:cNvPr id="1" name="s12-rule">
             <a:extLst xmlns:a="http://schemas.openxmlformats.org/drawingml/2006/main">
               <a:ext uri="{FF2B5EF4-FFF2-40B4-BE49-F238E27FC236}">
-                <a16:creationId xmlns:a16="http://schemas.microsoft.com/office/drawing/2014/main" id="{D5869295-05D3-47E1-8621-D99E229E411F}"/>
+                <a16:creationId xmlns:a16="http://schemas.microsoft.com/office/drawing/2014/main" id="{B44741DA-F733-43DD-908F-02E8BF0FDA2C}"/>
               </a:ext>
             </a:extLst>
           </p:cNvPr>
@@ -4081,7 +4081,7 @@
           <p:cNvPr id="2" name="s12-eyebrow">
             <a:extLst xmlns:a="http://schemas.openxmlformats.org/drawingml/2006/main">
               <a:ext uri="{FF2B5EF4-FFF2-40B4-BE49-F238E27FC236}">
-                <a16:creationId xmlns:a16="http://schemas.microsoft.com/office/drawing/2014/main" id="{92939E1D-D8C4-4389-BA51-B2E37A781A75}"/>
+                <a16:creationId xmlns:a16="http://schemas.microsoft.com/office/drawing/2014/main" id="{81A3A7F6-762D-4A92-A3EB-381F95CB3CFA}"/>
               </a:ext>
             </a:extLst>
           </p:cNvPr>
@@ -4139,7 +4139,7 @@
           <p:cNvPr id="3" name="s12-title">
             <a:extLst xmlns:a="http://schemas.openxmlformats.org/drawingml/2006/main">
               <a:ext uri="{FF2B5EF4-FFF2-40B4-BE49-F238E27FC236}">
-                <a16:creationId xmlns:a16="http://schemas.microsoft.com/office/drawing/2014/main" id="{535EC1A6-15D2-4B7F-A4C4-1812BBF4487F}"/>
+                <a16:creationId xmlns:a16="http://schemas.microsoft.com/office/drawing/2014/main" id="{1306FFB8-A77A-4286-B237-415E58798D5C}"/>
               </a:ext>
             </a:extLst>
           </p:cNvPr>
@@ -4197,7 +4197,7 @@
           <p:cNvPr id="4" name="s12-footer">
             <a:extLst xmlns:a="http://schemas.openxmlformats.org/drawingml/2006/main">
               <a:ext uri="{FF2B5EF4-FFF2-40B4-BE49-F238E27FC236}">
-                <a16:creationId xmlns:a16="http://schemas.microsoft.com/office/drawing/2014/main" id="{5E0B2110-DF7E-4107-A34B-D0AFB6F84AB1}"/>
+                <a16:creationId xmlns:a16="http://schemas.microsoft.com/office/drawing/2014/main" id="{63FF5082-95D5-4B3C-B073-00C6ABB5DD59}"/>
               </a:ext>
             </a:extLst>
           </p:cNvPr>
@@ -4228,7 +4228,7 @@
           <p:cNvPr id="5" name="s12-identity">
             <a:extLst xmlns:a="http://schemas.openxmlformats.org/drawingml/2006/main">
               <a:ext uri="{FF2B5EF4-FFF2-40B4-BE49-F238E27FC236}">
-                <a16:creationId xmlns:a16="http://schemas.microsoft.com/office/drawing/2014/main" id="{38BA7592-E6B4-4C54-84F8-4EF78C900C54}"/>
+                <a16:creationId xmlns:a16="http://schemas.microsoft.com/office/drawing/2014/main" id="{A53081E0-8D4E-460D-A466-CA7FBFB36B25}"/>
               </a:ext>
             </a:extLst>
           </p:cNvPr>
@@ -4286,7 +4286,7 @@
           <p:cNvPr id="6" name="source-0">
             <a:extLst xmlns:a="http://schemas.openxmlformats.org/drawingml/2006/main">
               <a:ext uri="{FF2B5EF4-FFF2-40B4-BE49-F238E27FC236}">
-                <a16:creationId xmlns:a16="http://schemas.microsoft.com/office/drawing/2014/main" id="{9D607FC3-E5A1-4BC1-A438-700B0738DBF2}"/>
+                <a16:creationId xmlns:a16="http://schemas.microsoft.com/office/drawing/2014/main" id="{21565E04-ADA0-4035-A472-8AD2F54AD7C7}"/>
               </a:ext>
             </a:extLst>
           </p:cNvPr>
@@ -4350,7 +4350,7 @@
           <p:cNvPr id="7" name="source-1">
             <a:extLst xmlns:a="http://schemas.openxmlformats.org/drawingml/2006/main">
               <a:ext uri="{FF2B5EF4-FFF2-40B4-BE49-F238E27FC236}">
-                <a16:creationId xmlns:a16="http://schemas.microsoft.com/office/drawing/2014/main" id="{CE69F3FF-9B17-4C9A-ACB9-594A0C6885C3}"/>
+                <a16:creationId xmlns:a16="http://schemas.microsoft.com/office/drawing/2014/main" id="{4D60B91D-1F4A-4A6E-AC53-37B98F768829}"/>
               </a:ext>
             </a:extLst>
           </p:cNvPr>
@@ -4414,7 +4414,7 @@
           <p:cNvPr id="8" name="s12-takeaway-rule">
             <a:extLst xmlns:a="http://schemas.openxmlformats.org/drawingml/2006/main">
               <a:ext uri="{FF2B5EF4-FFF2-40B4-BE49-F238E27FC236}">
-                <a16:creationId xmlns:a16="http://schemas.microsoft.com/office/drawing/2014/main" id="{78DA153B-C21E-46CB-8E10-52C60FAEC175}"/>
+                <a16:creationId xmlns:a16="http://schemas.microsoft.com/office/drawing/2014/main" id="{40060755-17EE-46A9-AE7D-1A379A67248F}"/>
               </a:ext>
             </a:extLst>
           </p:cNvPr>
@@ -4447,7 +4447,7 @@
           <p:cNvPr id="9" name="s12-takeaway">
             <a:extLst xmlns:a="http://schemas.openxmlformats.org/drawingml/2006/main">
               <a:ext uri="{FF2B5EF4-FFF2-40B4-BE49-F238E27FC236}">
-                <a16:creationId xmlns:a16="http://schemas.microsoft.com/office/drawing/2014/main" id="{8FB7EED4-B66E-4B26-9FCE-E3A642277090}"/>
+                <a16:creationId xmlns:a16="http://schemas.microsoft.com/office/drawing/2014/main" id="{8B17ADF1-144B-4CAE-9DD4-99C0AD264D71}"/>
               </a:ext>
             </a:extLst>
           </p:cNvPr>
@@ -4472,7 +4472,7 @@
         </p:spPr>
         <p:txBody>
           <a:bodyPr xmlns:a="http://schemas.openxmlformats.org/drawingml/2006/main" lIns="0" tIns="0" rIns="0" bIns="0" anchor="ctr">
-            <a:normAutofit fontScale="95911"/>
+            <a:normAutofit fontScale="100000"/>
           </a:bodyPr>
           <a:lstStyle xmlns:a="http://schemas.openxmlformats.org/drawingml/2006/main"/>
           <a:p xmlns:a="http://schemas.openxmlformats.org/drawingml/2006/main">
@@ -4495,7 +4495,7 @@
                 <a:ea typeface="PingFang SC"/>
                 <a:cs typeface="PingFang SC"/>
               </a:rPr>
-              <a:t>课程精编页用于讲授主线；播放器中的“原课件”模式保留团队 PowerPoint 精选页、真实图片和可播放视频。</a:t>
+              <a:t>课程正文与幻灯片共享同一知识主线，图片和视频用于帮助理解本节概念与案例。</a:t>
             </a:r>
           </a:p>
         </p:txBody>
@@ -4503,7 +4503,7 @@
     </p:spTree>
     <p:extLst>
       <p:ext uri="{BB962C8B-B14F-4D97-AF65-F5344CB8AC3E}">
-        <p14:creationId xmlns:p14="http://schemas.microsoft.com/office/powerpoint/2010/main" val="1254144670"/>
+        <p14:creationId xmlns:p14="http://schemas.microsoft.com/office/powerpoint/2010/main" val="1923058836"/>
       </p:ext>
     </p:extLst>
   </p:cSld>
@@ -4534,7 +4534,7 @@
           <p:cNvPr id="1" name="s2-rule">
             <a:extLst xmlns:a="http://schemas.openxmlformats.org/drawingml/2006/main">
               <a:ext uri="{FF2B5EF4-FFF2-40B4-BE49-F238E27FC236}">
-                <a16:creationId xmlns:a16="http://schemas.microsoft.com/office/drawing/2014/main" id="{10945804-75B3-4F74-8796-E9D38952ABFC}"/>
+                <a16:creationId xmlns:a16="http://schemas.microsoft.com/office/drawing/2014/main" id="{21522D95-121E-42AC-9D72-6434A31E5E4A}"/>
               </a:ext>
             </a:extLst>
           </p:cNvPr>
@@ -4567,7 +4567,7 @@
           <p:cNvPr id="2" name="s2-eyebrow">
             <a:extLst xmlns:a="http://schemas.openxmlformats.org/drawingml/2006/main">
               <a:ext uri="{FF2B5EF4-FFF2-40B4-BE49-F238E27FC236}">
-                <a16:creationId xmlns:a16="http://schemas.microsoft.com/office/drawing/2014/main" id="{C5387D38-B7A7-4965-9C8D-9A3885A6790A}"/>
+                <a16:creationId xmlns:a16="http://schemas.microsoft.com/office/drawing/2014/main" id="{8C758215-5964-497A-B419-90B359173344}"/>
               </a:ext>
             </a:extLst>
           </p:cNvPr>
@@ -4625,7 +4625,7 @@
           <p:cNvPr id="3" name="s2-title">
             <a:extLst xmlns:a="http://schemas.openxmlformats.org/drawingml/2006/main">
               <a:ext uri="{FF2B5EF4-FFF2-40B4-BE49-F238E27FC236}">
-                <a16:creationId xmlns:a16="http://schemas.microsoft.com/office/drawing/2014/main" id="{4C52D210-6713-4885-BA92-DD32C114E537}"/>
+                <a16:creationId xmlns:a16="http://schemas.microsoft.com/office/drawing/2014/main" id="{5C29B8CC-4474-4350-AE98-7DD45BBB4880}"/>
               </a:ext>
             </a:extLst>
           </p:cNvPr>
@@ -4683,7 +4683,7 @@
           <p:cNvPr id="4" name="s2-footer">
             <a:extLst xmlns:a="http://schemas.openxmlformats.org/drawingml/2006/main">
               <a:ext uri="{FF2B5EF4-FFF2-40B4-BE49-F238E27FC236}">
-                <a16:creationId xmlns:a16="http://schemas.microsoft.com/office/drawing/2014/main" id="{4648DB60-770A-4105-B99C-AD24D0D9AA45}"/>
+                <a16:creationId xmlns:a16="http://schemas.microsoft.com/office/drawing/2014/main" id="{AB23CD61-EB5E-4F6E-9951-7FEC860A13B3}"/>
               </a:ext>
             </a:extLst>
           </p:cNvPr>
@@ -4714,7 +4714,7 @@
           <p:cNvPr id="5" name="s2-identity">
             <a:extLst xmlns:a="http://schemas.openxmlformats.org/drawingml/2006/main">
               <a:ext uri="{FF2B5EF4-FFF2-40B4-BE49-F238E27FC236}">
-                <a16:creationId xmlns:a16="http://schemas.microsoft.com/office/drawing/2014/main" id="{9623BA56-07E8-46AA-81BA-A7F1DCB065D5}"/>
+                <a16:creationId xmlns:a16="http://schemas.microsoft.com/office/drawing/2014/main" id="{E02D33C1-862E-4C1D-9421-7DB49194FA30}"/>
               </a:ext>
             </a:extLst>
           </p:cNvPr>
@@ -4772,7 +4772,7 @@
           <p:cNvPr id="6" name="objective-1">
             <a:extLst xmlns:a="http://schemas.openxmlformats.org/drawingml/2006/main">
               <a:ext uri="{FF2B5EF4-FFF2-40B4-BE49-F238E27FC236}">
-                <a16:creationId xmlns:a16="http://schemas.microsoft.com/office/drawing/2014/main" id="{5EC4CFAD-3597-4F57-B470-C89F803BD025}"/>
+                <a16:creationId xmlns:a16="http://schemas.microsoft.com/office/drawing/2014/main" id="{9C2B226A-6AC7-4489-9729-48A3539AF028}"/>
               </a:ext>
             </a:extLst>
           </p:cNvPr>
@@ -4859,7 +4859,7 @@
           <p:cNvPr id="7" name="objective-2">
             <a:extLst xmlns:a="http://schemas.openxmlformats.org/drawingml/2006/main">
               <a:ext uri="{FF2B5EF4-FFF2-40B4-BE49-F238E27FC236}">
-                <a16:creationId xmlns:a16="http://schemas.microsoft.com/office/drawing/2014/main" id="{D074F745-CF2D-41E0-A1BA-80A9730C8E53}"/>
+                <a16:creationId xmlns:a16="http://schemas.microsoft.com/office/drawing/2014/main" id="{9F1321A8-2704-4428-9FAC-EB18E9AD03FA}"/>
               </a:ext>
             </a:extLst>
           </p:cNvPr>
@@ -4946,7 +4946,7 @@
           <p:cNvPr id="8" name="objective-3">
             <a:extLst xmlns:a="http://schemas.openxmlformats.org/drawingml/2006/main">
               <a:ext uri="{FF2B5EF4-FFF2-40B4-BE49-F238E27FC236}">
-                <a16:creationId xmlns:a16="http://schemas.microsoft.com/office/drawing/2014/main" id="{F4B237BE-321C-442D-9358-755FA5D2DD6C}"/>
+                <a16:creationId xmlns:a16="http://schemas.microsoft.com/office/drawing/2014/main" id="{4FDED931-B120-47D3-8FA1-96B580F8B411}"/>
               </a:ext>
             </a:extLst>
           </p:cNvPr>
@@ -5033,7 +5033,7 @@
           <p:cNvPr id="9" name="objective-4">
             <a:extLst xmlns:a="http://schemas.openxmlformats.org/drawingml/2006/main">
               <a:ext uri="{FF2B5EF4-FFF2-40B4-BE49-F238E27FC236}">
-                <a16:creationId xmlns:a16="http://schemas.microsoft.com/office/drawing/2014/main" id="{A01B2081-3FFB-411B-BDFC-341730A57747}"/>
+                <a16:creationId xmlns:a16="http://schemas.microsoft.com/office/drawing/2014/main" id="{0613AB2F-7081-4430-B496-26A421D2681B}"/>
               </a:ext>
             </a:extLst>
           </p:cNvPr>
@@ -5118,7 +5118,7 @@
     </p:spTree>
     <p:extLst>
       <p:ext uri="{BB962C8B-B14F-4D97-AF65-F5344CB8AC3E}">
-        <p14:creationId xmlns:p14="http://schemas.microsoft.com/office/powerpoint/2010/main" val="948190991"/>
+        <p14:creationId xmlns:p14="http://schemas.microsoft.com/office/powerpoint/2010/main" val="1532197918"/>
       </p:ext>
     </p:extLst>
   </p:cSld>
@@ -5149,7 +5149,7 @@
           <p:cNvPr id="1" name="s3-rule">
             <a:extLst xmlns:a="http://schemas.openxmlformats.org/drawingml/2006/main">
               <a:ext uri="{FF2B5EF4-FFF2-40B4-BE49-F238E27FC236}">
-                <a16:creationId xmlns:a16="http://schemas.microsoft.com/office/drawing/2014/main" id="{A6CAA713-5BB5-4F5F-B444-C68BDDF8DC82}"/>
+                <a16:creationId xmlns:a16="http://schemas.microsoft.com/office/drawing/2014/main" id="{2BE74595-67B9-454F-9D37-D07548335395}"/>
               </a:ext>
             </a:extLst>
           </p:cNvPr>
@@ -5182,7 +5182,7 @@
           <p:cNvPr id="2" name="s3-eyebrow">
             <a:extLst xmlns:a="http://schemas.openxmlformats.org/drawingml/2006/main">
               <a:ext uri="{FF2B5EF4-FFF2-40B4-BE49-F238E27FC236}">
-                <a16:creationId xmlns:a16="http://schemas.microsoft.com/office/drawing/2014/main" id="{84222EDB-5D3F-42F3-9227-8764532A3352}"/>
+                <a16:creationId xmlns:a16="http://schemas.microsoft.com/office/drawing/2014/main" id="{05DC4E02-864A-425C-A72C-224244074FFB}"/>
               </a:ext>
             </a:extLst>
           </p:cNvPr>
@@ -5240,7 +5240,7 @@
           <p:cNvPr id="3" name="s3-title">
             <a:extLst xmlns:a="http://schemas.openxmlformats.org/drawingml/2006/main">
               <a:ext uri="{FF2B5EF4-FFF2-40B4-BE49-F238E27FC236}">
-                <a16:creationId xmlns:a16="http://schemas.microsoft.com/office/drawing/2014/main" id="{B22583F0-6E6A-49EB-92A3-2ADAF340869C}"/>
+                <a16:creationId xmlns:a16="http://schemas.microsoft.com/office/drawing/2014/main" id="{29EC1522-A0B1-4631-9C7B-C0E3170B71ED}"/>
               </a:ext>
             </a:extLst>
           </p:cNvPr>
@@ -5298,7 +5298,7 @@
           <p:cNvPr id="4" name="s3-footer">
             <a:extLst xmlns:a="http://schemas.openxmlformats.org/drawingml/2006/main">
               <a:ext uri="{FF2B5EF4-FFF2-40B4-BE49-F238E27FC236}">
-                <a16:creationId xmlns:a16="http://schemas.microsoft.com/office/drawing/2014/main" id="{A9173F7E-6AE7-4DF8-9845-1FC651ECB55A}"/>
+                <a16:creationId xmlns:a16="http://schemas.microsoft.com/office/drawing/2014/main" id="{0F777614-C4BD-41BC-93E5-5AD096556FDE}"/>
               </a:ext>
             </a:extLst>
           </p:cNvPr>
@@ -5329,7 +5329,7 @@
           <p:cNvPr id="5" name="s3-identity">
             <a:extLst xmlns:a="http://schemas.openxmlformats.org/drawingml/2006/main">
               <a:ext uri="{FF2B5EF4-FFF2-40B4-BE49-F238E27FC236}">
-                <a16:creationId xmlns:a16="http://schemas.microsoft.com/office/drawing/2014/main" id="{0111FE54-B453-4AFE-8E3A-7FAEF40B381D}"/>
+                <a16:creationId xmlns:a16="http://schemas.microsoft.com/office/drawing/2014/main" id="{FC8D6CF6-4004-4500-8249-20DC70EB4658}"/>
               </a:ext>
             </a:extLst>
           </p:cNvPr>
@@ -5387,7 +5387,7 @@
           <p:cNvPr id="6" name="core-no-0">
             <a:extLst xmlns:a="http://schemas.openxmlformats.org/drawingml/2006/main">
               <a:ext uri="{FF2B5EF4-FFF2-40B4-BE49-F238E27FC236}">
-                <a16:creationId xmlns:a16="http://schemas.microsoft.com/office/drawing/2014/main" id="{8B76CB83-E7A1-4A73-9DCB-112BE3A1CE55}"/>
+                <a16:creationId xmlns:a16="http://schemas.microsoft.com/office/drawing/2014/main" id="{DC09B49F-DA11-494E-8821-264AD99CE29A}"/>
               </a:ext>
             </a:extLst>
           </p:cNvPr>
@@ -5445,7 +5445,7 @@
           <p:cNvPr id="7" name="core-label-0">
             <a:extLst xmlns:a="http://schemas.openxmlformats.org/drawingml/2006/main">
               <a:ext uri="{FF2B5EF4-FFF2-40B4-BE49-F238E27FC236}">
-                <a16:creationId xmlns:a16="http://schemas.microsoft.com/office/drawing/2014/main" id="{889ACE34-4A32-4292-9DEC-84BFE08D5958}"/>
+                <a16:creationId xmlns:a16="http://schemas.microsoft.com/office/drawing/2014/main" id="{701A88EC-3146-4A57-BA35-B08C997BAD3E}"/>
               </a:ext>
             </a:extLst>
           </p:cNvPr>
@@ -5503,7 +5503,7 @@
           <p:cNvPr id="8" name="core-body-0">
             <a:extLst xmlns:a="http://schemas.openxmlformats.org/drawingml/2006/main">
               <a:ext uri="{FF2B5EF4-FFF2-40B4-BE49-F238E27FC236}">
-                <a16:creationId xmlns:a16="http://schemas.microsoft.com/office/drawing/2014/main" id="{7B0E82E8-4A36-411A-AFB4-B7037F8BE651}"/>
+                <a16:creationId xmlns:a16="http://schemas.microsoft.com/office/drawing/2014/main" id="{CABC042F-EA4A-4B4E-8F3D-8C11188DA601}"/>
               </a:ext>
             </a:extLst>
           </p:cNvPr>
@@ -5567,7 +5567,7 @@
           <p:cNvPr id="9" name="core-no-1">
             <a:extLst xmlns:a="http://schemas.openxmlformats.org/drawingml/2006/main">
               <a:ext uri="{FF2B5EF4-FFF2-40B4-BE49-F238E27FC236}">
-                <a16:creationId xmlns:a16="http://schemas.microsoft.com/office/drawing/2014/main" id="{CD599278-4E1D-47DC-8AC8-AD75722FF160}"/>
+                <a16:creationId xmlns:a16="http://schemas.microsoft.com/office/drawing/2014/main" id="{92E10E67-DF5D-4300-870D-010F3169AFD7}"/>
               </a:ext>
             </a:extLst>
           </p:cNvPr>
@@ -5625,7 +5625,7 @@
           <p:cNvPr id="10" name="core-body-1">
             <a:extLst xmlns:a="http://schemas.openxmlformats.org/drawingml/2006/main">
               <a:ext uri="{FF2B5EF4-FFF2-40B4-BE49-F238E27FC236}">
-                <a16:creationId xmlns:a16="http://schemas.microsoft.com/office/drawing/2014/main" id="{D2F073FA-FEA8-4742-BE44-A9B9C398FB06}"/>
+                <a16:creationId xmlns:a16="http://schemas.microsoft.com/office/drawing/2014/main" id="{52A24881-9E51-4C70-900E-B0915D839731}"/>
               </a:ext>
             </a:extLst>
           </p:cNvPr>
@@ -5689,7 +5689,7 @@
           <p:cNvPr id="11" name="core-no-2">
             <a:extLst xmlns:a="http://schemas.openxmlformats.org/drawingml/2006/main">
               <a:ext uri="{FF2B5EF4-FFF2-40B4-BE49-F238E27FC236}">
-                <a16:creationId xmlns:a16="http://schemas.microsoft.com/office/drawing/2014/main" id="{22092EA3-381B-43EA-A16C-F61F38309D33}"/>
+                <a16:creationId xmlns:a16="http://schemas.microsoft.com/office/drawing/2014/main" id="{2EA37791-8C84-43E1-BE99-BFBF3A6813B8}"/>
               </a:ext>
             </a:extLst>
           </p:cNvPr>
@@ -5747,7 +5747,7 @@
           <p:cNvPr id="12" name="core-body-2">
             <a:extLst xmlns:a="http://schemas.openxmlformats.org/drawingml/2006/main">
               <a:ext uri="{FF2B5EF4-FFF2-40B4-BE49-F238E27FC236}">
-                <a16:creationId xmlns:a16="http://schemas.microsoft.com/office/drawing/2014/main" id="{8D6FA282-46FA-4983-8F2B-0799F0DC6AE0}"/>
+                <a16:creationId xmlns:a16="http://schemas.microsoft.com/office/drawing/2014/main" id="{1A49E89F-0678-4D4C-AB54-76992F82999E}"/>
               </a:ext>
             </a:extLst>
           </p:cNvPr>
@@ -5811,7 +5811,7 @@
           <p:cNvPr id="13" name="s3-takeaway-rule">
             <a:extLst xmlns:a="http://schemas.openxmlformats.org/drawingml/2006/main">
               <a:ext uri="{FF2B5EF4-FFF2-40B4-BE49-F238E27FC236}">
-                <a16:creationId xmlns:a16="http://schemas.microsoft.com/office/drawing/2014/main" id="{9919A745-1BBA-4519-830D-4E19D58619C1}"/>
+                <a16:creationId xmlns:a16="http://schemas.microsoft.com/office/drawing/2014/main" id="{60C1B4A3-BE82-445D-898C-DAC58217ABD8}"/>
               </a:ext>
             </a:extLst>
           </p:cNvPr>
@@ -5844,7 +5844,7 @@
           <p:cNvPr id="14" name="s3-takeaway">
             <a:extLst xmlns:a="http://schemas.openxmlformats.org/drawingml/2006/main">
               <a:ext uri="{FF2B5EF4-FFF2-40B4-BE49-F238E27FC236}">
-                <a16:creationId xmlns:a16="http://schemas.microsoft.com/office/drawing/2014/main" id="{99753C0D-7590-43ED-8E88-B2E689A117D0}"/>
+                <a16:creationId xmlns:a16="http://schemas.microsoft.com/office/drawing/2014/main" id="{7CC2480F-6474-4605-A31F-BA9FB457373E}"/>
               </a:ext>
             </a:extLst>
           </p:cNvPr>
@@ -5900,7 +5900,7 @@
     </p:spTree>
     <p:extLst>
       <p:ext uri="{BB962C8B-B14F-4D97-AF65-F5344CB8AC3E}">
-        <p14:creationId xmlns:p14="http://schemas.microsoft.com/office/powerpoint/2010/main" val="1307799871"/>
+        <p14:creationId xmlns:p14="http://schemas.microsoft.com/office/powerpoint/2010/main" val="1922830229"/>
       </p:ext>
     </p:extLst>
   </p:cSld>
@@ -5931,7 +5931,7 @@
           <p:cNvPr id="1" name="s4-rule">
             <a:extLst xmlns:a="http://schemas.openxmlformats.org/drawingml/2006/main">
               <a:ext uri="{FF2B5EF4-FFF2-40B4-BE49-F238E27FC236}">
-                <a16:creationId xmlns:a16="http://schemas.microsoft.com/office/drawing/2014/main" id="{0CDAE4AC-7D7E-4D43-8C91-0950FF8F8578}"/>
+                <a16:creationId xmlns:a16="http://schemas.microsoft.com/office/drawing/2014/main" id="{7E69ABDD-F934-4FC5-B372-ED61DEE674DA}"/>
               </a:ext>
             </a:extLst>
           </p:cNvPr>
@@ -5964,7 +5964,7 @@
           <p:cNvPr id="2" name="s4-eyebrow">
             <a:extLst xmlns:a="http://schemas.openxmlformats.org/drawingml/2006/main">
               <a:ext uri="{FF2B5EF4-FFF2-40B4-BE49-F238E27FC236}">
-                <a16:creationId xmlns:a16="http://schemas.microsoft.com/office/drawing/2014/main" id="{5F09C7A1-D062-4075-85F0-CFF19308C07D}"/>
+                <a16:creationId xmlns:a16="http://schemas.microsoft.com/office/drawing/2014/main" id="{109CA2C3-903C-4D53-861C-1C21B63E1246}"/>
               </a:ext>
             </a:extLst>
           </p:cNvPr>
@@ -6022,7 +6022,7 @@
           <p:cNvPr id="3" name="s4-title">
             <a:extLst xmlns:a="http://schemas.openxmlformats.org/drawingml/2006/main">
               <a:ext uri="{FF2B5EF4-FFF2-40B4-BE49-F238E27FC236}">
-                <a16:creationId xmlns:a16="http://schemas.microsoft.com/office/drawing/2014/main" id="{AB3DFEFE-B1B6-4AAE-AEC1-D86F968B8534}"/>
+                <a16:creationId xmlns:a16="http://schemas.microsoft.com/office/drawing/2014/main" id="{97E3679D-F7C2-4983-BA1B-EB8D51A4D263}"/>
               </a:ext>
             </a:extLst>
           </p:cNvPr>
@@ -6080,7 +6080,7 @@
           <p:cNvPr id="4" name="s4-footer">
             <a:extLst xmlns:a="http://schemas.openxmlformats.org/drawingml/2006/main">
               <a:ext uri="{FF2B5EF4-FFF2-40B4-BE49-F238E27FC236}">
-                <a16:creationId xmlns:a16="http://schemas.microsoft.com/office/drawing/2014/main" id="{977408A8-4206-48E0-820F-AC145A781BC4}"/>
+                <a16:creationId xmlns:a16="http://schemas.microsoft.com/office/drawing/2014/main" id="{0AA78D1D-EC3F-42D9-8529-FF70E3A93CD6}"/>
               </a:ext>
             </a:extLst>
           </p:cNvPr>
@@ -6111,7 +6111,7 @@
           <p:cNvPr id="5" name="s4-identity">
             <a:extLst xmlns:a="http://schemas.openxmlformats.org/drawingml/2006/main">
               <a:ext uri="{FF2B5EF4-FFF2-40B4-BE49-F238E27FC236}">
-                <a16:creationId xmlns:a16="http://schemas.microsoft.com/office/drawing/2014/main" id="{AD4E48C0-A816-4050-976B-F3757C1B8432}"/>
+                <a16:creationId xmlns:a16="http://schemas.microsoft.com/office/drawing/2014/main" id="{7E3E20DF-D885-4956-A10F-544B4F62BA0F}"/>
               </a:ext>
             </a:extLst>
           </p:cNvPr>
@@ -6169,7 +6169,7 @@
           <p:cNvPr id="6" name="core-no-0">
             <a:extLst xmlns:a="http://schemas.openxmlformats.org/drawingml/2006/main">
               <a:ext uri="{FF2B5EF4-FFF2-40B4-BE49-F238E27FC236}">
-                <a16:creationId xmlns:a16="http://schemas.microsoft.com/office/drawing/2014/main" id="{8DF6F97B-CA70-4ADA-B9D1-AFBECE9D8479}"/>
+                <a16:creationId xmlns:a16="http://schemas.microsoft.com/office/drawing/2014/main" id="{9C952AF3-C54C-4747-9FEE-7A0E6F915B2E}"/>
               </a:ext>
             </a:extLst>
           </p:cNvPr>
@@ -6227,7 +6227,7 @@
           <p:cNvPr id="7" name="core-label-0">
             <a:extLst xmlns:a="http://schemas.openxmlformats.org/drawingml/2006/main">
               <a:ext uri="{FF2B5EF4-FFF2-40B4-BE49-F238E27FC236}">
-                <a16:creationId xmlns:a16="http://schemas.microsoft.com/office/drawing/2014/main" id="{5874F2BE-727C-4FD4-A029-E45E3FA4AF8E}"/>
+                <a16:creationId xmlns:a16="http://schemas.microsoft.com/office/drawing/2014/main" id="{6599DE16-CB04-45FE-B9B0-C87206009E4B}"/>
               </a:ext>
             </a:extLst>
           </p:cNvPr>
@@ -6285,7 +6285,7 @@
           <p:cNvPr id="8" name="core-body-0">
             <a:extLst xmlns:a="http://schemas.openxmlformats.org/drawingml/2006/main">
               <a:ext uri="{FF2B5EF4-FFF2-40B4-BE49-F238E27FC236}">
-                <a16:creationId xmlns:a16="http://schemas.microsoft.com/office/drawing/2014/main" id="{1767B7D7-90A8-424B-AE7D-133672380E17}"/>
+                <a16:creationId xmlns:a16="http://schemas.microsoft.com/office/drawing/2014/main" id="{2E1A0456-A530-46DB-8AAC-9D6E7AC524E1}"/>
               </a:ext>
             </a:extLst>
           </p:cNvPr>
@@ -6349,7 +6349,7 @@
           <p:cNvPr id="9" name="core-no-1">
             <a:extLst xmlns:a="http://schemas.openxmlformats.org/drawingml/2006/main">
               <a:ext uri="{FF2B5EF4-FFF2-40B4-BE49-F238E27FC236}">
-                <a16:creationId xmlns:a16="http://schemas.microsoft.com/office/drawing/2014/main" id="{D7086158-A257-402E-8DE3-7A7AD1A63FF7}"/>
+                <a16:creationId xmlns:a16="http://schemas.microsoft.com/office/drawing/2014/main" id="{91AFB1DF-56BC-4F63-B212-EB52738E7F96}"/>
               </a:ext>
             </a:extLst>
           </p:cNvPr>
@@ -6407,7 +6407,7 @@
           <p:cNvPr id="10" name="core-body-1">
             <a:extLst xmlns:a="http://schemas.openxmlformats.org/drawingml/2006/main">
               <a:ext uri="{FF2B5EF4-FFF2-40B4-BE49-F238E27FC236}">
-                <a16:creationId xmlns:a16="http://schemas.microsoft.com/office/drawing/2014/main" id="{62445468-3DDC-4DF7-A0C6-A402100D2EE9}"/>
+                <a16:creationId xmlns:a16="http://schemas.microsoft.com/office/drawing/2014/main" id="{B37A1F64-A03C-4E45-B718-F0615B333D11}"/>
               </a:ext>
             </a:extLst>
           </p:cNvPr>
@@ -6471,7 +6471,7 @@
           <p:cNvPr id="11" name="s4-takeaway-rule">
             <a:extLst xmlns:a="http://schemas.openxmlformats.org/drawingml/2006/main">
               <a:ext uri="{FF2B5EF4-FFF2-40B4-BE49-F238E27FC236}">
-                <a16:creationId xmlns:a16="http://schemas.microsoft.com/office/drawing/2014/main" id="{FA92A216-66F3-44EA-A76A-76598DF75CFE}"/>
+                <a16:creationId xmlns:a16="http://schemas.microsoft.com/office/drawing/2014/main" id="{8BBA6FE2-D6D0-45E1-BFE4-31395CFA5B45}"/>
               </a:ext>
             </a:extLst>
           </p:cNvPr>
@@ -6504,7 +6504,7 @@
           <p:cNvPr id="12" name="s4-takeaway">
             <a:extLst xmlns:a="http://schemas.openxmlformats.org/drawingml/2006/main">
               <a:ext uri="{FF2B5EF4-FFF2-40B4-BE49-F238E27FC236}">
-                <a16:creationId xmlns:a16="http://schemas.microsoft.com/office/drawing/2014/main" id="{8BEC9CBA-2E2E-496D-8E95-A442FFA5A212}"/>
+                <a16:creationId xmlns:a16="http://schemas.microsoft.com/office/drawing/2014/main" id="{EC4A753C-3765-4619-AA4E-3D8B9B121415}"/>
               </a:ext>
             </a:extLst>
           </p:cNvPr>
@@ -6560,7 +6560,7 @@
     </p:spTree>
     <p:extLst>
       <p:ext uri="{BB962C8B-B14F-4D97-AF65-F5344CB8AC3E}">
-        <p14:creationId xmlns:p14="http://schemas.microsoft.com/office/powerpoint/2010/main" val="1596050988"/>
+        <p14:creationId xmlns:p14="http://schemas.microsoft.com/office/powerpoint/2010/main" val="1071101796"/>
       </p:ext>
     </p:extLst>
   </p:cSld>
@@ -6591,7 +6591,7 @@
           <p:cNvPr id="1" name="s5-rule">
             <a:extLst xmlns:a="http://schemas.openxmlformats.org/drawingml/2006/main">
               <a:ext uri="{FF2B5EF4-FFF2-40B4-BE49-F238E27FC236}">
-                <a16:creationId xmlns:a16="http://schemas.microsoft.com/office/drawing/2014/main" id="{9DD25006-677A-42FA-8980-1B8C34112218}"/>
+                <a16:creationId xmlns:a16="http://schemas.microsoft.com/office/drawing/2014/main" id="{B2C15301-E671-4733-BCFA-E325E3387DA3}"/>
               </a:ext>
             </a:extLst>
           </p:cNvPr>
@@ -6624,7 +6624,7 @@
           <p:cNvPr id="2" name="s5-eyebrow">
             <a:extLst xmlns:a="http://schemas.openxmlformats.org/drawingml/2006/main">
               <a:ext uri="{FF2B5EF4-FFF2-40B4-BE49-F238E27FC236}">
-                <a16:creationId xmlns:a16="http://schemas.microsoft.com/office/drawing/2014/main" id="{EEC70077-E8B2-4A67-9F92-4759016D4C3B}"/>
+                <a16:creationId xmlns:a16="http://schemas.microsoft.com/office/drawing/2014/main" id="{6F895153-E246-4D71-B22C-3D1F7FEA173F}"/>
               </a:ext>
             </a:extLst>
           </p:cNvPr>
@@ -6682,7 +6682,7 @@
           <p:cNvPr id="3" name="s5-title">
             <a:extLst xmlns:a="http://schemas.openxmlformats.org/drawingml/2006/main">
               <a:ext uri="{FF2B5EF4-FFF2-40B4-BE49-F238E27FC236}">
-                <a16:creationId xmlns:a16="http://schemas.microsoft.com/office/drawing/2014/main" id="{13CEB99E-E476-4A19-A439-1C2855949E57}"/>
+                <a16:creationId xmlns:a16="http://schemas.microsoft.com/office/drawing/2014/main" id="{C4B525A0-E00A-4E91-84AC-986F712E128E}"/>
               </a:ext>
             </a:extLst>
           </p:cNvPr>
@@ -6740,7 +6740,7 @@
           <p:cNvPr id="4" name="s5-footer">
             <a:extLst xmlns:a="http://schemas.openxmlformats.org/drawingml/2006/main">
               <a:ext uri="{FF2B5EF4-FFF2-40B4-BE49-F238E27FC236}">
-                <a16:creationId xmlns:a16="http://schemas.microsoft.com/office/drawing/2014/main" id="{D6EB712C-29C1-47EE-A8D9-D29A7AA992B3}"/>
+                <a16:creationId xmlns:a16="http://schemas.microsoft.com/office/drawing/2014/main" id="{10D5A5D0-4DB1-4030-963E-58E6B40CDA86}"/>
               </a:ext>
             </a:extLst>
           </p:cNvPr>
@@ -6771,7 +6771,7 @@
           <p:cNvPr id="5" name="s5-identity">
             <a:extLst xmlns:a="http://schemas.openxmlformats.org/drawingml/2006/main">
               <a:ext uri="{FF2B5EF4-FFF2-40B4-BE49-F238E27FC236}">
-                <a16:creationId xmlns:a16="http://schemas.microsoft.com/office/drawing/2014/main" id="{7D084D57-A189-486B-AA33-E1DDC8A1D490}"/>
+                <a16:creationId xmlns:a16="http://schemas.microsoft.com/office/drawing/2014/main" id="{EA8D7613-4E87-444D-878B-88A162CEF0EE}"/>
               </a:ext>
             </a:extLst>
           </p:cNvPr>
@@ -6829,7 +6829,7 @@
           <p:cNvPr id="6" name="core-no-0">
             <a:extLst xmlns:a="http://schemas.openxmlformats.org/drawingml/2006/main">
               <a:ext uri="{FF2B5EF4-FFF2-40B4-BE49-F238E27FC236}">
-                <a16:creationId xmlns:a16="http://schemas.microsoft.com/office/drawing/2014/main" id="{103BD534-5F08-40C6-9786-23C4102873C7}"/>
+                <a16:creationId xmlns:a16="http://schemas.microsoft.com/office/drawing/2014/main" id="{F7B327A0-C7C4-4C37-B2BC-A850CE18EBAF}"/>
               </a:ext>
             </a:extLst>
           </p:cNvPr>
@@ -6887,7 +6887,7 @@
           <p:cNvPr id="7" name="core-label-0">
             <a:extLst xmlns:a="http://schemas.openxmlformats.org/drawingml/2006/main">
               <a:ext uri="{FF2B5EF4-FFF2-40B4-BE49-F238E27FC236}">
-                <a16:creationId xmlns:a16="http://schemas.microsoft.com/office/drawing/2014/main" id="{95B36DC6-63BC-46AE-BFFC-115867DAF893}"/>
+                <a16:creationId xmlns:a16="http://schemas.microsoft.com/office/drawing/2014/main" id="{9065035E-FF24-4DA7-AFC5-3682D0F8856B}"/>
               </a:ext>
             </a:extLst>
           </p:cNvPr>
@@ -6945,7 +6945,7 @@
           <p:cNvPr id="8" name="core-body-0">
             <a:extLst xmlns:a="http://schemas.openxmlformats.org/drawingml/2006/main">
               <a:ext uri="{FF2B5EF4-FFF2-40B4-BE49-F238E27FC236}">
-                <a16:creationId xmlns:a16="http://schemas.microsoft.com/office/drawing/2014/main" id="{98BF2762-A89D-4A0E-B58D-42AAADDD4288}"/>
+                <a16:creationId xmlns:a16="http://schemas.microsoft.com/office/drawing/2014/main" id="{83F68136-B5DC-47FF-8EFF-3FA3C95273B5}"/>
               </a:ext>
             </a:extLst>
           </p:cNvPr>
@@ -7009,7 +7009,7 @@
           <p:cNvPr id="9" name="core-no-1">
             <a:extLst xmlns:a="http://schemas.openxmlformats.org/drawingml/2006/main">
               <a:ext uri="{FF2B5EF4-FFF2-40B4-BE49-F238E27FC236}">
-                <a16:creationId xmlns:a16="http://schemas.microsoft.com/office/drawing/2014/main" id="{7E67A8D3-3657-4C01-A303-59F0209BD7E2}"/>
+                <a16:creationId xmlns:a16="http://schemas.microsoft.com/office/drawing/2014/main" id="{B4CA602B-C32A-4F19-A6B3-CF0ACB0CBAD2}"/>
               </a:ext>
             </a:extLst>
           </p:cNvPr>
@@ -7067,7 +7067,7 @@
           <p:cNvPr id="10" name="core-body-1">
             <a:extLst xmlns:a="http://schemas.openxmlformats.org/drawingml/2006/main">
               <a:ext uri="{FF2B5EF4-FFF2-40B4-BE49-F238E27FC236}">
-                <a16:creationId xmlns:a16="http://schemas.microsoft.com/office/drawing/2014/main" id="{50F74658-85D0-4539-9E7E-67CB1043C8DC}"/>
+                <a16:creationId xmlns:a16="http://schemas.microsoft.com/office/drawing/2014/main" id="{72FD37B8-3A09-4462-AA0D-AE042525FB62}"/>
               </a:ext>
             </a:extLst>
           </p:cNvPr>
@@ -7131,7 +7131,7 @@
           <p:cNvPr id="11" name="s5-takeaway-rule">
             <a:extLst xmlns:a="http://schemas.openxmlformats.org/drawingml/2006/main">
               <a:ext uri="{FF2B5EF4-FFF2-40B4-BE49-F238E27FC236}">
-                <a16:creationId xmlns:a16="http://schemas.microsoft.com/office/drawing/2014/main" id="{DB33FC24-99D4-4EE4-9A80-377F93EA0D47}"/>
+                <a16:creationId xmlns:a16="http://schemas.microsoft.com/office/drawing/2014/main" id="{AB51F45F-65BA-4C9E-8327-C6FE2F6C0288}"/>
               </a:ext>
             </a:extLst>
           </p:cNvPr>
@@ -7164,7 +7164,7 @@
           <p:cNvPr id="12" name="s5-takeaway">
             <a:extLst xmlns:a="http://schemas.openxmlformats.org/drawingml/2006/main">
               <a:ext uri="{FF2B5EF4-FFF2-40B4-BE49-F238E27FC236}">
-                <a16:creationId xmlns:a16="http://schemas.microsoft.com/office/drawing/2014/main" id="{A325C19D-21E7-4C5B-92A0-C22046D3485B}"/>
+                <a16:creationId xmlns:a16="http://schemas.microsoft.com/office/drawing/2014/main" id="{49126E6F-4F88-41B4-9749-BE2816DC9CB2}"/>
               </a:ext>
             </a:extLst>
           </p:cNvPr>
@@ -7220,7 +7220,7 @@
     </p:spTree>
     <p:extLst>
       <p:ext uri="{BB962C8B-B14F-4D97-AF65-F5344CB8AC3E}">
-        <p14:creationId xmlns:p14="http://schemas.microsoft.com/office/powerpoint/2010/main" val="191501842"/>
+        <p14:creationId xmlns:p14="http://schemas.microsoft.com/office/powerpoint/2010/main" val="224870526"/>
       </p:ext>
     </p:extLst>
   </p:cSld>
@@ -7251,7 +7251,7 @@
           <p:cNvPr id="1" name="s6-rule">
             <a:extLst xmlns:a="http://schemas.openxmlformats.org/drawingml/2006/main">
               <a:ext uri="{FF2B5EF4-FFF2-40B4-BE49-F238E27FC236}">
-                <a16:creationId xmlns:a16="http://schemas.microsoft.com/office/drawing/2014/main" id="{A3B2B743-E336-48E9-8F7B-9DF1B25A49BF}"/>
+                <a16:creationId xmlns:a16="http://schemas.microsoft.com/office/drawing/2014/main" id="{2E4EFB2E-A99C-41AC-99C5-586F05F16600}"/>
               </a:ext>
             </a:extLst>
           </p:cNvPr>
@@ -7284,7 +7284,7 @@
           <p:cNvPr id="2" name="s6-eyebrow">
             <a:extLst xmlns:a="http://schemas.openxmlformats.org/drawingml/2006/main">
               <a:ext uri="{FF2B5EF4-FFF2-40B4-BE49-F238E27FC236}">
-                <a16:creationId xmlns:a16="http://schemas.microsoft.com/office/drawing/2014/main" id="{CEC6EBD7-6850-4E14-907C-6562BA68D377}"/>
+                <a16:creationId xmlns:a16="http://schemas.microsoft.com/office/drawing/2014/main" id="{8DE13C59-D4CC-4E6A-9F31-A1E51C81FFC9}"/>
               </a:ext>
             </a:extLst>
           </p:cNvPr>
@@ -7342,7 +7342,7 @@
           <p:cNvPr id="3" name="s6-title">
             <a:extLst xmlns:a="http://schemas.openxmlformats.org/drawingml/2006/main">
               <a:ext uri="{FF2B5EF4-FFF2-40B4-BE49-F238E27FC236}">
-                <a16:creationId xmlns:a16="http://schemas.microsoft.com/office/drawing/2014/main" id="{73CFE2E4-E04A-4BE2-A63D-7449F0F24A43}"/>
+                <a16:creationId xmlns:a16="http://schemas.microsoft.com/office/drawing/2014/main" id="{FC9BC249-5840-4384-BDE4-4BC01F3FC951}"/>
               </a:ext>
             </a:extLst>
           </p:cNvPr>
@@ -7400,7 +7400,7 @@
           <p:cNvPr id="4" name="s6-footer">
             <a:extLst xmlns:a="http://schemas.openxmlformats.org/drawingml/2006/main">
               <a:ext uri="{FF2B5EF4-FFF2-40B4-BE49-F238E27FC236}">
-                <a16:creationId xmlns:a16="http://schemas.microsoft.com/office/drawing/2014/main" id="{BF42DAA5-3F17-4585-821B-E0510DB673E6}"/>
+                <a16:creationId xmlns:a16="http://schemas.microsoft.com/office/drawing/2014/main" id="{EDF5D303-5C6B-4123-91A1-C74AA4DFB8C5}"/>
               </a:ext>
             </a:extLst>
           </p:cNvPr>
@@ -7431,7 +7431,7 @@
           <p:cNvPr id="5" name="s6-identity">
             <a:extLst xmlns:a="http://schemas.openxmlformats.org/drawingml/2006/main">
               <a:ext uri="{FF2B5EF4-FFF2-40B4-BE49-F238E27FC236}">
-                <a16:creationId xmlns:a16="http://schemas.microsoft.com/office/drawing/2014/main" id="{F767F407-031B-4775-ABC1-25ABC03655B1}"/>
+                <a16:creationId xmlns:a16="http://schemas.microsoft.com/office/drawing/2014/main" id="{6508059E-8463-4067-BC88-A5813DF6B742}"/>
               </a:ext>
             </a:extLst>
           </p:cNvPr>
@@ -7489,7 +7489,7 @@
           <p:cNvPr id="6" name="core-no-0">
             <a:extLst xmlns:a="http://schemas.openxmlformats.org/drawingml/2006/main">
               <a:ext uri="{FF2B5EF4-FFF2-40B4-BE49-F238E27FC236}">
-                <a16:creationId xmlns:a16="http://schemas.microsoft.com/office/drawing/2014/main" id="{76837667-888E-45C0-9D72-1829E8D33FDE}"/>
+                <a16:creationId xmlns:a16="http://schemas.microsoft.com/office/drawing/2014/main" id="{03CB2504-D511-4AE9-BFBD-327723CDFB9D}"/>
               </a:ext>
             </a:extLst>
           </p:cNvPr>
@@ -7547,7 +7547,7 @@
           <p:cNvPr id="7" name="core-label-0">
             <a:extLst xmlns:a="http://schemas.openxmlformats.org/drawingml/2006/main">
               <a:ext uri="{FF2B5EF4-FFF2-40B4-BE49-F238E27FC236}">
-                <a16:creationId xmlns:a16="http://schemas.microsoft.com/office/drawing/2014/main" id="{60C421EC-D888-429C-A72D-0C8A5BB0D953}"/>
+                <a16:creationId xmlns:a16="http://schemas.microsoft.com/office/drawing/2014/main" id="{77F7A411-A446-4193-8CD8-E5EB7BF02C73}"/>
               </a:ext>
             </a:extLst>
           </p:cNvPr>
@@ -7605,7 +7605,7 @@
           <p:cNvPr id="8" name="core-body-0">
             <a:extLst xmlns:a="http://schemas.openxmlformats.org/drawingml/2006/main">
               <a:ext uri="{FF2B5EF4-FFF2-40B4-BE49-F238E27FC236}">
-                <a16:creationId xmlns:a16="http://schemas.microsoft.com/office/drawing/2014/main" id="{CA9A88BA-EFEE-419D-A652-9EC86C7F7042}"/>
+                <a16:creationId xmlns:a16="http://schemas.microsoft.com/office/drawing/2014/main" id="{2E815F09-A9E0-4ACB-9BA2-3C5C405F8BEE}"/>
               </a:ext>
             </a:extLst>
           </p:cNvPr>
@@ -7669,7 +7669,7 @@
           <p:cNvPr id="9" name="core-no-1">
             <a:extLst xmlns:a="http://schemas.openxmlformats.org/drawingml/2006/main">
               <a:ext uri="{FF2B5EF4-FFF2-40B4-BE49-F238E27FC236}">
-                <a16:creationId xmlns:a16="http://schemas.microsoft.com/office/drawing/2014/main" id="{812FDB67-BADE-4383-A833-79F0843CD283}"/>
+                <a16:creationId xmlns:a16="http://schemas.microsoft.com/office/drawing/2014/main" id="{A905AB16-7D1A-4398-A14D-C19EB35CDD2E}"/>
               </a:ext>
             </a:extLst>
           </p:cNvPr>
@@ -7727,7 +7727,7 @@
           <p:cNvPr id="10" name="core-body-1">
             <a:extLst xmlns:a="http://schemas.openxmlformats.org/drawingml/2006/main">
               <a:ext uri="{FF2B5EF4-FFF2-40B4-BE49-F238E27FC236}">
-                <a16:creationId xmlns:a16="http://schemas.microsoft.com/office/drawing/2014/main" id="{85BA5374-77FF-4D9E-9E30-E02ABA93D0B8}"/>
+                <a16:creationId xmlns:a16="http://schemas.microsoft.com/office/drawing/2014/main" id="{165BFC14-1B78-4E0C-9000-5FB9CC1232ED}"/>
               </a:ext>
             </a:extLst>
           </p:cNvPr>
@@ -7791,7 +7791,7 @@
           <p:cNvPr id="11" name="s6-takeaway-rule">
             <a:extLst xmlns:a="http://schemas.openxmlformats.org/drawingml/2006/main">
               <a:ext uri="{FF2B5EF4-FFF2-40B4-BE49-F238E27FC236}">
-                <a16:creationId xmlns:a16="http://schemas.microsoft.com/office/drawing/2014/main" id="{37DB3D5B-83BC-4B43-8E81-4DE850D8ACAE}"/>
+                <a16:creationId xmlns:a16="http://schemas.microsoft.com/office/drawing/2014/main" id="{8F50C34E-2024-46CE-B020-8C84469612C7}"/>
               </a:ext>
             </a:extLst>
           </p:cNvPr>
@@ -7824,7 +7824,7 @@
           <p:cNvPr id="12" name="s6-takeaway">
             <a:extLst xmlns:a="http://schemas.openxmlformats.org/drawingml/2006/main">
               <a:ext uri="{FF2B5EF4-FFF2-40B4-BE49-F238E27FC236}">
-                <a16:creationId xmlns:a16="http://schemas.microsoft.com/office/drawing/2014/main" id="{6F118D86-9D1B-4ACA-879C-A4DCC7AC5EBE}"/>
+                <a16:creationId xmlns:a16="http://schemas.microsoft.com/office/drawing/2014/main" id="{8289CA9D-2D55-494B-BED0-8F4FACA8BD4D}"/>
               </a:ext>
             </a:extLst>
           </p:cNvPr>
@@ -7880,7 +7880,7 @@
     </p:spTree>
     <p:extLst>
       <p:ext uri="{BB962C8B-B14F-4D97-AF65-F5344CB8AC3E}">
-        <p14:creationId xmlns:p14="http://schemas.microsoft.com/office/powerpoint/2010/main" val="1461605460"/>
+        <p14:creationId xmlns:p14="http://schemas.microsoft.com/office/powerpoint/2010/main" val="1117197012"/>
       </p:ext>
     </p:extLst>
   </p:cSld>
@@ -7911,7 +7911,7 @@
           <p:cNvPr id="1" name="s7-rule">
             <a:extLst xmlns:a="http://schemas.openxmlformats.org/drawingml/2006/main">
               <a:ext uri="{FF2B5EF4-FFF2-40B4-BE49-F238E27FC236}">
-                <a16:creationId xmlns:a16="http://schemas.microsoft.com/office/drawing/2014/main" id="{681720F5-266E-4BC2-BEE8-624D51C445D0}"/>
+                <a16:creationId xmlns:a16="http://schemas.microsoft.com/office/drawing/2014/main" id="{594E1A81-76B9-4B6C-AA0F-20D0CDAAC1FC}"/>
               </a:ext>
             </a:extLst>
           </p:cNvPr>
@@ -7944,7 +7944,7 @@
           <p:cNvPr id="2" name="s7-eyebrow">
             <a:extLst xmlns:a="http://schemas.openxmlformats.org/drawingml/2006/main">
               <a:ext uri="{FF2B5EF4-FFF2-40B4-BE49-F238E27FC236}">
-                <a16:creationId xmlns:a16="http://schemas.microsoft.com/office/drawing/2014/main" id="{96E85FA9-5E9B-4335-91D0-3489E97ABC29}"/>
+                <a16:creationId xmlns:a16="http://schemas.microsoft.com/office/drawing/2014/main" id="{0F2B41BE-E84F-4FE2-9FA2-27622C9C9C02}"/>
               </a:ext>
             </a:extLst>
           </p:cNvPr>
@@ -8002,7 +8002,7 @@
           <p:cNvPr id="3" name="s7-title">
             <a:extLst xmlns:a="http://schemas.openxmlformats.org/drawingml/2006/main">
               <a:ext uri="{FF2B5EF4-FFF2-40B4-BE49-F238E27FC236}">
-                <a16:creationId xmlns:a16="http://schemas.microsoft.com/office/drawing/2014/main" id="{1B6F2908-AFF0-41CB-A6C8-8B4A30FD1131}"/>
+                <a16:creationId xmlns:a16="http://schemas.microsoft.com/office/drawing/2014/main" id="{80E233B1-7512-4C5E-A2C4-0F60C8EC3F70}"/>
               </a:ext>
             </a:extLst>
           </p:cNvPr>
@@ -8060,7 +8060,7 @@
           <p:cNvPr id="4" name="s7-footer">
             <a:extLst xmlns:a="http://schemas.openxmlformats.org/drawingml/2006/main">
               <a:ext uri="{FF2B5EF4-FFF2-40B4-BE49-F238E27FC236}">
-                <a16:creationId xmlns:a16="http://schemas.microsoft.com/office/drawing/2014/main" id="{DC79FB4A-1BEF-4332-AA70-B8E43DE83F7C}"/>
+                <a16:creationId xmlns:a16="http://schemas.microsoft.com/office/drawing/2014/main" id="{5A36AD04-0CE4-4FE3-9042-97C0246BE6B2}"/>
               </a:ext>
             </a:extLst>
           </p:cNvPr>
@@ -8091,7 +8091,7 @@
           <p:cNvPr id="5" name="s7-identity">
             <a:extLst xmlns:a="http://schemas.openxmlformats.org/drawingml/2006/main">
               <a:ext uri="{FF2B5EF4-FFF2-40B4-BE49-F238E27FC236}">
-                <a16:creationId xmlns:a16="http://schemas.microsoft.com/office/drawing/2014/main" id="{E4C6AF6C-096D-4747-BBEE-77488E6369E5}"/>
+                <a16:creationId xmlns:a16="http://schemas.microsoft.com/office/drawing/2014/main" id="{AAD9A870-C32F-4825-B8E9-B3C8D7AAF043}"/>
               </a:ext>
             </a:extLst>
           </p:cNvPr>
@@ -8149,7 +8149,7 @@
           <p:cNvPr id="6" name="core-no-0">
             <a:extLst xmlns:a="http://schemas.openxmlformats.org/drawingml/2006/main">
               <a:ext uri="{FF2B5EF4-FFF2-40B4-BE49-F238E27FC236}">
-                <a16:creationId xmlns:a16="http://schemas.microsoft.com/office/drawing/2014/main" id="{5578C2C6-05CE-4D90-85FA-E54567337664}"/>
+                <a16:creationId xmlns:a16="http://schemas.microsoft.com/office/drawing/2014/main" id="{E0F862CF-A2E2-42D1-998F-E220CEDABD44}"/>
               </a:ext>
             </a:extLst>
           </p:cNvPr>
@@ -8207,7 +8207,7 @@
           <p:cNvPr id="7" name="core-label-0">
             <a:extLst xmlns:a="http://schemas.openxmlformats.org/drawingml/2006/main">
               <a:ext uri="{FF2B5EF4-FFF2-40B4-BE49-F238E27FC236}">
-                <a16:creationId xmlns:a16="http://schemas.microsoft.com/office/drawing/2014/main" id="{B082F67B-A55A-4E66-9FAE-E7A83C8FD9BA}"/>
+                <a16:creationId xmlns:a16="http://schemas.microsoft.com/office/drawing/2014/main" id="{0D91FB5F-F2AA-416F-ADA2-008C720E2808}"/>
               </a:ext>
             </a:extLst>
           </p:cNvPr>
@@ -8265,7 +8265,7 @@
           <p:cNvPr id="8" name="core-body-0">
             <a:extLst xmlns:a="http://schemas.openxmlformats.org/drawingml/2006/main">
               <a:ext uri="{FF2B5EF4-FFF2-40B4-BE49-F238E27FC236}">
-                <a16:creationId xmlns:a16="http://schemas.microsoft.com/office/drawing/2014/main" id="{964E3EA7-7287-4EF4-8452-8296FECA19A4}"/>
+                <a16:creationId xmlns:a16="http://schemas.microsoft.com/office/drawing/2014/main" id="{EDCA4D53-63C9-4EBF-8AD1-7F424DBC94F1}"/>
               </a:ext>
             </a:extLst>
           </p:cNvPr>
@@ -8329,7 +8329,7 @@
           <p:cNvPr id="9" name="core-no-1">
             <a:extLst xmlns:a="http://schemas.openxmlformats.org/drawingml/2006/main">
               <a:ext uri="{FF2B5EF4-FFF2-40B4-BE49-F238E27FC236}">
-                <a16:creationId xmlns:a16="http://schemas.microsoft.com/office/drawing/2014/main" id="{25637C01-16EF-465D-9FDF-D8967EDBEAC7}"/>
+                <a16:creationId xmlns:a16="http://schemas.microsoft.com/office/drawing/2014/main" id="{A0F532CC-2E3F-423C-939B-D0F49D10DC95}"/>
               </a:ext>
             </a:extLst>
           </p:cNvPr>
@@ -8387,7 +8387,7 @@
           <p:cNvPr id="10" name="core-body-1">
             <a:extLst xmlns:a="http://schemas.openxmlformats.org/drawingml/2006/main">
               <a:ext uri="{FF2B5EF4-FFF2-40B4-BE49-F238E27FC236}">
-                <a16:creationId xmlns:a16="http://schemas.microsoft.com/office/drawing/2014/main" id="{CB8080AB-D859-4960-B5C7-EDD87F25850F}"/>
+                <a16:creationId xmlns:a16="http://schemas.microsoft.com/office/drawing/2014/main" id="{ADAF25AC-31B7-4D3F-A2D7-3DA9FC3B4A21}"/>
               </a:ext>
             </a:extLst>
           </p:cNvPr>
@@ -8451,7 +8451,7 @@
           <p:cNvPr id="11" name="s7-takeaway-rule">
             <a:extLst xmlns:a="http://schemas.openxmlformats.org/drawingml/2006/main">
               <a:ext uri="{FF2B5EF4-FFF2-40B4-BE49-F238E27FC236}">
-                <a16:creationId xmlns:a16="http://schemas.microsoft.com/office/drawing/2014/main" id="{C126896E-9CE1-4C9C-B3F6-347313675C19}"/>
+                <a16:creationId xmlns:a16="http://schemas.microsoft.com/office/drawing/2014/main" id="{738447B6-4AE8-42EF-AF35-BE30C3DF81DE}"/>
               </a:ext>
             </a:extLst>
           </p:cNvPr>
@@ -8484,7 +8484,7 @@
           <p:cNvPr id="12" name="s7-takeaway">
             <a:extLst xmlns:a="http://schemas.openxmlformats.org/drawingml/2006/main">
               <a:ext uri="{FF2B5EF4-FFF2-40B4-BE49-F238E27FC236}">
-                <a16:creationId xmlns:a16="http://schemas.microsoft.com/office/drawing/2014/main" id="{B612C709-F96C-411D-B3CF-C06AEED2EB72}"/>
+                <a16:creationId xmlns:a16="http://schemas.microsoft.com/office/drawing/2014/main" id="{ACA019F1-5EAA-4884-99FC-97086058F8B7}"/>
               </a:ext>
             </a:extLst>
           </p:cNvPr>
@@ -8540,7 +8540,7 @@
     </p:spTree>
     <p:extLst>
       <p:ext uri="{BB962C8B-B14F-4D97-AF65-F5344CB8AC3E}">
-        <p14:creationId xmlns:p14="http://schemas.microsoft.com/office/powerpoint/2010/main" val="1866480966"/>
+        <p14:creationId xmlns:p14="http://schemas.microsoft.com/office/powerpoint/2010/main" val="1317873842"/>
       </p:ext>
     </p:extLst>
   </p:cSld>
@@ -8571,7 +8571,7 @@
           <p:cNvPr id="1" name="s8-rule">
             <a:extLst xmlns:a="http://schemas.openxmlformats.org/drawingml/2006/main">
               <a:ext uri="{FF2B5EF4-FFF2-40B4-BE49-F238E27FC236}">
-                <a16:creationId xmlns:a16="http://schemas.microsoft.com/office/drawing/2014/main" id="{B37183B2-AA31-4133-B999-DA9604B11EF9}"/>
+                <a16:creationId xmlns:a16="http://schemas.microsoft.com/office/drawing/2014/main" id="{78DE1B26-089C-44F3-AB97-042F05A03019}"/>
               </a:ext>
             </a:extLst>
           </p:cNvPr>
@@ -8604,7 +8604,7 @@
           <p:cNvPr id="2" name="s8-eyebrow">
             <a:extLst xmlns:a="http://schemas.openxmlformats.org/drawingml/2006/main">
               <a:ext uri="{FF2B5EF4-FFF2-40B4-BE49-F238E27FC236}">
-                <a16:creationId xmlns:a16="http://schemas.microsoft.com/office/drawing/2014/main" id="{69EBBC56-0BC3-445B-A2C4-0009009F8A24}"/>
+                <a16:creationId xmlns:a16="http://schemas.microsoft.com/office/drawing/2014/main" id="{615CF7EB-F435-4E80-BDDF-08A64DD1C1A1}"/>
               </a:ext>
             </a:extLst>
           </p:cNvPr>
@@ -8662,7 +8662,7 @@
           <p:cNvPr id="3" name="s8-title">
             <a:extLst xmlns:a="http://schemas.openxmlformats.org/drawingml/2006/main">
               <a:ext uri="{FF2B5EF4-FFF2-40B4-BE49-F238E27FC236}">
-                <a16:creationId xmlns:a16="http://schemas.microsoft.com/office/drawing/2014/main" id="{1EFFE339-0321-4125-BC2E-70A132B5CAE8}"/>
+                <a16:creationId xmlns:a16="http://schemas.microsoft.com/office/drawing/2014/main" id="{A6259998-5B7D-4F6C-B5B2-E4A1377BC897}"/>
               </a:ext>
             </a:extLst>
           </p:cNvPr>
@@ -8720,7 +8720,7 @@
           <p:cNvPr id="4" name="s8-footer">
             <a:extLst xmlns:a="http://schemas.openxmlformats.org/drawingml/2006/main">
               <a:ext uri="{FF2B5EF4-FFF2-40B4-BE49-F238E27FC236}">
-                <a16:creationId xmlns:a16="http://schemas.microsoft.com/office/drawing/2014/main" id="{E479F57F-8CA2-44BA-8371-7DD1988970EC}"/>
+                <a16:creationId xmlns:a16="http://schemas.microsoft.com/office/drawing/2014/main" id="{793312AC-9DA0-4C53-8C2B-D4667C1EFB9B}"/>
               </a:ext>
             </a:extLst>
           </p:cNvPr>
@@ -8751,7 +8751,7 @@
           <p:cNvPr id="5" name="s8-identity">
             <a:extLst xmlns:a="http://schemas.openxmlformats.org/drawingml/2006/main">
               <a:ext uri="{FF2B5EF4-FFF2-40B4-BE49-F238E27FC236}">
-                <a16:creationId xmlns:a16="http://schemas.microsoft.com/office/drawing/2014/main" id="{4C12C999-9B35-4430-A394-9D1900585FE7}"/>
+                <a16:creationId xmlns:a16="http://schemas.microsoft.com/office/drawing/2014/main" id="{03FD0F55-9938-4239-8A3E-0F4220FB82C9}"/>
               </a:ext>
             </a:extLst>
           </p:cNvPr>
@@ -8809,7 +8809,7 @@
           <p:cNvPr id="6" name="case-title">
             <a:extLst xmlns:a="http://schemas.openxmlformats.org/drawingml/2006/main">
               <a:ext uri="{FF2B5EF4-FFF2-40B4-BE49-F238E27FC236}">
-                <a16:creationId xmlns:a16="http://schemas.microsoft.com/office/drawing/2014/main" id="{FBA8267C-F75F-40B6-B5C4-EFB05CA5E97E}"/>
+                <a16:creationId xmlns:a16="http://schemas.microsoft.com/office/drawing/2014/main" id="{BB7A7E17-15DB-4DEA-BC59-6D7DB1D17B2D}"/>
               </a:ext>
             </a:extLst>
           </p:cNvPr>
@@ -8873,7 +8873,7 @@
           <p:cNvPr id="7" name="case-row-0">
             <a:extLst xmlns:a="http://schemas.openxmlformats.org/drawingml/2006/main">
               <a:ext uri="{FF2B5EF4-FFF2-40B4-BE49-F238E27FC236}">
-                <a16:creationId xmlns:a16="http://schemas.microsoft.com/office/drawing/2014/main" id="{B07726E6-38DB-42FA-9A3C-B4DA432770CE}"/>
+                <a16:creationId xmlns:a16="http://schemas.microsoft.com/office/drawing/2014/main" id="{06B77C6C-AFED-4387-BF3B-7FD4FE565A3A}"/>
               </a:ext>
             </a:extLst>
           </p:cNvPr>
@@ -8937,7 +8937,7 @@
           <p:cNvPr id="8" name="case-row-1">
             <a:extLst xmlns:a="http://schemas.openxmlformats.org/drawingml/2006/main">
               <a:ext uri="{FF2B5EF4-FFF2-40B4-BE49-F238E27FC236}">
-                <a16:creationId xmlns:a16="http://schemas.microsoft.com/office/drawing/2014/main" id="{FA64A646-E385-4D34-9537-C87E97B00CA1}"/>
+                <a16:creationId xmlns:a16="http://schemas.microsoft.com/office/drawing/2014/main" id="{C7042D62-1F84-45BC-8CC2-9CA1CCE9E25B}"/>
               </a:ext>
             </a:extLst>
           </p:cNvPr>
@@ -9001,7 +9001,7 @@
           <p:cNvPr id="9" name="case-row-2">
             <a:extLst xmlns:a="http://schemas.openxmlformats.org/drawingml/2006/main">
               <a:ext uri="{FF2B5EF4-FFF2-40B4-BE49-F238E27FC236}">
-                <a16:creationId xmlns:a16="http://schemas.microsoft.com/office/drawing/2014/main" id="{082CC239-F876-45E1-825C-4D992499E38E}"/>
+                <a16:creationId xmlns:a16="http://schemas.microsoft.com/office/drawing/2014/main" id="{1E9C85EB-019F-401D-BC2B-C45F66109BC0}"/>
               </a:ext>
             </a:extLst>
           </p:cNvPr>
@@ -9065,7 +9065,7 @@
           <p:cNvPr id="10" name="case-row-3">
             <a:extLst xmlns:a="http://schemas.openxmlformats.org/drawingml/2006/main">
               <a:ext uri="{FF2B5EF4-FFF2-40B4-BE49-F238E27FC236}">
-                <a16:creationId xmlns:a16="http://schemas.microsoft.com/office/drawing/2014/main" id="{AEF525C2-E815-4A77-AFD9-940CEC0C8A8F}"/>
+                <a16:creationId xmlns:a16="http://schemas.microsoft.com/office/drawing/2014/main" id="{98E956F8-6A5C-4A7D-9090-C1FE0B34BEF2}"/>
               </a:ext>
             </a:extLst>
           </p:cNvPr>
@@ -9129,7 +9129,7 @@
           <p:cNvPr id="11" name="case-row-4">
             <a:extLst xmlns:a="http://schemas.openxmlformats.org/drawingml/2006/main">
               <a:ext uri="{FF2B5EF4-FFF2-40B4-BE49-F238E27FC236}">
-                <a16:creationId xmlns:a16="http://schemas.microsoft.com/office/drawing/2014/main" id="{1D8B9241-4709-4B38-9F3B-D5A1AA5732DF}"/>
+                <a16:creationId xmlns:a16="http://schemas.microsoft.com/office/drawing/2014/main" id="{622A9701-C1E5-426A-ACB8-4259FAAF61CA}"/>
               </a:ext>
             </a:extLst>
           </p:cNvPr>
@@ -9193,7 +9193,7 @@
           <p:cNvPr id="12" name="s8-takeaway-rule">
             <a:extLst xmlns:a="http://schemas.openxmlformats.org/drawingml/2006/main">
               <a:ext uri="{FF2B5EF4-FFF2-40B4-BE49-F238E27FC236}">
-                <a16:creationId xmlns:a16="http://schemas.microsoft.com/office/drawing/2014/main" id="{56FC44A9-0A7C-4383-98AA-5B644628E8F8}"/>
+                <a16:creationId xmlns:a16="http://schemas.microsoft.com/office/drawing/2014/main" id="{9057D2FB-AE72-4C7B-8F0E-3023CB0A3F9B}"/>
               </a:ext>
             </a:extLst>
           </p:cNvPr>
@@ -9226,7 +9226,7 @@
           <p:cNvPr id="13" name="s8-takeaway">
             <a:extLst xmlns:a="http://schemas.openxmlformats.org/drawingml/2006/main">
               <a:ext uri="{FF2B5EF4-FFF2-40B4-BE49-F238E27FC236}">
-                <a16:creationId xmlns:a16="http://schemas.microsoft.com/office/drawing/2014/main" id="{ADAF3DED-3FDA-4091-91FD-6FAF9B6A26ED}"/>
+                <a16:creationId xmlns:a16="http://schemas.microsoft.com/office/drawing/2014/main" id="{6F83DA46-DEF8-42D9-AC69-5A91EF21E9A0}"/>
               </a:ext>
             </a:extLst>
           </p:cNvPr>
@@ -9282,7 +9282,7 @@
     </p:spTree>
     <p:extLst>
       <p:ext uri="{BB962C8B-B14F-4D97-AF65-F5344CB8AC3E}">
-        <p14:creationId xmlns:p14="http://schemas.microsoft.com/office/powerpoint/2010/main" val="1422757240"/>
+        <p14:creationId xmlns:p14="http://schemas.microsoft.com/office/powerpoint/2010/main" val="1069320279"/>
       </p:ext>
     </p:extLst>
   </p:cSld>
@@ -9313,7 +9313,7 @@
           <p:cNvPr id="1" name="s9-rule">
             <a:extLst xmlns:a="http://schemas.openxmlformats.org/drawingml/2006/main">
               <a:ext uri="{FF2B5EF4-FFF2-40B4-BE49-F238E27FC236}">
-                <a16:creationId xmlns:a16="http://schemas.microsoft.com/office/drawing/2014/main" id="{420AA6A0-D581-41CC-AC95-F836B02A09B6}"/>
+                <a16:creationId xmlns:a16="http://schemas.microsoft.com/office/drawing/2014/main" id="{C536C3F6-FB7F-4BF9-8C48-B6003BF46249}"/>
               </a:ext>
             </a:extLst>
           </p:cNvPr>
@@ -9346,7 +9346,7 @@
           <p:cNvPr id="2" name="s9-eyebrow">
             <a:extLst xmlns:a="http://schemas.openxmlformats.org/drawingml/2006/main">
               <a:ext uri="{FF2B5EF4-FFF2-40B4-BE49-F238E27FC236}">
-                <a16:creationId xmlns:a16="http://schemas.microsoft.com/office/drawing/2014/main" id="{48ED1838-BE71-4D99-A2A4-E744B479A3FC}"/>
+                <a16:creationId xmlns:a16="http://schemas.microsoft.com/office/drawing/2014/main" id="{FCDC9974-7EE5-4044-AFE5-069100714BF8}"/>
               </a:ext>
             </a:extLst>
           </p:cNvPr>
@@ -9404,7 +9404,7 @@
           <p:cNvPr id="3" name="s9-title">
             <a:extLst xmlns:a="http://schemas.openxmlformats.org/drawingml/2006/main">
               <a:ext uri="{FF2B5EF4-FFF2-40B4-BE49-F238E27FC236}">
-                <a16:creationId xmlns:a16="http://schemas.microsoft.com/office/drawing/2014/main" id="{4D679931-9255-4492-A05C-76B67CC13BE5}"/>
+                <a16:creationId xmlns:a16="http://schemas.microsoft.com/office/drawing/2014/main" id="{ABCE71AC-C78A-449E-95CF-86911EF03BBB}"/>
               </a:ext>
             </a:extLst>
           </p:cNvPr>
@@ -9462,7 +9462,7 @@
           <p:cNvPr id="4" name="s9-footer">
             <a:extLst xmlns:a="http://schemas.openxmlformats.org/drawingml/2006/main">
               <a:ext uri="{FF2B5EF4-FFF2-40B4-BE49-F238E27FC236}">
-                <a16:creationId xmlns:a16="http://schemas.microsoft.com/office/drawing/2014/main" id="{8E4810BF-33C3-4E83-8496-3F6506695EDA}"/>
+                <a16:creationId xmlns:a16="http://schemas.microsoft.com/office/drawing/2014/main" id="{9719A2C6-D8DD-4DD9-8E40-771DBB2C70F9}"/>
               </a:ext>
             </a:extLst>
           </p:cNvPr>
@@ -9493,7 +9493,7 @@
           <p:cNvPr id="5" name="s9-identity">
             <a:extLst xmlns:a="http://schemas.openxmlformats.org/drawingml/2006/main">
               <a:ext uri="{FF2B5EF4-FFF2-40B4-BE49-F238E27FC236}">
-                <a16:creationId xmlns:a16="http://schemas.microsoft.com/office/drawing/2014/main" id="{F66866E3-092E-4A61-AFCF-A63EB826C7FA}"/>
+                <a16:creationId xmlns:a16="http://schemas.microsoft.com/office/drawing/2014/main" id="{4F86867B-9C8B-4244-BDFE-E7A7E29E4F8D}"/>
               </a:ext>
             </a:extLst>
           </p:cNvPr>
@@ -9551,7 +9551,7 @@
           <p:cNvPr id="6" name="case-title">
             <a:extLst xmlns:a="http://schemas.openxmlformats.org/drawingml/2006/main">
               <a:ext uri="{FF2B5EF4-FFF2-40B4-BE49-F238E27FC236}">
-                <a16:creationId xmlns:a16="http://schemas.microsoft.com/office/drawing/2014/main" id="{7CF79945-F5ED-4A4B-842E-6D1F269FEE98}"/>
+                <a16:creationId xmlns:a16="http://schemas.microsoft.com/office/drawing/2014/main" id="{2E5C971D-8C99-4F86-A59E-1BE85E4DCB07}"/>
               </a:ext>
             </a:extLst>
           </p:cNvPr>
@@ -9615,7 +9615,7 @@
           <p:cNvPr id="7" name="case-row-0">
             <a:extLst xmlns:a="http://schemas.openxmlformats.org/drawingml/2006/main">
               <a:ext uri="{FF2B5EF4-FFF2-40B4-BE49-F238E27FC236}">
-                <a16:creationId xmlns:a16="http://schemas.microsoft.com/office/drawing/2014/main" id="{4DC7C9E4-3C85-41AB-8C1F-690C8D96CDFC}"/>
+                <a16:creationId xmlns:a16="http://schemas.microsoft.com/office/drawing/2014/main" id="{1B761CB1-4236-4ADB-9CD2-DE812323208B}"/>
               </a:ext>
             </a:extLst>
           </p:cNvPr>
@@ -9679,7 +9679,7 @@
           <p:cNvPr id="8" name="case-row-1">
             <a:extLst xmlns:a="http://schemas.openxmlformats.org/drawingml/2006/main">
               <a:ext uri="{FF2B5EF4-FFF2-40B4-BE49-F238E27FC236}">
-                <a16:creationId xmlns:a16="http://schemas.microsoft.com/office/drawing/2014/main" id="{A626F12A-CF4A-4151-BBFB-6DBB3AF9791A}"/>
+                <a16:creationId xmlns:a16="http://schemas.microsoft.com/office/drawing/2014/main" id="{498737A6-792A-48AE-8941-E063142CC30B}"/>
               </a:ext>
             </a:extLst>
           </p:cNvPr>
@@ -9743,7 +9743,7 @@
           <p:cNvPr id="9" name="case-row-2">
             <a:extLst xmlns:a="http://schemas.openxmlformats.org/drawingml/2006/main">
               <a:ext uri="{FF2B5EF4-FFF2-40B4-BE49-F238E27FC236}">
-                <a16:creationId xmlns:a16="http://schemas.microsoft.com/office/drawing/2014/main" id="{C8ABA322-A900-4F24-A297-C01E7C1C21C9}"/>
+                <a16:creationId xmlns:a16="http://schemas.microsoft.com/office/drawing/2014/main" id="{F094793A-1D6D-42D7-A062-A78EBF1E70EC}"/>
               </a:ext>
             </a:extLst>
           </p:cNvPr>
@@ -9807,7 +9807,7 @@
           <p:cNvPr id="10" name="case-row-3">
             <a:extLst xmlns:a="http://schemas.openxmlformats.org/drawingml/2006/main">
               <a:ext uri="{FF2B5EF4-FFF2-40B4-BE49-F238E27FC236}">
-                <a16:creationId xmlns:a16="http://schemas.microsoft.com/office/drawing/2014/main" id="{D35718FB-56ED-42A8-B19A-6D4976024577}"/>
+                <a16:creationId xmlns:a16="http://schemas.microsoft.com/office/drawing/2014/main" id="{078497F2-196A-4050-8AE9-9B7A9434EB5B}"/>
               </a:ext>
             </a:extLst>
           </p:cNvPr>
@@ -9871,7 +9871,7 @@
           <p:cNvPr id="11" name="s9-takeaway-rule">
             <a:extLst xmlns:a="http://schemas.openxmlformats.org/drawingml/2006/main">
               <a:ext uri="{FF2B5EF4-FFF2-40B4-BE49-F238E27FC236}">
-                <a16:creationId xmlns:a16="http://schemas.microsoft.com/office/drawing/2014/main" id="{1B7536E8-3922-4AE8-B8F3-10A0EEC3AB68}"/>
+                <a16:creationId xmlns:a16="http://schemas.microsoft.com/office/drawing/2014/main" id="{A96FBBF3-268E-4822-8BFE-72D02300A23E}"/>
               </a:ext>
             </a:extLst>
           </p:cNvPr>
@@ -9904,7 +9904,7 @@
           <p:cNvPr id="12" name="s9-takeaway">
             <a:extLst xmlns:a="http://schemas.openxmlformats.org/drawingml/2006/main">
               <a:ext uri="{FF2B5EF4-FFF2-40B4-BE49-F238E27FC236}">
-                <a16:creationId xmlns:a16="http://schemas.microsoft.com/office/drawing/2014/main" id="{5A06D04D-DEC8-432C-B79B-97EBEDF73389}"/>
+                <a16:creationId xmlns:a16="http://schemas.microsoft.com/office/drawing/2014/main" id="{D845C04A-C15D-46CE-B815-BBA9368B5F56}"/>
               </a:ext>
             </a:extLst>
           </p:cNvPr>
@@ -9960,7 +9960,7 @@
     </p:spTree>
     <p:extLst>
       <p:ext uri="{BB962C8B-B14F-4D97-AF65-F5344CB8AC3E}">
-        <p14:creationId xmlns:p14="http://schemas.microsoft.com/office/powerpoint/2010/main" val="275199405"/>
+        <p14:creationId xmlns:p14="http://schemas.microsoft.com/office/powerpoint/2010/main" val="1665282588"/>
       </p:ext>
     </p:extLst>
   </p:cSld>
